--- a/16-4-2026.pptx
+++ b/16-4-2026.pptx
@@ -21,6 +21,7 @@
     <p:sldId id="269" r:id="rId16"/>
     <p:sldId id="270" r:id="rId17"/>
     <p:sldId id="271" r:id="rId18"/>
+    <p:sldId id="272" r:id="rId19"/>
   </p:sldIdLst>
   <p:sldSz cx="12192000" cy="6858000"/>
   <p:notesSz cx="7559675" cy="10691813"/>
@@ -28,8 +29,8 @@
 </file>
 
 <file path=ppt/slideLayouts/slideLayout1.xml><?xml version="1.0" encoding="utf-8"?>
-<p:sldLayout xmlns:a="http://schemas.openxmlformats.org/drawingml/2006/main" xmlns:p="http://schemas.openxmlformats.org/presentationml/2006/main" xmlns:r="http://schemas.openxmlformats.org/officeDocument/2006/relationships" xmlns:p14="http://schemas.microsoft.com/office/powerpoint/2010/main" xmlns:p15="http://schemas.microsoft.com/office/powerpoint/2012/main" xmlns:mc="http://schemas.openxmlformats.org/markup-compatibility/2006" type="blank" preserve="1">
-  <p:cSld name="Blank">
+<p:sldLayout xmlns:a="http://schemas.openxmlformats.org/drawingml/2006/main" xmlns:p="http://schemas.openxmlformats.org/presentationml/2006/main" xmlns:r="http://schemas.openxmlformats.org/officeDocument/2006/relationships" xmlns:p14="http://schemas.microsoft.com/office/powerpoint/2010/main" xmlns:p15="http://schemas.microsoft.com/office/powerpoint/2012/main" xmlns:mc="http://schemas.openxmlformats.org/markup-compatibility/2006" type="titleOnly" preserve="1">
+  <p:cSld name="Title Only">
     <p:bg>
       <p:bgPr>
         <a:solidFill>
@@ -64,7 +65,7 @@
         <p:spPr>
           <a:xfrm>
             <a:off x="0" y="0"/>
-            <a:ext cx="12179160" cy="6845040"/>
+            <a:ext cx="12178800" cy="6844680"/>
           </a:xfrm>
           <a:prstGeom prst="rect">
             <a:avLst/>
@@ -82,28 +83,28 @@
             <a:spLocks noGrp="1"/>
           </p:cNvSpPr>
           <p:nvPr>
-            <p:ph type="dt" idx="1"/>
+            <p:ph type="title"/>
           </p:nvPr>
         </p:nvSpPr>
         <p:spPr>
           <a:xfrm>
-            <a:off x="609480" y="6245280"/>
-            <a:ext cx="2831760" cy="463320"/>
-          </a:xfrm>
-          <a:prstGeom prst="rect">
-            <a:avLst/>
-          </a:prstGeom>
-          <a:noFill/>
-          <a:ln w="0">
+            <a:off x="609480" y="190440"/>
+            <a:ext cx="10959480" cy="569160"/>
+          </a:xfrm>
+          <a:prstGeom prst="rect">
+            <a:avLst/>
+          </a:prstGeom>
+          <a:noFill/>
+          <a:ln w="9360">
             <a:noFill/>
           </a:ln>
         </p:spPr>
         <p:txBody>
-          <a:bodyPr numCol="1" spcCol="0" lIns="91440" rIns="91440" tIns="45720" bIns="45720" anchor="t">
+          <a:bodyPr lIns="90000" rIns="90000" tIns="45000" bIns="45000" anchor="ctr">
             <a:noAutofit/>
           </a:bodyPr>
-          <a:lstStyle>
-            <a:lvl1pPr indent="0" defTabSz="914400">
+          <a:p>
+            <a:pPr indent="0">
               <a:lnSpc>
                 <a:spcPct val="100000"/>
               </a:lnSpc>
@@ -111,46 +112,26 @@
               <a:tabLst>
                 <a:tab algn="l" pos="0"/>
               </a:tabLst>
-              <a:defRPr lang="en-US" sz="1400" b="0" u="none" strike="noStrike">
-                <a:solidFill>
-                  <a:srgbClr val="000000"/>
-                </a:solidFill>
-                <a:effectLst/>
-                <a:uFillTx/>
-                <a:latin typeface="Times New Roman"/>
-                <a:ea typeface="SimSun"/>
-              </a:defRPr>
-            </a:lvl1pPr>
-          </a:lstStyle>
-          <a:p>
-            <a:pPr indent="0" defTabSz="914400">
-              <a:lnSpc>
-                <a:spcPct val="100000"/>
-              </a:lnSpc>
-              <a:buNone/>
-              <a:tabLst>
-                <a:tab algn="l" pos="0"/>
-              </a:tabLst>
-            </a:pPr>
-            <a:r>
-              <a:rPr lang="en-US" sz="1400" b="0" u="none" strike="noStrike">
-                <a:solidFill>
-                  <a:srgbClr val="000000"/>
-                </a:solidFill>
-                <a:effectLst/>
-                <a:uFillTx/>
-                <a:latin typeface="Times New Roman"/>
-                <a:ea typeface="SimSun"/>
-              </a:rPr>
-              <a:t>&lt;date/time&gt;</a:t>
-            </a:r>
-            <a:endParaRPr lang="en-US" sz="1400" b="0" u="none" strike="noStrike">
-              <a:solidFill>
-                <a:srgbClr val="000000"/>
-              </a:solidFill>
-              <a:effectLst/>
-              <a:uFillTx/>
-              <a:latin typeface="Times New Roman"/>
+            </a:pPr>
+            <a:r>
+              <a:rPr lang="en-US" sz="3600" b="0" u="none" strike="noStrike">
+                <a:solidFill>
+                  <a:schemeClr val="dk1"/>
+                </a:solidFill>
+                <a:effectLst/>
+                <a:uFillTx/>
+                <a:latin typeface="Arial"/>
+                <a:ea typeface="SimSun"/>
+              </a:rPr>
+              <a:t>Click to edit Master title style</a:t>
+            </a:r>
+            <a:endParaRPr lang="en-US" sz="3600" b="0" u="none" strike="noStrike">
+              <a:solidFill>
+                <a:srgbClr val="000000"/>
+              </a:solidFill>
+              <a:effectLst/>
+              <a:uFillTx/>
+              <a:latin typeface="Arial"/>
             </a:endParaRPr>
           </a:p>
         </p:txBody>
@@ -162,13 +143,13 @@
             <a:spLocks noGrp="1"/>
           </p:cNvSpPr>
           <p:nvPr>
-            <p:ph type="ftr" idx="2"/>
+            <p:ph type="dt" idx="1"/>
           </p:nvPr>
         </p:nvSpPr>
         <p:spPr>
           <a:xfrm>
-            <a:off x="4165560" y="6245280"/>
-            <a:ext cx="3847680" cy="463320"/>
+            <a:off x="609480" y="6245280"/>
+            <a:ext cx="2831400" cy="462960"/>
           </a:xfrm>
           <a:prstGeom prst="rect">
             <a:avLst/>
@@ -183,7 +164,7 @@
             <a:noAutofit/>
           </a:bodyPr>
           <a:lstStyle>
-            <a:lvl1pPr indent="0" algn="ctr" defTabSz="914400">
+            <a:lvl1pPr indent="0" defTabSz="914400">
               <a:lnSpc>
                 <a:spcPct val="100000"/>
               </a:lnSpc>
@@ -203,7 +184,7 @@
             </a:lvl1pPr>
           </a:lstStyle>
           <a:p>
-            <a:pPr indent="0" algn="ctr" defTabSz="914400">
+            <a:pPr indent="0" defTabSz="914400">
               <a:lnSpc>
                 <a:spcPct val="100000"/>
               </a:lnSpc>
@@ -222,7 +203,7 @@
                 <a:latin typeface="Times New Roman"/>
                 <a:ea typeface="SimSun"/>
               </a:rPr>
-              <a:t>&lt;footer&gt;</a:t>
+              <a:t>&lt;date/time&gt;</a:t>
             </a:r>
             <a:endParaRPr lang="en-US" sz="1400" b="0" u="none" strike="noStrike">
               <a:solidFill>
@@ -242,13 +223,93 @@
             <a:spLocks noGrp="1"/>
           </p:cNvSpPr>
           <p:nvPr>
+            <p:ph type="ftr" idx="2"/>
+          </p:nvPr>
+        </p:nvSpPr>
+        <p:spPr>
+          <a:xfrm>
+            <a:off x="4165560" y="6245280"/>
+            <a:ext cx="3847320" cy="462960"/>
+          </a:xfrm>
+          <a:prstGeom prst="rect">
+            <a:avLst/>
+          </a:prstGeom>
+          <a:noFill/>
+          <a:ln w="0">
+            <a:noFill/>
+          </a:ln>
+        </p:spPr>
+        <p:txBody>
+          <a:bodyPr numCol="1" spcCol="0" lIns="91440" rIns="91440" tIns="45720" bIns="45720" anchor="t">
+            <a:noAutofit/>
+          </a:bodyPr>
+          <a:lstStyle>
+            <a:lvl1pPr indent="0" algn="ctr" defTabSz="914400">
+              <a:lnSpc>
+                <a:spcPct val="100000"/>
+              </a:lnSpc>
+              <a:buNone/>
+              <a:tabLst>
+                <a:tab algn="l" pos="0"/>
+              </a:tabLst>
+              <a:defRPr lang="en-US" sz="1400" b="0" u="none" strike="noStrike">
+                <a:solidFill>
+                  <a:srgbClr val="000000"/>
+                </a:solidFill>
+                <a:effectLst/>
+                <a:uFillTx/>
+                <a:latin typeface="Times New Roman"/>
+                <a:ea typeface="SimSun"/>
+              </a:defRPr>
+            </a:lvl1pPr>
+          </a:lstStyle>
+          <a:p>
+            <a:pPr indent="0" algn="ctr" defTabSz="914400">
+              <a:lnSpc>
+                <a:spcPct val="100000"/>
+              </a:lnSpc>
+              <a:buNone/>
+              <a:tabLst>
+                <a:tab algn="l" pos="0"/>
+              </a:tabLst>
+            </a:pPr>
+            <a:r>
+              <a:rPr lang="en-US" sz="1400" b="0" u="none" strike="noStrike">
+                <a:solidFill>
+                  <a:srgbClr val="000000"/>
+                </a:solidFill>
+                <a:effectLst/>
+                <a:uFillTx/>
+                <a:latin typeface="Times New Roman"/>
+                <a:ea typeface="SimSun"/>
+              </a:rPr>
+              <a:t>&lt;footer&gt;</a:t>
+            </a:r>
+            <a:endParaRPr lang="en-US" sz="1400" b="0" u="none" strike="noStrike">
+              <a:solidFill>
+                <a:srgbClr val="000000"/>
+              </a:solidFill>
+              <a:effectLst/>
+              <a:uFillTx/>
+              <a:latin typeface="Times New Roman"/>
+            </a:endParaRPr>
+          </a:p>
+        </p:txBody>
+      </p:sp>
+      <p:sp>
+        <p:nvSpPr>
+          <p:cNvPr id="6" name="PlaceHolder 4"/>
+          <p:cNvSpPr>
+            <a:spLocks noGrp="1"/>
+          </p:cNvSpPr>
+          <p:nvPr>
             <p:ph type="sldNum" idx="3"/>
           </p:nvPr>
         </p:nvSpPr>
         <p:spPr>
           <a:xfrm>
             <a:off x="8737560" y="6245280"/>
-            <a:ext cx="2831760" cy="463320"/>
+            <a:ext cx="2831400" cy="462960"/>
           </a:xfrm>
           <a:prstGeom prst="rect">
             <a:avLst/>
@@ -283,6 +344,903 @@
 </file>
 
 <file path=ppt/slideLayouts/slideLayout10.xml><?xml version="1.0" encoding="utf-8"?>
+<p:sldLayout xmlns:a="http://schemas.openxmlformats.org/drawingml/2006/main" xmlns:p="http://schemas.openxmlformats.org/presentationml/2006/main" xmlns:r="http://schemas.openxmlformats.org/officeDocument/2006/relationships" xmlns:p14="http://schemas.microsoft.com/office/powerpoint/2010/main" xmlns:p15="http://schemas.microsoft.com/office/powerpoint/2012/main" xmlns:mc="http://schemas.openxmlformats.org/markup-compatibility/2006" type="obj" preserve="1">
+  <p:cSld name="Title and Content">
+    <p:bg>
+      <p:bgPr>
+        <a:solidFill>
+          <a:srgbClr val="ffffff"/>
+        </a:solidFill>
+      </p:bgPr>
+    </p:bg>
+    <p:spTree>
+      <p:nvGrpSpPr>
+        <p:cNvPr id="1" name=""/>
+        <p:cNvGrpSpPr/>
+        <p:nvPr/>
+      </p:nvGrpSpPr>
+      <p:grpSpPr>
+        <a:xfrm>
+          <a:off x="0" y="0"/>
+          <a:ext cx="0" cy="0"/>
+          <a:chOff x="0" y="0"/>
+          <a:chExt cx="0" cy="0"/>
+        </a:xfrm>
+      </p:grpSpPr>
+      <p:pic>
+        <p:nvPicPr>
+          <p:cNvPr id="59" name="Picture 10"/>
+          <p:cNvPicPr/>
+          <p:nvPr/>
+        </p:nvPicPr>
+        <p:blipFill>
+          <a:blip r:embed="rId2"/>
+          <a:stretch/>
+        </p:blipFill>
+        <p:spPr>
+          <a:xfrm>
+            <a:off x="0" y="0"/>
+            <a:ext cx="12178800" cy="6844680"/>
+          </a:xfrm>
+          <a:prstGeom prst="rect">
+            <a:avLst/>
+          </a:prstGeom>
+          <a:noFill/>
+          <a:ln w="9525">
+            <a:noFill/>
+          </a:ln>
+        </p:spPr>
+      </p:pic>
+      <p:sp>
+        <p:nvSpPr>
+          <p:cNvPr id="60" name="PlaceHolder 1"/>
+          <p:cNvSpPr>
+            <a:spLocks noGrp="1"/>
+          </p:cNvSpPr>
+          <p:nvPr>
+            <p:ph type="title"/>
+          </p:nvPr>
+        </p:nvSpPr>
+        <p:spPr>
+          <a:xfrm>
+            <a:off x="609480" y="190440"/>
+            <a:ext cx="10959480" cy="569160"/>
+          </a:xfrm>
+          <a:prstGeom prst="rect">
+            <a:avLst/>
+          </a:prstGeom>
+          <a:noFill/>
+          <a:ln w="9360">
+            <a:noFill/>
+          </a:ln>
+        </p:spPr>
+        <p:txBody>
+          <a:bodyPr lIns="90000" rIns="90000" tIns="45000" bIns="45000" anchor="ctr">
+            <a:noAutofit/>
+          </a:bodyPr>
+          <a:p>
+            <a:pPr indent="0">
+              <a:lnSpc>
+                <a:spcPct val="100000"/>
+              </a:lnSpc>
+              <a:buNone/>
+              <a:tabLst>
+                <a:tab algn="l" pos="0"/>
+              </a:tabLst>
+            </a:pPr>
+            <a:r>
+              <a:rPr lang="en-US" sz="3600" b="0" u="none" strike="noStrike">
+                <a:solidFill>
+                  <a:schemeClr val="dk1"/>
+                </a:solidFill>
+                <a:effectLst/>
+                <a:uFillTx/>
+                <a:latin typeface="Arial"/>
+                <a:ea typeface="SimSun"/>
+              </a:rPr>
+              <a:t>Click to edit Master title style</a:t>
+            </a:r>
+            <a:endParaRPr lang="en-US" sz="3600" b="0" u="none" strike="noStrike">
+              <a:solidFill>
+                <a:srgbClr val="000000"/>
+              </a:solidFill>
+              <a:effectLst/>
+              <a:uFillTx/>
+              <a:latin typeface="Arial"/>
+            </a:endParaRPr>
+          </a:p>
+        </p:txBody>
+      </p:sp>
+      <p:sp>
+        <p:nvSpPr>
+          <p:cNvPr id="61" name="PlaceHolder 2"/>
+          <p:cNvSpPr>
+            <a:spLocks noGrp="1"/>
+          </p:cNvSpPr>
+          <p:nvPr>
+            <p:ph type="body"/>
+          </p:nvPr>
+        </p:nvSpPr>
+        <p:spPr>
+          <a:xfrm>
+            <a:off x="609480" y="1174680"/>
+            <a:ext cx="10959480" cy="4939560"/>
+          </a:xfrm>
+          <a:prstGeom prst="rect">
+            <a:avLst/>
+          </a:prstGeom>
+          <a:noFill/>
+          <a:ln w="9360">
+            <a:noFill/>
+          </a:ln>
+        </p:spPr>
+        <p:txBody>
+          <a:bodyPr lIns="90000" rIns="90000" tIns="45000" bIns="45000" anchor="t">
+            <a:noAutofit/>
+          </a:bodyPr>
+          <a:p>
+            <a:pPr marL="343080" indent="-343080">
+              <a:lnSpc>
+                <a:spcPct val="100000"/>
+              </a:lnSpc>
+              <a:spcBef>
+                <a:spcPts val="641"/>
+              </a:spcBef>
+              <a:buClr>
+                <a:srgbClr val="000000"/>
+              </a:buClr>
+              <a:buFont typeface="Symbol" charset="2"/>
+              <a:buChar char=""/>
+            </a:pPr>
+            <a:r>
+              <a:rPr lang="en-US" sz="3200" b="0" u="none" strike="noStrike">
+                <a:solidFill>
+                  <a:schemeClr val="dk1"/>
+                </a:solidFill>
+                <a:effectLst/>
+                <a:uFillTx/>
+                <a:latin typeface="Arial"/>
+                <a:ea typeface="SimSun"/>
+              </a:rPr>
+              <a:t>Click to edit Master text styles</a:t>
+            </a:r>
+            <a:endParaRPr lang="en-US" sz="3200" b="0" u="none" strike="noStrike">
+              <a:solidFill>
+                <a:srgbClr val="000000"/>
+              </a:solidFill>
+              <a:effectLst/>
+              <a:uFillTx/>
+              <a:latin typeface="Arial"/>
+            </a:endParaRPr>
+          </a:p>
+          <a:p>
+            <a:pPr marL="743040" lvl="1" indent="-285840">
+              <a:lnSpc>
+                <a:spcPct val="100000"/>
+              </a:lnSpc>
+              <a:spcBef>
+                <a:spcPts val="561"/>
+              </a:spcBef>
+              <a:buClr>
+                <a:srgbClr val="000000"/>
+              </a:buClr>
+              <a:buFont typeface="Symbol" charset="2"/>
+              <a:buChar char=""/>
+            </a:pPr>
+            <a:r>
+              <a:rPr lang="en-US" sz="2800" b="0" u="none" strike="noStrike">
+                <a:solidFill>
+                  <a:schemeClr val="dk1"/>
+                </a:solidFill>
+                <a:effectLst/>
+                <a:uFillTx/>
+                <a:latin typeface="Arial"/>
+                <a:ea typeface="SimSun"/>
+              </a:rPr>
+              <a:t>Second level</a:t>
+            </a:r>
+            <a:endParaRPr lang="en-US" sz="2800" b="0" u="none" strike="noStrike">
+              <a:solidFill>
+                <a:srgbClr val="000000"/>
+              </a:solidFill>
+              <a:effectLst/>
+              <a:uFillTx/>
+              <a:latin typeface="Arial"/>
+            </a:endParaRPr>
+          </a:p>
+          <a:p>
+            <a:pPr marL="1143000" lvl="2" indent="-228600">
+              <a:lnSpc>
+                <a:spcPct val="100000"/>
+              </a:lnSpc>
+              <a:spcBef>
+                <a:spcPts val="479"/>
+              </a:spcBef>
+              <a:buClr>
+                <a:srgbClr val="000000"/>
+              </a:buClr>
+              <a:buFont typeface="Symbol" charset="2"/>
+              <a:buChar char=""/>
+            </a:pPr>
+            <a:r>
+              <a:rPr lang="en-US" sz="2400" b="0" u="none" strike="noStrike">
+                <a:solidFill>
+                  <a:schemeClr val="dk1"/>
+                </a:solidFill>
+                <a:effectLst/>
+                <a:uFillTx/>
+                <a:latin typeface="Arial"/>
+                <a:ea typeface="SimSun"/>
+              </a:rPr>
+              <a:t>Third level</a:t>
+            </a:r>
+            <a:endParaRPr lang="en-US" sz="2400" b="0" u="none" strike="noStrike">
+              <a:solidFill>
+                <a:srgbClr val="000000"/>
+              </a:solidFill>
+              <a:effectLst/>
+              <a:uFillTx/>
+              <a:latin typeface="Arial"/>
+            </a:endParaRPr>
+          </a:p>
+          <a:p>
+            <a:pPr marL="1600200" lvl="3" indent="-228600">
+              <a:lnSpc>
+                <a:spcPct val="100000"/>
+              </a:lnSpc>
+              <a:spcBef>
+                <a:spcPts val="400"/>
+              </a:spcBef>
+              <a:buClr>
+                <a:srgbClr val="000000"/>
+              </a:buClr>
+              <a:buFont typeface="Symbol" charset="2"/>
+              <a:buChar char=""/>
+            </a:pPr>
+            <a:r>
+              <a:rPr lang="en-US" sz="2000" b="0" u="none" strike="noStrike">
+                <a:solidFill>
+                  <a:schemeClr val="dk1"/>
+                </a:solidFill>
+                <a:effectLst/>
+                <a:uFillTx/>
+                <a:latin typeface="Arial"/>
+                <a:ea typeface="SimSun"/>
+              </a:rPr>
+              <a:t>Fourth level</a:t>
+            </a:r>
+            <a:endParaRPr lang="en-US" sz="2000" b="0" u="none" strike="noStrike">
+              <a:solidFill>
+                <a:srgbClr val="000000"/>
+              </a:solidFill>
+              <a:effectLst/>
+              <a:uFillTx/>
+              <a:latin typeface="Arial"/>
+            </a:endParaRPr>
+          </a:p>
+          <a:p>
+            <a:pPr marL="2057400" lvl="4" indent="-228600">
+              <a:lnSpc>
+                <a:spcPct val="100000"/>
+              </a:lnSpc>
+              <a:spcBef>
+                <a:spcPts val="400"/>
+              </a:spcBef>
+              <a:buClr>
+                <a:srgbClr val="000000"/>
+              </a:buClr>
+              <a:buFont typeface="OpenSymbol"/>
+              <a:buChar char="»"/>
+            </a:pPr>
+            <a:r>
+              <a:rPr lang="en-US" sz="2000" b="0" u="none" strike="noStrike">
+                <a:solidFill>
+                  <a:schemeClr val="dk1"/>
+                </a:solidFill>
+                <a:effectLst/>
+                <a:uFillTx/>
+                <a:latin typeface="Arial"/>
+                <a:ea typeface="SimSun"/>
+              </a:rPr>
+              <a:t>Fifth level</a:t>
+            </a:r>
+            <a:endParaRPr lang="en-US" sz="2000" b="0" u="none" strike="noStrike">
+              <a:solidFill>
+                <a:srgbClr val="000000"/>
+              </a:solidFill>
+              <a:effectLst/>
+              <a:uFillTx/>
+              <a:latin typeface="Arial"/>
+            </a:endParaRPr>
+          </a:p>
+        </p:txBody>
+      </p:sp>
+      <p:sp>
+        <p:nvSpPr>
+          <p:cNvPr id="62" name="PlaceHolder 3"/>
+          <p:cNvSpPr>
+            <a:spLocks noGrp="1"/>
+          </p:cNvSpPr>
+          <p:nvPr>
+            <p:ph type="dt" idx="28"/>
+          </p:nvPr>
+        </p:nvSpPr>
+        <p:spPr>
+          <a:xfrm>
+            <a:off x="609480" y="6245280"/>
+            <a:ext cx="2831400" cy="462960"/>
+          </a:xfrm>
+          <a:prstGeom prst="rect">
+            <a:avLst/>
+          </a:prstGeom>
+          <a:noFill/>
+          <a:ln w="0">
+            <a:noFill/>
+          </a:ln>
+        </p:spPr>
+        <p:txBody>
+          <a:bodyPr numCol="1" spcCol="0" lIns="91440" rIns="91440" tIns="45720" bIns="45720" anchor="t">
+            <a:noAutofit/>
+          </a:bodyPr>
+          <a:lstStyle>
+            <a:lvl1pPr indent="0" defTabSz="914400">
+              <a:lnSpc>
+                <a:spcPct val="100000"/>
+              </a:lnSpc>
+              <a:buNone/>
+              <a:tabLst>
+                <a:tab algn="l" pos="0"/>
+              </a:tabLst>
+              <a:defRPr lang="en-US" sz="1400" b="0" u="none" strike="noStrike">
+                <a:solidFill>
+                  <a:srgbClr val="000000"/>
+                </a:solidFill>
+                <a:effectLst/>
+                <a:uFillTx/>
+                <a:latin typeface="Times New Roman"/>
+                <a:ea typeface="SimSun"/>
+              </a:defRPr>
+            </a:lvl1pPr>
+          </a:lstStyle>
+          <a:p>
+            <a:pPr indent="0" defTabSz="914400">
+              <a:lnSpc>
+                <a:spcPct val="100000"/>
+              </a:lnSpc>
+              <a:buNone/>
+              <a:tabLst>
+                <a:tab algn="l" pos="0"/>
+              </a:tabLst>
+            </a:pPr>
+            <a:r>
+              <a:rPr lang="en-US" sz="1400" b="0" u="none" strike="noStrike">
+                <a:solidFill>
+                  <a:srgbClr val="000000"/>
+                </a:solidFill>
+                <a:effectLst/>
+                <a:uFillTx/>
+                <a:latin typeface="Times New Roman"/>
+                <a:ea typeface="SimSun"/>
+              </a:rPr>
+              <a:t>&lt;date/time&gt;</a:t>
+            </a:r>
+            <a:endParaRPr lang="en-US" sz="1400" b="0" u="none" strike="noStrike">
+              <a:solidFill>
+                <a:srgbClr val="000000"/>
+              </a:solidFill>
+              <a:effectLst/>
+              <a:uFillTx/>
+              <a:latin typeface="Times New Roman"/>
+            </a:endParaRPr>
+          </a:p>
+        </p:txBody>
+      </p:sp>
+      <p:sp>
+        <p:nvSpPr>
+          <p:cNvPr id="63" name="PlaceHolder 4"/>
+          <p:cNvSpPr>
+            <a:spLocks noGrp="1"/>
+          </p:cNvSpPr>
+          <p:nvPr>
+            <p:ph type="ftr" idx="29"/>
+          </p:nvPr>
+        </p:nvSpPr>
+        <p:spPr>
+          <a:xfrm>
+            <a:off x="4165560" y="6245280"/>
+            <a:ext cx="3847320" cy="462960"/>
+          </a:xfrm>
+          <a:prstGeom prst="rect">
+            <a:avLst/>
+          </a:prstGeom>
+          <a:noFill/>
+          <a:ln w="0">
+            <a:noFill/>
+          </a:ln>
+        </p:spPr>
+        <p:txBody>
+          <a:bodyPr numCol="1" spcCol="0" lIns="91440" rIns="91440" tIns="45720" bIns="45720" anchor="t">
+            <a:noAutofit/>
+          </a:bodyPr>
+          <a:lstStyle>
+            <a:lvl1pPr indent="0" algn="ctr" defTabSz="914400">
+              <a:lnSpc>
+                <a:spcPct val="100000"/>
+              </a:lnSpc>
+              <a:buNone/>
+              <a:tabLst>
+                <a:tab algn="l" pos="0"/>
+              </a:tabLst>
+              <a:defRPr lang="en-US" sz="1400" b="0" u="none" strike="noStrike">
+                <a:solidFill>
+                  <a:srgbClr val="000000"/>
+                </a:solidFill>
+                <a:effectLst/>
+                <a:uFillTx/>
+                <a:latin typeface="Times New Roman"/>
+                <a:ea typeface="SimSun"/>
+              </a:defRPr>
+            </a:lvl1pPr>
+          </a:lstStyle>
+          <a:p>
+            <a:pPr indent="0" algn="ctr" defTabSz="914400">
+              <a:lnSpc>
+                <a:spcPct val="100000"/>
+              </a:lnSpc>
+              <a:buNone/>
+              <a:tabLst>
+                <a:tab algn="l" pos="0"/>
+              </a:tabLst>
+            </a:pPr>
+            <a:r>
+              <a:rPr lang="en-US" sz="1400" b="0" u="none" strike="noStrike">
+                <a:solidFill>
+                  <a:srgbClr val="000000"/>
+                </a:solidFill>
+                <a:effectLst/>
+                <a:uFillTx/>
+                <a:latin typeface="Times New Roman"/>
+                <a:ea typeface="SimSun"/>
+              </a:rPr>
+              <a:t>&lt;footer&gt;</a:t>
+            </a:r>
+            <a:endParaRPr lang="en-US" sz="1400" b="0" u="none" strike="noStrike">
+              <a:solidFill>
+                <a:srgbClr val="000000"/>
+              </a:solidFill>
+              <a:effectLst/>
+              <a:uFillTx/>
+              <a:latin typeface="Times New Roman"/>
+            </a:endParaRPr>
+          </a:p>
+        </p:txBody>
+      </p:sp>
+      <p:sp>
+        <p:nvSpPr>
+          <p:cNvPr id="64" name="PlaceHolder 5"/>
+          <p:cNvSpPr>
+            <a:spLocks noGrp="1"/>
+          </p:cNvSpPr>
+          <p:nvPr>
+            <p:ph type="sldNum" idx="30"/>
+          </p:nvPr>
+        </p:nvSpPr>
+        <p:spPr>
+          <a:xfrm>
+            <a:off x="8737560" y="6245280"/>
+            <a:ext cx="2831400" cy="462960"/>
+          </a:xfrm>
+          <a:prstGeom prst="rect">
+            <a:avLst/>
+          </a:prstGeom>
+          <a:noFill/>
+          <a:ln w="0">
+            <a:noFill/>
+          </a:ln>
+        </p:spPr>
+        <p:txBody>
+          <a:bodyPr numCol="1" spcCol="0" lIns="91440" rIns="91440" tIns="45720" bIns="45720" anchor="t">
+            <a:noAutofit/>
+          </a:bodyPr>
+          <a:p>
+            <a:pPr indent="0">
+              <a:buNone/>
+            </a:pPr>
+            <a:endParaRPr lang="en-US" sz="1800" b="0" u="none" strike="noStrike">
+              <a:solidFill>
+                <a:srgbClr val="000000"/>
+              </a:solidFill>
+              <a:effectLst/>
+              <a:uFillTx/>
+              <a:latin typeface="Times New Roman"/>
+            </a:endParaRPr>
+          </a:p>
+        </p:txBody>
+      </p:sp>
+    </p:spTree>
+  </p:cSld>
+</p:sldLayout>
+</file>
+
+<file path=ppt/slideLayouts/slideLayout11.xml><?xml version="1.0" encoding="utf-8"?>
+<p:sldLayout xmlns:a="http://schemas.openxmlformats.org/drawingml/2006/main" xmlns:p="http://schemas.openxmlformats.org/presentationml/2006/main" xmlns:r="http://schemas.openxmlformats.org/officeDocument/2006/relationships" xmlns:p14="http://schemas.microsoft.com/office/powerpoint/2010/main" xmlns:p15="http://schemas.microsoft.com/office/powerpoint/2012/main" xmlns:mc="http://schemas.openxmlformats.org/markup-compatibility/2006" type="blank" preserve="1">
+  <p:cSld name="Section Header">
+    <p:bg>
+      <p:bgPr>
+        <a:solidFill>
+          <a:srgbClr val="ffffff"/>
+        </a:solidFill>
+      </p:bgPr>
+    </p:bg>
+    <p:spTree>
+      <p:nvGrpSpPr>
+        <p:cNvPr id="1" name=""/>
+        <p:cNvGrpSpPr/>
+        <p:nvPr/>
+      </p:nvGrpSpPr>
+      <p:grpSpPr>
+        <a:xfrm>
+          <a:off x="0" y="0"/>
+          <a:ext cx="0" cy="0"/>
+          <a:chOff x="0" y="0"/>
+          <a:chExt cx="0" cy="0"/>
+        </a:xfrm>
+      </p:grpSpPr>
+      <p:pic>
+        <p:nvPicPr>
+          <p:cNvPr id="65" name="Picture 10"/>
+          <p:cNvPicPr/>
+          <p:nvPr/>
+        </p:nvPicPr>
+        <p:blipFill>
+          <a:blip r:embed="rId2"/>
+          <a:stretch/>
+        </p:blipFill>
+        <p:spPr>
+          <a:xfrm>
+            <a:off x="0" y="0"/>
+            <a:ext cx="12178800" cy="6844680"/>
+          </a:xfrm>
+          <a:prstGeom prst="rect">
+            <a:avLst/>
+          </a:prstGeom>
+          <a:noFill/>
+          <a:ln w="9525">
+            <a:noFill/>
+          </a:ln>
+        </p:spPr>
+      </p:pic>
+      <p:sp>
+        <p:nvSpPr>
+          <p:cNvPr id="66" name="PlaceHolder 1"/>
+          <p:cNvSpPr>
+            <a:spLocks noGrp="1"/>
+          </p:cNvSpPr>
+          <p:nvPr>
+            <p:ph type="title"/>
+          </p:nvPr>
+        </p:nvSpPr>
+        <p:spPr>
+          <a:xfrm>
+            <a:off x="831960" y="1709640"/>
+            <a:ext cx="10502280" cy="2839320"/>
+          </a:xfrm>
+          <a:prstGeom prst="rect">
+            <a:avLst/>
+          </a:prstGeom>
+          <a:noFill/>
+          <a:ln w="9360">
+            <a:noFill/>
+          </a:ln>
+        </p:spPr>
+        <p:txBody>
+          <a:bodyPr lIns="90000" rIns="90000" tIns="45000" bIns="45000" anchor="b">
+            <a:noAutofit/>
+          </a:bodyPr>
+          <a:p>
+            <a:pPr indent="0">
+              <a:lnSpc>
+                <a:spcPct val="100000"/>
+              </a:lnSpc>
+              <a:buNone/>
+              <a:tabLst>
+                <a:tab algn="l" pos="0"/>
+              </a:tabLst>
+            </a:pPr>
+            <a:r>
+              <a:rPr lang="en-US" sz="6000" b="0" u="none" strike="noStrike">
+                <a:solidFill>
+                  <a:schemeClr val="dk1"/>
+                </a:solidFill>
+                <a:effectLst/>
+                <a:uFillTx/>
+                <a:latin typeface="Arial"/>
+                <a:ea typeface="SimSun"/>
+              </a:rPr>
+              <a:t>Click to edit Master title style</a:t>
+            </a:r>
+            <a:endParaRPr lang="en-US" sz="6000" b="0" u="none" strike="noStrike">
+              <a:solidFill>
+                <a:srgbClr val="000000"/>
+              </a:solidFill>
+              <a:effectLst/>
+              <a:uFillTx/>
+              <a:latin typeface="Arial"/>
+            </a:endParaRPr>
+          </a:p>
+        </p:txBody>
+      </p:sp>
+      <p:sp>
+        <p:nvSpPr>
+          <p:cNvPr id="67" name="PlaceHolder 2"/>
+          <p:cNvSpPr>
+            <a:spLocks noGrp="1"/>
+          </p:cNvSpPr>
+          <p:nvPr>
+            <p:ph type="body"/>
+          </p:nvPr>
+        </p:nvSpPr>
+        <p:spPr>
+          <a:xfrm>
+            <a:off x="831960" y="4589640"/>
+            <a:ext cx="10502280" cy="1486800"/>
+          </a:xfrm>
+          <a:prstGeom prst="rect">
+            <a:avLst/>
+          </a:prstGeom>
+          <a:noFill/>
+          <a:ln w="9360">
+            <a:noFill/>
+          </a:ln>
+        </p:spPr>
+        <p:txBody>
+          <a:bodyPr lIns="90000" rIns="90000" tIns="45000" bIns="45000" anchor="t">
+            <a:noAutofit/>
+          </a:bodyPr>
+          <a:p>
+            <a:pPr indent="0">
+              <a:lnSpc>
+                <a:spcPct val="100000"/>
+              </a:lnSpc>
+              <a:spcBef>
+                <a:spcPts val="479"/>
+              </a:spcBef>
+              <a:buNone/>
+              <a:tabLst>
+                <a:tab algn="l" pos="0"/>
+              </a:tabLst>
+            </a:pPr>
+            <a:r>
+              <a:rPr lang="en-US" sz="2400" b="0" u="none" strike="noStrike">
+                <a:solidFill>
+                  <a:schemeClr val="dk1"/>
+                </a:solidFill>
+                <a:effectLst/>
+                <a:uFillTx/>
+                <a:latin typeface="Arial"/>
+                <a:ea typeface="SimSun"/>
+              </a:rPr>
+              <a:t>Click to edit Master text styles</a:t>
+            </a:r>
+            <a:endParaRPr lang="en-US" sz="2400" b="0" u="none" strike="noStrike">
+              <a:solidFill>
+                <a:srgbClr val="000000"/>
+              </a:solidFill>
+              <a:effectLst/>
+              <a:uFillTx/>
+              <a:latin typeface="Arial"/>
+            </a:endParaRPr>
+          </a:p>
+        </p:txBody>
+      </p:sp>
+      <p:sp>
+        <p:nvSpPr>
+          <p:cNvPr id="68" name="PlaceHolder 3"/>
+          <p:cNvSpPr>
+            <a:spLocks noGrp="1"/>
+          </p:cNvSpPr>
+          <p:nvPr>
+            <p:ph type="dt" idx="31"/>
+          </p:nvPr>
+        </p:nvSpPr>
+        <p:spPr>
+          <a:xfrm>
+            <a:off x="609480" y="6245280"/>
+            <a:ext cx="2831400" cy="462960"/>
+          </a:xfrm>
+          <a:prstGeom prst="rect">
+            <a:avLst/>
+          </a:prstGeom>
+          <a:noFill/>
+          <a:ln w="0">
+            <a:noFill/>
+          </a:ln>
+        </p:spPr>
+        <p:txBody>
+          <a:bodyPr numCol="1" spcCol="0" lIns="91440" rIns="91440" tIns="45720" bIns="45720" anchor="t">
+            <a:noAutofit/>
+          </a:bodyPr>
+          <a:lstStyle>
+            <a:lvl1pPr indent="0" defTabSz="914400">
+              <a:lnSpc>
+                <a:spcPct val="100000"/>
+              </a:lnSpc>
+              <a:buNone/>
+              <a:tabLst>
+                <a:tab algn="l" pos="0"/>
+              </a:tabLst>
+              <a:defRPr lang="en-US" sz="1400" b="0" u="none" strike="noStrike">
+                <a:solidFill>
+                  <a:srgbClr val="000000"/>
+                </a:solidFill>
+                <a:effectLst/>
+                <a:uFillTx/>
+                <a:latin typeface="Times New Roman"/>
+                <a:ea typeface="SimSun"/>
+              </a:defRPr>
+            </a:lvl1pPr>
+          </a:lstStyle>
+          <a:p>
+            <a:pPr indent="0" defTabSz="914400">
+              <a:lnSpc>
+                <a:spcPct val="100000"/>
+              </a:lnSpc>
+              <a:buNone/>
+              <a:tabLst>
+                <a:tab algn="l" pos="0"/>
+              </a:tabLst>
+            </a:pPr>
+            <a:r>
+              <a:rPr lang="en-US" sz="1400" b="0" u="none" strike="noStrike">
+                <a:solidFill>
+                  <a:srgbClr val="000000"/>
+                </a:solidFill>
+                <a:effectLst/>
+                <a:uFillTx/>
+                <a:latin typeface="Times New Roman"/>
+                <a:ea typeface="SimSun"/>
+              </a:rPr>
+              <a:t>&lt;date/time&gt;</a:t>
+            </a:r>
+            <a:endParaRPr lang="en-US" sz="1400" b="0" u="none" strike="noStrike">
+              <a:solidFill>
+                <a:srgbClr val="000000"/>
+              </a:solidFill>
+              <a:effectLst/>
+              <a:uFillTx/>
+              <a:latin typeface="Times New Roman"/>
+            </a:endParaRPr>
+          </a:p>
+        </p:txBody>
+      </p:sp>
+      <p:sp>
+        <p:nvSpPr>
+          <p:cNvPr id="69" name="PlaceHolder 4"/>
+          <p:cNvSpPr>
+            <a:spLocks noGrp="1"/>
+          </p:cNvSpPr>
+          <p:nvPr>
+            <p:ph type="ftr" idx="32"/>
+          </p:nvPr>
+        </p:nvSpPr>
+        <p:spPr>
+          <a:xfrm>
+            <a:off x="4165560" y="6245280"/>
+            <a:ext cx="3847320" cy="462960"/>
+          </a:xfrm>
+          <a:prstGeom prst="rect">
+            <a:avLst/>
+          </a:prstGeom>
+          <a:noFill/>
+          <a:ln w="0">
+            <a:noFill/>
+          </a:ln>
+        </p:spPr>
+        <p:txBody>
+          <a:bodyPr numCol="1" spcCol="0" lIns="91440" rIns="91440" tIns="45720" bIns="45720" anchor="t">
+            <a:noAutofit/>
+          </a:bodyPr>
+          <a:lstStyle>
+            <a:lvl1pPr indent="0" algn="ctr" defTabSz="914400">
+              <a:lnSpc>
+                <a:spcPct val="100000"/>
+              </a:lnSpc>
+              <a:buNone/>
+              <a:tabLst>
+                <a:tab algn="l" pos="0"/>
+              </a:tabLst>
+              <a:defRPr lang="en-US" sz="1400" b="0" u="none" strike="noStrike">
+                <a:solidFill>
+                  <a:srgbClr val="000000"/>
+                </a:solidFill>
+                <a:effectLst/>
+                <a:uFillTx/>
+                <a:latin typeface="Times New Roman"/>
+                <a:ea typeface="SimSun"/>
+              </a:defRPr>
+            </a:lvl1pPr>
+          </a:lstStyle>
+          <a:p>
+            <a:pPr indent="0" algn="ctr" defTabSz="914400">
+              <a:lnSpc>
+                <a:spcPct val="100000"/>
+              </a:lnSpc>
+              <a:buNone/>
+              <a:tabLst>
+                <a:tab algn="l" pos="0"/>
+              </a:tabLst>
+            </a:pPr>
+            <a:r>
+              <a:rPr lang="en-US" sz="1400" b="0" u="none" strike="noStrike">
+                <a:solidFill>
+                  <a:srgbClr val="000000"/>
+                </a:solidFill>
+                <a:effectLst/>
+                <a:uFillTx/>
+                <a:latin typeface="Times New Roman"/>
+                <a:ea typeface="SimSun"/>
+              </a:rPr>
+              <a:t>&lt;footer&gt;</a:t>
+            </a:r>
+            <a:endParaRPr lang="en-US" sz="1400" b="0" u="none" strike="noStrike">
+              <a:solidFill>
+                <a:srgbClr val="000000"/>
+              </a:solidFill>
+              <a:effectLst/>
+              <a:uFillTx/>
+              <a:latin typeface="Times New Roman"/>
+            </a:endParaRPr>
+          </a:p>
+        </p:txBody>
+      </p:sp>
+      <p:sp>
+        <p:nvSpPr>
+          <p:cNvPr id="70" name="PlaceHolder 5"/>
+          <p:cNvSpPr>
+            <a:spLocks noGrp="1"/>
+          </p:cNvSpPr>
+          <p:nvPr>
+            <p:ph type="sldNum" idx="33"/>
+          </p:nvPr>
+        </p:nvSpPr>
+        <p:spPr>
+          <a:xfrm>
+            <a:off x="8737560" y="6245280"/>
+            <a:ext cx="2831400" cy="462960"/>
+          </a:xfrm>
+          <a:prstGeom prst="rect">
+            <a:avLst/>
+          </a:prstGeom>
+          <a:noFill/>
+          <a:ln w="0">
+            <a:noFill/>
+          </a:ln>
+        </p:spPr>
+        <p:txBody>
+          <a:bodyPr numCol="1" spcCol="0" lIns="91440" rIns="91440" tIns="45720" bIns="45720" anchor="t">
+            <a:noAutofit/>
+          </a:bodyPr>
+          <a:p>
+            <a:pPr indent="0">
+              <a:buNone/>
+            </a:pPr>
+            <a:endParaRPr lang="en-US" sz="1800" b="0" u="none" strike="noStrike">
+              <a:solidFill>
+                <a:srgbClr val="000000"/>
+              </a:solidFill>
+              <a:effectLst/>
+              <a:uFillTx/>
+              <a:latin typeface="Times New Roman"/>
+            </a:endParaRPr>
+          </a:p>
+        </p:txBody>
+      </p:sp>
+    </p:spTree>
+  </p:cSld>
+</p:sldLayout>
+</file>
+
+<file path=ppt/slideLayouts/slideLayout2.xml><?xml version="1.0" encoding="utf-8"?>
 <p:sldLayout xmlns:a="http://schemas.openxmlformats.org/drawingml/2006/main" xmlns:p="http://schemas.openxmlformats.org/presentationml/2006/main" xmlns:r="http://schemas.openxmlformats.org/officeDocument/2006/relationships" xmlns:p14="http://schemas.microsoft.com/office/powerpoint/2010/main" xmlns:p15="http://schemas.microsoft.com/office/powerpoint/2012/main" xmlns:mc="http://schemas.openxmlformats.org/markup-compatibility/2006" type="twoObj" preserve="1">
   <p:cSld name="Two Content">
     <p:bg>
@@ -308,7 +1266,7 @@
       </p:grpSpPr>
       <p:pic>
         <p:nvPicPr>
-          <p:cNvPr id="55" name="Picture 10"/>
+          <p:cNvPr id="7" name="Picture 10"/>
           <p:cNvPicPr/>
           <p:nvPr/>
         </p:nvPicPr>
@@ -319,7 +1277,7 @@
         <p:spPr>
           <a:xfrm>
             <a:off x="0" y="0"/>
-            <a:ext cx="12179160" cy="6845040"/>
+            <a:ext cx="12178800" cy="6844680"/>
           </a:xfrm>
           <a:prstGeom prst="rect">
             <a:avLst/>
@@ -332,7 +1290,7 @@
       </p:pic>
       <p:sp>
         <p:nvSpPr>
-          <p:cNvPr id="56" name="PlaceHolder 1"/>
+          <p:cNvPr id="8" name="PlaceHolder 1"/>
           <p:cNvSpPr>
             <a:spLocks noGrp="1"/>
           </p:cNvSpPr>
@@ -343,7 +1301,7 @@
         <p:spPr>
           <a:xfrm>
             <a:off x="609480" y="190440"/>
-            <a:ext cx="10959840" cy="569520"/>
+            <a:ext cx="10959480" cy="569160"/>
           </a:xfrm>
           <a:prstGeom prst="rect">
             <a:avLst/>
@@ -392,7 +1350,7 @@
       </p:sp>
       <p:sp>
         <p:nvSpPr>
-          <p:cNvPr id="57" name="PlaceHolder 2"/>
+          <p:cNvPr id="9" name="PlaceHolder 2"/>
           <p:cNvSpPr>
             <a:spLocks noGrp="1"/>
           </p:cNvSpPr>
@@ -403,7 +1361,7 @@
         <p:spPr>
           <a:xfrm>
             <a:off x="609480" y="1174680"/>
-            <a:ext cx="5371920" cy="4939920"/>
+            <a:ext cx="5371560" cy="4939560"/>
           </a:xfrm>
           <a:prstGeom prst="rect">
             <a:avLst/>
@@ -596,7 +1554,7 @@
       </p:sp>
       <p:sp>
         <p:nvSpPr>
-          <p:cNvPr id="58" name="PlaceHolder 3"/>
+          <p:cNvPr id="10" name="PlaceHolder 3"/>
           <p:cNvSpPr>
             <a:spLocks noGrp="1"/>
           </p:cNvSpPr>
@@ -607,7 +1565,7 @@
         <p:spPr>
           <a:xfrm>
             <a:off x="6197760" y="1174680"/>
-            <a:ext cx="5371920" cy="4939920"/>
+            <a:ext cx="5371560" cy="4939560"/>
           </a:xfrm>
           <a:prstGeom prst="rect">
             <a:avLst/>
@@ -800,18 +1758,18 @@
       </p:sp>
       <p:sp>
         <p:nvSpPr>
-          <p:cNvPr id="59" name="PlaceHolder 4"/>
+          <p:cNvPr id="11" name="PlaceHolder 4"/>
           <p:cNvSpPr>
             <a:spLocks noGrp="1"/>
           </p:cNvSpPr>
           <p:nvPr>
-            <p:ph type="dt" idx="28"/>
+            <p:ph type="dt" idx="4"/>
           </p:nvPr>
         </p:nvSpPr>
         <p:spPr>
           <a:xfrm>
             <a:off x="609480" y="6245280"/>
-            <a:ext cx="2831760" cy="463320"/>
+            <a:ext cx="2831400" cy="462960"/>
           </a:xfrm>
           <a:prstGeom prst="rect">
             <a:avLst/>
@@ -880,18 +1838,18 @@
       </p:sp>
       <p:sp>
         <p:nvSpPr>
-          <p:cNvPr id="60" name="PlaceHolder 5"/>
+          <p:cNvPr id="12" name="PlaceHolder 5"/>
           <p:cNvSpPr>
             <a:spLocks noGrp="1"/>
           </p:cNvSpPr>
           <p:nvPr>
-            <p:ph type="ftr" idx="29"/>
+            <p:ph type="ftr" idx="5"/>
           </p:nvPr>
         </p:nvSpPr>
         <p:spPr>
           <a:xfrm>
             <a:off x="4165560" y="6245280"/>
-            <a:ext cx="3847680" cy="463320"/>
+            <a:ext cx="3847320" cy="462960"/>
           </a:xfrm>
           <a:prstGeom prst="rect">
             <a:avLst/>
@@ -960,18 +1918,18 @@
       </p:sp>
       <p:sp>
         <p:nvSpPr>
-          <p:cNvPr id="61" name="PlaceHolder 6"/>
+          <p:cNvPr id="13" name="PlaceHolder 6"/>
           <p:cNvSpPr>
             <a:spLocks noGrp="1"/>
           </p:cNvSpPr>
           <p:nvPr>
-            <p:ph type="sldNum" idx="30"/>
+            <p:ph type="sldNum" idx="6"/>
           </p:nvPr>
         </p:nvSpPr>
         <p:spPr>
           <a:xfrm>
             <a:off x="8737560" y="6245280"/>
-            <a:ext cx="2831760" cy="463320"/>
+            <a:ext cx="2831400" cy="462960"/>
           </a:xfrm>
           <a:prstGeom prst="rect">
             <a:avLst/>
@@ -1005,7 +1963,7 @@
 </p:sldLayout>
 </file>
 
-<file path=ppt/slideLayouts/slideLayout11.xml><?xml version="1.0" encoding="utf-8"?>
+<file path=ppt/slideLayouts/slideLayout3.xml><?xml version="1.0" encoding="utf-8"?>
 <p:sldLayout xmlns:a="http://schemas.openxmlformats.org/drawingml/2006/main" xmlns:p="http://schemas.openxmlformats.org/presentationml/2006/main" xmlns:r="http://schemas.openxmlformats.org/officeDocument/2006/relationships" xmlns:p14="http://schemas.microsoft.com/office/powerpoint/2010/main" xmlns:p15="http://schemas.microsoft.com/office/powerpoint/2012/main" xmlns:mc="http://schemas.openxmlformats.org/markup-compatibility/2006" type="blank" preserve="1">
   <p:cSld name="Comparison">
     <p:bg>
@@ -1031,7 +1989,7 @@
       </p:grpSpPr>
       <p:pic>
         <p:nvPicPr>
-          <p:cNvPr id="62" name="Picture 10"/>
+          <p:cNvPr id="14" name="Picture 10"/>
           <p:cNvPicPr/>
           <p:nvPr/>
         </p:nvPicPr>
@@ -1042,7 +2000,7 @@
         <p:spPr>
           <a:xfrm>
             <a:off x="0" y="0"/>
-            <a:ext cx="12179160" cy="6845040"/>
+            <a:ext cx="12178800" cy="6844680"/>
           </a:xfrm>
           <a:prstGeom prst="rect">
             <a:avLst/>
@@ -1055,7 +2013,7 @@
       </p:pic>
       <p:sp>
         <p:nvSpPr>
-          <p:cNvPr id="63" name="PlaceHolder 1"/>
+          <p:cNvPr id="15" name="PlaceHolder 1"/>
           <p:cNvSpPr>
             <a:spLocks noGrp="1"/>
           </p:cNvSpPr>
@@ -1066,7 +2024,7 @@
         <p:spPr>
           <a:xfrm>
             <a:off x="840240" y="365040"/>
-            <a:ext cx="10502640" cy="1312560"/>
+            <a:ext cx="10502280" cy="1312200"/>
           </a:xfrm>
           <a:prstGeom prst="rect">
             <a:avLst/>
@@ -1115,7 +2073,7 @@
       </p:sp>
       <p:sp>
         <p:nvSpPr>
-          <p:cNvPr id="64" name="PlaceHolder 2"/>
+          <p:cNvPr id="16" name="PlaceHolder 2"/>
           <p:cNvSpPr>
             <a:spLocks noGrp="1"/>
           </p:cNvSpPr>
@@ -1126,7 +2084,7 @@
         <p:spPr>
           <a:xfrm>
             <a:off x="840240" y="1681200"/>
-            <a:ext cx="5145480" cy="811080"/>
+            <a:ext cx="5145120" cy="810720"/>
           </a:xfrm>
           <a:prstGeom prst="rect">
             <a:avLst/>
@@ -1178,7 +2136,7 @@
       </p:sp>
       <p:sp>
         <p:nvSpPr>
-          <p:cNvPr id="65" name="PlaceHolder 3"/>
+          <p:cNvPr id="17" name="PlaceHolder 3"/>
           <p:cNvSpPr>
             <a:spLocks noGrp="1"/>
           </p:cNvSpPr>
@@ -1189,7 +2147,7 @@
         <p:spPr>
           <a:xfrm>
             <a:off x="840240" y="2505240"/>
-            <a:ext cx="5145480" cy="3671640"/>
+            <a:ext cx="5145120" cy="3671280"/>
           </a:xfrm>
           <a:prstGeom prst="rect">
             <a:avLst/>
@@ -1382,7 +2340,7 @@
       </p:sp>
       <p:sp>
         <p:nvSpPr>
-          <p:cNvPr id="66" name="PlaceHolder 4"/>
+          <p:cNvPr id="18" name="PlaceHolder 4"/>
           <p:cNvSpPr>
             <a:spLocks noGrp="1"/>
           </p:cNvSpPr>
@@ -1393,7 +2351,7 @@
         <p:spPr>
           <a:xfrm>
             <a:off x="6172200" y="1681200"/>
-            <a:ext cx="5170680" cy="811080"/>
+            <a:ext cx="5170320" cy="810720"/>
           </a:xfrm>
           <a:prstGeom prst="rect">
             <a:avLst/>
@@ -1445,7 +2403,7 @@
       </p:sp>
       <p:sp>
         <p:nvSpPr>
-          <p:cNvPr id="67" name="PlaceHolder 5"/>
+          <p:cNvPr id="19" name="PlaceHolder 5"/>
           <p:cNvSpPr>
             <a:spLocks noGrp="1"/>
           </p:cNvSpPr>
@@ -1456,7 +2414,7 @@
         <p:spPr>
           <a:xfrm>
             <a:off x="6172200" y="2505240"/>
-            <a:ext cx="5170680" cy="3671640"/>
+            <a:ext cx="5170320" cy="3671280"/>
           </a:xfrm>
           <a:prstGeom prst="rect">
             <a:avLst/>
@@ -1649,18 +2607,18 @@
       </p:sp>
       <p:sp>
         <p:nvSpPr>
-          <p:cNvPr id="68" name="PlaceHolder 6"/>
+          <p:cNvPr id="20" name="PlaceHolder 6"/>
           <p:cNvSpPr>
             <a:spLocks noGrp="1"/>
           </p:cNvSpPr>
           <p:nvPr>
-            <p:ph type="dt" idx="31"/>
+            <p:ph type="dt" idx="7"/>
           </p:nvPr>
         </p:nvSpPr>
         <p:spPr>
           <a:xfrm>
             <a:off x="609480" y="6245280"/>
-            <a:ext cx="2831760" cy="463320"/>
+            <a:ext cx="2831400" cy="462960"/>
           </a:xfrm>
           <a:prstGeom prst="rect">
             <a:avLst/>
@@ -1729,18 +2687,18 @@
       </p:sp>
       <p:sp>
         <p:nvSpPr>
-          <p:cNvPr id="69" name="PlaceHolder 7"/>
+          <p:cNvPr id="21" name="PlaceHolder 7"/>
           <p:cNvSpPr>
             <a:spLocks noGrp="1"/>
           </p:cNvSpPr>
           <p:nvPr>
-            <p:ph type="ftr" idx="32"/>
+            <p:ph type="ftr" idx="8"/>
           </p:nvPr>
         </p:nvSpPr>
         <p:spPr>
           <a:xfrm>
             <a:off x="4165560" y="6245280"/>
-            <a:ext cx="3847680" cy="463320"/>
+            <a:ext cx="3847320" cy="462960"/>
           </a:xfrm>
           <a:prstGeom prst="rect">
             <a:avLst/>
@@ -1809,18 +2767,18 @@
       </p:sp>
       <p:sp>
         <p:nvSpPr>
-          <p:cNvPr id="70" name="PlaceHolder 8"/>
+          <p:cNvPr id="22" name="PlaceHolder 8"/>
           <p:cNvSpPr>
             <a:spLocks noGrp="1"/>
           </p:cNvSpPr>
           <p:nvPr>
-            <p:ph type="sldNum" idx="33"/>
+            <p:ph type="sldNum" idx="9"/>
           </p:nvPr>
         </p:nvSpPr>
         <p:spPr>
           <a:xfrm>
             <a:off x="8737560" y="6245280"/>
-            <a:ext cx="2831760" cy="463320"/>
+            <a:ext cx="2831400" cy="462960"/>
           </a:xfrm>
           <a:prstGeom prst="rect">
             <a:avLst/>
@@ -1854,7 +2812,262 @@
 </p:sldLayout>
 </file>
 
-<file path=ppt/slideLayouts/slideLayout2.xml><?xml version="1.0" encoding="utf-8"?>
+<file path=ppt/slideLayouts/slideLayout4.xml><?xml version="1.0" encoding="utf-8"?>
+<p:sldLayout xmlns:a="http://schemas.openxmlformats.org/drawingml/2006/main" xmlns:p="http://schemas.openxmlformats.org/presentationml/2006/main" xmlns:r="http://schemas.openxmlformats.org/officeDocument/2006/relationships" xmlns:p14="http://schemas.microsoft.com/office/powerpoint/2010/main" xmlns:p15="http://schemas.microsoft.com/office/powerpoint/2012/main" xmlns:mc="http://schemas.openxmlformats.org/markup-compatibility/2006" type="blank" preserve="1">
+  <p:cSld name="Blank">
+    <p:bg>
+      <p:bgPr>
+        <a:solidFill>
+          <a:srgbClr val="ffffff"/>
+        </a:solidFill>
+      </p:bgPr>
+    </p:bg>
+    <p:spTree>
+      <p:nvGrpSpPr>
+        <p:cNvPr id="1" name=""/>
+        <p:cNvGrpSpPr/>
+        <p:nvPr/>
+      </p:nvGrpSpPr>
+      <p:grpSpPr>
+        <a:xfrm>
+          <a:off x="0" y="0"/>
+          <a:ext cx="0" cy="0"/>
+          <a:chOff x="0" y="0"/>
+          <a:chExt cx="0" cy="0"/>
+        </a:xfrm>
+      </p:grpSpPr>
+      <p:pic>
+        <p:nvPicPr>
+          <p:cNvPr id="23" name="Picture 10"/>
+          <p:cNvPicPr/>
+          <p:nvPr/>
+        </p:nvPicPr>
+        <p:blipFill>
+          <a:blip r:embed="rId2"/>
+          <a:stretch/>
+        </p:blipFill>
+        <p:spPr>
+          <a:xfrm>
+            <a:off x="0" y="0"/>
+            <a:ext cx="12178800" cy="6844680"/>
+          </a:xfrm>
+          <a:prstGeom prst="rect">
+            <a:avLst/>
+          </a:prstGeom>
+          <a:noFill/>
+          <a:ln w="9525">
+            <a:noFill/>
+          </a:ln>
+        </p:spPr>
+      </p:pic>
+      <p:sp>
+        <p:nvSpPr>
+          <p:cNvPr id="24" name="PlaceHolder 1"/>
+          <p:cNvSpPr>
+            <a:spLocks noGrp="1"/>
+          </p:cNvSpPr>
+          <p:nvPr>
+            <p:ph type="dt" idx="10"/>
+          </p:nvPr>
+        </p:nvSpPr>
+        <p:spPr>
+          <a:xfrm>
+            <a:off x="609480" y="6245280"/>
+            <a:ext cx="2831400" cy="462960"/>
+          </a:xfrm>
+          <a:prstGeom prst="rect">
+            <a:avLst/>
+          </a:prstGeom>
+          <a:noFill/>
+          <a:ln w="0">
+            <a:noFill/>
+          </a:ln>
+        </p:spPr>
+        <p:txBody>
+          <a:bodyPr numCol="1" spcCol="0" lIns="91440" rIns="91440" tIns="45720" bIns="45720" anchor="t">
+            <a:noAutofit/>
+          </a:bodyPr>
+          <a:lstStyle>
+            <a:lvl1pPr indent="0" defTabSz="914400">
+              <a:lnSpc>
+                <a:spcPct val="100000"/>
+              </a:lnSpc>
+              <a:buNone/>
+              <a:tabLst>
+                <a:tab algn="l" pos="0"/>
+              </a:tabLst>
+              <a:defRPr lang="en-US" sz="1400" b="0" u="none" strike="noStrike">
+                <a:solidFill>
+                  <a:srgbClr val="000000"/>
+                </a:solidFill>
+                <a:effectLst/>
+                <a:uFillTx/>
+                <a:latin typeface="Times New Roman"/>
+                <a:ea typeface="SimSun"/>
+              </a:defRPr>
+            </a:lvl1pPr>
+          </a:lstStyle>
+          <a:p>
+            <a:pPr indent="0" defTabSz="914400">
+              <a:lnSpc>
+                <a:spcPct val="100000"/>
+              </a:lnSpc>
+              <a:buNone/>
+              <a:tabLst>
+                <a:tab algn="l" pos="0"/>
+              </a:tabLst>
+            </a:pPr>
+            <a:r>
+              <a:rPr lang="en-US" sz="1400" b="0" u="none" strike="noStrike">
+                <a:solidFill>
+                  <a:srgbClr val="000000"/>
+                </a:solidFill>
+                <a:effectLst/>
+                <a:uFillTx/>
+                <a:latin typeface="Times New Roman"/>
+                <a:ea typeface="SimSun"/>
+              </a:rPr>
+              <a:t>&lt;date/time&gt;</a:t>
+            </a:r>
+            <a:endParaRPr lang="en-US" sz="1400" b="0" u="none" strike="noStrike">
+              <a:solidFill>
+                <a:srgbClr val="000000"/>
+              </a:solidFill>
+              <a:effectLst/>
+              <a:uFillTx/>
+              <a:latin typeface="Times New Roman"/>
+            </a:endParaRPr>
+          </a:p>
+        </p:txBody>
+      </p:sp>
+      <p:sp>
+        <p:nvSpPr>
+          <p:cNvPr id="25" name="PlaceHolder 2"/>
+          <p:cNvSpPr>
+            <a:spLocks noGrp="1"/>
+          </p:cNvSpPr>
+          <p:nvPr>
+            <p:ph type="ftr" idx="11"/>
+          </p:nvPr>
+        </p:nvSpPr>
+        <p:spPr>
+          <a:xfrm>
+            <a:off x="4165560" y="6245280"/>
+            <a:ext cx="3847320" cy="462960"/>
+          </a:xfrm>
+          <a:prstGeom prst="rect">
+            <a:avLst/>
+          </a:prstGeom>
+          <a:noFill/>
+          <a:ln w="0">
+            <a:noFill/>
+          </a:ln>
+        </p:spPr>
+        <p:txBody>
+          <a:bodyPr numCol="1" spcCol="0" lIns="91440" rIns="91440" tIns="45720" bIns="45720" anchor="t">
+            <a:noAutofit/>
+          </a:bodyPr>
+          <a:lstStyle>
+            <a:lvl1pPr indent="0" algn="ctr" defTabSz="914400">
+              <a:lnSpc>
+                <a:spcPct val="100000"/>
+              </a:lnSpc>
+              <a:buNone/>
+              <a:tabLst>
+                <a:tab algn="l" pos="0"/>
+              </a:tabLst>
+              <a:defRPr lang="en-US" sz="1400" b="0" u="none" strike="noStrike">
+                <a:solidFill>
+                  <a:srgbClr val="000000"/>
+                </a:solidFill>
+                <a:effectLst/>
+                <a:uFillTx/>
+                <a:latin typeface="Times New Roman"/>
+                <a:ea typeface="SimSun"/>
+              </a:defRPr>
+            </a:lvl1pPr>
+          </a:lstStyle>
+          <a:p>
+            <a:pPr indent="0" algn="ctr" defTabSz="914400">
+              <a:lnSpc>
+                <a:spcPct val="100000"/>
+              </a:lnSpc>
+              <a:buNone/>
+              <a:tabLst>
+                <a:tab algn="l" pos="0"/>
+              </a:tabLst>
+            </a:pPr>
+            <a:r>
+              <a:rPr lang="en-US" sz="1400" b="0" u="none" strike="noStrike">
+                <a:solidFill>
+                  <a:srgbClr val="000000"/>
+                </a:solidFill>
+                <a:effectLst/>
+                <a:uFillTx/>
+                <a:latin typeface="Times New Roman"/>
+                <a:ea typeface="SimSun"/>
+              </a:rPr>
+              <a:t>&lt;footer&gt;</a:t>
+            </a:r>
+            <a:endParaRPr lang="en-US" sz="1400" b="0" u="none" strike="noStrike">
+              <a:solidFill>
+                <a:srgbClr val="000000"/>
+              </a:solidFill>
+              <a:effectLst/>
+              <a:uFillTx/>
+              <a:latin typeface="Times New Roman"/>
+            </a:endParaRPr>
+          </a:p>
+        </p:txBody>
+      </p:sp>
+      <p:sp>
+        <p:nvSpPr>
+          <p:cNvPr id="26" name="PlaceHolder 3"/>
+          <p:cNvSpPr>
+            <a:spLocks noGrp="1"/>
+          </p:cNvSpPr>
+          <p:nvPr>
+            <p:ph type="sldNum" idx="12"/>
+          </p:nvPr>
+        </p:nvSpPr>
+        <p:spPr>
+          <a:xfrm>
+            <a:off x="8737560" y="6245280"/>
+            <a:ext cx="2831400" cy="462960"/>
+          </a:xfrm>
+          <a:prstGeom prst="rect">
+            <a:avLst/>
+          </a:prstGeom>
+          <a:noFill/>
+          <a:ln w="0">
+            <a:noFill/>
+          </a:ln>
+        </p:spPr>
+        <p:txBody>
+          <a:bodyPr numCol="1" spcCol="0" lIns="91440" rIns="91440" tIns="45720" bIns="45720" anchor="t">
+            <a:noAutofit/>
+          </a:bodyPr>
+          <a:p>
+            <a:pPr indent="0">
+              <a:buNone/>
+            </a:pPr>
+            <a:endParaRPr lang="en-US" sz="1800" b="0" u="none" strike="noStrike">
+              <a:solidFill>
+                <a:srgbClr val="000000"/>
+              </a:solidFill>
+              <a:effectLst/>
+              <a:uFillTx/>
+              <a:latin typeface="Times New Roman"/>
+            </a:endParaRPr>
+          </a:p>
+        </p:txBody>
+      </p:sp>
+    </p:spTree>
+  </p:cSld>
+</p:sldLayout>
+</file>
+
+<file path=ppt/slideLayouts/slideLayout5.xml><?xml version="1.0" encoding="utf-8"?>
 <p:sldLayout xmlns:a="http://schemas.openxmlformats.org/drawingml/2006/main" xmlns:p="http://schemas.openxmlformats.org/presentationml/2006/main" xmlns:r="http://schemas.openxmlformats.org/officeDocument/2006/relationships" xmlns:p14="http://schemas.microsoft.com/office/powerpoint/2010/main" xmlns:p15="http://schemas.microsoft.com/office/powerpoint/2012/main" xmlns:mc="http://schemas.openxmlformats.org/markup-compatibility/2006" type="vertTitleAndTx" preserve="1">
   <p:cSld name="Vertical Title and Text">
     <p:bg>
@@ -1880,7 +3093,7 @@
       </p:grpSpPr>
       <p:pic>
         <p:nvPicPr>
-          <p:cNvPr id="6" name="Picture 10"/>
+          <p:cNvPr id="27" name="Picture 10"/>
           <p:cNvPicPr/>
           <p:nvPr/>
         </p:nvPicPr>
@@ -1891,7 +3104,7 @@
         <p:spPr>
           <a:xfrm>
             <a:off x="0" y="0"/>
-            <a:ext cx="12179160" cy="6845040"/>
+            <a:ext cx="12178800" cy="6844680"/>
           </a:xfrm>
           <a:prstGeom prst="rect">
             <a:avLst/>
@@ -1904,7 +3117,7 @@
       </p:pic>
       <p:sp>
         <p:nvSpPr>
-          <p:cNvPr id="7" name="PlaceHolder 1"/>
+          <p:cNvPr id="28" name="PlaceHolder 1"/>
           <p:cNvSpPr>
             <a:spLocks noGrp="1"/>
           </p:cNvSpPr>
@@ -1915,7 +3128,7 @@
         <p:spPr>
           <a:xfrm>
             <a:off x="8839080" y="190440"/>
-            <a:ext cx="2730240" cy="5924160"/>
+            <a:ext cx="2729880" cy="5923800"/>
           </a:xfrm>
           <a:prstGeom prst="rect">
             <a:avLst/>
@@ -1964,7 +3177,7 @@
       </p:sp>
       <p:sp>
         <p:nvSpPr>
-          <p:cNvPr id="8" name="PlaceHolder 2"/>
+          <p:cNvPr id="29" name="PlaceHolder 2"/>
           <p:cNvSpPr>
             <a:spLocks noGrp="1"/>
           </p:cNvSpPr>
@@ -1975,7 +3188,7 @@
         <p:spPr>
           <a:xfrm>
             <a:off x="609480" y="190440"/>
-            <a:ext cx="8013600" cy="5924160"/>
+            <a:ext cx="8013240" cy="5923800"/>
           </a:xfrm>
           <a:prstGeom prst="rect">
             <a:avLst/>
@@ -2168,18 +3381,18 @@
       </p:sp>
       <p:sp>
         <p:nvSpPr>
-          <p:cNvPr id="9" name="PlaceHolder 3"/>
+          <p:cNvPr id="30" name="PlaceHolder 3"/>
           <p:cNvSpPr>
             <a:spLocks noGrp="1"/>
           </p:cNvSpPr>
           <p:nvPr>
-            <p:ph type="dt" idx="4"/>
+            <p:ph type="dt" idx="13"/>
           </p:nvPr>
         </p:nvSpPr>
         <p:spPr>
           <a:xfrm>
             <a:off x="609480" y="6245280"/>
-            <a:ext cx="2831760" cy="463320"/>
+            <a:ext cx="2831400" cy="462960"/>
           </a:xfrm>
           <a:prstGeom prst="rect">
             <a:avLst/>
@@ -2248,18 +3461,18 @@
       </p:sp>
       <p:sp>
         <p:nvSpPr>
-          <p:cNvPr id="10" name="PlaceHolder 4"/>
+          <p:cNvPr id="31" name="PlaceHolder 4"/>
           <p:cNvSpPr>
             <a:spLocks noGrp="1"/>
           </p:cNvSpPr>
           <p:nvPr>
-            <p:ph type="ftr" idx="5"/>
+            <p:ph type="ftr" idx="14"/>
           </p:nvPr>
         </p:nvSpPr>
         <p:spPr>
           <a:xfrm>
             <a:off x="4165560" y="6245280"/>
-            <a:ext cx="3847680" cy="463320"/>
+            <a:ext cx="3847320" cy="462960"/>
           </a:xfrm>
           <a:prstGeom prst="rect">
             <a:avLst/>
@@ -2328,18 +3541,18 @@
       </p:sp>
       <p:sp>
         <p:nvSpPr>
-          <p:cNvPr id="11" name="PlaceHolder 5"/>
+          <p:cNvPr id="32" name="PlaceHolder 5"/>
           <p:cNvSpPr>
             <a:spLocks noGrp="1"/>
           </p:cNvSpPr>
           <p:nvPr>
-            <p:ph type="sldNum" idx="6"/>
+            <p:ph type="sldNum" idx="15"/>
           </p:nvPr>
         </p:nvSpPr>
         <p:spPr>
           <a:xfrm>
             <a:off x="8737560" y="6245280"/>
-            <a:ext cx="2831760" cy="463320"/>
+            <a:ext cx="2831400" cy="462960"/>
           </a:xfrm>
           <a:prstGeom prst="rect">
             <a:avLst/>
@@ -2373,7 +3586,7 @@
 </p:sldLayout>
 </file>
 
-<file path=ppt/slideLayouts/slideLayout3.xml><?xml version="1.0" encoding="utf-8"?>
+<file path=ppt/slideLayouts/slideLayout6.xml><?xml version="1.0" encoding="utf-8"?>
 <p:sldLayout xmlns:a="http://schemas.openxmlformats.org/drawingml/2006/main" xmlns:p="http://schemas.openxmlformats.org/presentationml/2006/main" xmlns:r="http://schemas.openxmlformats.org/officeDocument/2006/relationships" xmlns:p14="http://schemas.microsoft.com/office/powerpoint/2010/main" xmlns:p15="http://schemas.microsoft.com/office/powerpoint/2012/main" xmlns:mc="http://schemas.openxmlformats.org/markup-compatibility/2006" type="blank" preserve="1">
   <p:cSld name="Content with Caption">
     <p:bg>
@@ -2399,7 +3612,7 @@
       </p:grpSpPr>
       <p:pic>
         <p:nvPicPr>
-          <p:cNvPr id="12" name="Picture 10"/>
+          <p:cNvPr id="33" name="Picture 10"/>
           <p:cNvPicPr/>
           <p:nvPr/>
         </p:nvPicPr>
@@ -2410,7 +3623,7 @@
         <p:spPr>
           <a:xfrm>
             <a:off x="0" y="0"/>
-            <a:ext cx="12179160" cy="6845040"/>
+            <a:ext cx="12178800" cy="6844680"/>
           </a:xfrm>
           <a:prstGeom prst="rect">
             <a:avLst/>
@@ -2423,7 +3636,7 @@
       </p:pic>
       <p:sp>
         <p:nvSpPr>
-          <p:cNvPr id="13" name="PlaceHolder 1"/>
+          <p:cNvPr id="34" name="PlaceHolder 1"/>
           <p:cNvSpPr>
             <a:spLocks noGrp="1"/>
           </p:cNvSpPr>
@@ -2434,7 +3647,7 @@
         <p:spPr>
           <a:xfrm>
             <a:off x="840240" y="457200"/>
-            <a:ext cx="3919680" cy="1587240"/>
+            <a:ext cx="3919320" cy="1586880"/>
           </a:xfrm>
           <a:prstGeom prst="rect">
             <a:avLst/>
@@ -2468,7 +3681,379 @@
                 <a:latin typeface="Arial"/>
                 <a:ea typeface="SimSun"/>
               </a:rPr>
-              <a:t>Click to edit Master title style</a:t>
+              <a:t>C</a:t>
+            </a:r>
+            <a:r>
+              <a:rPr lang="en-US" sz="3200" b="0" u="none" strike="noStrike">
+                <a:solidFill>
+                  <a:schemeClr val="dk1"/>
+                </a:solidFill>
+                <a:effectLst/>
+                <a:uFillTx/>
+                <a:latin typeface="Arial"/>
+                <a:ea typeface="SimSun"/>
+              </a:rPr>
+              <a:t>l</a:t>
+            </a:r>
+            <a:r>
+              <a:rPr lang="en-US" sz="3200" b="0" u="none" strike="noStrike">
+                <a:solidFill>
+                  <a:schemeClr val="dk1"/>
+                </a:solidFill>
+                <a:effectLst/>
+                <a:uFillTx/>
+                <a:latin typeface="Arial"/>
+                <a:ea typeface="SimSun"/>
+              </a:rPr>
+              <a:t>i</a:t>
+            </a:r>
+            <a:r>
+              <a:rPr lang="en-US" sz="3200" b="0" u="none" strike="noStrike">
+                <a:solidFill>
+                  <a:schemeClr val="dk1"/>
+                </a:solidFill>
+                <a:effectLst/>
+                <a:uFillTx/>
+                <a:latin typeface="Arial"/>
+                <a:ea typeface="SimSun"/>
+              </a:rPr>
+              <a:t>c</a:t>
+            </a:r>
+            <a:r>
+              <a:rPr lang="en-US" sz="3200" b="0" u="none" strike="noStrike">
+                <a:solidFill>
+                  <a:schemeClr val="dk1"/>
+                </a:solidFill>
+                <a:effectLst/>
+                <a:uFillTx/>
+                <a:latin typeface="Arial"/>
+                <a:ea typeface="SimSun"/>
+              </a:rPr>
+              <a:t>k</a:t>
+            </a:r>
+            <a:r>
+              <a:rPr lang="en-US" sz="3200" b="0" u="none" strike="noStrike">
+                <a:solidFill>
+                  <a:schemeClr val="dk1"/>
+                </a:solidFill>
+                <a:effectLst/>
+                <a:uFillTx/>
+                <a:latin typeface="Arial"/>
+                <a:ea typeface="SimSun"/>
+              </a:rPr>
+              <a:t> </a:t>
+            </a:r>
+            <a:r>
+              <a:rPr lang="en-US" sz="3200" b="0" u="none" strike="noStrike">
+                <a:solidFill>
+                  <a:schemeClr val="dk1"/>
+                </a:solidFill>
+                <a:effectLst/>
+                <a:uFillTx/>
+                <a:latin typeface="Arial"/>
+                <a:ea typeface="SimSun"/>
+              </a:rPr>
+              <a:t>t</a:t>
+            </a:r>
+            <a:r>
+              <a:rPr lang="en-US" sz="3200" b="0" u="none" strike="noStrike">
+                <a:solidFill>
+                  <a:schemeClr val="dk1"/>
+                </a:solidFill>
+                <a:effectLst/>
+                <a:uFillTx/>
+                <a:latin typeface="Arial"/>
+                <a:ea typeface="SimSun"/>
+              </a:rPr>
+              <a:t>o</a:t>
+            </a:r>
+            <a:r>
+              <a:rPr lang="en-US" sz="3200" b="0" u="none" strike="noStrike">
+                <a:solidFill>
+                  <a:schemeClr val="dk1"/>
+                </a:solidFill>
+                <a:effectLst/>
+                <a:uFillTx/>
+                <a:latin typeface="Arial"/>
+                <a:ea typeface="SimSun"/>
+              </a:rPr>
+              <a:t> </a:t>
+            </a:r>
+            <a:r>
+              <a:rPr lang="en-US" sz="3200" b="0" u="none" strike="noStrike">
+                <a:solidFill>
+                  <a:schemeClr val="dk1"/>
+                </a:solidFill>
+                <a:effectLst/>
+                <a:uFillTx/>
+                <a:latin typeface="Arial"/>
+                <a:ea typeface="SimSun"/>
+              </a:rPr>
+              <a:t>e</a:t>
+            </a:r>
+            <a:r>
+              <a:rPr lang="en-US" sz="3200" b="0" u="none" strike="noStrike">
+                <a:solidFill>
+                  <a:schemeClr val="dk1"/>
+                </a:solidFill>
+                <a:effectLst/>
+                <a:uFillTx/>
+                <a:latin typeface="Arial"/>
+                <a:ea typeface="SimSun"/>
+              </a:rPr>
+              <a:t>d</a:t>
+            </a:r>
+            <a:r>
+              <a:rPr lang="en-US" sz="3200" b="0" u="none" strike="noStrike">
+                <a:solidFill>
+                  <a:schemeClr val="dk1"/>
+                </a:solidFill>
+                <a:effectLst/>
+                <a:uFillTx/>
+                <a:latin typeface="Arial"/>
+                <a:ea typeface="SimSun"/>
+              </a:rPr>
+              <a:t>i</a:t>
+            </a:r>
+            <a:r>
+              <a:rPr lang="en-US" sz="3200" b="0" u="none" strike="noStrike">
+                <a:solidFill>
+                  <a:schemeClr val="dk1"/>
+                </a:solidFill>
+                <a:effectLst/>
+                <a:uFillTx/>
+                <a:latin typeface="Arial"/>
+                <a:ea typeface="SimSun"/>
+              </a:rPr>
+              <a:t>t</a:t>
+            </a:r>
+            <a:r>
+              <a:rPr lang="en-US" sz="3200" b="0" u="none" strike="noStrike">
+                <a:solidFill>
+                  <a:schemeClr val="dk1"/>
+                </a:solidFill>
+                <a:effectLst/>
+                <a:uFillTx/>
+                <a:latin typeface="Arial"/>
+                <a:ea typeface="SimSun"/>
+              </a:rPr>
+              <a:t> </a:t>
+            </a:r>
+            <a:r>
+              <a:rPr lang="en-US" sz="3200" b="0" u="none" strike="noStrike">
+                <a:solidFill>
+                  <a:schemeClr val="dk1"/>
+                </a:solidFill>
+                <a:effectLst/>
+                <a:uFillTx/>
+                <a:latin typeface="Arial"/>
+                <a:ea typeface="SimSun"/>
+              </a:rPr>
+              <a:t>M</a:t>
+            </a:r>
+            <a:r>
+              <a:rPr lang="en-US" sz="3200" b="0" u="none" strike="noStrike">
+                <a:solidFill>
+                  <a:schemeClr val="dk1"/>
+                </a:solidFill>
+                <a:effectLst/>
+                <a:uFillTx/>
+                <a:latin typeface="Arial"/>
+                <a:ea typeface="SimSun"/>
+              </a:rPr>
+              <a:t>a</a:t>
+            </a:r>
+            <a:r>
+              <a:rPr lang="en-US" sz="3200" b="0" u="none" strike="noStrike">
+                <a:solidFill>
+                  <a:schemeClr val="dk1"/>
+                </a:solidFill>
+                <a:effectLst/>
+                <a:uFillTx/>
+                <a:latin typeface="Arial"/>
+                <a:ea typeface="SimSun"/>
+              </a:rPr>
+              <a:t>s</a:t>
+            </a:r>
+            <a:r>
+              <a:rPr lang="en-US" sz="3200" b="0" u="none" strike="noStrike">
+                <a:solidFill>
+                  <a:schemeClr val="dk1"/>
+                </a:solidFill>
+                <a:effectLst/>
+                <a:uFillTx/>
+                <a:latin typeface="Arial"/>
+                <a:ea typeface="SimSun"/>
+              </a:rPr>
+              <a:t>t</a:t>
+            </a:r>
+            <a:r>
+              <a:rPr lang="en-US" sz="3200" b="0" u="none" strike="noStrike">
+                <a:solidFill>
+                  <a:schemeClr val="dk1"/>
+                </a:solidFill>
+                <a:effectLst/>
+                <a:uFillTx/>
+                <a:latin typeface="Arial"/>
+                <a:ea typeface="SimSun"/>
+              </a:rPr>
+              <a:t>e</a:t>
+            </a:r>
+            <a:r>
+              <a:rPr lang="en-US" sz="3200" b="0" u="none" strike="noStrike">
+                <a:solidFill>
+                  <a:schemeClr val="dk1"/>
+                </a:solidFill>
+                <a:effectLst/>
+                <a:uFillTx/>
+                <a:latin typeface="Arial"/>
+                <a:ea typeface="SimSun"/>
+              </a:rPr>
+              <a:t>r</a:t>
+            </a:r>
+            <a:r>
+              <a:rPr lang="en-US" sz="3200" b="0" u="none" strike="noStrike">
+                <a:solidFill>
+                  <a:schemeClr val="dk1"/>
+                </a:solidFill>
+                <a:effectLst/>
+                <a:uFillTx/>
+                <a:latin typeface="Arial"/>
+                <a:ea typeface="SimSun"/>
+              </a:rPr>
+              <a:t> </a:t>
+            </a:r>
+            <a:r>
+              <a:rPr lang="en-US" sz="3200" b="0" u="none" strike="noStrike">
+                <a:solidFill>
+                  <a:schemeClr val="dk1"/>
+                </a:solidFill>
+                <a:effectLst/>
+                <a:uFillTx/>
+                <a:latin typeface="Arial"/>
+                <a:ea typeface="SimSun"/>
+              </a:rPr>
+              <a:t>t</a:t>
+            </a:r>
+            <a:r>
+              <a:rPr lang="en-US" sz="3200" b="0" u="none" strike="noStrike">
+                <a:solidFill>
+                  <a:schemeClr val="dk1"/>
+                </a:solidFill>
+                <a:effectLst/>
+                <a:uFillTx/>
+                <a:latin typeface="Arial"/>
+                <a:ea typeface="SimSun"/>
+              </a:rPr>
+              <a:t>i</a:t>
+            </a:r>
+            <a:r>
+              <a:rPr lang="en-US" sz="3200" b="0" u="none" strike="noStrike">
+                <a:solidFill>
+                  <a:schemeClr val="dk1"/>
+                </a:solidFill>
+                <a:effectLst/>
+                <a:uFillTx/>
+                <a:latin typeface="Arial"/>
+                <a:ea typeface="SimSun"/>
+              </a:rPr>
+              <a:t>t</a:t>
+            </a:r>
+            <a:r>
+              <a:rPr lang="en-US" sz="3200" b="0" u="none" strike="noStrike">
+                <a:solidFill>
+                  <a:schemeClr val="dk1"/>
+                </a:solidFill>
+                <a:effectLst/>
+                <a:uFillTx/>
+                <a:latin typeface="Arial"/>
+                <a:ea typeface="SimSun"/>
+              </a:rPr>
+              <a:t>l</a:t>
+            </a:r>
+            <a:r>
+              <a:rPr lang="en-US" sz="3200" b="0" u="none" strike="noStrike">
+                <a:solidFill>
+                  <a:schemeClr val="dk1"/>
+                </a:solidFill>
+                <a:effectLst/>
+                <a:uFillTx/>
+                <a:latin typeface="Arial"/>
+                <a:ea typeface="SimSun"/>
+              </a:rPr>
+              <a:t>e</a:t>
+            </a:r>
+            <a:r>
+              <a:rPr lang="en-US" sz="3200" b="0" u="none" strike="noStrike">
+                <a:solidFill>
+                  <a:schemeClr val="dk1"/>
+                </a:solidFill>
+                <a:effectLst/>
+                <a:uFillTx/>
+                <a:latin typeface="Arial"/>
+                <a:ea typeface="SimSun"/>
+              </a:rPr>
+              <a:t> </a:t>
+            </a:r>
+            <a:r>
+              <a:rPr lang="en-US" sz="3200" b="0" u="none" strike="noStrike">
+                <a:solidFill>
+                  <a:schemeClr val="dk1"/>
+                </a:solidFill>
+                <a:effectLst/>
+                <a:uFillTx/>
+                <a:latin typeface="Arial"/>
+                <a:ea typeface="SimSun"/>
+              </a:rPr>
+              <a:t>s</a:t>
+            </a:r>
+            <a:r>
+              <a:rPr lang="en-US" sz="3200" b="0" u="none" strike="noStrike">
+                <a:solidFill>
+                  <a:schemeClr val="dk1"/>
+                </a:solidFill>
+                <a:effectLst/>
+                <a:uFillTx/>
+                <a:latin typeface="Arial"/>
+                <a:ea typeface="SimSun"/>
+              </a:rPr>
+              <a:t>t</a:t>
+            </a:r>
+            <a:r>
+              <a:rPr lang="en-US" sz="3200" b="0" u="none" strike="noStrike">
+                <a:solidFill>
+                  <a:schemeClr val="dk1"/>
+                </a:solidFill>
+                <a:effectLst/>
+                <a:uFillTx/>
+                <a:latin typeface="Arial"/>
+                <a:ea typeface="SimSun"/>
+              </a:rPr>
+              <a:t>y</a:t>
+            </a:r>
+            <a:r>
+              <a:rPr lang="en-US" sz="3200" b="0" u="none" strike="noStrike">
+                <a:solidFill>
+                  <a:schemeClr val="dk1"/>
+                </a:solidFill>
+                <a:effectLst/>
+                <a:uFillTx/>
+                <a:latin typeface="Arial"/>
+                <a:ea typeface="SimSun"/>
+              </a:rPr>
+              <a:t>l</a:t>
+            </a:r>
+            <a:r>
+              <a:rPr lang="en-US" sz="3200" b="0" u="none" strike="noStrike">
+                <a:solidFill>
+                  <a:schemeClr val="dk1"/>
+                </a:solidFill>
+                <a:effectLst/>
+                <a:uFillTx/>
+                <a:latin typeface="Arial"/>
+                <a:ea typeface="SimSun"/>
+              </a:rPr>
+              <a:t>e</a:t>
             </a:r>
             <a:endParaRPr lang="en-US" sz="3200" b="0" u="none" strike="noStrike">
               <a:solidFill>
@@ -2483,7 +4068,7 @@
       </p:sp>
       <p:sp>
         <p:nvSpPr>
-          <p:cNvPr id="14" name="PlaceHolder 2"/>
+          <p:cNvPr id="35" name="PlaceHolder 2"/>
           <p:cNvSpPr>
             <a:spLocks noGrp="1"/>
           </p:cNvSpPr>
@@ -2494,7 +4079,7 @@
         <p:spPr>
           <a:xfrm>
             <a:off x="5183640" y="987480"/>
-            <a:ext cx="6159240" cy="4860720"/>
+            <a:ext cx="6158880" cy="4860360"/>
           </a:xfrm>
           <a:prstGeom prst="rect">
             <a:avLst/>
@@ -2687,7 +4272,7 @@
       </p:sp>
       <p:sp>
         <p:nvSpPr>
-          <p:cNvPr id="15" name="PlaceHolder 3"/>
+          <p:cNvPr id="36" name="PlaceHolder 3"/>
           <p:cNvSpPr>
             <a:spLocks noGrp="1"/>
           </p:cNvSpPr>
@@ -2698,7 +4283,7 @@
         <p:spPr>
           <a:xfrm>
             <a:off x="840240" y="2057400"/>
-            <a:ext cx="3919680" cy="3798720"/>
+            <a:ext cx="3919320" cy="3798360"/>
           </a:xfrm>
           <a:prstGeom prst="rect">
             <a:avLst/>
@@ -2750,18 +4335,18 @@
       </p:sp>
       <p:sp>
         <p:nvSpPr>
-          <p:cNvPr id="16" name="PlaceHolder 4"/>
+          <p:cNvPr id="37" name="PlaceHolder 4"/>
           <p:cNvSpPr>
             <a:spLocks noGrp="1"/>
           </p:cNvSpPr>
           <p:nvPr>
-            <p:ph type="dt" idx="7"/>
+            <p:ph type="dt" idx="16"/>
           </p:nvPr>
         </p:nvSpPr>
         <p:spPr>
           <a:xfrm>
             <a:off x="609480" y="6245280"/>
-            <a:ext cx="2831760" cy="463320"/>
+            <a:ext cx="2831400" cy="462960"/>
           </a:xfrm>
           <a:prstGeom prst="rect">
             <a:avLst/>
@@ -2830,18 +4415,18 @@
       </p:sp>
       <p:sp>
         <p:nvSpPr>
-          <p:cNvPr id="17" name="PlaceHolder 5"/>
+          <p:cNvPr id="38" name="PlaceHolder 5"/>
           <p:cNvSpPr>
             <a:spLocks noGrp="1"/>
           </p:cNvSpPr>
           <p:nvPr>
-            <p:ph type="ftr" idx="8"/>
+            <p:ph type="ftr" idx="17"/>
           </p:nvPr>
         </p:nvSpPr>
         <p:spPr>
           <a:xfrm>
             <a:off x="4165560" y="6245280"/>
-            <a:ext cx="3847680" cy="463320"/>
+            <a:ext cx="3847320" cy="462960"/>
           </a:xfrm>
           <a:prstGeom prst="rect">
             <a:avLst/>
@@ -2910,18 +4495,18 @@
       </p:sp>
       <p:sp>
         <p:nvSpPr>
-          <p:cNvPr id="18" name="PlaceHolder 6"/>
+          <p:cNvPr id="39" name="PlaceHolder 6"/>
           <p:cNvSpPr>
             <a:spLocks noGrp="1"/>
           </p:cNvSpPr>
           <p:nvPr>
-            <p:ph type="sldNum" idx="9"/>
+            <p:ph type="sldNum" idx="18"/>
           </p:nvPr>
         </p:nvSpPr>
         <p:spPr>
           <a:xfrm>
             <a:off x="8737560" y="6245280"/>
-            <a:ext cx="2831760" cy="463320"/>
+            <a:ext cx="2831400" cy="462960"/>
           </a:xfrm>
           <a:prstGeom prst="rect">
             <a:avLst/>
@@ -2955,7 +4540,7 @@
 </p:sldLayout>
 </file>
 
-<file path=ppt/slideLayouts/slideLayout4.xml><?xml version="1.0" encoding="utf-8"?>
+<file path=ppt/slideLayouts/slideLayout7.xml><?xml version="1.0" encoding="utf-8"?>
 <p:sldLayout xmlns:a="http://schemas.openxmlformats.org/drawingml/2006/main" xmlns:p="http://schemas.openxmlformats.org/presentationml/2006/main" xmlns:r="http://schemas.openxmlformats.org/officeDocument/2006/relationships" xmlns:p14="http://schemas.microsoft.com/office/powerpoint/2010/main" xmlns:p15="http://schemas.microsoft.com/office/powerpoint/2012/main" xmlns:mc="http://schemas.openxmlformats.org/markup-compatibility/2006" type="blank" preserve="1">
   <p:cSld name="Picture with Caption">
     <p:bg>
@@ -2981,7 +4566,7 @@
       </p:grpSpPr>
       <p:pic>
         <p:nvPicPr>
-          <p:cNvPr id="19" name="Picture 10"/>
+          <p:cNvPr id="40" name="Picture 10"/>
           <p:cNvPicPr/>
           <p:nvPr/>
         </p:nvPicPr>
@@ -2992,7 +4577,7 @@
         <p:spPr>
           <a:xfrm>
             <a:off x="0" y="0"/>
-            <a:ext cx="12179160" cy="6845040"/>
+            <a:ext cx="12178800" cy="6844680"/>
           </a:xfrm>
           <a:prstGeom prst="rect">
             <a:avLst/>
@@ -3005,7 +4590,7 @@
       </p:pic>
       <p:sp>
         <p:nvSpPr>
-          <p:cNvPr id="20" name="PlaceHolder 1"/>
+          <p:cNvPr id="41" name="PlaceHolder 1"/>
           <p:cNvSpPr>
             <a:spLocks noGrp="1"/>
           </p:cNvSpPr>
@@ -3016,7 +4601,7 @@
         <p:spPr>
           <a:xfrm>
             <a:off x="840240" y="457200"/>
-            <a:ext cx="3919680" cy="1587240"/>
+            <a:ext cx="3919320" cy="1586880"/>
           </a:xfrm>
           <a:prstGeom prst="rect">
             <a:avLst/>
@@ -3065,7 +4650,7 @@
       </p:sp>
       <p:sp>
         <p:nvSpPr>
-          <p:cNvPr id="21" name="PlaceHolder 2"/>
+          <p:cNvPr id="42" name="PlaceHolder 2"/>
           <p:cNvSpPr>
             <a:spLocks noGrp="1"/>
           </p:cNvSpPr>
@@ -3076,7 +4661,7 @@
         <p:spPr>
           <a:xfrm>
             <a:off x="5183640" y="987480"/>
-            <a:ext cx="6159240" cy="4860720"/>
+            <a:ext cx="6158880" cy="4860360"/>
           </a:xfrm>
           <a:prstGeom prst="rect">
             <a:avLst/>
@@ -3339,7 +4924,7 @@
       </p:sp>
       <p:sp>
         <p:nvSpPr>
-          <p:cNvPr id="22" name="PlaceHolder 3"/>
+          <p:cNvPr id="43" name="PlaceHolder 3"/>
           <p:cNvSpPr>
             <a:spLocks noGrp="1"/>
           </p:cNvSpPr>
@@ -3350,7 +4935,7 @@
         <p:spPr>
           <a:xfrm>
             <a:off x="840240" y="2057400"/>
-            <a:ext cx="3919680" cy="3798720"/>
+            <a:ext cx="3919320" cy="3798360"/>
           </a:xfrm>
           <a:prstGeom prst="rect">
             <a:avLst/>
@@ -3402,18 +4987,18 @@
       </p:sp>
       <p:sp>
         <p:nvSpPr>
-          <p:cNvPr id="23" name="PlaceHolder 4"/>
+          <p:cNvPr id="44" name="PlaceHolder 4"/>
           <p:cNvSpPr>
             <a:spLocks noGrp="1"/>
           </p:cNvSpPr>
           <p:nvPr>
-            <p:ph type="dt" idx="10"/>
+            <p:ph type="dt" idx="19"/>
           </p:nvPr>
         </p:nvSpPr>
         <p:spPr>
           <a:xfrm>
             <a:off x="609480" y="6245280"/>
-            <a:ext cx="2831760" cy="463320"/>
+            <a:ext cx="2831400" cy="462960"/>
           </a:xfrm>
           <a:prstGeom prst="rect">
             <a:avLst/>
@@ -3482,18 +5067,18 @@
       </p:sp>
       <p:sp>
         <p:nvSpPr>
-          <p:cNvPr id="24" name="PlaceHolder 5"/>
+          <p:cNvPr id="45" name="PlaceHolder 5"/>
           <p:cNvSpPr>
             <a:spLocks noGrp="1"/>
           </p:cNvSpPr>
           <p:nvPr>
-            <p:ph type="ftr" idx="11"/>
+            <p:ph type="ftr" idx="20"/>
           </p:nvPr>
         </p:nvSpPr>
         <p:spPr>
           <a:xfrm>
             <a:off x="4165560" y="6245280"/>
-            <a:ext cx="3847680" cy="463320"/>
+            <a:ext cx="3847320" cy="462960"/>
           </a:xfrm>
           <a:prstGeom prst="rect">
             <a:avLst/>
@@ -3562,18 +5147,18 @@
       </p:sp>
       <p:sp>
         <p:nvSpPr>
-          <p:cNvPr id="25" name="PlaceHolder 6"/>
+          <p:cNvPr id="46" name="PlaceHolder 6"/>
           <p:cNvSpPr>
             <a:spLocks noGrp="1"/>
           </p:cNvSpPr>
           <p:nvPr>
-            <p:ph type="sldNum" idx="12"/>
+            <p:ph type="sldNum" idx="21"/>
           </p:nvPr>
         </p:nvSpPr>
         <p:spPr>
           <a:xfrm>
             <a:off x="8737560" y="6245280"/>
-            <a:ext cx="2831760" cy="463320"/>
+            <a:ext cx="2831400" cy="462960"/>
           </a:xfrm>
           <a:prstGeom prst="rect">
             <a:avLst/>
@@ -3607,7 +5192,7 @@
 </p:sldLayout>
 </file>
 
-<file path=ppt/slideLayouts/slideLayout5.xml><?xml version="1.0" encoding="utf-8"?>
+<file path=ppt/slideLayouts/slideLayout8.xml><?xml version="1.0" encoding="utf-8"?>
 <p:sldLayout xmlns:a="http://schemas.openxmlformats.org/drawingml/2006/main" xmlns:p="http://schemas.openxmlformats.org/presentationml/2006/main" xmlns:r="http://schemas.openxmlformats.org/officeDocument/2006/relationships" xmlns:p14="http://schemas.microsoft.com/office/powerpoint/2010/main" xmlns:p15="http://schemas.microsoft.com/office/powerpoint/2012/main" xmlns:mc="http://schemas.openxmlformats.org/markup-compatibility/2006" type="title" preserve="1">
   <p:cSld name="Title Slide">
     <p:bg>
@@ -3633,7 +5218,7 @@
       </p:grpSpPr>
       <p:pic>
         <p:nvPicPr>
-          <p:cNvPr id="26" name="Picture 10" hidden="1"/>
+          <p:cNvPr id="47" name="Picture 10" hidden="1"/>
           <p:cNvPicPr/>
           <p:nvPr/>
         </p:nvPicPr>
@@ -3644,7 +5229,7 @@
         <p:spPr>
           <a:xfrm>
             <a:off x="0" y="0"/>
-            <a:ext cx="12179160" cy="6845040"/>
+            <a:ext cx="12178800" cy="6844680"/>
           </a:xfrm>
           <a:prstGeom prst="rect">
             <a:avLst/>
@@ -3657,7 +5242,7 @@
       </p:pic>
       <p:pic>
         <p:nvPicPr>
-          <p:cNvPr id="27" name="Picture 3"/>
+          <p:cNvPr id="48" name="Picture 3"/>
           <p:cNvPicPr/>
           <p:nvPr/>
         </p:nvPicPr>
@@ -3668,7 +5253,7 @@
         <p:spPr>
           <a:xfrm>
             <a:off x="0" y="0"/>
-            <a:ext cx="12179160" cy="6845040"/>
+            <a:ext cx="12178800" cy="6844680"/>
           </a:xfrm>
           <a:prstGeom prst="rect">
             <a:avLst/>
@@ -3681,7 +5266,7 @@
       </p:pic>
       <p:sp>
         <p:nvSpPr>
-          <p:cNvPr id="28" name="PlaceHolder 1"/>
+          <p:cNvPr id="49" name="PlaceHolder 1"/>
           <p:cNvSpPr>
             <a:spLocks noGrp="1"/>
           </p:cNvSpPr>
@@ -3692,7 +5277,7 @@
         <p:spPr>
           <a:xfrm>
             <a:off x="624240" y="3718080"/>
-            <a:ext cx="10930320" cy="1069560"/>
+            <a:ext cx="10929960" cy="1069200"/>
           </a:xfrm>
           <a:prstGeom prst="rect">
             <a:avLst/>
@@ -3741,18 +5326,18 @@
       </p:sp>
       <p:sp>
         <p:nvSpPr>
-          <p:cNvPr id="29" name="PlaceHolder 2"/>
+          <p:cNvPr id="50" name="PlaceHolder 2"/>
           <p:cNvSpPr>
             <a:spLocks noGrp="1"/>
           </p:cNvSpPr>
           <p:nvPr>
-            <p:ph type="dt" idx="13"/>
+            <p:ph type="dt" idx="22"/>
           </p:nvPr>
         </p:nvSpPr>
         <p:spPr>
           <a:xfrm>
             <a:off x="609480" y="6245280"/>
-            <a:ext cx="2831760" cy="463320"/>
+            <a:ext cx="2831400" cy="462960"/>
           </a:xfrm>
           <a:prstGeom prst="rect">
             <a:avLst/>
@@ -3821,18 +5406,18 @@
       </p:sp>
       <p:sp>
         <p:nvSpPr>
-          <p:cNvPr id="30" name="PlaceHolder 3"/>
+          <p:cNvPr id="51" name="PlaceHolder 3"/>
           <p:cNvSpPr>
             <a:spLocks noGrp="1"/>
           </p:cNvSpPr>
           <p:nvPr>
-            <p:ph type="ftr" idx="14"/>
+            <p:ph type="ftr" idx="23"/>
           </p:nvPr>
         </p:nvSpPr>
         <p:spPr>
           <a:xfrm>
             <a:off x="4165560" y="6245280"/>
-            <a:ext cx="3847680" cy="463320"/>
+            <a:ext cx="3847320" cy="462960"/>
           </a:xfrm>
           <a:prstGeom prst="rect">
             <a:avLst/>
@@ -3901,18 +5486,18 @@
       </p:sp>
       <p:sp>
         <p:nvSpPr>
-          <p:cNvPr id="31" name="PlaceHolder 4"/>
+          <p:cNvPr id="52" name="PlaceHolder 4"/>
           <p:cNvSpPr>
             <a:spLocks noGrp="1"/>
           </p:cNvSpPr>
           <p:nvPr>
-            <p:ph type="sldNum" idx="15"/>
+            <p:ph type="sldNum" idx="24"/>
           </p:nvPr>
         </p:nvSpPr>
         <p:spPr>
           <a:xfrm>
             <a:off x="8737560" y="6245280"/>
-            <a:ext cx="2831760" cy="463320"/>
+            <a:ext cx="2831400" cy="462960"/>
           </a:xfrm>
           <a:prstGeom prst="rect">
             <a:avLst/>
@@ -3946,7 +5531,7 @@
 </p:sldLayout>
 </file>
 
-<file path=ppt/slideLayouts/slideLayout6.xml><?xml version="1.0" encoding="utf-8"?>
+<file path=ppt/slideLayouts/slideLayout9.xml><?xml version="1.0" encoding="utf-8"?>
 <p:sldLayout xmlns:a="http://schemas.openxmlformats.org/drawingml/2006/main" xmlns:p="http://schemas.openxmlformats.org/presentationml/2006/main" xmlns:r="http://schemas.openxmlformats.org/officeDocument/2006/relationships" xmlns:p14="http://schemas.microsoft.com/office/powerpoint/2010/main" xmlns:p15="http://schemas.microsoft.com/office/powerpoint/2012/main" xmlns:mc="http://schemas.openxmlformats.org/markup-compatibility/2006" type="vertTx" preserve="1">
   <p:cSld name="Title and Vertical Text">
     <p:bg>
@@ -3972,7 +5557,7 @@
       </p:grpSpPr>
       <p:pic>
         <p:nvPicPr>
-          <p:cNvPr id="32" name="Picture 10"/>
+          <p:cNvPr id="53" name="Picture 10"/>
           <p:cNvPicPr/>
           <p:nvPr/>
         </p:nvPicPr>
@@ -3983,7 +5568,7 @@
         <p:spPr>
           <a:xfrm>
             <a:off x="0" y="0"/>
-            <a:ext cx="12179160" cy="6845040"/>
+            <a:ext cx="12178800" cy="6844680"/>
           </a:xfrm>
           <a:prstGeom prst="rect">
             <a:avLst/>
@@ -3996,7 +5581,7 @@
       </p:pic>
       <p:sp>
         <p:nvSpPr>
-          <p:cNvPr id="33" name="PlaceHolder 1"/>
+          <p:cNvPr id="54" name="PlaceHolder 1"/>
           <p:cNvSpPr>
             <a:spLocks noGrp="1"/>
           </p:cNvSpPr>
@@ -4007,7 +5592,7 @@
         <p:spPr>
           <a:xfrm>
             <a:off x="609480" y="190440"/>
-            <a:ext cx="10959840" cy="569520"/>
+            <a:ext cx="10959480" cy="569160"/>
           </a:xfrm>
           <a:prstGeom prst="rect">
             <a:avLst/>
@@ -4041,7 +5626,379 @@
                 <a:latin typeface="Arial"/>
                 <a:ea typeface="SimSun"/>
               </a:rPr>
-              <a:t>Click to edit Master title style</a:t>
+              <a:t>C</a:t>
+            </a:r>
+            <a:r>
+              <a:rPr lang="en-US" sz="3600" b="0" u="none" strike="noStrike">
+                <a:solidFill>
+                  <a:schemeClr val="dk1"/>
+                </a:solidFill>
+                <a:effectLst/>
+                <a:uFillTx/>
+                <a:latin typeface="Arial"/>
+                <a:ea typeface="SimSun"/>
+              </a:rPr>
+              <a:t>l</a:t>
+            </a:r>
+            <a:r>
+              <a:rPr lang="en-US" sz="3600" b="0" u="none" strike="noStrike">
+                <a:solidFill>
+                  <a:schemeClr val="dk1"/>
+                </a:solidFill>
+                <a:effectLst/>
+                <a:uFillTx/>
+                <a:latin typeface="Arial"/>
+                <a:ea typeface="SimSun"/>
+              </a:rPr>
+              <a:t>i</a:t>
+            </a:r>
+            <a:r>
+              <a:rPr lang="en-US" sz="3600" b="0" u="none" strike="noStrike">
+                <a:solidFill>
+                  <a:schemeClr val="dk1"/>
+                </a:solidFill>
+                <a:effectLst/>
+                <a:uFillTx/>
+                <a:latin typeface="Arial"/>
+                <a:ea typeface="SimSun"/>
+              </a:rPr>
+              <a:t>c</a:t>
+            </a:r>
+            <a:r>
+              <a:rPr lang="en-US" sz="3600" b="0" u="none" strike="noStrike">
+                <a:solidFill>
+                  <a:schemeClr val="dk1"/>
+                </a:solidFill>
+                <a:effectLst/>
+                <a:uFillTx/>
+                <a:latin typeface="Arial"/>
+                <a:ea typeface="SimSun"/>
+              </a:rPr>
+              <a:t>k</a:t>
+            </a:r>
+            <a:r>
+              <a:rPr lang="en-US" sz="3600" b="0" u="none" strike="noStrike">
+                <a:solidFill>
+                  <a:schemeClr val="dk1"/>
+                </a:solidFill>
+                <a:effectLst/>
+                <a:uFillTx/>
+                <a:latin typeface="Arial"/>
+                <a:ea typeface="SimSun"/>
+              </a:rPr>
+              <a:t> </a:t>
+            </a:r>
+            <a:r>
+              <a:rPr lang="en-US" sz="3600" b="0" u="none" strike="noStrike">
+                <a:solidFill>
+                  <a:schemeClr val="dk1"/>
+                </a:solidFill>
+                <a:effectLst/>
+                <a:uFillTx/>
+                <a:latin typeface="Arial"/>
+                <a:ea typeface="SimSun"/>
+              </a:rPr>
+              <a:t>t</a:t>
+            </a:r>
+            <a:r>
+              <a:rPr lang="en-US" sz="3600" b="0" u="none" strike="noStrike">
+                <a:solidFill>
+                  <a:schemeClr val="dk1"/>
+                </a:solidFill>
+                <a:effectLst/>
+                <a:uFillTx/>
+                <a:latin typeface="Arial"/>
+                <a:ea typeface="SimSun"/>
+              </a:rPr>
+              <a:t>o</a:t>
+            </a:r>
+            <a:r>
+              <a:rPr lang="en-US" sz="3600" b="0" u="none" strike="noStrike">
+                <a:solidFill>
+                  <a:schemeClr val="dk1"/>
+                </a:solidFill>
+                <a:effectLst/>
+                <a:uFillTx/>
+                <a:latin typeface="Arial"/>
+                <a:ea typeface="SimSun"/>
+              </a:rPr>
+              <a:t> </a:t>
+            </a:r>
+            <a:r>
+              <a:rPr lang="en-US" sz="3600" b="0" u="none" strike="noStrike">
+                <a:solidFill>
+                  <a:schemeClr val="dk1"/>
+                </a:solidFill>
+                <a:effectLst/>
+                <a:uFillTx/>
+                <a:latin typeface="Arial"/>
+                <a:ea typeface="SimSun"/>
+              </a:rPr>
+              <a:t>e</a:t>
+            </a:r>
+            <a:r>
+              <a:rPr lang="en-US" sz="3600" b="0" u="none" strike="noStrike">
+                <a:solidFill>
+                  <a:schemeClr val="dk1"/>
+                </a:solidFill>
+                <a:effectLst/>
+                <a:uFillTx/>
+                <a:latin typeface="Arial"/>
+                <a:ea typeface="SimSun"/>
+              </a:rPr>
+              <a:t>d</a:t>
+            </a:r>
+            <a:r>
+              <a:rPr lang="en-US" sz="3600" b="0" u="none" strike="noStrike">
+                <a:solidFill>
+                  <a:schemeClr val="dk1"/>
+                </a:solidFill>
+                <a:effectLst/>
+                <a:uFillTx/>
+                <a:latin typeface="Arial"/>
+                <a:ea typeface="SimSun"/>
+              </a:rPr>
+              <a:t>i</a:t>
+            </a:r>
+            <a:r>
+              <a:rPr lang="en-US" sz="3600" b="0" u="none" strike="noStrike">
+                <a:solidFill>
+                  <a:schemeClr val="dk1"/>
+                </a:solidFill>
+                <a:effectLst/>
+                <a:uFillTx/>
+                <a:latin typeface="Arial"/>
+                <a:ea typeface="SimSun"/>
+              </a:rPr>
+              <a:t>t</a:t>
+            </a:r>
+            <a:r>
+              <a:rPr lang="en-US" sz="3600" b="0" u="none" strike="noStrike">
+                <a:solidFill>
+                  <a:schemeClr val="dk1"/>
+                </a:solidFill>
+                <a:effectLst/>
+                <a:uFillTx/>
+                <a:latin typeface="Arial"/>
+                <a:ea typeface="SimSun"/>
+              </a:rPr>
+              <a:t> </a:t>
+            </a:r>
+            <a:r>
+              <a:rPr lang="en-US" sz="3600" b="0" u="none" strike="noStrike">
+                <a:solidFill>
+                  <a:schemeClr val="dk1"/>
+                </a:solidFill>
+                <a:effectLst/>
+                <a:uFillTx/>
+                <a:latin typeface="Arial"/>
+                <a:ea typeface="SimSun"/>
+              </a:rPr>
+              <a:t>M</a:t>
+            </a:r>
+            <a:r>
+              <a:rPr lang="en-US" sz="3600" b="0" u="none" strike="noStrike">
+                <a:solidFill>
+                  <a:schemeClr val="dk1"/>
+                </a:solidFill>
+                <a:effectLst/>
+                <a:uFillTx/>
+                <a:latin typeface="Arial"/>
+                <a:ea typeface="SimSun"/>
+              </a:rPr>
+              <a:t>a</a:t>
+            </a:r>
+            <a:r>
+              <a:rPr lang="en-US" sz="3600" b="0" u="none" strike="noStrike">
+                <a:solidFill>
+                  <a:schemeClr val="dk1"/>
+                </a:solidFill>
+                <a:effectLst/>
+                <a:uFillTx/>
+                <a:latin typeface="Arial"/>
+                <a:ea typeface="SimSun"/>
+              </a:rPr>
+              <a:t>s</a:t>
+            </a:r>
+            <a:r>
+              <a:rPr lang="en-US" sz="3600" b="0" u="none" strike="noStrike">
+                <a:solidFill>
+                  <a:schemeClr val="dk1"/>
+                </a:solidFill>
+                <a:effectLst/>
+                <a:uFillTx/>
+                <a:latin typeface="Arial"/>
+                <a:ea typeface="SimSun"/>
+              </a:rPr>
+              <a:t>t</a:t>
+            </a:r>
+            <a:r>
+              <a:rPr lang="en-US" sz="3600" b="0" u="none" strike="noStrike">
+                <a:solidFill>
+                  <a:schemeClr val="dk1"/>
+                </a:solidFill>
+                <a:effectLst/>
+                <a:uFillTx/>
+                <a:latin typeface="Arial"/>
+                <a:ea typeface="SimSun"/>
+              </a:rPr>
+              <a:t>e</a:t>
+            </a:r>
+            <a:r>
+              <a:rPr lang="en-US" sz="3600" b="0" u="none" strike="noStrike">
+                <a:solidFill>
+                  <a:schemeClr val="dk1"/>
+                </a:solidFill>
+                <a:effectLst/>
+                <a:uFillTx/>
+                <a:latin typeface="Arial"/>
+                <a:ea typeface="SimSun"/>
+              </a:rPr>
+              <a:t>r</a:t>
+            </a:r>
+            <a:r>
+              <a:rPr lang="en-US" sz="3600" b="0" u="none" strike="noStrike">
+                <a:solidFill>
+                  <a:schemeClr val="dk1"/>
+                </a:solidFill>
+                <a:effectLst/>
+                <a:uFillTx/>
+                <a:latin typeface="Arial"/>
+                <a:ea typeface="SimSun"/>
+              </a:rPr>
+              <a:t> </a:t>
+            </a:r>
+            <a:r>
+              <a:rPr lang="en-US" sz="3600" b="0" u="none" strike="noStrike">
+                <a:solidFill>
+                  <a:schemeClr val="dk1"/>
+                </a:solidFill>
+                <a:effectLst/>
+                <a:uFillTx/>
+                <a:latin typeface="Arial"/>
+                <a:ea typeface="SimSun"/>
+              </a:rPr>
+              <a:t>t</a:t>
+            </a:r>
+            <a:r>
+              <a:rPr lang="en-US" sz="3600" b="0" u="none" strike="noStrike">
+                <a:solidFill>
+                  <a:schemeClr val="dk1"/>
+                </a:solidFill>
+                <a:effectLst/>
+                <a:uFillTx/>
+                <a:latin typeface="Arial"/>
+                <a:ea typeface="SimSun"/>
+              </a:rPr>
+              <a:t>i</a:t>
+            </a:r>
+            <a:r>
+              <a:rPr lang="en-US" sz="3600" b="0" u="none" strike="noStrike">
+                <a:solidFill>
+                  <a:schemeClr val="dk1"/>
+                </a:solidFill>
+                <a:effectLst/>
+                <a:uFillTx/>
+                <a:latin typeface="Arial"/>
+                <a:ea typeface="SimSun"/>
+              </a:rPr>
+              <a:t>t</a:t>
+            </a:r>
+            <a:r>
+              <a:rPr lang="en-US" sz="3600" b="0" u="none" strike="noStrike">
+                <a:solidFill>
+                  <a:schemeClr val="dk1"/>
+                </a:solidFill>
+                <a:effectLst/>
+                <a:uFillTx/>
+                <a:latin typeface="Arial"/>
+                <a:ea typeface="SimSun"/>
+              </a:rPr>
+              <a:t>l</a:t>
+            </a:r>
+            <a:r>
+              <a:rPr lang="en-US" sz="3600" b="0" u="none" strike="noStrike">
+                <a:solidFill>
+                  <a:schemeClr val="dk1"/>
+                </a:solidFill>
+                <a:effectLst/>
+                <a:uFillTx/>
+                <a:latin typeface="Arial"/>
+                <a:ea typeface="SimSun"/>
+              </a:rPr>
+              <a:t>e</a:t>
+            </a:r>
+            <a:r>
+              <a:rPr lang="en-US" sz="3600" b="0" u="none" strike="noStrike">
+                <a:solidFill>
+                  <a:schemeClr val="dk1"/>
+                </a:solidFill>
+                <a:effectLst/>
+                <a:uFillTx/>
+                <a:latin typeface="Arial"/>
+                <a:ea typeface="SimSun"/>
+              </a:rPr>
+              <a:t> </a:t>
+            </a:r>
+            <a:r>
+              <a:rPr lang="en-US" sz="3600" b="0" u="none" strike="noStrike">
+                <a:solidFill>
+                  <a:schemeClr val="dk1"/>
+                </a:solidFill>
+                <a:effectLst/>
+                <a:uFillTx/>
+                <a:latin typeface="Arial"/>
+                <a:ea typeface="SimSun"/>
+              </a:rPr>
+              <a:t>s</a:t>
+            </a:r>
+            <a:r>
+              <a:rPr lang="en-US" sz="3600" b="0" u="none" strike="noStrike">
+                <a:solidFill>
+                  <a:schemeClr val="dk1"/>
+                </a:solidFill>
+                <a:effectLst/>
+                <a:uFillTx/>
+                <a:latin typeface="Arial"/>
+                <a:ea typeface="SimSun"/>
+              </a:rPr>
+              <a:t>t</a:t>
+            </a:r>
+            <a:r>
+              <a:rPr lang="en-US" sz="3600" b="0" u="none" strike="noStrike">
+                <a:solidFill>
+                  <a:schemeClr val="dk1"/>
+                </a:solidFill>
+                <a:effectLst/>
+                <a:uFillTx/>
+                <a:latin typeface="Arial"/>
+                <a:ea typeface="SimSun"/>
+              </a:rPr>
+              <a:t>y</a:t>
+            </a:r>
+            <a:r>
+              <a:rPr lang="en-US" sz="3600" b="0" u="none" strike="noStrike">
+                <a:solidFill>
+                  <a:schemeClr val="dk1"/>
+                </a:solidFill>
+                <a:effectLst/>
+                <a:uFillTx/>
+                <a:latin typeface="Arial"/>
+                <a:ea typeface="SimSun"/>
+              </a:rPr>
+              <a:t>l</a:t>
+            </a:r>
+            <a:r>
+              <a:rPr lang="en-US" sz="3600" b="0" u="none" strike="noStrike">
+                <a:solidFill>
+                  <a:schemeClr val="dk1"/>
+                </a:solidFill>
+                <a:effectLst/>
+                <a:uFillTx/>
+                <a:latin typeface="Arial"/>
+                <a:ea typeface="SimSun"/>
+              </a:rPr>
+              <a:t>e</a:t>
             </a:r>
             <a:endParaRPr lang="en-US" sz="3600" b="0" u="none" strike="noStrike">
               <a:solidFill>
@@ -4056,7 +6013,7 @@
       </p:sp>
       <p:sp>
         <p:nvSpPr>
-          <p:cNvPr id="34" name="PlaceHolder 2"/>
+          <p:cNvPr id="55" name="PlaceHolder 2"/>
           <p:cNvSpPr>
             <a:spLocks noGrp="1"/>
           </p:cNvSpPr>
@@ -4067,7 +6024,7 @@
         <p:spPr>
           <a:xfrm>
             <a:off x="609480" y="1174680"/>
-            <a:ext cx="10959840" cy="4939920"/>
+            <a:ext cx="10959480" cy="4939560"/>
           </a:xfrm>
           <a:prstGeom prst="rect">
             <a:avLst/>
@@ -4260,1219 +6217,7 @@
       </p:sp>
       <p:sp>
         <p:nvSpPr>
-          <p:cNvPr id="35" name="PlaceHolder 3"/>
-          <p:cNvSpPr>
-            <a:spLocks noGrp="1"/>
-          </p:cNvSpPr>
-          <p:nvPr>
-            <p:ph type="dt" idx="16"/>
-          </p:nvPr>
-        </p:nvSpPr>
-        <p:spPr>
-          <a:xfrm>
-            <a:off x="609480" y="6245280"/>
-            <a:ext cx="2831760" cy="463320"/>
-          </a:xfrm>
-          <a:prstGeom prst="rect">
-            <a:avLst/>
-          </a:prstGeom>
-          <a:noFill/>
-          <a:ln w="0">
-            <a:noFill/>
-          </a:ln>
-        </p:spPr>
-        <p:txBody>
-          <a:bodyPr numCol="1" spcCol="0" lIns="91440" rIns="91440" tIns="45720" bIns="45720" anchor="t">
-            <a:noAutofit/>
-          </a:bodyPr>
-          <a:lstStyle>
-            <a:lvl1pPr indent="0" defTabSz="914400">
-              <a:lnSpc>
-                <a:spcPct val="100000"/>
-              </a:lnSpc>
-              <a:buNone/>
-              <a:tabLst>
-                <a:tab algn="l" pos="0"/>
-              </a:tabLst>
-              <a:defRPr lang="en-US" sz="1400" b="0" u="none" strike="noStrike">
-                <a:solidFill>
-                  <a:srgbClr val="000000"/>
-                </a:solidFill>
-                <a:effectLst/>
-                <a:uFillTx/>
-                <a:latin typeface="Times New Roman"/>
-                <a:ea typeface="SimSun"/>
-              </a:defRPr>
-            </a:lvl1pPr>
-          </a:lstStyle>
-          <a:p>
-            <a:pPr indent="0" defTabSz="914400">
-              <a:lnSpc>
-                <a:spcPct val="100000"/>
-              </a:lnSpc>
-              <a:buNone/>
-              <a:tabLst>
-                <a:tab algn="l" pos="0"/>
-              </a:tabLst>
-            </a:pPr>
-            <a:r>
-              <a:rPr lang="en-US" sz="1400" b="0" u="none" strike="noStrike">
-                <a:solidFill>
-                  <a:srgbClr val="000000"/>
-                </a:solidFill>
-                <a:effectLst/>
-                <a:uFillTx/>
-                <a:latin typeface="Times New Roman"/>
-                <a:ea typeface="SimSun"/>
-              </a:rPr>
-              <a:t>&lt;date/time&gt;</a:t>
-            </a:r>
-            <a:endParaRPr lang="en-US" sz="1400" b="0" u="none" strike="noStrike">
-              <a:solidFill>
-                <a:srgbClr val="000000"/>
-              </a:solidFill>
-              <a:effectLst/>
-              <a:uFillTx/>
-              <a:latin typeface="Times New Roman"/>
-            </a:endParaRPr>
-          </a:p>
-        </p:txBody>
-      </p:sp>
-      <p:sp>
-        <p:nvSpPr>
-          <p:cNvPr id="36" name="PlaceHolder 4"/>
-          <p:cNvSpPr>
-            <a:spLocks noGrp="1"/>
-          </p:cNvSpPr>
-          <p:nvPr>
-            <p:ph type="ftr" idx="17"/>
-          </p:nvPr>
-        </p:nvSpPr>
-        <p:spPr>
-          <a:xfrm>
-            <a:off x="4165560" y="6245280"/>
-            <a:ext cx="3847680" cy="463320"/>
-          </a:xfrm>
-          <a:prstGeom prst="rect">
-            <a:avLst/>
-          </a:prstGeom>
-          <a:noFill/>
-          <a:ln w="0">
-            <a:noFill/>
-          </a:ln>
-        </p:spPr>
-        <p:txBody>
-          <a:bodyPr numCol="1" spcCol="0" lIns="91440" rIns="91440" tIns="45720" bIns="45720" anchor="t">
-            <a:noAutofit/>
-          </a:bodyPr>
-          <a:lstStyle>
-            <a:lvl1pPr indent="0" algn="ctr" defTabSz="914400">
-              <a:lnSpc>
-                <a:spcPct val="100000"/>
-              </a:lnSpc>
-              <a:buNone/>
-              <a:tabLst>
-                <a:tab algn="l" pos="0"/>
-              </a:tabLst>
-              <a:defRPr lang="en-US" sz="1400" b="0" u="none" strike="noStrike">
-                <a:solidFill>
-                  <a:srgbClr val="000000"/>
-                </a:solidFill>
-                <a:effectLst/>
-                <a:uFillTx/>
-                <a:latin typeface="Times New Roman"/>
-                <a:ea typeface="SimSun"/>
-              </a:defRPr>
-            </a:lvl1pPr>
-          </a:lstStyle>
-          <a:p>
-            <a:pPr indent="0" algn="ctr" defTabSz="914400">
-              <a:lnSpc>
-                <a:spcPct val="100000"/>
-              </a:lnSpc>
-              <a:buNone/>
-              <a:tabLst>
-                <a:tab algn="l" pos="0"/>
-              </a:tabLst>
-            </a:pPr>
-            <a:r>
-              <a:rPr lang="en-US" sz="1400" b="0" u="none" strike="noStrike">
-                <a:solidFill>
-                  <a:srgbClr val="000000"/>
-                </a:solidFill>
-                <a:effectLst/>
-                <a:uFillTx/>
-                <a:latin typeface="Times New Roman"/>
-                <a:ea typeface="SimSun"/>
-              </a:rPr>
-              <a:t>&lt;footer&gt;</a:t>
-            </a:r>
-            <a:endParaRPr lang="en-US" sz="1400" b="0" u="none" strike="noStrike">
-              <a:solidFill>
-                <a:srgbClr val="000000"/>
-              </a:solidFill>
-              <a:effectLst/>
-              <a:uFillTx/>
-              <a:latin typeface="Times New Roman"/>
-            </a:endParaRPr>
-          </a:p>
-        </p:txBody>
-      </p:sp>
-      <p:sp>
-        <p:nvSpPr>
-          <p:cNvPr id="37" name="PlaceHolder 5"/>
-          <p:cNvSpPr>
-            <a:spLocks noGrp="1"/>
-          </p:cNvSpPr>
-          <p:nvPr>
-            <p:ph type="sldNum" idx="18"/>
-          </p:nvPr>
-        </p:nvSpPr>
-        <p:spPr>
-          <a:xfrm>
-            <a:off x="8737560" y="6245280"/>
-            <a:ext cx="2831760" cy="463320"/>
-          </a:xfrm>
-          <a:prstGeom prst="rect">
-            <a:avLst/>
-          </a:prstGeom>
-          <a:noFill/>
-          <a:ln w="0">
-            <a:noFill/>
-          </a:ln>
-        </p:spPr>
-        <p:txBody>
-          <a:bodyPr numCol="1" spcCol="0" lIns="91440" rIns="91440" tIns="45720" bIns="45720" anchor="t">
-            <a:noAutofit/>
-          </a:bodyPr>
-          <a:p>
-            <a:pPr indent="0">
-              <a:buNone/>
-            </a:pPr>
-            <a:endParaRPr lang="en-US" sz="1800" b="0" u="none" strike="noStrike">
-              <a:solidFill>
-                <a:srgbClr val="000000"/>
-              </a:solidFill>
-              <a:effectLst/>
-              <a:uFillTx/>
-              <a:latin typeface="Times New Roman"/>
-            </a:endParaRPr>
-          </a:p>
-        </p:txBody>
-      </p:sp>
-    </p:spTree>
-  </p:cSld>
-</p:sldLayout>
-</file>
-
-<file path=ppt/slideLayouts/slideLayout7.xml><?xml version="1.0" encoding="utf-8"?>
-<p:sldLayout xmlns:a="http://schemas.openxmlformats.org/drawingml/2006/main" xmlns:p="http://schemas.openxmlformats.org/presentationml/2006/main" xmlns:r="http://schemas.openxmlformats.org/officeDocument/2006/relationships" xmlns:p14="http://schemas.microsoft.com/office/powerpoint/2010/main" xmlns:p15="http://schemas.microsoft.com/office/powerpoint/2012/main" xmlns:mc="http://schemas.openxmlformats.org/markup-compatibility/2006" type="obj" preserve="1">
-  <p:cSld name="Title and Content">
-    <p:bg>
-      <p:bgPr>
-        <a:solidFill>
-          <a:srgbClr val="ffffff"/>
-        </a:solidFill>
-      </p:bgPr>
-    </p:bg>
-    <p:spTree>
-      <p:nvGrpSpPr>
-        <p:cNvPr id="1" name=""/>
-        <p:cNvGrpSpPr/>
-        <p:nvPr/>
-      </p:nvGrpSpPr>
-      <p:grpSpPr>
-        <a:xfrm>
-          <a:off x="0" y="0"/>
-          <a:ext cx="0" cy="0"/>
-          <a:chOff x="0" y="0"/>
-          <a:chExt cx="0" cy="0"/>
-        </a:xfrm>
-      </p:grpSpPr>
-      <p:pic>
-        <p:nvPicPr>
-          <p:cNvPr id="38" name="Picture 10"/>
-          <p:cNvPicPr/>
-          <p:nvPr/>
-        </p:nvPicPr>
-        <p:blipFill>
-          <a:blip r:embed="rId2"/>
-          <a:stretch/>
-        </p:blipFill>
-        <p:spPr>
-          <a:xfrm>
-            <a:off x="0" y="0"/>
-            <a:ext cx="12179160" cy="6845040"/>
-          </a:xfrm>
-          <a:prstGeom prst="rect">
-            <a:avLst/>
-          </a:prstGeom>
-          <a:noFill/>
-          <a:ln w="9525">
-            <a:noFill/>
-          </a:ln>
-        </p:spPr>
-      </p:pic>
-      <p:sp>
-        <p:nvSpPr>
-          <p:cNvPr id="39" name="PlaceHolder 1"/>
-          <p:cNvSpPr>
-            <a:spLocks noGrp="1"/>
-          </p:cNvSpPr>
-          <p:nvPr>
-            <p:ph type="title"/>
-          </p:nvPr>
-        </p:nvSpPr>
-        <p:spPr>
-          <a:xfrm>
-            <a:off x="609480" y="190440"/>
-            <a:ext cx="10959840" cy="569520"/>
-          </a:xfrm>
-          <a:prstGeom prst="rect">
-            <a:avLst/>
-          </a:prstGeom>
-          <a:noFill/>
-          <a:ln w="9360">
-            <a:noFill/>
-          </a:ln>
-        </p:spPr>
-        <p:txBody>
-          <a:bodyPr lIns="90000" rIns="90000" tIns="45000" bIns="45000" anchor="ctr">
-            <a:noAutofit/>
-          </a:bodyPr>
-          <a:p>
-            <a:pPr indent="0">
-              <a:lnSpc>
-                <a:spcPct val="100000"/>
-              </a:lnSpc>
-              <a:buNone/>
-              <a:tabLst>
-                <a:tab algn="l" pos="0"/>
-              </a:tabLst>
-            </a:pPr>
-            <a:r>
-              <a:rPr lang="en-US" sz="3600" b="0" u="none" strike="noStrike">
-                <a:solidFill>
-                  <a:schemeClr val="dk1"/>
-                </a:solidFill>
-                <a:effectLst/>
-                <a:uFillTx/>
-                <a:latin typeface="Arial"/>
-                <a:ea typeface="SimSun"/>
-              </a:rPr>
-              <a:t>Click to edit Master title style</a:t>
-            </a:r>
-            <a:endParaRPr lang="en-US" sz="3600" b="0" u="none" strike="noStrike">
-              <a:solidFill>
-                <a:srgbClr val="000000"/>
-              </a:solidFill>
-              <a:effectLst/>
-              <a:uFillTx/>
-              <a:latin typeface="Arial"/>
-            </a:endParaRPr>
-          </a:p>
-        </p:txBody>
-      </p:sp>
-      <p:sp>
-        <p:nvSpPr>
-          <p:cNvPr id="40" name="PlaceHolder 2"/>
-          <p:cNvSpPr>
-            <a:spLocks noGrp="1"/>
-          </p:cNvSpPr>
-          <p:nvPr>
-            <p:ph type="body"/>
-          </p:nvPr>
-        </p:nvSpPr>
-        <p:spPr>
-          <a:xfrm>
-            <a:off x="609480" y="1174680"/>
-            <a:ext cx="10959840" cy="4939920"/>
-          </a:xfrm>
-          <a:prstGeom prst="rect">
-            <a:avLst/>
-          </a:prstGeom>
-          <a:noFill/>
-          <a:ln w="9360">
-            <a:noFill/>
-          </a:ln>
-        </p:spPr>
-        <p:txBody>
-          <a:bodyPr lIns="90000" rIns="90000" tIns="45000" bIns="45000" anchor="t">
-            <a:noAutofit/>
-          </a:bodyPr>
-          <a:p>
-            <a:pPr marL="343080" indent="-343080">
-              <a:lnSpc>
-                <a:spcPct val="100000"/>
-              </a:lnSpc>
-              <a:spcBef>
-                <a:spcPts val="641"/>
-              </a:spcBef>
-              <a:buClr>
-                <a:srgbClr val="000000"/>
-              </a:buClr>
-              <a:buFont typeface="Symbol" charset="2"/>
-              <a:buChar char=""/>
-            </a:pPr>
-            <a:r>
-              <a:rPr lang="en-US" sz="3200" b="0" u="none" strike="noStrike">
-                <a:solidFill>
-                  <a:schemeClr val="dk1"/>
-                </a:solidFill>
-                <a:effectLst/>
-                <a:uFillTx/>
-                <a:latin typeface="Arial"/>
-                <a:ea typeface="SimSun"/>
-              </a:rPr>
-              <a:t>Click to edit Master text styles</a:t>
-            </a:r>
-            <a:endParaRPr lang="en-US" sz="3200" b="0" u="none" strike="noStrike">
-              <a:solidFill>
-                <a:srgbClr val="000000"/>
-              </a:solidFill>
-              <a:effectLst/>
-              <a:uFillTx/>
-              <a:latin typeface="Arial"/>
-            </a:endParaRPr>
-          </a:p>
-          <a:p>
-            <a:pPr marL="743040" lvl="1" indent="-285840">
-              <a:lnSpc>
-                <a:spcPct val="100000"/>
-              </a:lnSpc>
-              <a:spcBef>
-                <a:spcPts val="561"/>
-              </a:spcBef>
-              <a:buClr>
-                <a:srgbClr val="000000"/>
-              </a:buClr>
-              <a:buFont typeface="Symbol" charset="2"/>
-              <a:buChar char=""/>
-            </a:pPr>
-            <a:r>
-              <a:rPr lang="en-US" sz="2800" b="0" u="none" strike="noStrike">
-                <a:solidFill>
-                  <a:schemeClr val="dk1"/>
-                </a:solidFill>
-                <a:effectLst/>
-                <a:uFillTx/>
-                <a:latin typeface="Arial"/>
-                <a:ea typeface="SimSun"/>
-              </a:rPr>
-              <a:t>Second level</a:t>
-            </a:r>
-            <a:endParaRPr lang="en-US" sz="2800" b="0" u="none" strike="noStrike">
-              <a:solidFill>
-                <a:srgbClr val="000000"/>
-              </a:solidFill>
-              <a:effectLst/>
-              <a:uFillTx/>
-              <a:latin typeface="Arial"/>
-            </a:endParaRPr>
-          </a:p>
-          <a:p>
-            <a:pPr marL="1143000" lvl="2" indent="-228600">
-              <a:lnSpc>
-                <a:spcPct val="100000"/>
-              </a:lnSpc>
-              <a:spcBef>
-                <a:spcPts val="479"/>
-              </a:spcBef>
-              <a:buClr>
-                <a:srgbClr val="000000"/>
-              </a:buClr>
-              <a:buFont typeface="Symbol" charset="2"/>
-              <a:buChar char=""/>
-            </a:pPr>
-            <a:r>
-              <a:rPr lang="en-US" sz="2400" b="0" u="none" strike="noStrike">
-                <a:solidFill>
-                  <a:schemeClr val="dk1"/>
-                </a:solidFill>
-                <a:effectLst/>
-                <a:uFillTx/>
-                <a:latin typeface="Arial"/>
-                <a:ea typeface="SimSun"/>
-              </a:rPr>
-              <a:t>Third level</a:t>
-            </a:r>
-            <a:endParaRPr lang="en-US" sz="2400" b="0" u="none" strike="noStrike">
-              <a:solidFill>
-                <a:srgbClr val="000000"/>
-              </a:solidFill>
-              <a:effectLst/>
-              <a:uFillTx/>
-              <a:latin typeface="Arial"/>
-            </a:endParaRPr>
-          </a:p>
-          <a:p>
-            <a:pPr marL="1600200" lvl="3" indent="-228600">
-              <a:lnSpc>
-                <a:spcPct val="100000"/>
-              </a:lnSpc>
-              <a:spcBef>
-                <a:spcPts val="400"/>
-              </a:spcBef>
-              <a:buClr>
-                <a:srgbClr val="000000"/>
-              </a:buClr>
-              <a:buFont typeface="Symbol" charset="2"/>
-              <a:buChar char=""/>
-            </a:pPr>
-            <a:r>
-              <a:rPr lang="en-US" sz="2000" b="0" u="none" strike="noStrike">
-                <a:solidFill>
-                  <a:schemeClr val="dk1"/>
-                </a:solidFill>
-                <a:effectLst/>
-                <a:uFillTx/>
-                <a:latin typeface="Arial"/>
-                <a:ea typeface="SimSun"/>
-              </a:rPr>
-              <a:t>Fourth level</a:t>
-            </a:r>
-            <a:endParaRPr lang="en-US" sz="2000" b="0" u="none" strike="noStrike">
-              <a:solidFill>
-                <a:srgbClr val="000000"/>
-              </a:solidFill>
-              <a:effectLst/>
-              <a:uFillTx/>
-              <a:latin typeface="Arial"/>
-            </a:endParaRPr>
-          </a:p>
-          <a:p>
-            <a:pPr marL="2057400" lvl="4" indent="-228600">
-              <a:lnSpc>
-                <a:spcPct val="100000"/>
-              </a:lnSpc>
-              <a:spcBef>
-                <a:spcPts val="400"/>
-              </a:spcBef>
-              <a:buClr>
-                <a:srgbClr val="000000"/>
-              </a:buClr>
-              <a:buFont typeface="OpenSymbol"/>
-              <a:buChar char="»"/>
-            </a:pPr>
-            <a:r>
-              <a:rPr lang="en-US" sz="2000" b="0" u="none" strike="noStrike">
-                <a:solidFill>
-                  <a:schemeClr val="dk1"/>
-                </a:solidFill>
-                <a:effectLst/>
-                <a:uFillTx/>
-                <a:latin typeface="Arial"/>
-                <a:ea typeface="SimSun"/>
-              </a:rPr>
-              <a:t>Fifth level</a:t>
-            </a:r>
-            <a:endParaRPr lang="en-US" sz="2000" b="0" u="none" strike="noStrike">
-              <a:solidFill>
-                <a:srgbClr val="000000"/>
-              </a:solidFill>
-              <a:effectLst/>
-              <a:uFillTx/>
-              <a:latin typeface="Arial"/>
-            </a:endParaRPr>
-          </a:p>
-        </p:txBody>
-      </p:sp>
-      <p:sp>
-        <p:nvSpPr>
-          <p:cNvPr id="41" name="PlaceHolder 3"/>
-          <p:cNvSpPr>
-            <a:spLocks noGrp="1"/>
-          </p:cNvSpPr>
-          <p:nvPr>
-            <p:ph type="dt" idx="19"/>
-          </p:nvPr>
-        </p:nvSpPr>
-        <p:spPr>
-          <a:xfrm>
-            <a:off x="609480" y="6245280"/>
-            <a:ext cx="2831760" cy="463320"/>
-          </a:xfrm>
-          <a:prstGeom prst="rect">
-            <a:avLst/>
-          </a:prstGeom>
-          <a:noFill/>
-          <a:ln w="0">
-            <a:noFill/>
-          </a:ln>
-        </p:spPr>
-        <p:txBody>
-          <a:bodyPr numCol="1" spcCol="0" lIns="91440" rIns="91440" tIns="45720" bIns="45720" anchor="t">
-            <a:noAutofit/>
-          </a:bodyPr>
-          <a:lstStyle>
-            <a:lvl1pPr indent="0" defTabSz="914400">
-              <a:lnSpc>
-                <a:spcPct val="100000"/>
-              </a:lnSpc>
-              <a:buNone/>
-              <a:tabLst>
-                <a:tab algn="l" pos="0"/>
-              </a:tabLst>
-              <a:defRPr lang="en-US" sz="1400" b="0" u="none" strike="noStrike">
-                <a:solidFill>
-                  <a:srgbClr val="000000"/>
-                </a:solidFill>
-                <a:effectLst/>
-                <a:uFillTx/>
-                <a:latin typeface="Times New Roman"/>
-                <a:ea typeface="SimSun"/>
-              </a:defRPr>
-            </a:lvl1pPr>
-          </a:lstStyle>
-          <a:p>
-            <a:pPr indent="0" defTabSz="914400">
-              <a:lnSpc>
-                <a:spcPct val="100000"/>
-              </a:lnSpc>
-              <a:buNone/>
-              <a:tabLst>
-                <a:tab algn="l" pos="0"/>
-              </a:tabLst>
-            </a:pPr>
-            <a:r>
-              <a:rPr lang="en-US" sz="1400" b="0" u="none" strike="noStrike">
-                <a:solidFill>
-                  <a:srgbClr val="000000"/>
-                </a:solidFill>
-                <a:effectLst/>
-                <a:uFillTx/>
-                <a:latin typeface="Times New Roman"/>
-                <a:ea typeface="SimSun"/>
-              </a:rPr>
-              <a:t>&lt;date/time&gt;</a:t>
-            </a:r>
-            <a:endParaRPr lang="en-US" sz="1400" b="0" u="none" strike="noStrike">
-              <a:solidFill>
-                <a:srgbClr val="000000"/>
-              </a:solidFill>
-              <a:effectLst/>
-              <a:uFillTx/>
-              <a:latin typeface="Times New Roman"/>
-            </a:endParaRPr>
-          </a:p>
-        </p:txBody>
-      </p:sp>
-      <p:sp>
-        <p:nvSpPr>
-          <p:cNvPr id="42" name="PlaceHolder 4"/>
-          <p:cNvSpPr>
-            <a:spLocks noGrp="1"/>
-          </p:cNvSpPr>
-          <p:nvPr>
-            <p:ph type="ftr" idx="20"/>
-          </p:nvPr>
-        </p:nvSpPr>
-        <p:spPr>
-          <a:xfrm>
-            <a:off x="4165560" y="6245280"/>
-            <a:ext cx="3847680" cy="463320"/>
-          </a:xfrm>
-          <a:prstGeom prst="rect">
-            <a:avLst/>
-          </a:prstGeom>
-          <a:noFill/>
-          <a:ln w="0">
-            <a:noFill/>
-          </a:ln>
-        </p:spPr>
-        <p:txBody>
-          <a:bodyPr numCol="1" spcCol="0" lIns="91440" rIns="91440" tIns="45720" bIns="45720" anchor="t">
-            <a:noAutofit/>
-          </a:bodyPr>
-          <a:lstStyle>
-            <a:lvl1pPr indent="0" algn="ctr" defTabSz="914400">
-              <a:lnSpc>
-                <a:spcPct val="100000"/>
-              </a:lnSpc>
-              <a:buNone/>
-              <a:tabLst>
-                <a:tab algn="l" pos="0"/>
-              </a:tabLst>
-              <a:defRPr lang="en-US" sz="1400" b="0" u="none" strike="noStrike">
-                <a:solidFill>
-                  <a:srgbClr val="000000"/>
-                </a:solidFill>
-                <a:effectLst/>
-                <a:uFillTx/>
-                <a:latin typeface="Times New Roman"/>
-                <a:ea typeface="SimSun"/>
-              </a:defRPr>
-            </a:lvl1pPr>
-          </a:lstStyle>
-          <a:p>
-            <a:pPr indent="0" algn="ctr" defTabSz="914400">
-              <a:lnSpc>
-                <a:spcPct val="100000"/>
-              </a:lnSpc>
-              <a:buNone/>
-              <a:tabLst>
-                <a:tab algn="l" pos="0"/>
-              </a:tabLst>
-            </a:pPr>
-            <a:r>
-              <a:rPr lang="en-US" sz="1400" b="0" u="none" strike="noStrike">
-                <a:solidFill>
-                  <a:srgbClr val="000000"/>
-                </a:solidFill>
-                <a:effectLst/>
-                <a:uFillTx/>
-                <a:latin typeface="Times New Roman"/>
-                <a:ea typeface="SimSun"/>
-              </a:rPr>
-              <a:t>&lt;footer&gt;</a:t>
-            </a:r>
-            <a:endParaRPr lang="en-US" sz="1400" b="0" u="none" strike="noStrike">
-              <a:solidFill>
-                <a:srgbClr val="000000"/>
-              </a:solidFill>
-              <a:effectLst/>
-              <a:uFillTx/>
-              <a:latin typeface="Times New Roman"/>
-            </a:endParaRPr>
-          </a:p>
-        </p:txBody>
-      </p:sp>
-      <p:sp>
-        <p:nvSpPr>
-          <p:cNvPr id="43" name="PlaceHolder 5"/>
-          <p:cNvSpPr>
-            <a:spLocks noGrp="1"/>
-          </p:cNvSpPr>
-          <p:nvPr>
-            <p:ph type="sldNum" idx="21"/>
-          </p:nvPr>
-        </p:nvSpPr>
-        <p:spPr>
-          <a:xfrm>
-            <a:off x="8737560" y="6245280"/>
-            <a:ext cx="2831760" cy="463320"/>
-          </a:xfrm>
-          <a:prstGeom prst="rect">
-            <a:avLst/>
-          </a:prstGeom>
-          <a:noFill/>
-          <a:ln w="0">
-            <a:noFill/>
-          </a:ln>
-        </p:spPr>
-        <p:txBody>
-          <a:bodyPr numCol="1" spcCol="0" lIns="91440" rIns="91440" tIns="45720" bIns="45720" anchor="t">
-            <a:noAutofit/>
-          </a:bodyPr>
-          <a:p>
-            <a:pPr indent="0">
-              <a:buNone/>
-            </a:pPr>
-            <a:endParaRPr lang="en-US" sz="1800" b="0" u="none" strike="noStrike">
-              <a:solidFill>
-                <a:srgbClr val="000000"/>
-              </a:solidFill>
-              <a:effectLst/>
-              <a:uFillTx/>
-              <a:latin typeface="Times New Roman"/>
-            </a:endParaRPr>
-          </a:p>
-        </p:txBody>
-      </p:sp>
-    </p:spTree>
-  </p:cSld>
-</p:sldLayout>
-</file>
-
-<file path=ppt/slideLayouts/slideLayout8.xml><?xml version="1.0" encoding="utf-8"?>
-<p:sldLayout xmlns:a="http://schemas.openxmlformats.org/drawingml/2006/main" xmlns:p="http://schemas.openxmlformats.org/presentationml/2006/main" xmlns:r="http://schemas.openxmlformats.org/officeDocument/2006/relationships" xmlns:p14="http://schemas.microsoft.com/office/powerpoint/2010/main" xmlns:p15="http://schemas.microsoft.com/office/powerpoint/2012/main" xmlns:mc="http://schemas.openxmlformats.org/markup-compatibility/2006" type="blank" preserve="1">
-  <p:cSld name="Section Header">
-    <p:bg>
-      <p:bgPr>
-        <a:solidFill>
-          <a:srgbClr val="ffffff"/>
-        </a:solidFill>
-      </p:bgPr>
-    </p:bg>
-    <p:spTree>
-      <p:nvGrpSpPr>
-        <p:cNvPr id="1" name=""/>
-        <p:cNvGrpSpPr/>
-        <p:nvPr/>
-      </p:nvGrpSpPr>
-      <p:grpSpPr>
-        <a:xfrm>
-          <a:off x="0" y="0"/>
-          <a:ext cx="0" cy="0"/>
-          <a:chOff x="0" y="0"/>
-          <a:chExt cx="0" cy="0"/>
-        </a:xfrm>
-      </p:grpSpPr>
-      <p:pic>
-        <p:nvPicPr>
-          <p:cNvPr id="44" name="Picture 10"/>
-          <p:cNvPicPr/>
-          <p:nvPr/>
-        </p:nvPicPr>
-        <p:blipFill>
-          <a:blip r:embed="rId2"/>
-          <a:stretch/>
-        </p:blipFill>
-        <p:spPr>
-          <a:xfrm>
-            <a:off x="0" y="0"/>
-            <a:ext cx="12179160" cy="6845040"/>
-          </a:xfrm>
-          <a:prstGeom prst="rect">
-            <a:avLst/>
-          </a:prstGeom>
-          <a:noFill/>
-          <a:ln w="9525">
-            <a:noFill/>
-          </a:ln>
-        </p:spPr>
-      </p:pic>
-      <p:sp>
-        <p:nvSpPr>
-          <p:cNvPr id="45" name="PlaceHolder 1"/>
-          <p:cNvSpPr>
-            <a:spLocks noGrp="1"/>
-          </p:cNvSpPr>
-          <p:nvPr>
-            <p:ph type="title"/>
-          </p:nvPr>
-        </p:nvSpPr>
-        <p:spPr>
-          <a:xfrm>
-            <a:off x="831960" y="1709640"/>
-            <a:ext cx="10502640" cy="2839680"/>
-          </a:xfrm>
-          <a:prstGeom prst="rect">
-            <a:avLst/>
-          </a:prstGeom>
-          <a:noFill/>
-          <a:ln w="9360">
-            <a:noFill/>
-          </a:ln>
-        </p:spPr>
-        <p:txBody>
-          <a:bodyPr lIns="90000" rIns="90000" tIns="45000" bIns="45000" anchor="b">
-            <a:noAutofit/>
-          </a:bodyPr>
-          <a:p>
-            <a:pPr indent="0">
-              <a:lnSpc>
-                <a:spcPct val="100000"/>
-              </a:lnSpc>
-              <a:buNone/>
-              <a:tabLst>
-                <a:tab algn="l" pos="0"/>
-              </a:tabLst>
-            </a:pPr>
-            <a:r>
-              <a:rPr lang="en-US" sz="6000" b="0" u="none" strike="noStrike">
-                <a:solidFill>
-                  <a:schemeClr val="dk1"/>
-                </a:solidFill>
-                <a:effectLst/>
-                <a:uFillTx/>
-                <a:latin typeface="Arial"/>
-                <a:ea typeface="SimSun"/>
-              </a:rPr>
-              <a:t>Click to edit Master title style</a:t>
-            </a:r>
-            <a:endParaRPr lang="en-US" sz="6000" b="0" u="none" strike="noStrike">
-              <a:solidFill>
-                <a:srgbClr val="000000"/>
-              </a:solidFill>
-              <a:effectLst/>
-              <a:uFillTx/>
-              <a:latin typeface="Arial"/>
-            </a:endParaRPr>
-          </a:p>
-        </p:txBody>
-      </p:sp>
-      <p:sp>
-        <p:nvSpPr>
-          <p:cNvPr id="46" name="PlaceHolder 2"/>
-          <p:cNvSpPr>
-            <a:spLocks noGrp="1"/>
-          </p:cNvSpPr>
-          <p:nvPr>
-            <p:ph type="body"/>
-          </p:nvPr>
-        </p:nvSpPr>
-        <p:spPr>
-          <a:xfrm>
-            <a:off x="831960" y="4589640"/>
-            <a:ext cx="10502640" cy="1487160"/>
-          </a:xfrm>
-          <a:prstGeom prst="rect">
-            <a:avLst/>
-          </a:prstGeom>
-          <a:noFill/>
-          <a:ln w="9360">
-            <a:noFill/>
-          </a:ln>
-        </p:spPr>
-        <p:txBody>
-          <a:bodyPr lIns="90000" rIns="90000" tIns="45000" bIns="45000" anchor="t">
-            <a:noAutofit/>
-          </a:bodyPr>
-          <a:p>
-            <a:pPr indent="0">
-              <a:lnSpc>
-                <a:spcPct val="100000"/>
-              </a:lnSpc>
-              <a:spcBef>
-                <a:spcPts val="479"/>
-              </a:spcBef>
-              <a:buNone/>
-              <a:tabLst>
-                <a:tab algn="l" pos="0"/>
-              </a:tabLst>
-            </a:pPr>
-            <a:r>
-              <a:rPr lang="en-US" sz="2400" b="0" u="none" strike="noStrike">
-                <a:solidFill>
-                  <a:schemeClr val="dk1"/>
-                </a:solidFill>
-                <a:effectLst/>
-                <a:uFillTx/>
-                <a:latin typeface="Arial"/>
-                <a:ea typeface="SimSun"/>
-              </a:rPr>
-              <a:t>Click to edit Master text styles</a:t>
-            </a:r>
-            <a:endParaRPr lang="en-US" sz="2400" b="0" u="none" strike="noStrike">
-              <a:solidFill>
-                <a:srgbClr val="000000"/>
-              </a:solidFill>
-              <a:effectLst/>
-              <a:uFillTx/>
-              <a:latin typeface="Arial"/>
-            </a:endParaRPr>
-          </a:p>
-        </p:txBody>
-      </p:sp>
-      <p:sp>
-        <p:nvSpPr>
-          <p:cNvPr id="47" name="PlaceHolder 3"/>
-          <p:cNvSpPr>
-            <a:spLocks noGrp="1"/>
-          </p:cNvSpPr>
-          <p:nvPr>
-            <p:ph type="dt" idx="22"/>
-          </p:nvPr>
-        </p:nvSpPr>
-        <p:spPr>
-          <a:xfrm>
-            <a:off x="609480" y="6245280"/>
-            <a:ext cx="2831760" cy="463320"/>
-          </a:xfrm>
-          <a:prstGeom prst="rect">
-            <a:avLst/>
-          </a:prstGeom>
-          <a:noFill/>
-          <a:ln w="0">
-            <a:noFill/>
-          </a:ln>
-        </p:spPr>
-        <p:txBody>
-          <a:bodyPr numCol="1" spcCol="0" lIns="91440" rIns="91440" tIns="45720" bIns="45720" anchor="t">
-            <a:noAutofit/>
-          </a:bodyPr>
-          <a:lstStyle>
-            <a:lvl1pPr indent="0" defTabSz="914400">
-              <a:lnSpc>
-                <a:spcPct val="100000"/>
-              </a:lnSpc>
-              <a:buNone/>
-              <a:tabLst>
-                <a:tab algn="l" pos="0"/>
-              </a:tabLst>
-              <a:defRPr lang="en-US" sz="1400" b="0" u="none" strike="noStrike">
-                <a:solidFill>
-                  <a:srgbClr val="000000"/>
-                </a:solidFill>
-                <a:effectLst/>
-                <a:uFillTx/>
-                <a:latin typeface="Times New Roman"/>
-                <a:ea typeface="SimSun"/>
-              </a:defRPr>
-            </a:lvl1pPr>
-          </a:lstStyle>
-          <a:p>
-            <a:pPr indent="0" defTabSz="914400">
-              <a:lnSpc>
-                <a:spcPct val="100000"/>
-              </a:lnSpc>
-              <a:buNone/>
-              <a:tabLst>
-                <a:tab algn="l" pos="0"/>
-              </a:tabLst>
-            </a:pPr>
-            <a:r>
-              <a:rPr lang="en-US" sz="1400" b="0" u="none" strike="noStrike">
-                <a:solidFill>
-                  <a:srgbClr val="000000"/>
-                </a:solidFill>
-                <a:effectLst/>
-                <a:uFillTx/>
-                <a:latin typeface="Times New Roman"/>
-                <a:ea typeface="SimSun"/>
-              </a:rPr>
-              <a:t>&lt;date/time&gt;</a:t>
-            </a:r>
-            <a:endParaRPr lang="en-US" sz="1400" b="0" u="none" strike="noStrike">
-              <a:solidFill>
-                <a:srgbClr val="000000"/>
-              </a:solidFill>
-              <a:effectLst/>
-              <a:uFillTx/>
-              <a:latin typeface="Times New Roman"/>
-            </a:endParaRPr>
-          </a:p>
-        </p:txBody>
-      </p:sp>
-      <p:sp>
-        <p:nvSpPr>
-          <p:cNvPr id="48" name="PlaceHolder 4"/>
-          <p:cNvSpPr>
-            <a:spLocks noGrp="1"/>
-          </p:cNvSpPr>
-          <p:nvPr>
-            <p:ph type="ftr" idx="23"/>
-          </p:nvPr>
-        </p:nvSpPr>
-        <p:spPr>
-          <a:xfrm>
-            <a:off x="4165560" y="6245280"/>
-            <a:ext cx="3847680" cy="463320"/>
-          </a:xfrm>
-          <a:prstGeom prst="rect">
-            <a:avLst/>
-          </a:prstGeom>
-          <a:noFill/>
-          <a:ln w="0">
-            <a:noFill/>
-          </a:ln>
-        </p:spPr>
-        <p:txBody>
-          <a:bodyPr numCol="1" spcCol="0" lIns="91440" rIns="91440" tIns="45720" bIns="45720" anchor="t">
-            <a:noAutofit/>
-          </a:bodyPr>
-          <a:lstStyle>
-            <a:lvl1pPr indent="0" algn="ctr" defTabSz="914400">
-              <a:lnSpc>
-                <a:spcPct val="100000"/>
-              </a:lnSpc>
-              <a:buNone/>
-              <a:tabLst>
-                <a:tab algn="l" pos="0"/>
-              </a:tabLst>
-              <a:defRPr lang="en-US" sz="1400" b="0" u="none" strike="noStrike">
-                <a:solidFill>
-                  <a:srgbClr val="000000"/>
-                </a:solidFill>
-                <a:effectLst/>
-                <a:uFillTx/>
-                <a:latin typeface="Times New Roman"/>
-                <a:ea typeface="SimSun"/>
-              </a:defRPr>
-            </a:lvl1pPr>
-          </a:lstStyle>
-          <a:p>
-            <a:pPr indent="0" algn="ctr" defTabSz="914400">
-              <a:lnSpc>
-                <a:spcPct val="100000"/>
-              </a:lnSpc>
-              <a:buNone/>
-              <a:tabLst>
-                <a:tab algn="l" pos="0"/>
-              </a:tabLst>
-            </a:pPr>
-            <a:r>
-              <a:rPr lang="en-US" sz="1400" b="0" u="none" strike="noStrike">
-                <a:solidFill>
-                  <a:srgbClr val="000000"/>
-                </a:solidFill>
-                <a:effectLst/>
-                <a:uFillTx/>
-                <a:latin typeface="Times New Roman"/>
-                <a:ea typeface="SimSun"/>
-              </a:rPr>
-              <a:t>&lt;footer&gt;</a:t>
-            </a:r>
-            <a:endParaRPr lang="en-US" sz="1400" b="0" u="none" strike="noStrike">
-              <a:solidFill>
-                <a:srgbClr val="000000"/>
-              </a:solidFill>
-              <a:effectLst/>
-              <a:uFillTx/>
-              <a:latin typeface="Times New Roman"/>
-            </a:endParaRPr>
-          </a:p>
-        </p:txBody>
-      </p:sp>
-      <p:sp>
-        <p:nvSpPr>
-          <p:cNvPr id="49" name="PlaceHolder 5"/>
-          <p:cNvSpPr>
-            <a:spLocks noGrp="1"/>
-          </p:cNvSpPr>
-          <p:nvPr>
-            <p:ph type="sldNum" idx="24"/>
-          </p:nvPr>
-        </p:nvSpPr>
-        <p:spPr>
-          <a:xfrm>
-            <a:off x="8737560" y="6245280"/>
-            <a:ext cx="2831760" cy="463320"/>
-          </a:xfrm>
-          <a:prstGeom prst="rect">
-            <a:avLst/>
-          </a:prstGeom>
-          <a:noFill/>
-          <a:ln w="0">
-            <a:noFill/>
-          </a:ln>
-        </p:spPr>
-        <p:txBody>
-          <a:bodyPr numCol="1" spcCol="0" lIns="91440" rIns="91440" tIns="45720" bIns="45720" anchor="t">
-            <a:noAutofit/>
-          </a:bodyPr>
-          <a:p>
-            <a:pPr indent="0">
-              <a:buNone/>
-            </a:pPr>
-            <a:endParaRPr lang="en-US" sz="1800" b="0" u="none" strike="noStrike">
-              <a:solidFill>
-                <a:srgbClr val="000000"/>
-              </a:solidFill>
-              <a:effectLst/>
-              <a:uFillTx/>
-              <a:latin typeface="Times New Roman"/>
-            </a:endParaRPr>
-          </a:p>
-        </p:txBody>
-      </p:sp>
-    </p:spTree>
-  </p:cSld>
-</p:sldLayout>
-</file>
-
-<file path=ppt/slideLayouts/slideLayout9.xml><?xml version="1.0" encoding="utf-8"?>
-<p:sldLayout xmlns:a="http://schemas.openxmlformats.org/drawingml/2006/main" xmlns:p="http://schemas.openxmlformats.org/presentationml/2006/main" xmlns:r="http://schemas.openxmlformats.org/officeDocument/2006/relationships" xmlns:p14="http://schemas.microsoft.com/office/powerpoint/2010/main" xmlns:p15="http://schemas.microsoft.com/office/powerpoint/2012/main" xmlns:mc="http://schemas.openxmlformats.org/markup-compatibility/2006" type="titleOnly" preserve="1">
-  <p:cSld name="Title Only">
-    <p:bg>
-      <p:bgPr>
-        <a:solidFill>
-          <a:srgbClr val="ffffff"/>
-        </a:solidFill>
-      </p:bgPr>
-    </p:bg>
-    <p:spTree>
-      <p:nvGrpSpPr>
-        <p:cNvPr id="1" name=""/>
-        <p:cNvGrpSpPr/>
-        <p:nvPr/>
-      </p:nvGrpSpPr>
-      <p:grpSpPr>
-        <a:xfrm>
-          <a:off x="0" y="0"/>
-          <a:ext cx="0" cy="0"/>
-          <a:chOff x="0" y="0"/>
-          <a:chExt cx="0" cy="0"/>
-        </a:xfrm>
-      </p:grpSpPr>
-      <p:pic>
-        <p:nvPicPr>
-          <p:cNvPr id="50" name="Picture 10"/>
-          <p:cNvPicPr/>
-          <p:nvPr/>
-        </p:nvPicPr>
-        <p:blipFill>
-          <a:blip r:embed="rId2"/>
-          <a:stretch/>
-        </p:blipFill>
-        <p:spPr>
-          <a:xfrm>
-            <a:off x="0" y="0"/>
-            <a:ext cx="12179160" cy="6845040"/>
-          </a:xfrm>
-          <a:prstGeom prst="rect">
-            <a:avLst/>
-          </a:prstGeom>
-          <a:noFill/>
-          <a:ln w="9525">
-            <a:noFill/>
-          </a:ln>
-        </p:spPr>
-      </p:pic>
-      <p:sp>
-        <p:nvSpPr>
-          <p:cNvPr id="51" name="PlaceHolder 1"/>
-          <p:cNvSpPr>
-            <a:spLocks noGrp="1"/>
-          </p:cNvSpPr>
-          <p:nvPr>
-            <p:ph type="title"/>
-          </p:nvPr>
-        </p:nvSpPr>
-        <p:spPr>
-          <a:xfrm>
-            <a:off x="609480" y="190440"/>
-            <a:ext cx="10959840" cy="569520"/>
-          </a:xfrm>
-          <a:prstGeom prst="rect">
-            <a:avLst/>
-          </a:prstGeom>
-          <a:noFill/>
-          <a:ln w="9360">
-            <a:noFill/>
-          </a:ln>
-        </p:spPr>
-        <p:txBody>
-          <a:bodyPr lIns="90000" rIns="90000" tIns="45000" bIns="45000" anchor="ctr">
-            <a:noAutofit/>
-          </a:bodyPr>
-          <a:p>
-            <a:pPr indent="0">
-              <a:lnSpc>
-                <a:spcPct val="100000"/>
-              </a:lnSpc>
-              <a:buNone/>
-              <a:tabLst>
-                <a:tab algn="l" pos="0"/>
-              </a:tabLst>
-            </a:pPr>
-            <a:r>
-              <a:rPr lang="en-US" sz="3600" b="0" u="none" strike="noStrike">
-                <a:solidFill>
-                  <a:schemeClr val="dk1"/>
-                </a:solidFill>
-                <a:effectLst/>
-                <a:uFillTx/>
-                <a:latin typeface="Arial"/>
-                <a:ea typeface="SimSun"/>
-              </a:rPr>
-              <a:t>Click to edit Master title style</a:t>
-            </a:r>
-            <a:endParaRPr lang="en-US" sz="3600" b="0" u="none" strike="noStrike">
-              <a:solidFill>
-                <a:srgbClr val="000000"/>
-              </a:solidFill>
-              <a:effectLst/>
-              <a:uFillTx/>
-              <a:latin typeface="Arial"/>
-            </a:endParaRPr>
-          </a:p>
-        </p:txBody>
-      </p:sp>
-      <p:sp>
-        <p:nvSpPr>
-          <p:cNvPr id="52" name="PlaceHolder 2"/>
+          <p:cNvPr id="56" name="PlaceHolder 3"/>
           <p:cNvSpPr>
             <a:spLocks noGrp="1"/>
           </p:cNvSpPr>
@@ -5483,7 +6228,7 @@
         <p:spPr>
           <a:xfrm>
             <a:off x="609480" y="6245280"/>
-            <a:ext cx="2831760" cy="463320"/>
+            <a:ext cx="2831400" cy="462960"/>
           </a:xfrm>
           <a:prstGeom prst="rect">
             <a:avLst/>
@@ -5552,7 +6297,7 @@
       </p:sp>
       <p:sp>
         <p:nvSpPr>
-          <p:cNvPr id="53" name="PlaceHolder 3"/>
+          <p:cNvPr id="57" name="PlaceHolder 4"/>
           <p:cNvSpPr>
             <a:spLocks noGrp="1"/>
           </p:cNvSpPr>
@@ -5563,7 +6308,7 @@
         <p:spPr>
           <a:xfrm>
             <a:off x="4165560" y="6245280"/>
-            <a:ext cx="3847680" cy="463320"/>
+            <a:ext cx="3847320" cy="462960"/>
           </a:xfrm>
           <a:prstGeom prst="rect">
             <a:avLst/>
@@ -5632,7 +6377,7 @@
       </p:sp>
       <p:sp>
         <p:nvSpPr>
-          <p:cNvPr id="54" name="PlaceHolder 4"/>
+          <p:cNvPr id="58" name="PlaceHolder 5"/>
           <p:cNvSpPr>
             <a:spLocks noGrp="1"/>
           </p:cNvSpPr>
@@ -5643,7 +6388,7 @@
         <p:spPr>
           <a:xfrm>
             <a:off x="8737560" y="6245280"/>
-            <a:ext cx="2831760" cy="463320"/>
+            <a:ext cx="2831400" cy="462960"/>
           </a:xfrm>
           <a:prstGeom prst="rect">
             <a:avLst/>
@@ -5743,7 +6488,7 @@
         <p:spPr>
           <a:xfrm>
             <a:off x="734760" y="1720800"/>
-            <a:ext cx="10325520" cy="2887560"/>
+            <a:ext cx="10325160" cy="2887200"/>
           </a:xfrm>
           <a:prstGeom prst="rect">
             <a:avLst/>
@@ -5878,7 +6623,7 @@
       </p:grpSpPr>
       <p:sp>
         <p:nvSpPr>
-          <p:cNvPr id="94" name="PlaceHolder 1"/>
+          <p:cNvPr id="97" name="PlaceHolder 1"/>
           <p:cNvSpPr>
             <a:spLocks noGrp="1"/>
           </p:cNvSpPr>
@@ -5888,8 +6633,8 @@
         </p:nvSpPr>
         <p:spPr>
           <a:xfrm>
-            <a:off x="609480" y="135720"/>
-            <a:ext cx="2584080" cy="679680"/>
+            <a:off x="609480" y="135360"/>
+            <a:ext cx="2583720" cy="680040"/>
           </a:xfrm>
           <a:prstGeom prst="rect">
             <a:avLst/>
@@ -5922,9 +6667,194 @@
                 <a:uFillTx/>
                 <a:latin typeface="Arial"/>
               </a:rPr>
-              <a:t>L3 1</a:t>
+              <a:t> L3 1</a:t>
             </a:r>
             <a:endParaRPr lang="en-US" sz="4400" b="0" u="none" strike="noStrike">
+              <a:solidFill>
+                <a:srgbClr val="000000"/>
+              </a:solidFill>
+              <a:effectLst/>
+              <a:uFillTx/>
+              <a:latin typeface="Arial"/>
+            </a:endParaRPr>
+          </a:p>
+        </p:txBody>
+      </p:sp>
+      <p:sp>
+        <p:nvSpPr>
+          <p:cNvPr id="98" name="Rectangles 2"/>
+          <p:cNvSpPr/>
+          <p:nvPr/>
+        </p:nvSpPr>
+        <p:spPr>
+          <a:xfrm>
+            <a:off x="1440" y="914400"/>
+            <a:ext cx="2282040" cy="5247360"/>
+          </a:xfrm>
+          <a:prstGeom prst="rect">
+            <a:avLst/>
+          </a:prstGeom>
+          <a:solidFill>
+            <a:srgbClr val="729fcf"/>
+          </a:solidFill>
+          <a:ln w="0">
+            <a:solidFill>
+              <a:srgbClr val="3465a4"/>
+            </a:solidFill>
+          </a:ln>
+        </p:spPr>
+        <p:style>
+          <a:lnRef idx="0"/>
+          <a:fillRef idx="0"/>
+          <a:effectRef idx="0"/>
+          <a:fontRef idx="minor"/>
+        </p:style>
+        <p:txBody>
+          <a:bodyPr lIns="90000" rIns="90000" tIns="45000" bIns="45000" anchor="ctr">
+            <a:noAutofit/>
+          </a:bodyPr>
+          <a:p>
+            <a:pPr defTabSz="914400">
+              <a:lnSpc>
+                <a:spcPct val="100000"/>
+              </a:lnSpc>
+            </a:pPr>
+            <a:r>
+              <a:rPr lang="en-US" sz="1400" b="1" u="none" strike="noStrike">
+                <a:solidFill>
+                  <a:srgbClr val="000000"/>
+                </a:solidFill>
+                <a:effectLst/>
+                <a:uFillTx/>
+                <a:latin typeface="Arial"/>
+                <a:ea typeface="SimSun"/>
+              </a:rPr>
+              <a:t>Erosion = 8</a:t>
+            </a:r>
+            <a:endParaRPr lang="en-US" sz="1400" b="0" u="none" strike="noStrike">
+              <a:solidFill>
+                <a:srgbClr val="000000"/>
+              </a:solidFill>
+              <a:effectLst/>
+              <a:uFillTx/>
+              <a:latin typeface="Arial"/>
+            </a:endParaRPr>
+          </a:p>
+          <a:p>
+            <a:pPr defTabSz="914400">
+              <a:lnSpc>
+                <a:spcPct val="100000"/>
+              </a:lnSpc>
+            </a:pPr>
+            <a:r>
+              <a:rPr lang="en-US" sz="1400" b="1" u="none" strike="noStrike">
+                <a:solidFill>
+                  <a:srgbClr val="000000"/>
+                </a:solidFill>
+                <a:effectLst/>
+                <a:uFillTx/>
+                <a:latin typeface="Arial"/>
+                <a:ea typeface="SimSun"/>
+              </a:rPr>
+              <a:t>Thresholding = 0.0025</a:t>
+            </a:r>
+            <a:endParaRPr lang="en-US" sz="1400" b="0" u="none" strike="noStrike">
+              <a:solidFill>
+                <a:srgbClr val="000000"/>
+              </a:solidFill>
+              <a:effectLst/>
+              <a:uFillTx/>
+              <a:latin typeface="Arial"/>
+            </a:endParaRPr>
+          </a:p>
+          <a:p>
+            <a:pPr defTabSz="914400">
+              <a:lnSpc>
+                <a:spcPct val="100000"/>
+              </a:lnSpc>
+            </a:pPr>
+            <a:r>
+              <a:rPr lang="en-US" sz="1400" b="1" u="none" strike="noStrike">
+                <a:solidFill>
+                  <a:srgbClr val="000000"/>
+                </a:solidFill>
+                <a:effectLst/>
+                <a:uFillTx/>
+                <a:latin typeface="Arial"/>
+                <a:ea typeface="SimSun"/>
+              </a:rPr>
+              <a:t>margin um = 1.2</a:t>
+            </a:r>
+            <a:endParaRPr lang="en-US" sz="1400" b="0" u="none" strike="noStrike">
+              <a:solidFill>
+                <a:srgbClr val="000000"/>
+              </a:solidFill>
+              <a:effectLst/>
+              <a:uFillTx/>
+              <a:latin typeface="Arial"/>
+            </a:endParaRPr>
+          </a:p>
+          <a:p>
+            <a:pPr defTabSz="914400">
+              <a:lnSpc>
+                <a:spcPct val="100000"/>
+              </a:lnSpc>
+            </a:pPr>
+            <a:r>
+              <a:rPr lang="en-US" sz="1400" b="1" u="none" strike="noStrike">
+                <a:solidFill>
+                  <a:srgbClr val="000000"/>
+                </a:solidFill>
+                <a:effectLst/>
+                <a:uFillTx/>
+                <a:latin typeface="Arial"/>
+                <a:ea typeface="SimSun"/>
+              </a:rPr>
+              <a:t>overlap alpha = 0.6</a:t>
+            </a:r>
+            <a:endParaRPr lang="en-US" sz="1400" b="0" u="none" strike="noStrike">
+              <a:solidFill>
+                <a:srgbClr val="000000"/>
+              </a:solidFill>
+              <a:effectLst/>
+              <a:uFillTx/>
+              <a:latin typeface="Arial"/>
+            </a:endParaRPr>
+          </a:p>
+          <a:p>
+            <a:pPr defTabSz="914400">
+              <a:lnSpc>
+                <a:spcPct val="100000"/>
+              </a:lnSpc>
+            </a:pPr>
+            <a:r>
+              <a:rPr lang="en-US" sz="1400" b="1" u="none" strike="noStrike">
+                <a:solidFill>
+                  <a:srgbClr val="000000"/>
+                </a:solidFill>
+                <a:effectLst/>
+                <a:uFillTx/>
+                <a:latin typeface="Arial"/>
+                <a:ea typeface="SimSun"/>
+              </a:rPr>
+              <a:t>viz min voxels = 12000</a:t>
+            </a:r>
+            <a:endParaRPr lang="en-US" sz="1400" b="0" u="none" strike="noStrike">
+              <a:solidFill>
+                <a:srgbClr val="000000"/>
+              </a:solidFill>
+              <a:effectLst/>
+              <a:uFillTx/>
+              <a:latin typeface="Arial"/>
+            </a:endParaRPr>
+          </a:p>
+          <a:p>
+            <a:pPr defTabSz="914400">
+              <a:lnSpc>
+                <a:spcPct val="100000"/>
+              </a:lnSpc>
+            </a:pPr>
+            <a:endParaRPr lang="en-US" sz="1400" b="0" u="none" strike="noStrike">
               <a:solidFill>
                 <a:srgbClr val="000000"/>
               </a:solidFill>
@@ -5937,7 +6867,7 @@
       </p:sp>
       <p:pic>
         <p:nvPicPr>
-          <p:cNvPr id="95" name="Picture 3"/>
+          <p:cNvPr id="99" name=""/>
           <p:cNvPicPr/>
           <p:nvPr/>
         </p:nvPicPr>
@@ -5947,8 +6877,8 @@
         </p:blipFill>
         <p:spPr>
           <a:xfrm>
-            <a:off x="0" y="1595880"/>
-            <a:ext cx="4816080" cy="4116960"/>
+            <a:off x="2057400" y="1143000"/>
+            <a:ext cx="4571640" cy="4800240"/>
           </a:xfrm>
           <a:prstGeom prst="rect">
             <a:avLst/>
@@ -5961,7 +6891,7 @@
       </p:pic>
       <p:pic>
         <p:nvPicPr>
-          <p:cNvPr id="96" name="Picture 4"/>
+          <p:cNvPr id="100" name=""/>
           <p:cNvPicPr/>
           <p:nvPr/>
         </p:nvPicPr>
@@ -5971,8 +6901,8 @@
         </p:blipFill>
         <p:spPr>
           <a:xfrm>
-            <a:off x="5715000" y="1582920"/>
-            <a:ext cx="4829040" cy="4129920"/>
+            <a:off x="6813000" y="1143000"/>
+            <a:ext cx="5302440" cy="4800240"/>
           </a:xfrm>
           <a:prstGeom prst="rect">
             <a:avLst/>
@@ -6015,14 +6945,18 @@
       </p:grpSpPr>
       <p:sp>
         <p:nvSpPr>
-          <p:cNvPr id="97" name="PlaceHolder 8"/>
-          <p:cNvSpPr/>
-          <p:nvPr/>
+          <p:cNvPr id="101" name="PlaceHolder 1"/>
+          <p:cNvSpPr>
+            <a:spLocks noGrp="1"/>
+          </p:cNvSpPr>
+          <p:nvPr>
+            <p:ph type="title"/>
+          </p:nvPr>
         </p:nvSpPr>
         <p:spPr>
           <a:xfrm>
-            <a:off x="609480" y="140400"/>
-            <a:ext cx="3503160" cy="670680"/>
+            <a:off x="609480" y="135360"/>
+            <a:ext cx="2583720" cy="680040"/>
           </a:xfrm>
           <a:prstGeom prst="rect">
             <a:avLst/>
@@ -6032,21 +6966,16 @@
             <a:noFill/>
           </a:ln>
         </p:spPr>
-        <p:style>
-          <a:lnRef idx="0"/>
-          <a:fillRef idx="0"/>
-          <a:effectRef idx="0"/>
-          <a:fontRef idx="minor"/>
-        </p:style>
         <p:txBody>
           <a:bodyPr lIns="0" rIns="0" tIns="0" bIns="0" anchor="ctr">
             <a:spAutoFit/>
           </a:bodyPr>
           <a:p>
-            <a:pPr algn="ctr" defTabSz="914400">
-              <a:lnSpc>
-                <a:spcPct val="100000"/>
-              </a:lnSpc>
+            <a:pPr indent="0" algn="ctr">
+              <a:lnSpc>
+                <a:spcPct val="100000"/>
+              </a:lnSpc>
+              <a:buNone/>
               <a:tabLst>
                 <a:tab algn="l" pos="0"/>
               </a:tabLst>
@@ -6059,9 +6988,8 @@
                 <a:effectLst/>
                 <a:uFillTx/>
                 <a:latin typeface="Arial"/>
-                <a:ea typeface="SimSun"/>
-              </a:rPr>
-              <a:t>L3 1 CELLS</a:t>
+              </a:rPr>
+              <a:t>L3 1</a:t>
             </a:r>
             <a:endParaRPr lang="en-US" sz="4400" b="0" u="none" strike="noStrike">
               <a:solidFill>
@@ -6076,7 +7004,7 @@
       </p:sp>
       <p:pic>
         <p:nvPicPr>
-          <p:cNvPr id="98" name=""/>
+          <p:cNvPr id="102" name="Picture 3"/>
           <p:cNvPicPr/>
           <p:nvPr/>
         </p:nvPicPr>
@@ -6086,8 +7014,8 @@
         </p:blipFill>
         <p:spPr>
           <a:xfrm>
-            <a:off x="217080" y="1600200"/>
-            <a:ext cx="5337360" cy="4114800"/>
+            <a:off x="0" y="1595880"/>
+            <a:ext cx="4815720" cy="4116600"/>
           </a:xfrm>
           <a:prstGeom prst="rect">
             <a:avLst/>
@@ -6100,7 +7028,7 @@
       </p:pic>
       <p:pic>
         <p:nvPicPr>
-          <p:cNvPr id="99" name=""/>
+          <p:cNvPr id="103" name="Picture 4"/>
           <p:cNvPicPr/>
           <p:nvPr/>
         </p:nvPicPr>
@@ -6110,8 +7038,8 @@
         </p:blipFill>
         <p:spPr>
           <a:xfrm>
-            <a:off x="5675040" y="1600200"/>
-            <a:ext cx="5297760" cy="4084560"/>
+            <a:off x="5715000" y="1582920"/>
+            <a:ext cx="4828680" cy="4129560"/>
           </a:xfrm>
           <a:prstGeom prst="rect">
             <a:avLst/>
@@ -6154,14 +7082,14 @@
       </p:grpSpPr>
       <p:sp>
         <p:nvSpPr>
-          <p:cNvPr id="100" name="PlaceHolder 10"/>
+          <p:cNvPr id="104" name="PlaceHolder 8"/>
           <p:cNvSpPr/>
           <p:nvPr/>
         </p:nvSpPr>
         <p:spPr>
           <a:xfrm>
             <a:off x="609480" y="140400"/>
-            <a:ext cx="3503160" cy="670680"/>
+            <a:ext cx="3502800" cy="670320"/>
           </a:xfrm>
           <a:prstGeom prst="rect">
             <a:avLst/>
@@ -6215,7 +7143,7 @@
       </p:sp>
       <p:pic>
         <p:nvPicPr>
-          <p:cNvPr id="101" name=""/>
+          <p:cNvPr id="105" name=""/>
           <p:cNvPicPr/>
           <p:nvPr/>
         </p:nvPicPr>
@@ -6225,8 +7153,8 @@
         </p:blipFill>
         <p:spPr>
           <a:xfrm>
-            <a:off x="6172200" y="1537560"/>
-            <a:ext cx="5715000" cy="4406040"/>
+            <a:off x="217080" y="1600200"/>
+            <a:ext cx="5337000" cy="4114440"/>
           </a:xfrm>
           <a:prstGeom prst="rect">
             <a:avLst/>
@@ -6239,7 +7167,7 @@
       </p:pic>
       <p:pic>
         <p:nvPicPr>
-          <p:cNvPr id="102" name=""/>
+          <p:cNvPr id="106" name=""/>
           <p:cNvPicPr/>
           <p:nvPr/>
         </p:nvPicPr>
@@ -6249,8 +7177,8 @@
         </p:blipFill>
         <p:spPr>
           <a:xfrm>
-            <a:off x="188640" y="1506600"/>
-            <a:ext cx="5754960" cy="4437000"/>
+            <a:off x="5675040" y="1600200"/>
+            <a:ext cx="5297400" cy="4084200"/>
           </a:xfrm>
           <a:prstGeom prst="rect">
             <a:avLst/>
@@ -6293,14 +7221,14 @@
       </p:grpSpPr>
       <p:sp>
         <p:nvSpPr>
-          <p:cNvPr id="103" name="PlaceHolder 11"/>
+          <p:cNvPr id="107" name="PlaceHolder 10"/>
           <p:cNvSpPr/>
           <p:nvPr/>
         </p:nvSpPr>
         <p:spPr>
           <a:xfrm>
-            <a:off x="468000" y="239400"/>
-            <a:ext cx="10959840" cy="669960"/>
+            <a:off x="609480" y="140400"/>
+            <a:ext cx="3502800" cy="670320"/>
           </a:xfrm>
           <a:prstGeom prst="rect">
             <a:avLst/>
@@ -6321,7 +7249,7 @@
             <a:spAutoFit/>
           </a:bodyPr>
           <a:p>
-            <a:pPr defTabSz="914400">
+            <a:pPr algn="ctr" defTabSz="914400">
               <a:lnSpc>
                 <a:spcPct val="100000"/>
               </a:lnSpc>
@@ -6339,7 +7267,7 @@
                 <a:latin typeface="Arial"/>
                 <a:ea typeface="SimSun"/>
               </a:rPr>
-              <a:t>DATASETS L3-1</a:t>
+              <a:t>L3 1 CELLS</a:t>
             </a:r>
             <a:endParaRPr lang="en-US" sz="4400" b="0" u="none" strike="noStrike">
               <a:solidFill>
@@ -6354,7 +7282,7 @@
       </p:sp>
       <p:pic>
         <p:nvPicPr>
-          <p:cNvPr id="104" name=""/>
+          <p:cNvPr id="108" name=""/>
           <p:cNvPicPr/>
           <p:nvPr/>
         </p:nvPicPr>
@@ -6364,8 +7292,8 @@
         </p:blipFill>
         <p:spPr>
           <a:xfrm>
-            <a:off x="7172640" y="0"/>
-            <a:ext cx="2885760" cy="6916320"/>
+            <a:off x="6172200" y="1537560"/>
+            <a:ext cx="5714640" cy="4405680"/>
           </a:xfrm>
           <a:prstGeom prst="rect">
             <a:avLst/>
@@ -6378,7 +7306,7 @@
       </p:pic>
       <p:pic>
         <p:nvPicPr>
-          <p:cNvPr id="105" name=""/>
+          <p:cNvPr id="109" name=""/>
           <p:cNvPicPr/>
           <p:nvPr/>
         </p:nvPicPr>
@@ -6388,8 +7316,8 @@
         </p:blipFill>
         <p:spPr>
           <a:xfrm>
-            <a:off x="2286000" y="2286000"/>
-            <a:ext cx="2900880" cy="2286000"/>
+            <a:off x="188640" y="1506600"/>
+            <a:ext cx="5754600" cy="4436640"/>
           </a:xfrm>
           <a:prstGeom prst="rect">
             <a:avLst/>
@@ -6432,14 +7360,14 @@
       </p:grpSpPr>
       <p:sp>
         <p:nvSpPr>
-          <p:cNvPr id="106" name="PlaceHolder 6"/>
+          <p:cNvPr id="110" name="PlaceHolder 11"/>
           <p:cNvSpPr/>
           <p:nvPr/>
         </p:nvSpPr>
         <p:spPr>
           <a:xfrm>
-            <a:off x="609480" y="137520"/>
-            <a:ext cx="10959840" cy="676440"/>
+            <a:off x="468000" y="239400"/>
+            <a:ext cx="10959480" cy="669600"/>
           </a:xfrm>
           <a:prstGeom prst="rect">
             <a:avLst/>
@@ -6478,7 +7406,7 @@
                 <a:latin typeface="Arial"/>
                 <a:ea typeface="SimSun"/>
               </a:rPr>
-              <a:t>L3 1(manual analysis)</a:t>
+              <a:t>DATASETS L3-1</a:t>
             </a:r>
             <a:endParaRPr lang="en-US" sz="4400" b="0" u="none" strike="noStrike">
               <a:solidFill>
@@ -6493,7 +7421,7 @@
       </p:sp>
       <p:pic>
         <p:nvPicPr>
-          <p:cNvPr id="107" name="Picture 101"/>
+          <p:cNvPr id="111" name=""/>
           <p:cNvPicPr/>
           <p:nvPr/>
         </p:nvPicPr>
@@ -6503,8 +7431,32 @@
         </p:blipFill>
         <p:spPr>
           <a:xfrm>
-            <a:off x="2057400" y="1143000"/>
-            <a:ext cx="7852680" cy="5484240"/>
+            <a:off x="7172640" y="0"/>
+            <a:ext cx="2885400" cy="6915960"/>
+          </a:xfrm>
+          <a:prstGeom prst="rect">
+            <a:avLst/>
+          </a:prstGeom>
+          <a:noFill/>
+          <a:ln w="0">
+            <a:noFill/>
+          </a:ln>
+        </p:spPr>
+      </p:pic>
+      <p:pic>
+        <p:nvPicPr>
+          <p:cNvPr id="112" name=""/>
+          <p:cNvPicPr/>
+          <p:nvPr/>
+        </p:nvPicPr>
+        <p:blipFill>
+          <a:blip r:embed="rId2"/>
+          <a:stretch/>
+        </p:blipFill>
+        <p:spPr>
+          <a:xfrm>
+            <a:off x="2286000" y="2286000"/>
+            <a:ext cx="2900520" cy="2285640"/>
           </a:xfrm>
           <a:prstGeom prst="rect">
             <a:avLst/>
@@ -6547,14 +7499,14 @@
       </p:grpSpPr>
       <p:sp>
         <p:nvSpPr>
-          <p:cNvPr id="108" name="PlaceHolder 5"/>
+          <p:cNvPr id="113" name="PlaceHolder 6"/>
           <p:cNvSpPr/>
           <p:nvPr/>
         </p:nvSpPr>
         <p:spPr>
           <a:xfrm>
-            <a:off x="470160" y="75600"/>
-            <a:ext cx="10959840" cy="549360"/>
+            <a:off x="609480" y="137520"/>
+            <a:ext cx="10959480" cy="676080"/>
           </a:xfrm>
           <a:prstGeom prst="rect">
             <a:avLst/>
@@ -6584,7 +7536,7 @@
               </a:tabLst>
             </a:pPr>
             <a:r>
-              <a:rPr lang="en-US" sz="3600" b="1" u="none" strike="noStrike">
+              <a:rPr lang="en-US" sz="4400" b="1" u="none" strike="noStrike">
                 <a:solidFill>
                   <a:srgbClr val="ff0000"/>
                 </a:solidFill>
@@ -6593,137 +7545,9 @@
                 <a:latin typeface="Arial"/>
                 <a:ea typeface="SimSun"/>
               </a:rPr>
-              <a:t>L3 1(CELL IMAGES, SAME PARAMETERS GUI)</a:t>
-            </a:r>
-            <a:endParaRPr lang="en-US" sz="3600" b="0" u="none" strike="noStrike">
-              <a:solidFill>
-                <a:srgbClr val="000000"/>
-              </a:solidFill>
-              <a:effectLst/>
-              <a:uFillTx/>
-              <a:latin typeface="Arial"/>
-            </a:endParaRPr>
-          </a:p>
-        </p:txBody>
-      </p:sp>
-      <p:sp>
-        <p:nvSpPr>
-          <p:cNvPr id="109" name="PlaceHolder 7"/>
-          <p:cNvSpPr/>
-          <p:nvPr/>
-        </p:nvSpPr>
-        <p:spPr>
-          <a:xfrm>
-            <a:off x="228600" y="685800"/>
-            <a:ext cx="4572000" cy="749160"/>
-          </a:xfrm>
-          <a:prstGeom prst="rect">
-            <a:avLst/>
-          </a:prstGeom>
-          <a:noFill/>
-          <a:ln w="9360">
-            <a:solidFill>
-              <a:srgbClr val="2a6099"/>
-            </a:solidFill>
-            <a:round/>
-          </a:ln>
-        </p:spPr>
-        <p:style>
-          <a:lnRef idx="0"/>
-          <a:fillRef idx="0"/>
-          <a:effectRef idx="0"/>
-          <a:fontRef idx="minor"/>
-        </p:style>
-        <p:txBody>
-          <a:bodyPr lIns="90000" rIns="90000" tIns="45000" bIns="45000" anchor="ctr">
-            <a:noAutofit/>
-          </a:bodyPr>
-          <a:p>
-            <a:pPr defTabSz="914400">
-              <a:lnSpc>
-                <a:spcPct val="100000"/>
-              </a:lnSpc>
-              <a:tabLst>
-                <a:tab algn="l" pos="0"/>
-              </a:tabLst>
-            </a:pPr>
-            <a:r>
-              <a:rPr lang="en-US" sz="3600" b="1" u="none" strike="noStrike">
-                <a:solidFill>
-                  <a:srgbClr val="ff0000"/>
-                </a:solidFill>
-                <a:effectLst/>
-                <a:uFillTx/>
-                <a:latin typeface="Arial"/>
-                <a:ea typeface="SimSun"/>
-              </a:rPr>
-              <a:t>WITH SPOTIFLOW</a:t>
-            </a:r>
-            <a:endParaRPr lang="en-US" sz="3600" b="0" u="none" strike="noStrike">
-              <a:solidFill>
-                <a:srgbClr val="000000"/>
-              </a:solidFill>
-              <a:effectLst/>
-              <a:uFillTx/>
-              <a:latin typeface="Arial"/>
-            </a:endParaRPr>
-          </a:p>
-        </p:txBody>
-      </p:sp>
-      <p:sp>
-        <p:nvSpPr>
-          <p:cNvPr id="110" name="PlaceHolder 12"/>
-          <p:cNvSpPr/>
-          <p:nvPr/>
-        </p:nvSpPr>
-        <p:spPr>
-          <a:xfrm>
-            <a:off x="6629400" y="685800"/>
-            <a:ext cx="5257800" cy="749160"/>
-          </a:xfrm>
-          <a:prstGeom prst="rect">
-            <a:avLst/>
-          </a:prstGeom>
-          <a:noFill/>
-          <a:ln w="9360">
-            <a:solidFill>
-              <a:srgbClr val="2a6099"/>
-            </a:solidFill>
-            <a:round/>
-          </a:ln>
-        </p:spPr>
-        <p:style>
-          <a:lnRef idx="0"/>
-          <a:fillRef idx="0"/>
-          <a:effectRef idx="0"/>
-          <a:fontRef idx="minor"/>
-        </p:style>
-        <p:txBody>
-          <a:bodyPr lIns="90000" rIns="90000" tIns="45000" bIns="45000" anchor="ctr">
-            <a:noAutofit/>
-          </a:bodyPr>
-          <a:p>
-            <a:pPr defTabSz="914400">
-              <a:lnSpc>
-                <a:spcPct val="100000"/>
-              </a:lnSpc>
-              <a:tabLst>
-                <a:tab algn="l" pos="0"/>
-              </a:tabLst>
-            </a:pPr>
-            <a:r>
-              <a:rPr lang="en-US" sz="3600" b="1" u="none" strike="noStrike">
-                <a:solidFill>
-                  <a:srgbClr val="ff0000"/>
-                </a:solidFill>
-                <a:effectLst/>
-                <a:uFillTx/>
-                <a:latin typeface="Arial"/>
-                <a:ea typeface="SimSun"/>
-              </a:rPr>
-              <a:t>WITHOUT SPOTIFLOW</a:t>
-            </a:r>
-            <a:endParaRPr lang="en-US" sz="3600" b="0" u="none" strike="noStrike">
+              <a:t>L3 1(manual analysis)</a:t>
+            </a:r>
+            <a:endParaRPr lang="en-US" sz="4400" b="0" u="none" strike="noStrike">
               <a:solidFill>
                 <a:srgbClr val="000000"/>
               </a:solidFill>
@@ -6736,7 +7560,7 @@
       </p:sp>
       <p:pic>
         <p:nvPicPr>
-          <p:cNvPr id="111" name=""/>
+          <p:cNvPr id="114" name="Picture 101"/>
           <p:cNvPicPr/>
           <p:nvPr/>
         </p:nvPicPr>
@@ -6746,219 +7570,8 @@
         </p:blipFill>
         <p:spPr>
           <a:xfrm>
-            <a:off x="0" y="1828800"/>
-            <a:ext cx="2965680" cy="2286000"/>
-          </a:xfrm>
-          <a:prstGeom prst="rect">
-            <a:avLst/>
-          </a:prstGeom>
-          <a:noFill/>
-          <a:ln w="0">
-            <a:noFill/>
-          </a:ln>
-        </p:spPr>
-      </p:pic>
-      <p:pic>
-        <p:nvPicPr>
-          <p:cNvPr id="112" name=""/>
-          <p:cNvPicPr/>
-          <p:nvPr/>
-        </p:nvPicPr>
-        <p:blipFill>
-          <a:blip r:embed="rId2"/>
-          <a:stretch/>
-        </p:blipFill>
-        <p:spPr>
-          <a:xfrm>
-            <a:off x="2971800" y="1828800"/>
-            <a:ext cx="2964600" cy="2286000"/>
-          </a:xfrm>
-          <a:prstGeom prst="rect">
-            <a:avLst/>
-          </a:prstGeom>
-          <a:noFill/>
-          <a:ln w="0">
-            <a:noFill/>
-          </a:ln>
-        </p:spPr>
-      </p:pic>
-      <p:pic>
-        <p:nvPicPr>
-          <p:cNvPr id="113" name=""/>
-          <p:cNvPicPr/>
-          <p:nvPr/>
-        </p:nvPicPr>
-        <p:blipFill>
-          <a:blip r:embed="rId3"/>
-          <a:stretch/>
-        </p:blipFill>
-        <p:spPr>
-          <a:xfrm>
-            <a:off x="0" y="4572000"/>
-            <a:ext cx="2965320" cy="2286000"/>
-          </a:xfrm>
-          <a:prstGeom prst="rect">
-            <a:avLst/>
-          </a:prstGeom>
-          <a:noFill/>
-          <a:ln w="0">
-            <a:noFill/>
-          </a:ln>
-        </p:spPr>
-      </p:pic>
-      <p:pic>
-        <p:nvPicPr>
-          <p:cNvPr id="114" name=""/>
-          <p:cNvPicPr/>
-          <p:nvPr/>
-        </p:nvPicPr>
-        <p:blipFill>
-          <a:blip r:embed="rId4"/>
-          <a:stretch/>
-        </p:blipFill>
-        <p:spPr>
-          <a:xfrm>
-            <a:off x="2971800" y="4572000"/>
-            <a:ext cx="2978280" cy="2296080"/>
-          </a:xfrm>
-          <a:prstGeom prst="rect">
-            <a:avLst/>
-          </a:prstGeom>
-          <a:noFill/>
-          <a:ln w="0">
-            <a:noFill/>
-          </a:ln>
-        </p:spPr>
-      </p:pic>
-      <p:pic>
-        <p:nvPicPr>
-          <p:cNvPr id="115" name=""/>
-          <p:cNvPicPr/>
-          <p:nvPr/>
-        </p:nvPicPr>
-        <p:blipFill>
-          <a:blip r:embed="rId5"/>
-          <a:stretch/>
-        </p:blipFill>
-        <p:spPr>
-          <a:xfrm>
-            <a:off x="6172200" y="1828800"/>
-            <a:ext cx="2798640" cy="2386800"/>
-          </a:xfrm>
-          <a:prstGeom prst="rect">
-            <a:avLst/>
-          </a:prstGeom>
-          <a:noFill/>
-          <a:ln w="0">
-            <a:noFill/>
-          </a:ln>
-        </p:spPr>
-      </p:pic>
-      <p:sp>
-        <p:nvSpPr>
-          <p:cNvPr id="116" name=""/>
-          <p:cNvSpPr/>
-          <p:nvPr/>
-        </p:nvSpPr>
-        <p:spPr>
-          <a:xfrm>
-            <a:off x="5943600" y="685800"/>
-            <a:ext cx="6480" cy="6182280"/>
-          </a:xfrm>
-          <a:prstGeom prst="line">
-            <a:avLst/>
-          </a:prstGeom>
-          <a:ln w="91440">
-            <a:solidFill>
-              <a:srgbClr val="00a933"/>
-            </a:solidFill>
-            <a:round/>
-          </a:ln>
-        </p:spPr>
-        <p:style>
-          <a:lnRef idx="0"/>
-          <a:fillRef idx="0"/>
-          <a:effectRef idx="0"/>
-          <a:fontRef idx="minor"/>
-        </p:style>
-        <p:txBody>
-          <a:bodyPr lIns="90000" rIns="90000" tIns="45000" bIns="45000" anchor="ctr">
-            <a:noAutofit/>
-          </a:bodyPr>
-          <a:p>
-            <a:endParaRPr lang="en-US" sz="1800" b="0" u="none" strike="noStrike">
-              <a:solidFill>
-                <a:srgbClr val="000000"/>
-              </a:solidFill>
-              <a:effectLst/>
-              <a:uFillTx/>
-              <a:latin typeface="Arial"/>
-            </a:endParaRPr>
-          </a:p>
-        </p:txBody>
-      </p:sp>
-      <p:pic>
-        <p:nvPicPr>
-          <p:cNvPr id="117" name=""/>
-          <p:cNvPicPr/>
-          <p:nvPr/>
-        </p:nvPicPr>
-        <p:blipFill>
-          <a:blip r:embed="rId6"/>
-          <a:stretch/>
-        </p:blipFill>
-        <p:spPr>
-          <a:xfrm>
-            <a:off x="9372600" y="1775160"/>
-            <a:ext cx="2743200" cy="2339640"/>
-          </a:xfrm>
-          <a:prstGeom prst="rect">
-            <a:avLst/>
-          </a:prstGeom>
-          <a:noFill/>
-          <a:ln w="0">
-            <a:noFill/>
-          </a:ln>
-        </p:spPr>
-      </p:pic>
-      <p:pic>
-        <p:nvPicPr>
-          <p:cNvPr id="118" name=""/>
-          <p:cNvPicPr/>
-          <p:nvPr/>
-        </p:nvPicPr>
-        <p:blipFill>
-          <a:blip r:embed="rId7"/>
-          <a:stretch/>
-        </p:blipFill>
-        <p:spPr>
-          <a:xfrm>
-            <a:off x="6195240" y="4353480"/>
-            <a:ext cx="2948760" cy="2514600"/>
-          </a:xfrm>
-          <a:prstGeom prst="rect">
-            <a:avLst/>
-          </a:prstGeom>
-          <a:noFill/>
-          <a:ln w="0">
-            <a:noFill/>
-          </a:ln>
-        </p:spPr>
-      </p:pic>
-      <p:pic>
-        <p:nvPicPr>
-          <p:cNvPr id="119" name=""/>
-          <p:cNvPicPr/>
-          <p:nvPr/>
-        </p:nvPicPr>
-        <p:blipFill>
-          <a:blip r:embed="rId8"/>
-          <a:stretch/>
-        </p:blipFill>
-        <p:spPr>
-          <a:xfrm>
-            <a:off x="9243360" y="4343400"/>
-            <a:ext cx="2948760" cy="2514600"/>
+            <a:off x="2057400" y="1143000"/>
+            <a:ext cx="7852320" cy="5483880"/>
           </a:xfrm>
           <a:prstGeom prst="rect">
             <a:avLst/>
@@ -7001,14 +7614,14 @@
       </p:grpSpPr>
       <p:sp>
         <p:nvSpPr>
-          <p:cNvPr id="120" name="PlaceHolder 16"/>
+          <p:cNvPr id="115" name="PlaceHolder 5"/>
           <p:cNvSpPr/>
           <p:nvPr/>
         </p:nvSpPr>
         <p:spPr>
           <a:xfrm>
-            <a:off x="457200" y="228600"/>
-            <a:ext cx="10959840" cy="1339920"/>
+            <a:off x="470160" y="75600"/>
+            <a:ext cx="10959480" cy="549000"/>
           </a:xfrm>
           <a:prstGeom prst="rect">
             <a:avLst/>
@@ -7038,7 +7651,7 @@
               </a:tabLst>
             </a:pPr>
             <a:r>
-              <a:rPr lang="en-US" sz="4400" b="1" u="none" strike="noStrike">
+              <a:rPr lang="en-US" sz="3600" b="1" u="none" strike="noStrike">
                 <a:solidFill>
                   <a:srgbClr val="ff0000"/>
                 </a:solidFill>
@@ -7047,9 +7660,9 @@
                 <a:latin typeface="Arial"/>
                 <a:ea typeface="SimSun"/>
               </a:rPr>
-              <a:t>L3 1(manual.VS.aut spotiflow, not spotiflow)</a:t>
-            </a:r>
-            <a:endParaRPr lang="en-US" sz="4400" b="0" u="none" strike="noStrike">
+              <a:t>L3 1(CELL IMAGES, SAME PARAMETERS GUI)</a:t>
+            </a:r>
+            <a:endParaRPr lang="en-US" sz="3600" b="0" u="none" strike="noStrike">
               <a:solidFill>
                 <a:srgbClr val="000000"/>
               </a:solidFill>
@@ -7060,6 +7673,206 @@
           </a:p>
         </p:txBody>
       </p:sp>
+      <p:sp>
+        <p:nvSpPr>
+          <p:cNvPr id="116" name="PlaceHolder 7"/>
+          <p:cNvSpPr/>
+          <p:nvPr/>
+        </p:nvSpPr>
+        <p:spPr>
+          <a:xfrm>
+            <a:off x="228600" y="685800"/>
+            <a:ext cx="4571640" cy="748800"/>
+          </a:xfrm>
+          <a:prstGeom prst="rect">
+            <a:avLst/>
+          </a:prstGeom>
+          <a:noFill/>
+          <a:ln w="9360">
+            <a:solidFill>
+              <a:srgbClr val="2a6099"/>
+            </a:solidFill>
+            <a:round/>
+          </a:ln>
+        </p:spPr>
+        <p:style>
+          <a:lnRef idx="0"/>
+          <a:fillRef idx="0"/>
+          <a:effectRef idx="0"/>
+          <a:fontRef idx="minor"/>
+        </p:style>
+        <p:txBody>
+          <a:bodyPr lIns="90000" rIns="90000" tIns="45000" bIns="45000" anchor="ctr">
+            <a:noAutofit/>
+          </a:bodyPr>
+          <a:p>
+            <a:pPr defTabSz="914400">
+              <a:lnSpc>
+                <a:spcPct val="100000"/>
+              </a:lnSpc>
+              <a:tabLst>
+                <a:tab algn="l" pos="0"/>
+              </a:tabLst>
+            </a:pPr>
+            <a:r>
+              <a:rPr lang="en-US" sz="3600" b="1" u="none" strike="noStrike">
+                <a:solidFill>
+                  <a:srgbClr val="ff0000"/>
+                </a:solidFill>
+                <a:effectLst/>
+                <a:uFillTx/>
+                <a:latin typeface="Arial"/>
+                <a:ea typeface="SimSun"/>
+              </a:rPr>
+              <a:t>WITH SPOTIFLOW</a:t>
+            </a:r>
+            <a:endParaRPr lang="en-US" sz="3600" b="0" u="none" strike="noStrike">
+              <a:solidFill>
+                <a:srgbClr val="000000"/>
+              </a:solidFill>
+              <a:effectLst/>
+              <a:uFillTx/>
+              <a:latin typeface="Arial"/>
+            </a:endParaRPr>
+          </a:p>
+        </p:txBody>
+      </p:sp>
+      <p:sp>
+        <p:nvSpPr>
+          <p:cNvPr id="117" name="PlaceHolder 12"/>
+          <p:cNvSpPr/>
+          <p:nvPr/>
+        </p:nvSpPr>
+        <p:spPr>
+          <a:xfrm>
+            <a:off x="6629400" y="685800"/>
+            <a:ext cx="5257440" cy="748800"/>
+          </a:xfrm>
+          <a:prstGeom prst="rect">
+            <a:avLst/>
+          </a:prstGeom>
+          <a:noFill/>
+          <a:ln w="9360">
+            <a:solidFill>
+              <a:srgbClr val="2a6099"/>
+            </a:solidFill>
+            <a:round/>
+          </a:ln>
+        </p:spPr>
+        <p:style>
+          <a:lnRef idx="0"/>
+          <a:fillRef idx="0"/>
+          <a:effectRef idx="0"/>
+          <a:fontRef idx="minor"/>
+        </p:style>
+        <p:txBody>
+          <a:bodyPr lIns="90000" rIns="90000" tIns="45000" bIns="45000" anchor="ctr">
+            <a:noAutofit/>
+          </a:bodyPr>
+          <a:p>
+            <a:pPr defTabSz="914400">
+              <a:lnSpc>
+                <a:spcPct val="100000"/>
+              </a:lnSpc>
+              <a:tabLst>
+                <a:tab algn="l" pos="0"/>
+              </a:tabLst>
+            </a:pPr>
+            <a:r>
+              <a:rPr lang="en-US" sz="3600" b="1" u="none" strike="noStrike">
+                <a:solidFill>
+                  <a:srgbClr val="ff0000"/>
+                </a:solidFill>
+                <a:effectLst/>
+                <a:uFillTx/>
+                <a:latin typeface="Arial"/>
+                <a:ea typeface="SimSun"/>
+              </a:rPr>
+              <a:t>WITHOUT SPOTIFLOW</a:t>
+            </a:r>
+            <a:endParaRPr lang="en-US" sz="3600" b="0" u="none" strike="noStrike">
+              <a:solidFill>
+                <a:srgbClr val="000000"/>
+              </a:solidFill>
+              <a:effectLst/>
+              <a:uFillTx/>
+              <a:latin typeface="Arial"/>
+            </a:endParaRPr>
+          </a:p>
+        </p:txBody>
+      </p:sp>
+      <p:pic>
+        <p:nvPicPr>
+          <p:cNvPr id="118" name=""/>
+          <p:cNvPicPr/>
+          <p:nvPr/>
+        </p:nvPicPr>
+        <p:blipFill>
+          <a:blip r:embed="rId1"/>
+          <a:stretch/>
+        </p:blipFill>
+        <p:spPr>
+          <a:xfrm>
+            <a:off x="0" y="1828800"/>
+            <a:ext cx="2965320" cy="2285640"/>
+          </a:xfrm>
+          <a:prstGeom prst="rect">
+            <a:avLst/>
+          </a:prstGeom>
+          <a:noFill/>
+          <a:ln w="0">
+            <a:noFill/>
+          </a:ln>
+        </p:spPr>
+      </p:pic>
+      <p:pic>
+        <p:nvPicPr>
+          <p:cNvPr id="119" name=""/>
+          <p:cNvPicPr/>
+          <p:nvPr/>
+        </p:nvPicPr>
+        <p:blipFill>
+          <a:blip r:embed="rId2"/>
+          <a:stretch/>
+        </p:blipFill>
+        <p:spPr>
+          <a:xfrm>
+            <a:off x="2971800" y="1828800"/>
+            <a:ext cx="2964240" cy="2285640"/>
+          </a:xfrm>
+          <a:prstGeom prst="rect">
+            <a:avLst/>
+          </a:prstGeom>
+          <a:noFill/>
+          <a:ln w="0">
+            <a:noFill/>
+          </a:ln>
+        </p:spPr>
+      </p:pic>
+      <p:pic>
+        <p:nvPicPr>
+          <p:cNvPr id="120" name=""/>
+          <p:cNvPicPr/>
+          <p:nvPr/>
+        </p:nvPicPr>
+        <p:blipFill>
+          <a:blip r:embed="rId3"/>
+          <a:stretch/>
+        </p:blipFill>
+        <p:spPr>
+          <a:xfrm>
+            <a:off x="0" y="4572000"/>
+            <a:ext cx="2964960" cy="2285640"/>
+          </a:xfrm>
+          <a:prstGeom prst="rect">
+            <a:avLst/>
+          </a:prstGeom>
+          <a:noFill/>
+          <a:ln w="0">
+            <a:noFill/>
+          </a:ln>
+        </p:spPr>
+      </p:pic>
       <p:pic>
         <p:nvPicPr>
           <p:cNvPr id="121" name=""/>
@@ -7067,13 +7880,13 @@
           <p:nvPr/>
         </p:nvPicPr>
         <p:blipFill>
-          <a:blip r:embed="rId1"/>
+          <a:blip r:embed="rId4"/>
           <a:stretch/>
         </p:blipFill>
         <p:spPr>
           <a:xfrm>
-            <a:off x="457200" y="1600200"/>
-            <a:ext cx="4444560" cy="1161720"/>
+            <a:off x="2971800" y="4572000"/>
+            <a:ext cx="2977920" cy="2295720"/>
           </a:xfrm>
           <a:prstGeom prst="rect">
             <a:avLst/>
@@ -7091,13 +7904,13 @@
           <p:nvPr/>
         </p:nvPicPr>
         <p:blipFill>
-          <a:blip r:embed="rId2"/>
+          <a:blip r:embed="rId5"/>
           <a:stretch/>
         </p:blipFill>
         <p:spPr>
           <a:xfrm>
-            <a:off x="1143000" y="2743200"/>
-            <a:ext cx="2964600" cy="2286000"/>
+            <a:off x="6172200" y="1828800"/>
+            <a:ext cx="2798280" cy="2386440"/>
           </a:xfrm>
           <a:prstGeom prst="rect">
             <a:avLst/>
@@ -7108,30 +7921,50 @@
           </a:ln>
         </p:spPr>
       </p:pic>
-      <p:pic>
-        <p:nvPicPr>
+      <p:sp>
+        <p:nvSpPr>
           <p:cNvPr id="123" name=""/>
-          <p:cNvPicPr/>
+          <p:cNvSpPr/>
           <p:nvPr/>
-        </p:nvPicPr>
-        <p:blipFill>
-          <a:blip r:embed="rId3"/>
-          <a:stretch/>
-        </p:blipFill>
-        <p:spPr>
-          <a:xfrm>
-            <a:off x="5991480" y="1591200"/>
-            <a:ext cx="4469040" cy="1152000"/>
-          </a:xfrm>
-          <a:prstGeom prst="rect">
-            <a:avLst/>
-          </a:prstGeom>
-          <a:noFill/>
-          <a:ln w="0">
-            <a:noFill/>
-          </a:ln>
-        </p:spPr>
-      </p:pic>
+        </p:nvSpPr>
+        <p:spPr>
+          <a:xfrm>
+            <a:off x="5943600" y="685800"/>
+            <a:ext cx="6480" cy="6182280"/>
+          </a:xfrm>
+          <a:prstGeom prst="line">
+            <a:avLst/>
+          </a:prstGeom>
+          <a:ln w="91440">
+            <a:solidFill>
+              <a:srgbClr val="00a933"/>
+            </a:solidFill>
+            <a:round/>
+          </a:ln>
+        </p:spPr>
+        <p:style>
+          <a:lnRef idx="0"/>
+          <a:fillRef idx="0"/>
+          <a:effectRef idx="0"/>
+          <a:fontRef idx="minor"/>
+        </p:style>
+        <p:txBody>
+          <a:bodyPr lIns="90000" rIns="90000" tIns="45000" bIns="45000" anchor="ctr">
+            <a:noAutofit/>
+          </a:bodyPr>
+          <a:p>
+            <a:endParaRPr lang="en-US" sz="1800" b="0" u="none" strike="noStrike">
+              <a:solidFill>
+                <a:srgbClr val="000000"/>
+              </a:solidFill>
+              <a:effectLst/>
+              <a:uFillTx/>
+              <a:latin typeface="Arial"/>
+              <a:ea typeface="SimSun"/>
+            </a:endParaRPr>
+          </a:p>
+        </p:txBody>
+      </p:sp>
       <p:pic>
         <p:nvPicPr>
           <p:cNvPr id="124" name=""/>
@@ -7139,13 +7972,13 @@
           <p:nvPr/>
         </p:nvPicPr>
         <p:blipFill>
-          <a:blip r:embed="rId4"/>
+          <a:blip r:embed="rId6"/>
           <a:stretch/>
         </p:blipFill>
         <p:spPr>
           <a:xfrm>
-            <a:off x="7020000" y="2743200"/>
-            <a:ext cx="2809800" cy="2396520"/>
+            <a:off x="9372600" y="1775160"/>
+            <a:ext cx="2742840" cy="2339280"/>
           </a:xfrm>
           <a:prstGeom prst="rect">
             <a:avLst/>
@@ -7163,13 +7996,248 @@
           <p:nvPr/>
         </p:nvPicPr>
         <p:blipFill>
+          <a:blip r:embed="rId7"/>
+          <a:stretch/>
+        </p:blipFill>
+        <p:spPr>
+          <a:xfrm>
+            <a:off x="6195240" y="4353480"/>
+            <a:ext cx="2948400" cy="2514240"/>
+          </a:xfrm>
+          <a:prstGeom prst="rect">
+            <a:avLst/>
+          </a:prstGeom>
+          <a:noFill/>
+          <a:ln w="0">
+            <a:noFill/>
+          </a:ln>
+        </p:spPr>
+      </p:pic>
+      <p:pic>
+        <p:nvPicPr>
+          <p:cNvPr id="126" name=""/>
+          <p:cNvPicPr/>
+          <p:nvPr/>
+        </p:nvPicPr>
+        <p:blipFill>
+          <a:blip r:embed="rId8"/>
+          <a:stretch/>
+        </p:blipFill>
+        <p:spPr>
+          <a:xfrm>
+            <a:off x="9243360" y="4343400"/>
+            <a:ext cx="2948400" cy="2514240"/>
+          </a:xfrm>
+          <a:prstGeom prst="rect">
+            <a:avLst/>
+          </a:prstGeom>
+          <a:noFill/>
+          <a:ln w="0">
+            <a:noFill/>
+          </a:ln>
+        </p:spPr>
+      </p:pic>
+    </p:spTree>
+  </p:cSld>
+  <mc:AlternateContent>
+    <mc:Choice Requires="p14">
+      <p:transition spd="slow" p14:dur="2000"/>
+    </mc:Choice>
+    <mc:Fallback>
+      <p:transition spd="slow"/>
+    </mc:Fallback>
+  </mc:AlternateContent>
+</p:sld>
+</file>
+
+<file path=ppt/slides/slide17.xml><?xml version="1.0" encoding="utf-8"?>
+<p:sld xmlns:a="http://schemas.openxmlformats.org/drawingml/2006/main" xmlns:p="http://schemas.openxmlformats.org/presentationml/2006/main" xmlns:r="http://schemas.openxmlformats.org/officeDocument/2006/relationships" xmlns:p14="http://schemas.microsoft.com/office/powerpoint/2010/main" xmlns:p15="http://schemas.microsoft.com/office/powerpoint/2012/main" xmlns:mc="http://schemas.openxmlformats.org/markup-compatibility/2006">
+  <p:cSld>
+    <p:spTree>
+      <p:nvGrpSpPr>
+        <p:cNvPr id="1" name=""/>
+        <p:cNvGrpSpPr/>
+        <p:nvPr/>
+      </p:nvGrpSpPr>
+      <p:grpSpPr>
+        <a:xfrm>
+          <a:off x="0" y="0"/>
+          <a:ext cx="0" cy="0"/>
+          <a:chOff x="0" y="0"/>
+          <a:chExt cx="0" cy="0"/>
+        </a:xfrm>
+      </p:grpSpPr>
+      <p:sp>
+        <p:nvSpPr>
+          <p:cNvPr id="127" name="PlaceHolder 16"/>
+          <p:cNvSpPr/>
+          <p:nvPr/>
+        </p:nvSpPr>
+        <p:spPr>
+          <a:xfrm>
+            <a:off x="457200" y="228600"/>
+            <a:ext cx="10959480" cy="1339920"/>
+          </a:xfrm>
+          <a:prstGeom prst="rect">
+            <a:avLst/>
+          </a:prstGeom>
+          <a:noFill/>
+          <a:ln w="0">
+            <a:noFill/>
+          </a:ln>
+        </p:spPr>
+        <p:style>
+          <a:lnRef idx="0"/>
+          <a:fillRef idx="0"/>
+          <a:effectRef idx="0"/>
+          <a:fontRef idx="minor"/>
+        </p:style>
+        <p:txBody>
+          <a:bodyPr lIns="0" rIns="0" tIns="0" bIns="0" anchor="ctr">
+            <a:spAutoFit/>
+          </a:bodyPr>
+          <a:p>
+            <a:pPr defTabSz="914400">
+              <a:lnSpc>
+                <a:spcPct val="100000"/>
+              </a:lnSpc>
+              <a:tabLst>
+                <a:tab algn="l" pos="0"/>
+              </a:tabLst>
+            </a:pPr>
+            <a:r>
+              <a:rPr lang="en-US" sz="4400" b="1" u="none" strike="noStrike">
+                <a:solidFill>
+                  <a:srgbClr val="ff0000"/>
+                </a:solidFill>
+                <a:effectLst/>
+                <a:uFillTx/>
+                <a:latin typeface="Arial"/>
+                <a:ea typeface="SimSun"/>
+              </a:rPr>
+              <a:t>L3 1(manual.VS.aut spotiflow, not spotiflow)</a:t>
+            </a:r>
+            <a:endParaRPr lang="en-US" sz="4400" b="0" u="none" strike="noStrike">
+              <a:solidFill>
+                <a:srgbClr val="000000"/>
+              </a:solidFill>
+              <a:effectLst/>
+              <a:uFillTx/>
+              <a:latin typeface="Arial"/>
+            </a:endParaRPr>
+          </a:p>
+        </p:txBody>
+      </p:sp>
+      <p:pic>
+        <p:nvPicPr>
+          <p:cNvPr id="128" name=""/>
+          <p:cNvPicPr/>
+          <p:nvPr/>
+        </p:nvPicPr>
+        <p:blipFill>
+          <a:blip r:embed="rId1"/>
+          <a:stretch/>
+        </p:blipFill>
+        <p:spPr>
+          <a:xfrm>
+            <a:off x="457200" y="1600200"/>
+            <a:ext cx="4444200" cy="1161360"/>
+          </a:xfrm>
+          <a:prstGeom prst="rect">
+            <a:avLst/>
+          </a:prstGeom>
+          <a:noFill/>
+          <a:ln w="0">
+            <a:noFill/>
+          </a:ln>
+        </p:spPr>
+      </p:pic>
+      <p:pic>
+        <p:nvPicPr>
+          <p:cNvPr id="129" name=""/>
+          <p:cNvPicPr/>
+          <p:nvPr/>
+        </p:nvPicPr>
+        <p:blipFill>
+          <a:blip r:embed="rId2"/>
+          <a:stretch/>
+        </p:blipFill>
+        <p:spPr>
+          <a:xfrm>
+            <a:off x="1143000" y="2743200"/>
+            <a:ext cx="2964240" cy="2285640"/>
+          </a:xfrm>
+          <a:prstGeom prst="rect">
+            <a:avLst/>
+          </a:prstGeom>
+          <a:noFill/>
+          <a:ln w="0">
+            <a:noFill/>
+          </a:ln>
+        </p:spPr>
+      </p:pic>
+      <p:pic>
+        <p:nvPicPr>
+          <p:cNvPr id="130" name=""/>
+          <p:cNvPicPr/>
+          <p:nvPr/>
+        </p:nvPicPr>
+        <p:blipFill>
+          <a:blip r:embed="rId3"/>
+          <a:stretch/>
+        </p:blipFill>
+        <p:spPr>
+          <a:xfrm>
+            <a:off x="5991480" y="1591200"/>
+            <a:ext cx="4468680" cy="1151640"/>
+          </a:xfrm>
+          <a:prstGeom prst="rect">
+            <a:avLst/>
+          </a:prstGeom>
+          <a:noFill/>
+          <a:ln w="0">
+            <a:noFill/>
+          </a:ln>
+        </p:spPr>
+      </p:pic>
+      <p:pic>
+        <p:nvPicPr>
+          <p:cNvPr id="131" name=""/>
+          <p:cNvPicPr/>
+          <p:nvPr/>
+        </p:nvPicPr>
+        <p:blipFill>
+          <a:blip r:embed="rId4"/>
+          <a:stretch/>
+        </p:blipFill>
+        <p:spPr>
+          <a:xfrm>
+            <a:off x="7020000" y="2743200"/>
+            <a:ext cx="2809440" cy="2396160"/>
+          </a:xfrm>
+          <a:prstGeom prst="rect">
+            <a:avLst/>
+          </a:prstGeom>
+          <a:noFill/>
+          <a:ln w="0">
+            <a:noFill/>
+          </a:ln>
+        </p:spPr>
+      </p:pic>
+      <p:pic>
+        <p:nvPicPr>
+          <p:cNvPr id="132" name=""/>
+          <p:cNvPicPr/>
+          <p:nvPr/>
+        </p:nvPicPr>
+        <p:blipFill>
           <a:blip r:embed="rId5"/>
           <a:stretch/>
         </p:blipFill>
         <p:spPr>
           <a:xfrm>
             <a:off x="3610080" y="5257800"/>
-            <a:ext cx="3699000" cy="1371600"/>
+            <a:ext cx="3698640" cy="1371240"/>
           </a:xfrm>
           <a:prstGeom prst="rect">
             <a:avLst/>
@@ -7219,7 +8287,7 @@
         <p:spPr>
           <a:xfrm>
             <a:off x="1143000" y="2743560"/>
-            <a:ext cx="10959840" cy="749160"/>
+            <a:ext cx="10959480" cy="748800"/>
           </a:xfrm>
           <a:prstGeom prst="rect">
             <a:avLst/>
@@ -7313,8 +8381,8 @@
         </p:nvSpPr>
         <p:spPr>
           <a:xfrm>
-            <a:off x="609480" y="135720"/>
-            <a:ext cx="2584080" cy="679680"/>
+            <a:off x="609480" y="135360"/>
+            <a:ext cx="2583720" cy="680040"/>
           </a:xfrm>
           <a:prstGeom prst="rect">
             <a:avLst/>
@@ -7369,7 +8437,7 @@
         <p:spPr>
           <a:xfrm>
             <a:off x="1440" y="914400"/>
-            <a:ext cx="2282400" cy="5247720"/>
+            <a:ext cx="2282040" cy="5247360"/>
           </a:xfrm>
           <a:prstGeom prst="rect">
             <a:avLst/>
@@ -7558,7 +8626,7 @@
         <p:spPr>
           <a:xfrm>
             <a:off x="2142360" y="1363680"/>
-            <a:ext cx="4833720" cy="4122360"/>
+            <a:ext cx="4833360" cy="4122000"/>
           </a:xfrm>
           <a:prstGeom prst="rect">
             <a:avLst/>
@@ -7582,7 +8650,7 @@
         <p:spPr>
           <a:xfrm>
             <a:off x="7011360" y="1321200"/>
-            <a:ext cx="4883400" cy="4164840"/>
+            <a:ext cx="4883040" cy="4164480"/>
           </a:xfrm>
           <a:prstGeom prst="rect">
             <a:avLst/>
@@ -7635,8 +8703,8 @@
         </p:nvSpPr>
         <p:spPr>
           <a:xfrm>
-            <a:off x="609480" y="135720"/>
-            <a:ext cx="2584080" cy="679680"/>
+            <a:off x="609480" y="135360"/>
+            <a:ext cx="2583720" cy="680040"/>
           </a:xfrm>
           <a:prstGeom prst="rect">
             <a:avLst/>
@@ -7695,7 +8763,7 @@
         <p:spPr>
           <a:xfrm>
             <a:off x="0" y="1595880"/>
-            <a:ext cx="4816080" cy="4116960"/>
+            <a:ext cx="4815720" cy="4116600"/>
           </a:xfrm>
           <a:prstGeom prst="rect">
             <a:avLst/>
@@ -7719,7 +8787,7 @@
         <p:spPr>
           <a:xfrm>
             <a:off x="5715000" y="1582920"/>
-            <a:ext cx="4829040" cy="4129920"/>
+            <a:ext cx="4828680" cy="4129560"/>
           </a:xfrm>
           <a:prstGeom prst="rect">
             <a:avLst/>
@@ -7769,7 +8837,7 @@
         <p:spPr>
           <a:xfrm>
             <a:off x="609480" y="-193680"/>
-            <a:ext cx="3503160" cy="1338840"/>
+            <a:ext cx="3502800" cy="1338480"/>
           </a:xfrm>
           <a:prstGeom prst="rect">
             <a:avLst/>
@@ -7834,7 +8902,7 @@
         <p:spPr>
           <a:xfrm>
             <a:off x="37440" y="906480"/>
-            <a:ext cx="5905800" cy="5036760"/>
+            <a:ext cx="5905440" cy="5036400"/>
           </a:xfrm>
           <a:prstGeom prst="rect">
             <a:avLst/>
@@ -7858,7 +8926,7 @@
         <p:spPr>
           <a:xfrm>
             <a:off x="6167880" y="914400"/>
-            <a:ext cx="5947560" cy="5072400"/>
+            <a:ext cx="5947200" cy="5072040"/>
           </a:xfrm>
           <a:prstGeom prst="rect">
             <a:avLst/>
@@ -7908,7 +8976,7 @@
         <p:spPr>
           <a:xfrm>
             <a:off x="609480" y="-193680"/>
-            <a:ext cx="3503160" cy="1338840"/>
+            <a:ext cx="3502800" cy="1338480"/>
           </a:xfrm>
           <a:prstGeom prst="rect">
             <a:avLst/>
@@ -7973,7 +9041,7 @@
         <p:spPr>
           <a:xfrm>
             <a:off x="46440" y="1143000"/>
-            <a:ext cx="5896800" cy="5028840"/>
+            <a:ext cx="5896440" cy="5028480"/>
           </a:xfrm>
           <a:prstGeom prst="rect">
             <a:avLst/>
@@ -7997,7 +9065,7 @@
         <p:spPr>
           <a:xfrm>
             <a:off x="6099120" y="1135080"/>
-            <a:ext cx="5906160" cy="5036760"/>
+            <a:ext cx="5905800" cy="5036400"/>
           </a:xfrm>
           <a:prstGeom prst="rect">
             <a:avLst/>
@@ -8047,7 +9115,7 @@
         <p:spPr>
           <a:xfrm>
             <a:off x="468000" y="239400"/>
-            <a:ext cx="10959840" cy="669960"/>
+            <a:ext cx="10959480" cy="669600"/>
           </a:xfrm>
           <a:prstGeom prst="rect">
             <a:avLst/>
@@ -8112,7 +9180,7 @@
         <p:spPr>
           <a:xfrm>
             <a:off x="5976000" y="228600"/>
-            <a:ext cx="4768200" cy="6400800"/>
+            <a:ext cx="4767840" cy="6400440"/>
           </a:xfrm>
           <a:prstGeom prst="rect">
             <a:avLst/>
@@ -8136,7 +9204,7 @@
         <p:spPr>
           <a:xfrm>
             <a:off x="1572120" y="2229120"/>
-            <a:ext cx="2824920" cy="2342880"/>
+            <a:ext cx="2824560" cy="2342520"/>
           </a:xfrm>
           <a:prstGeom prst="rect">
             <a:avLst/>
@@ -8186,7 +9254,7 @@
         <p:spPr>
           <a:xfrm>
             <a:off x="1143000" y="2743560"/>
-            <a:ext cx="10959840" cy="749160"/>
+            <a:ext cx="10959480" cy="748800"/>
           </a:xfrm>
           <a:prstGeom prst="rect">
             <a:avLst/>
@@ -8270,84 +9338,21 @@
       </p:grpSpPr>
       <p:sp>
         <p:nvSpPr>
-          <p:cNvPr id="90" name="PlaceHolder 1"/>
-          <p:cNvSpPr>
-            <a:spLocks noGrp="1"/>
-          </p:cNvSpPr>
-          <p:nvPr>
-            <p:ph type="title"/>
-          </p:nvPr>
-        </p:nvSpPr>
-        <p:spPr>
-          <a:xfrm>
-            <a:off x="609480" y="135720"/>
-            <a:ext cx="2584080" cy="679680"/>
-          </a:xfrm>
-          <a:prstGeom prst="rect">
-            <a:avLst/>
-          </a:prstGeom>
-          <a:noFill/>
-          <a:ln w="0">
-            <a:noFill/>
-          </a:ln>
-        </p:spPr>
-        <p:txBody>
-          <a:bodyPr lIns="0" rIns="0" tIns="0" bIns="0" anchor="ctr">
-            <a:spAutoFit/>
-          </a:bodyPr>
-          <a:p>
-            <a:pPr indent="0" algn="ctr">
-              <a:lnSpc>
-                <a:spcPct val="100000"/>
-              </a:lnSpc>
-              <a:buNone/>
-              <a:tabLst>
-                <a:tab algn="l" pos="0"/>
-              </a:tabLst>
-            </a:pPr>
-            <a:r>
-              <a:rPr lang="en-US" sz="4400" b="1" u="none" strike="noStrike">
-                <a:solidFill>
-                  <a:srgbClr val="ff0000"/>
-                </a:solidFill>
-                <a:effectLst/>
-                <a:uFillTx/>
-                <a:latin typeface="Arial"/>
-              </a:rPr>
-              <a:t> L3 1</a:t>
-            </a:r>
-            <a:endParaRPr lang="en-US" sz="4400" b="0" u="none" strike="noStrike">
-              <a:solidFill>
-                <a:srgbClr val="000000"/>
-              </a:solidFill>
-              <a:effectLst/>
-              <a:uFillTx/>
-              <a:latin typeface="Arial"/>
-            </a:endParaRPr>
-          </a:p>
-        </p:txBody>
-      </p:sp>
-      <p:sp>
-        <p:nvSpPr>
-          <p:cNvPr id="91" name="Rectangles 2"/>
+          <p:cNvPr id="90" name="PlaceHolder 13"/>
           <p:cNvSpPr/>
           <p:nvPr/>
         </p:nvSpPr>
         <p:spPr>
           <a:xfrm>
-            <a:off x="1440" y="914400"/>
-            <a:ext cx="2282400" cy="5247720"/>
-          </a:xfrm>
-          <a:prstGeom prst="rect">
-            <a:avLst/>
-          </a:prstGeom>
-          <a:solidFill>
-            <a:srgbClr val="729fcf"/>
-          </a:solidFill>
-          <a:ln w="0">
-            <a:solidFill>
-              <a:srgbClr val="3465a4"/>
-            </a:solidFill>
+            <a:off x="228600" y="0"/>
+            <a:ext cx="10959480" cy="748800"/>
+          </a:xfrm>
+          <a:prstGeom prst="rect">
+            <a:avLst/>
+          </a:prstGeom>
+          <a:noFill/>
+          <a:ln w="9360">
+            <a:noFill/>
           </a:ln>
         </p:spPr>
         <p:style>
@@ -8365,143 +9370,23 @@
               <a:lnSpc>
                 <a:spcPct val="100000"/>
               </a:lnSpc>
-            </a:pPr>
-            <a:r>
-              <a:rPr lang="en-US" sz="1400" b="1" u="none" strike="noStrike">
-                <a:solidFill>
-                  <a:srgbClr val="000000"/>
-                </a:solidFill>
-                <a:effectLst/>
-                <a:uFillTx/>
-                <a:latin typeface="Arial"/>
-                <a:ea typeface="SimSun"/>
-              </a:rPr>
-              <a:t>Erosion = 8</a:t>
-            </a:r>
-            <a:endParaRPr lang="en-US" sz="1400" b="0" u="none" strike="noStrike">
-              <a:solidFill>
-                <a:srgbClr val="000000"/>
-              </a:solidFill>
-              <a:effectLst/>
-              <a:uFillTx/>
-              <a:latin typeface="Arial"/>
-            </a:endParaRPr>
-          </a:p>
-          <a:p>
-            <a:pPr defTabSz="914400">
-              <a:lnSpc>
-                <a:spcPct val="100000"/>
-              </a:lnSpc>
-            </a:pPr>
-            <a:r>
-              <a:rPr lang="en-US" sz="1400" b="1" u="none" strike="noStrike">
-                <a:solidFill>
-                  <a:srgbClr val="000000"/>
-                </a:solidFill>
-                <a:effectLst/>
-                <a:uFillTx/>
-                <a:latin typeface="Arial"/>
-                <a:ea typeface="SimSun"/>
-              </a:rPr>
-              <a:t>Thresholding = 0.0025</a:t>
-            </a:r>
-            <a:endParaRPr lang="en-US" sz="1400" b="0" u="none" strike="noStrike">
-              <a:solidFill>
-                <a:srgbClr val="000000"/>
-              </a:solidFill>
-              <a:effectLst/>
-              <a:uFillTx/>
-              <a:latin typeface="Arial"/>
-            </a:endParaRPr>
-          </a:p>
-          <a:p>
-            <a:pPr defTabSz="914400">
-              <a:lnSpc>
-                <a:spcPct val="100000"/>
-              </a:lnSpc>
-            </a:pPr>
-            <a:r>
-              <a:rPr lang="en-US" sz="1400" b="1" u="none" strike="noStrike">
-                <a:solidFill>
-                  <a:srgbClr val="000000"/>
-                </a:solidFill>
-                <a:effectLst/>
-                <a:uFillTx/>
-                <a:latin typeface="Arial"/>
-                <a:ea typeface="SimSun"/>
-              </a:rPr>
-              <a:t>margin um = 1.2</a:t>
-            </a:r>
-            <a:endParaRPr lang="en-US" sz="1400" b="0" u="none" strike="noStrike">
-              <a:solidFill>
-                <a:srgbClr val="000000"/>
-              </a:solidFill>
-              <a:effectLst/>
-              <a:uFillTx/>
-              <a:latin typeface="Arial"/>
-            </a:endParaRPr>
-          </a:p>
-          <a:p>
-            <a:pPr defTabSz="914400">
-              <a:lnSpc>
-                <a:spcPct val="100000"/>
-              </a:lnSpc>
-            </a:pPr>
-            <a:r>
-              <a:rPr lang="en-US" sz="1400" b="1" u="none" strike="noStrike">
-                <a:solidFill>
-                  <a:srgbClr val="000000"/>
-                </a:solidFill>
-                <a:effectLst/>
-                <a:uFillTx/>
-                <a:latin typeface="Arial"/>
-                <a:ea typeface="SimSun"/>
-              </a:rPr>
-              <a:t>overlap alpha = 0.6</a:t>
-            </a:r>
-            <a:endParaRPr lang="en-US" sz="1400" b="0" u="none" strike="noStrike">
-              <a:solidFill>
-                <a:srgbClr val="000000"/>
-              </a:solidFill>
-              <a:effectLst/>
-              <a:uFillTx/>
-              <a:latin typeface="Arial"/>
-            </a:endParaRPr>
-          </a:p>
-          <a:p>
-            <a:pPr defTabSz="914400">
-              <a:lnSpc>
-                <a:spcPct val="100000"/>
-              </a:lnSpc>
-            </a:pPr>
-            <a:r>
-              <a:rPr lang="en-US" sz="1400" b="1" u="none" strike="noStrike">
-                <a:solidFill>
-                  <a:srgbClr val="000000"/>
-                </a:solidFill>
-                <a:effectLst/>
-                <a:uFillTx/>
-                <a:latin typeface="Arial"/>
-                <a:ea typeface="SimSun"/>
-              </a:rPr>
-              <a:t>viz min voxels = 12000</a:t>
-            </a:r>
-            <a:endParaRPr lang="en-US" sz="1400" b="0" u="none" strike="noStrike">
-              <a:solidFill>
-                <a:srgbClr val="000000"/>
-              </a:solidFill>
-              <a:effectLst/>
-              <a:uFillTx/>
-              <a:latin typeface="Arial"/>
-            </a:endParaRPr>
-          </a:p>
-          <a:p>
-            <a:pPr defTabSz="914400">
-              <a:lnSpc>
-                <a:spcPct val="100000"/>
-              </a:lnSpc>
-            </a:pPr>
-            <a:endParaRPr lang="en-US" sz="1400" b="0" u="none" strike="noStrike">
+              <a:tabLst>
+                <a:tab algn="l" pos="0"/>
+              </a:tabLst>
+            </a:pPr>
+            <a:r>
+              <a:rPr lang="en-US" sz="3600" b="1" u="none" strike="noStrike">
+                <a:solidFill>
+                  <a:srgbClr val="ff0000"/>
+                </a:solidFill>
+                <a:effectLst/>
+                <a:uFillTx/>
+                <a:latin typeface="Arial"/>
+                <a:ea typeface="SimSun"/>
+              </a:rPr>
+              <a:t>SPOTIFLOW</a:t>
+            </a:r>
+            <a:endParaRPr lang="en-US" sz="3600" b="0" u="none" strike="noStrike">
               <a:solidFill>
                 <a:srgbClr val="000000"/>
               </a:solidFill>
@@ -8514,7 +9399,7 @@
       </p:sp>
       <p:pic>
         <p:nvPicPr>
-          <p:cNvPr id="92" name=""/>
+          <p:cNvPr id="91" name=""/>
           <p:cNvPicPr/>
           <p:nvPr/>
         </p:nvPicPr>
@@ -8524,8 +9409,8 @@
         </p:blipFill>
         <p:spPr>
           <a:xfrm>
-            <a:off x="2057400" y="1143000"/>
-            <a:ext cx="4572000" cy="4800600"/>
+            <a:off x="465840" y="4591440"/>
+            <a:ext cx="7077960" cy="1123560"/>
           </a:xfrm>
           <a:prstGeom prst="rect">
             <a:avLst/>
@@ -8536,6 +9421,216 @@
           </a:ln>
         </p:spPr>
       </p:pic>
+      <p:sp>
+        <p:nvSpPr>
+          <p:cNvPr id="92" name=""/>
+          <p:cNvSpPr txBox="1"/>
+          <p:nvPr/>
+        </p:nvSpPr>
+        <p:spPr>
+          <a:xfrm>
+            <a:off x="228600" y="703080"/>
+            <a:ext cx="11201400" cy="2681280"/>
+          </a:xfrm>
+          <a:prstGeom prst="rect">
+            <a:avLst/>
+          </a:prstGeom>
+          <a:noFill/>
+          <a:ln w="0">
+            <a:noFill/>
+          </a:ln>
+        </p:spPr>
+        <p:txBody>
+          <a:bodyPr lIns="90000" rIns="90000" tIns="45000" bIns="45000" anchor="t">
+            <a:spAutoFit/>
+          </a:bodyPr>
+          <a:p>
+            <a:r>
+              <a:rPr lang="en-US" sz="1800" b="0" u="none" strike="noStrike">
+                <a:solidFill>
+                  <a:srgbClr val="000000"/>
+                </a:solidFill>
+                <a:effectLst/>
+                <a:uFillTx/>
+                <a:latin typeface="Arial"/>
+              </a:rPr>
+              <a:t>This computes one global intensity threshold from the smoothed channel 2 image using Otsu’s method. </a:t>
+            </a:r>
+            <a:endParaRPr lang="en-US" sz="1800" b="0" u="none" strike="noStrike">
+              <a:solidFill>
+                <a:srgbClr val="000000"/>
+              </a:solidFill>
+              <a:effectLst/>
+              <a:uFillTx/>
+              <a:latin typeface="Arial"/>
+            </a:endParaRPr>
+          </a:p>
+          <a:p>
+            <a:endParaRPr lang="en-US" sz="1800" b="0" u="none" strike="noStrike">
+              <a:solidFill>
+                <a:srgbClr val="000000"/>
+              </a:solidFill>
+              <a:effectLst/>
+              <a:uFillTx/>
+              <a:latin typeface="Arial"/>
+            </a:endParaRPr>
+          </a:p>
+          <a:p>
+            <a:pPr>
+              <a:lnSpc>
+                <a:spcPct val="100000"/>
+              </a:lnSpc>
+              <a:spcBef>
+                <a:spcPts val="340"/>
+              </a:spcBef>
+              <a:spcAft>
+                <a:spcPts val="142"/>
+              </a:spcAft>
+            </a:pPr>
+            <a:r>
+              <a:rPr lang="en-US" sz="1800" b="0" u="none" strike="noStrike">
+                <a:solidFill>
+                  <a:srgbClr val="000000"/>
+                </a:solidFill>
+                <a:effectLst/>
+                <a:uFillTx/>
+                <a:latin typeface="Arial"/>
+              </a:rPr>
+              <a:t>This creates a binary mask:</a:t>
+            </a:r>
+            <a:endParaRPr lang="en-US" sz="1800" b="0" u="none" strike="noStrike">
+              <a:solidFill>
+                <a:srgbClr val="000000"/>
+              </a:solidFill>
+              <a:effectLst/>
+              <a:uFillTx/>
+              <a:latin typeface="Arial"/>
+              <a:ea typeface="Microsoft YaHei"/>
+            </a:endParaRPr>
+          </a:p>
+          <a:p>
+            <a:pPr marL="216000" indent="-216000">
+              <a:lnSpc>
+                <a:spcPct val="100000"/>
+              </a:lnSpc>
+              <a:spcBef>
+                <a:spcPts val="340"/>
+              </a:spcBef>
+              <a:spcAft>
+                <a:spcPts val="142"/>
+              </a:spcAft>
+              <a:buClr>
+                <a:srgbClr val="000000"/>
+              </a:buClr>
+              <a:buSzPct val="45000"/>
+              <a:buFont typeface="Wingdings" charset="2"/>
+              <a:buChar char=""/>
+            </a:pPr>
+            <a:r>
+              <a:rPr lang="en-US" sz="1800" b="0" u="none" strike="noStrike">
+                <a:solidFill>
+                  <a:srgbClr val="000000"/>
+                </a:solidFill>
+                <a:effectLst/>
+                <a:uFillTx/>
+                <a:latin typeface="Arial"/>
+              </a:rPr>
+              <a:t>True where channel 2 is brighter than the threshold.</a:t>
+            </a:r>
+            <a:endParaRPr lang="en-US" sz="1800" b="0" u="none" strike="noStrike">
+              <a:solidFill>
+                <a:srgbClr val="000000"/>
+              </a:solidFill>
+              <a:effectLst/>
+              <a:uFillTx/>
+              <a:latin typeface="Arial"/>
+              <a:ea typeface="Microsoft YaHei"/>
+            </a:endParaRPr>
+          </a:p>
+          <a:p>
+            <a:pPr marL="216000" indent="-216000">
+              <a:lnSpc>
+                <a:spcPct val="100000"/>
+              </a:lnSpc>
+              <a:spcBef>
+                <a:spcPts val="340"/>
+              </a:spcBef>
+              <a:spcAft>
+                <a:spcPts val="142"/>
+              </a:spcAft>
+              <a:buClr>
+                <a:srgbClr val="000000"/>
+              </a:buClr>
+              <a:buSzPct val="45000"/>
+              <a:buFont typeface="Wingdings" charset="2"/>
+              <a:buChar char=""/>
+            </a:pPr>
+            <a:r>
+              <a:rPr lang="en-US" sz="1800" b="0" u="none" strike="noStrike">
+                <a:solidFill>
+                  <a:srgbClr val="000000"/>
+                </a:solidFill>
+                <a:effectLst/>
+                <a:uFillTx/>
+                <a:latin typeface="Arial"/>
+              </a:rPr>
+              <a:t>False where it is darker. </a:t>
+            </a:r>
+            <a:endParaRPr lang="en-US" sz="1800" b="0" u="none" strike="noStrike">
+              <a:solidFill>
+                <a:srgbClr val="000000"/>
+              </a:solidFill>
+              <a:effectLst/>
+              <a:uFillTx/>
+              <a:latin typeface="Arial"/>
+              <a:ea typeface="Microsoft YaHei"/>
+            </a:endParaRPr>
+          </a:p>
+          <a:p>
+            <a:pPr>
+              <a:lnSpc>
+                <a:spcPct val="100000"/>
+              </a:lnSpc>
+              <a:spcBef>
+                <a:spcPts val="340"/>
+              </a:spcBef>
+              <a:spcAft>
+                <a:spcPts val="142"/>
+              </a:spcAft>
+            </a:pPr>
+            <a:r>
+              <a:rPr lang="en-US" sz="1800" b="1" u="none" strike="noStrike">
+                <a:solidFill>
+                  <a:srgbClr val="000000"/>
+                </a:solidFill>
+                <a:effectLst/>
+                <a:uFillTx/>
+                <a:latin typeface="Arial"/>
+              </a:rPr>
+              <a:t>So this is your rough “inside cell” mask.</a:t>
+            </a:r>
+            <a:endParaRPr lang="en-US" sz="1800" b="0" u="none" strike="noStrike">
+              <a:solidFill>
+                <a:srgbClr val="000000"/>
+              </a:solidFill>
+              <a:effectLst/>
+              <a:uFillTx/>
+              <a:latin typeface="Arial"/>
+              <a:ea typeface="Microsoft YaHei"/>
+            </a:endParaRPr>
+          </a:p>
+          <a:p>
+            <a:endParaRPr lang="en-US" sz="1800" b="0" u="none" strike="noStrike">
+              <a:solidFill>
+                <a:srgbClr val="000000"/>
+              </a:solidFill>
+              <a:effectLst/>
+              <a:uFillTx/>
+              <a:latin typeface="Arial"/>
+            </a:endParaRPr>
+          </a:p>
+        </p:txBody>
+      </p:sp>
       <p:pic>
         <p:nvPicPr>
           <p:cNvPr id="93" name=""/>
@@ -8548,8 +9643,8 @@
         </p:blipFill>
         <p:spPr>
           <a:xfrm>
-            <a:off x="6813000" y="1143000"/>
-            <a:ext cx="5302800" cy="4800600"/>
+            <a:off x="3657600" y="1095840"/>
+            <a:ext cx="3629160" cy="504360"/>
           </a:xfrm>
           <a:prstGeom prst="rect">
             <a:avLst/>
@@ -8560,6 +9655,548 @@
           </a:ln>
         </p:spPr>
       </p:pic>
+      <p:pic>
+        <p:nvPicPr>
+          <p:cNvPr id="94" name=""/>
+          <p:cNvPicPr/>
+          <p:nvPr/>
+        </p:nvPicPr>
+        <p:blipFill>
+          <a:blip r:embed="rId3"/>
+          <a:stretch/>
+        </p:blipFill>
+        <p:spPr>
+          <a:xfrm>
+            <a:off x="1600200" y="2971800"/>
+            <a:ext cx="5906160" cy="457200"/>
+          </a:xfrm>
+          <a:prstGeom prst="rect">
+            <a:avLst/>
+          </a:prstGeom>
+          <a:noFill/>
+          <a:ln w="0">
+            <a:noFill/>
+          </a:ln>
+        </p:spPr>
+      </p:pic>
+      <p:pic>
+        <p:nvPicPr>
+          <p:cNvPr id="95" name=""/>
+          <p:cNvPicPr/>
+          <p:nvPr/>
+        </p:nvPicPr>
+        <p:blipFill>
+          <a:blip r:embed="rId4"/>
+          <a:stretch/>
+        </p:blipFill>
+        <p:spPr>
+          <a:xfrm>
+            <a:off x="1600200" y="3657600"/>
+            <a:ext cx="5937840" cy="457200"/>
+          </a:xfrm>
+          <a:prstGeom prst="rect">
+            <a:avLst/>
+          </a:prstGeom>
+          <a:noFill/>
+          <a:ln w="0">
+            <a:noFill/>
+          </a:ln>
+        </p:spPr>
+      </p:pic>
+      <p:sp>
+        <p:nvSpPr>
+          <p:cNvPr id="96" name=""/>
+          <p:cNvSpPr txBox="1"/>
+          <p:nvPr/>
+        </p:nvSpPr>
+        <p:spPr>
+          <a:xfrm>
+            <a:off x="7772400" y="1143000"/>
+            <a:ext cx="4343400" cy="5257800"/>
+          </a:xfrm>
+          <a:prstGeom prst="rect">
+            <a:avLst/>
+          </a:prstGeom>
+          <a:noFill/>
+          <a:ln w="0">
+            <a:solidFill>
+              <a:srgbClr val="00a933"/>
+            </a:solidFill>
+          </a:ln>
+        </p:spPr>
+        <p:txBody>
+          <a:bodyPr lIns="90000" rIns="90000" tIns="45000" bIns="45000" anchor="t">
+            <a:spAutoFit/>
+          </a:bodyPr>
+          <a:p>
+            <a:r>
+              <a:rPr lang="en-US" sz="1800" b="1" u="none" strike="noStrike">
+                <a:solidFill>
+                  <a:srgbClr val="000000"/>
+                </a:solidFill>
+                <a:effectLst/>
+                <a:uFillTx/>
+                <a:latin typeface="Arial"/>
+              </a:rPr>
+              <a:t>What is Otsu’s method?</a:t>
+            </a:r>
+            <a:endParaRPr lang="en-US" sz="1800" b="1" u="none" strike="noStrike">
+              <a:solidFill>
+                <a:srgbClr val="000000"/>
+              </a:solidFill>
+              <a:effectLst/>
+              <a:uFillTx/>
+              <a:latin typeface="Arial"/>
+            </a:endParaRPr>
+          </a:p>
+          <a:p>
+            <a:pPr>
+              <a:lnSpc>
+                <a:spcPct val="100000"/>
+              </a:lnSpc>
+              <a:spcBef>
+                <a:spcPts val="340"/>
+              </a:spcBef>
+              <a:spcAft>
+                <a:spcPts val="142"/>
+              </a:spcAft>
+            </a:pPr>
+            <a:r>
+              <a:rPr lang="en-US" sz="1400" b="0" u="none" strike="noStrike">
+                <a:solidFill>
+                  <a:srgbClr val="000000"/>
+                </a:solidFill>
+                <a:effectLst/>
+                <a:uFillTx/>
+                <a:latin typeface="Arial"/>
+              </a:rPr>
+              <a:t>Otsu’s method is an automatic thresholding method.</a:t>
+            </a:r>
+            <a:endParaRPr lang="en-US" sz="1400" b="0" u="none" strike="noStrike">
+              <a:solidFill>
+                <a:srgbClr val="000000"/>
+              </a:solidFill>
+              <a:effectLst/>
+              <a:uFillTx/>
+              <a:latin typeface="Arial"/>
+              <a:ea typeface="Microsoft YaHei"/>
+            </a:endParaRPr>
+          </a:p>
+          <a:p>
+            <a:pPr>
+              <a:lnSpc>
+                <a:spcPct val="100000"/>
+              </a:lnSpc>
+              <a:spcBef>
+                <a:spcPts val="340"/>
+              </a:spcBef>
+              <a:spcAft>
+                <a:spcPts val="142"/>
+              </a:spcAft>
+            </a:pPr>
+            <a:r>
+              <a:rPr lang="en-US" sz="1400" b="0" u="none" strike="noStrike">
+                <a:solidFill>
+                  <a:srgbClr val="000000"/>
+                </a:solidFill>
+                <a:effectLst/>
+                <a:uFillTx/>
+                <a:latin typeface="Arial"/>
+              </a:rPr>
+              <a:t>It tries to split image pixels into two groups:</a:t>
+            </a:r>
+            <a:endParaRPr lang="en-US" sz="1400" b="0" u="none" strike="noStrike">
+              <a:solidFill>
+                <a:srgbClr val="000000"/>
+              </a:solidFill>
+              <a:effectLst/>
+              <a:uFillTx/>
+              <a:latin typeface="Arial"/>
+              <a:ea typeface="Microsoft YaHei"/>
+            </a:endParaRPr>
+          </a:p>
+          <a:p>
+            <a:pPr marL="216000" indent="-216000">
+              <a:lnSpc>
+                <a:spcPct val="100000"/>
+              </a:lnSpc>
+              <a:spcBef>
+                <a:spcPts val="340"/>
+              </a:spcBef>
+              <a:spcAft>
+                <a:spcPts val="142"/>
+              </a:spcAft>
+              <a:buClr>
+                <a:srgbClr val="000000"/>
+              </a:buClr>
+              <a:buSzPct val="45000"/>
+              <a:buFont typeface="Wingdings" charset="2"/>
+              <a:buChar char=""/>
+            </a:pPr>
+            <a:r>
+              <a:rPr lang="en-US" sz="1400" b="0" u="none" strike="noStrike">
+                <a:solidFill>
+                  <a:srgbClr val="000000"/>
+                </a:solidFill>
+                <a:effectLst/>
+                <a:uFillTx/>
+                <a:latin typeface="Arial"/>
+              </a:rPr>
+              <a:t>background </a:t>
+            </a:r>
+            <a:endParaRPr lang="en-US" sz="1400" b="0" u="none" strike="noStrike">
+              <a:solidFill>
+                <a:srgbClr val="000000"/>
+              </a:solidFill>
+              <a:effectLst/>
+              <a:uFillTx/>
+              <a:latin typeface="Arial"/>
+              <a:ea typeface="Microsoft YaHei"/>
+            </a:endParaRPr>
+          </a:p>
+          <a:p>
+            <a:pPr marL="216000" indent="-216000">
+              <a:lnSpc>
+                <a:spcPct val="100000"/>
+              </a:lnSpc>
+              <a:spcBef>
+                <a:spcPts val="340"/>
+              </a:spcBef>
+              <a:spcAft>
+                <a:spcPts val="142"/>
+              </a:spcAft>
+              <a:buClr>
+                <a:srgbClr val="000000"/>
+              </a:buClr>
+              <a:buSzPct val="45000"/>
+              <a:buFont typeface="Wingdings" charset="2"/>
+              <a:buChar char=""/>
+            </a:pPr>
+            <a:r>
+              <a:rPr lang="en-US" sz="1400" b="0" u="none" strike="noStrike">
+                <a:solidFill>
+                  <a:srgbClr val="000000"/>
+                </a:solidFill>
+                <a:effectLst/>
+                <a:uFillTx/>
+                <a:latin typeface="Arial"/>
+              </a:rPr>
+              <a:t>foreground </a:t>
+            </a:r>
+            <a:endParaRPr lang="en-US" sz="1400" b="0" u="none" strike="noStrike">
+              <a:solidFill>
+                <a:srgbClr val="000000"/>
+              </a:solidFill>
+              <a:effectLst/>
+              <a:uFillTx/>
+              <a:latin typeface="Arial"/>
+              <a:ea typeface="Microsoft YaHei"/>
+            </a:endParaRPr>
+          </a:p>
+          <a:p>
+            <a:pPr>
+              <a:lnSpc>
+                <a:spcPct val="100000"/>
+              </a:lnSpc>
+              <a:spcBef>
+                <a:spcPts val="340"/>
+              </a:spcBef>
+              <a:spcAft>
+                <a:spcPts val="142"/>
+              </a:spcAft>
+            </a:pPr>
+            <a:r>
+              <a:rPr lang="en-US" sz="1400" b="0" u="none" strike="noStrike">
+                <a:solidFill>
+                  <a:srgbClr val="000000"/>
+                </a:solidFill>
+                <a:effectLst/>
+                <a:uFillTx/>
+                <a:latin typeface="Arial"/>
+              </a:rPr>
+              <a:t>by choosing a threshold that best separates their intensity distributions.</a:t>
+            </a:r>
+            <a:endParaRPr lang="en-US" sz="1400" b="0" u="none" strike="noStrike">
+              <a:solidFill>
+                <a:srgbClr val="000000"/>
+              </a:solidFill>
+              <a:effectLst/>
+              <a:uFillTx/>
+              <a:latin typeface="Arial"/>
+              <a:ea typeface="Microsoft YaHei"/>
+            </a:endParaRPr>
+          </a:p>
+          <a:p>
+            <a:pPr>
+              <a:lnSpc>
+                <a:spcPct val="100000"/>
+              </a:lnSpc>
+              <a:spcBef>
+                <a:spcPts val="340"/>
+              </a:spcBef>
+              <a:spcAft>
+                <a:spcPts val="142"/>
+              </a:spcAft>
+            </a:pPr>
+            <a:endParaRPr lang="en-US" sz="1800" b="0" u="none" strike="noStrike">
+              <a:solidFill>
+                <a:srgbClr val="000000"/>
+              </a:solidFill>
+              <a:effectLst/>
+              <a:uFillTx/>
+              <a:latin typeface="Arial"/>
+              <a:ea typeface="Microsoft YaHei"/>
+            </a:endParaRPr>
+          </a:p>
+          <a:p>
+            <a:pPr>
+              <a:lnSpc>
+                <a:spcPct val="100000"/>
+              </a:lnSpc>
+              <a:spcBef>
+                <a:spcPts val="340"/>
+              </a:spcBef>
+              <a:spcAft>
+                <a:spcPts val="142"/>
+              </a:spcAft>
+            </a:pPr>
+            <a:r>
+              <a:rPr lang="en-US" sz="1400" b="1" u="none" strike="noStrike">
+                <a:solidFill>
+                  <a:srgbClr val="000000"/>
+                </a:solidFill>
+                <a:effectLst/>
+                <a:uFillTx/>
+                <a:latin typeface="Arial"/>
+                <a:ea typeface="Microsoft YaHei"/>
+              </a:rPr>
+              <a:t>Simply way</a:t>
+            </a:r>
+            <a:endParaRPr lang="en-US" sz="1400" b="1" u="none" strike="noStrike">
+              <a:solidFill>
+                <a:srgbClr val="000000"/>
+              </a:solidFill>
+              <a:effectLst/>
+              <a:uFillTx/>
+              <a:latin typeface="Arial"/>
+              <a:ea typeface="Microsoft YaHei"/>
+            </a:endParaRPr>
+          </a:p>
+          <a:p>
+            <a:pPr>
+              <a:lnSpc>
+                <a:spcPct val="100000"/>
+              </a:lnSpc>
+              <a:spcBef>
+                <a:spcPts val="340"/>
+              </a:spcBef>
+              <a:spcAft>
+                <a:spcPts val="142"/>
+              </a:spcAft>
+            </a:pPr>
+            <a:r>
+              <a:rPr lang="en-US" sz="1400" b="0" u="none" strike="noStrike">
+                <a:solidFill>
+                  <a:srgbClr val="000000"/>
+                </a:solidFill>
+                <a:effectLst/>
+                <a:uFillTx/>
+                <a:latin typeface="Arial"/>
+                <a:ea typeface="Microsoft YaHei"/>
+              </a:rPr>
+              <a:t>Imagine a histogram of image intensities:</a:t>
+            </a:r>
+            <a:endParaRPr lang="en-US" sz="1400" b="0" u="none" strike="noStrike">
+              <a:solidFill>
+                <a:srgbClr val="000000"/>
+              </a:solidFill>
+              <a:effectLst/>
+              <a:uFillTx/>
+              <a:latin typeface="Arial"/>
+              <a:ea typeface="Microsoft YaHei"/>
+            </a:endParaRPr>
+          </a:p>
+          <a:p>
+            <a:pPr marL="216000" indent="-216000">
+              <a:lnSpc>
+                <a:spcPct val="100000"/>
+              </a:lnSpc>
+              <a:spcBef>
+                <a:spcPts val="340"/>
+              </a:spcBef>
+              <a:spcAft>
+                <a:spcPts val="142"/>
+              </a:spcAft>
+              <a:buClr>
+                <a:srgbClr val="000000"/>
+              </a:buClr>
+              <a:buSzPct val="45000"/>
+              <a:buFont typeface="Wingdings" charset="2"/>
+              <a:buChar char=""/>
+            </a:pPr>
+            <a:r>
+              <a:rPr lang="en-US" sz="1400" b="0" u="none" strike="noStrike">
+                <a:solidFill>
+                  <a:srgbClr val="000000"/>
+                </a:solidFill>
+                <a:effectLst/>
+                <a:uFillTx/>
+                <a:latin typeface="Arial"/>
+                <a:ea typeface="Microsoft YaHei"/>
+              </a:rPr>
+              <a:t>one peak for dark background </a:t>
+            </a:r>
+            <a:endParaRPr lang="en-US" sz="1400" b="0" u="none" strike="noStrike">
+              <a:solidFill>
+                <a:srgbClr val="000000"/>
+              </a:solidFill>
+              <a:effectLst/>
+              <a:uFillTx/>
+              <a:latin typeface="Arial"/>
+              <a:ea typeface="Microsoft YaHei"/>
+            </a:endParaRPr>
+          </a:p>
+          <a:p>
+            <a:pPr marL="216000" indent="-216000">
+              <a:lnSpc>
+                <a:spcPct val="100000"/>
+              </a:lnSpc>
+              <a:spcBef>
+                <a:spcPts val="340"/>
+              </a:spcBef>
+              <a:spcAft>
+                <a:spcPts val="142"/>
+              </a:spcAft>
+              <a:buClr>
+                <a:srgbClr val="000000"/>
+              </a:buClr>
+              <a:buSzPct val="45000"/>
+              <a:buFont typeface="Wingdings" charset="2"/>
+              <a:buChar char=""/>
+            </a:pPr>
+            <a:r>
+              <a:rPr lang="en-US" sz="1400" b="0" u="none" strike="noStrike">
+                <a:solidFill>
+                  <a:srgbClr val="000000"/>
+                </a:solidFill>
+                <a:effectLst/>
+                <a:uFillTx/>
+                <a:latin typeface="Arial"/>
+                <a:ea typeface="Microsoft YaHei"/>
+              </a:rPr>
+              <a:t>one peak for brighter objects </a:t>
+            </a:r>
+            <a:endParaRPr lang="en-US" sz="1400" b="0" u="none" strike="noStrike">
+              <a:solidFill>
+                <a:srgbClr val="000000"/>
+              </a:solidFill>
+              <a:effectLst/>
+              <a:uFillTx/>
+              <a:latin typeface="Arial"/>
+              <a:ea typeface="Microsoft YaHei"/>
+            </a:endParaRPr>
+          </a:p>
+          <a:p>
+            <a:pPr>
+              <a:lnSpc>
+                <a:spcPct val="100000"/>
+              </a:lnSpc>
+              <a:spcBef>
+                <a:spcPts val="340"/>
+              </a:spcBef>
+              <a:spcAft>
+                <a:spcPts val="142"/>
+              </a:spcAft>
+            </a:pPr>
+            <a:r>
+              <a:rPr lang="en-US" sz="1400" b="0" u="none" strike="noStrike">
+                <a:solidFill>
+                  <a:srgbClr val="000000"/>
+                </a:solidFill>
+                <a:effectLst/>
+                <a:uFillTx/>
+                <a:latin typeface="Arial"/>
+                <a:ea typeface="Microsoft YaHei"/>
+              </a:rPr>
+              <a:t>Otsu searches for the threshold between those peaks.</a:t>
+            </a:r>
+            <a:endParaRPr lang="en-US" sz="1400" b="0" u="none" strike="noStrike">
+              <a:solidFill>
+                <a:srgbClr val="000000"/>
+              </a:solidFill>
+              <a:effectLst/>
+              <a:uFillTx/>
+              <a:latin typeface="Arial"/>
+              <a:ea typeface="Microsoft YaHei"/>
+            </a:endParaRPr>
+          </a:p>
+          <a:p>
+            <a:pPr>
+              <a:lnSpc>
+                <a:spcPct val="100000"/>
+              </a:lnSpc>
+              <a:spcBef>
+                <a:spcPts val="340"/>
+              </a:spcBef>
+              <a:spcAft>
+                <a:spcPts val="142"/>
+              </a:spcAft>
+            </a:pPr>
+            <a:r>
+              <a:rPr lang="en-US" sz="1400" b="0" u="none" strike="noStrike">
+                <a:solidFill>
+                  <a:srgbClr val="000000"/>
+                </a:solidFill>
+                <a:effectLst/>
+                <a:uFillTx/>
+                <a:latin typeface="Arial"/>
+                <a:ea typeface="Microsoft YaHei"/>
+              </a:rPr>
+              <a:t>It picks the threshold that gives the best separation between the two classes.</a:t>
+            </a:r>
+            <a:endParaRPr lang="en-US" sz="1400" b="0" u="none" strike="noStrike">
+              <a:solidFill>
+                <a:srgbClr val="000000"/>
+              </a:solidFill>
+              <a:effectLst/>
+              <a:uFillTx/>
+              <a:latin typeface="Arial"/>
+              <a:ea typeface="Microsoft YaHei"/>
+            </a:endParaRPr>
+          </a:p>
+          <a:p>
+            <a:pPr>
+              <a:lnSpc>
+                <a:spcPct val="100000"/>
+              </a:lnSpc>
+              <a:spcBef>
+                <a:spcPts val="1191"/>
+              </a:spcBef>
+              <a:spcAft>
+                <a:spcPts val="992"/>
+              </a:spcAft>
+            </a:pPr>
+            <a:endParaRPr lang="en-US" sz="1400" b="0" u="none" strike="noStrike">
+              <a:solidFill>
+                <a:srgbClr val="000000"/>
+              </a:solidFill>
+              <a:effectLst/>
+              <a:uFillTx/>
+              <a:latin typeface="Arial"/>
+            </a:endParaRPr>
+          </a:p>
+          <a:p>
+            <a:endParaRPr lang="en-US" sz="1400" b="0" u="none" strike="noStrike">
+              <a:solidFill>
+                <a:srgbClr val="000000"/>
+              </a:solidFill>
+              <a:effectLst/>
+              <a:uFillTx/>
+              <a:latin typeface="Arial"/>
+            </a:endParaRPr>
+          </a:p>
+        </p:txBody>
+      </p:sp>
     </p:spTree>
   </p:cSld>
   <mc:AlternateContent>

--- a/16-4-2026.pptx
+++ b/16-4-2026.pptx
@@ -22,6 +22,7 @@
     <p:sldId id="270" r:id="rId17"/>
     <p:sldId id="271" r:id="rId18"/>
     <p:sldId id="272" r:id="rId19"/>
+    <p:sldId id="273" r:id="rId20"/>
   </p:sldIdLst>
   <p:sldSz cx="12192000" cy="6858000"/>
   <p:notesSz cx="7559675" cy="10691813"/>
@@ -29,8 +30,8 @@
 </file>
 
 <file path=ppt/slideLayouts/slideLayout1.xml><?xml version="1.0" encoding="utf-8"?>
-<p:sldLayout xmlns:a="http://schemas.openxmlformats.org/drawingml/2006/main" xmlns:p="http://schemas.openxmlformats.org/presentationml/2006/main" xmlns:r="http://schemas.openxmlformats.org/officeDocument/2006/relationships" xmlns:p14="http://schemas.microsoft.com/office/powerpoint/2010/main" xmlns:p15="http://schemas.microsoft.com/office/powerpoint/2012/main" xmlns:mc="http://schemas.openxmlformats.org/markup-compatibility/2006" type="titleOnly" preserve="1">
-  <p:cSld name="Title Only">
+<p:sldLayout xmlns:a="http://schemas.openxmlformats.org/drawingml/2006/main" xmlns:p="http://schemas.openxmlformats.org/presentationml/2006/main" xmlns:r="http://schemas.openxmlformats.org/officeDocument/2006/relationships" xmlns:p14="http://schemas.microsoft.com/office/powerpoint/2010/main" xmlns:p15="http://schemas.microsoft.com/office/powerpoint/2012/main" xmlns:mc="http://schemas.openxmlformats.org/markup-compatibility/2006" type="vertTx" preserve="1">
+  <p:cSld name="Title and Vertical Text">
     <p:bg>
       <p:bgPr>
         <a:solidFill>
@@ -65,7 +66,7 @@
         <p:spPr>
           <a:xfrm>
             <a:off x="0" y="0"/>
-            <a:ext cx="12178800" cy="6844680"/>
+            <a:ext cx="12178440" cy="6844320"/>
           </a:xfrm>
           <a:prstGeom prst="rect">
             <a:avLst/>
@@ -89,7 +90,7 @@
         <p:spPr>
           <a:xfrm>
             <a:off x="609480" y="190440"/>
-            <a:ext cx="10959480" cy="569160"/>
+            <a:ext cx="10959120" cy="568800"/>
           </a:xfrm>
           <a:prstGeom prst="rect">
             <a:avLst/>
@@ -143,75 +144,199 @@
             <a:spLocks noGrp="1"/>
           </p:cNvSpPr>
           <p:nvPr>
-            <p:ph type="dt" idx="1"/>
+            <p:ph type="body"/>
           </p:nvPr>
         </p:nvSpPr>
         <p:spPr>
           <a:xfrm>
-            <a:off x="609480" y="6245280"/>
-            <a:ext cx="2831400" cy="462960"/>
-          </a:xfrm>
-          <a:prstGeom prst="rect">
-            <a:avLst/>
-          </a:prstGeom>
-          <a:noFill/>
-          <a:ln w="0">
+            <a:off x="609480" y="1174680"/>
+            <a:ext cx="10959120" cy="4939200"/>
+          </a:xfrm>
+          <a:prstGeom prst="rect">
+            <a:avLst/>
+          </a:prstGeom>
+          <a:noFill/>
+          <a:ln w="9360">
             <a:noFill/>
           </a:ln>
         </p:spPr>
         <p:txBody>
-          <a:bodyPr numCol="1" spcCol="0" lIns="91440" rIns="91440" tIns="45720" bIns="45720" anchor="t">
+          <a:bodyPr lIns="45000" rIns="45000" tIns="90000" bIns="90000" anchor="t" vert="eaVert">
             <a:noAutofit/>
           </a:bodyPr>
-          <a:lstStyle>
-            <a:lvl1pPr indent="0" defTabSz="914400">
-              <a:lnSpc>
-                <a:spcPct val="100000"/>
-              </a:lnSpc>
-              <a:buNone/>
-              <a:tabLst>
-                <a:tab algn="l" pos="0"/>
-              </a:tabLst>
-              <a:defRPr lang="en-US" sz="1400" b="0" u="none" strike="noStrike">
-                <a:solidFill>
-                  <a:srgbClr val="000000"/>
-                </a:solidFill>
-                <a:effectLst/>
-                <a:uFillTx/>
-                <a:latin typeface="Times New Roman"/>
-                <a:ea typeface="SimSun"/>
-              </a:defRPr>
-            </a:lvl1pPr>
-          </a:lstStyle>
-          <a:p>
-            <a:pPr indent="0" defTabSz="914400">
-              <a:lnSpc>
-                <a:spcPct val="100000"/>
-              </a:lnSpc>
-              <a:buNone/>
-              <a:tabLst>
-                <a:tab algn="l" pos="0"/>
-              </a:tabLst>
-            </a:pPr>
-            <a:r>
-              <a:rPr lang="en-US" sz="1400" b="0" u="none" strike="noStrike">
-                <a:solidFill>
-                  <a:srgbClr val="000000"/>
-                </a:solidFill>
-                <a:effectLst/>
-                <a:uFillTx/>
-                <a:latin typeface="Times New Roman"/>
-                <a:ea typeface="SimSun"/>
-              </a:rPr>
-              <a:t>&lt;date/time&gt;</a:t>
-            </a:r>
-            <a:endParaRPr lang="en-US" sz="1400" b="0" u="none" strike="noStrike">
-              <a:solidFill>
-                <a:srgbClr val="000000"/>
-              </a:solidFill>
-              <a:effectLst/>
-              <a:uFillTx/>
-              <a:latin typeface="Times New Roman"/>
+          <a:p>
+            <a:pPr marL="343080" indent="-343080">
+              <a:lnSpc>
+                <a:spcPct val="100000"/>
+              </a:lnSpc>
+              <a:spcBef>
+                <a:spcPts val="641"/>
+              </a:spcBef>
+              <a:buClr>
+                <a:srgbClr val="000000"/>
+              </a:buClr>
+              <a:buFont typeface="Symbol" charset="2"/>
+              <a:buChar char=""/>
+            </a:pPr>
+            <a:r>
+              <a:rPr lang="en-US" sz="3200" b="0" u="none" strike="noStrike">
+                <a:solidFill>
+                  <a:schemeClr val="dk1"/>
+                </a:solidFill>
+                <a:effectLst/>
+                <a:uFillTx/>
+                <a:latin typeface="Arial"/>
+                <a:ea typeface="SimSun"/>
+              </a:rPr>
+              <a:t>Click to edit Master text styles</a:t>
+            </a:r>
+            <a:endParaRPr lang="en-US" sz="3200" b="0" u="none" strike="noStrike">
+              <a:solidFill>
+                <a:srgbClr val="000000"/>
+              </a:solidFill>
+              <a:effectLst/>
+              <a:uFillTx/>
+              <a:latin typeface="Arial"/>
+            </a:endParaRPr>
+          </a:p>
+          <a:p>
+            <a:pPr marL="743040" lvl="1" indent="-285840">
+              <a:lnSpc>
+                <a:spcPct val="100000"/>
+              </a:lnSpc>
+              <a:spcBef>
+                <a:spcPts val="561"/>
+              </a:spcBef>
+              <a:buClr>
+                <a:srgbClr val="000000"/>
+              </a:buClr>
+              <a:buFont typeface="Symbol" charset="2"/>
+              <a:buChar char=""/>
+            </a:pPr>
+            <a:r>
+              <a:rPr lang="en-US" sz="2800" b="0" u="none" strike="noStrike">
+                <a:solidFill>
+                  <a:schemeClr val="dk1"/>
+                </a:solidFill>
+                <a:effectLst/>
+                <a:uFillTx/>
+                <a:latin typeface="Arial"/>
+                <a:ea typeface="SimSun"/>
+              </a:rPr>
+              <a:t>Second level</a:t>
+            </a:r>
+            <a:endParaRPr lang="en-US" sz="2800" b="0" u="none" strike="noStrike">
+              <a:solidFill>
+                <a:srgbClr val="000000"/>
+              </a:solidFill>
+              <a:effectLst/>
+              <a:uFillTx/>
+              <a:latin typeface="Arial"/>
+            </a:endParaRPr>
+          </a:p>
+          <a:p>
+            <a:pPr marL="1143000" lvl="2" indent="-228600">
+              <a:lnSpc>
+                <a:spcPct val="100000"/>
+              </a:lnSpc>
+              <a:spcBef>
+                <a:spcPts val="479"/>
+              </a:spcBef>
+              <a:buClr>
+                <a:srgbClr val="000000"/>
+              </a:buClr>
+              <a:buFont typeface="Symbol" charset="2"/>
+              <a:buChar char=""/>
+            </a:pPr>
+            <a:r>
+              <a:rPr lang="en-US" sz="2400" b="0" u="none" strike="noStrike">
+                <a:solidFill>
+                  <a:schemeClr val="dk1"/>
+                </a:solidFill>
+                <a:effectLst/>
+                <a:uFillTx/>
+                <a:latin typeface="Arial"/>
+                <a:ea typeface="SimSun"/>
+              </a:rPr>
+              <a:t>Third level</a:t>
+            </a:r>
+            <a:endParaRPr lang="en-US" sz="2400" b="0" u="none" strike="noStrike">
+              <a:solidFill>
+                <a:srgbClr val="000000"/>
+              </a:solidFill>
+              <a:effectLst/>
+              <a:uFillTx/>
+              <a:latin typeface="Arial"/>
+            </a:endParaRPr>
+          </a:p>
+          <a:p>
+            <a:pPr marL="1600200" lvl="3" indent="-228600">
+              <a:lnSpc>
+                <a:spcPct val="100000"/>
+              </a:lnSpc>
+              <a:spcBef>
+                <a:spcPts val="400"/>
+              </a:spcBef>
+              <a:buClr>
+                <a:srgbClr val="000000"/>
+              </a:buClr>
+              <a:buFont typeface="Symbol" charset="2"/>
+              <a:buChar char=""/>
+            </a:pPr>
+            <a:r>
+              <a:rPr lang="en-US" sz="2000" b="0" u="none" strike="noStrike">
+                <a:solidFill>
+                  <a:schemeClr val="dk1"/>
+                </a:solidFill>
+                <a:effectLst/>
+                <a:uFillTx/>
+                <a:latin typeface="Arial"/>
+                <a:ea typeface="SimSun"/>
+              </a:rPr>
+              <a:t>Fourth level</a:t>
+            </a:r>
+            <a:endParaRPr lang="en-US" sz="2000" b="0" u="none" strike="noStrike">
+              <a:solidFill>
+                <a:srgbClr val="000000"/>
+              </a:solidFill>
+              <a:effectLst/>
+              <a:uFillTx/>
+              <a:latin typeface="Arial"/>
+            </a:endParaRPr>
+          </a:p>
+          <a:p>
+            <a:pPr marL="2057400" lvl="4" indent="-228600">
+              <a:lnSpc>
+                <a:spcPct val="100000"/>
+              </a:lnSpc>
+              <a:spcBef>
+                <a:spcPts val="400"/>
+              </a:spcBef>
+              <a:buClr>
+                <a:srgbClr val="000000"/>
+              </a:buClr>
+              <a:buFont typeface="OpenSymbol"/>
+              <a:buChar char="»"/>
+            </a:pPr>
+            <a:r>
+              <a:rPr lang="en-US" sz="2000" b="0" u="none" strike="noStrike">
+                <a:solidFill>
+                  <a:schemeClr val="dk1"/>
+                </a:solidFill>
+                <a:effectLst/>
+                <a:uFillTx/>
+                <a:latin typeface="Arial"/>
+                <a:ea typeface="SimSun"/>
+              </a:rPr>
+              <a:t>Fifth level</a:t>
+            </a:r>
+            <a:endParaRPr lang="en-US" sz="2000" b="0" u="none" strike="noStrike">
+              <a:solidFill>
+                <a:srgbClr val="000000"/>
+              </a:solidFill>
+              <a:effectLst/>
+              <a:uFillTx/>
+              <a:latin typeface="Arial"/>
             </a:endParaRPr>
           </a:p>
         </p:txBody>
@@ -223,13 +348,13 @@
             <a:spLocks noGrp="1"/>
           </p:cNvSpPr>
           <p:nvPr>
-            <p:ph type="ftr" idx="2"/>
+            <p:ph type="dt" idx="1"/>
           </p:nvPr>
         </p:nvSpPr>
         <p:spPr>
           <a:xfrm>
-            <a:off x="4165560" y="6245280"/>
-            <a:ext cx="3847320" cy="462960"/>
+            <a:off x="609480" y="6245280"/>
+            <a:ext cx="2831040" cy="462600"/>
           </a:xfrm>
           <a:prstGeom prst="rect">
             <a:avLst/>
@@ -244,7 +369,7 @@
             <a:noAutofit/>
           </a:bodyPr>
           <a:lstStyle>
-            <a:lvl1pPr indent="0" algn="ctr" defTabSz="914400">
+            <a:lvl1pPr indent="0" defTabSz="914400">
               <a:lnSpc>
                 <a:spcPct val="100000"/>
               </a:lnSpc>
@@ -264,7 +389,7 @@
             </a:lvl1pPr>
           </a:lstStyle>
           <a:p>
-            <a:pPr indent="0" algn="ctr" defTabSz="914400">
+            <a:pPr indent="0" defTabSz="914400">
               <a:lnSpc>
                 <a:spcPct val="100000"/>
               </a:lnSpc>
@@ -283,7 +408,7 @@
                 <a:latin typeface="Times New Roman"/>
                 <a:ea typeface="SimSun"/>
               </a:rPr>
-              <a:t>&lt;footer&gt;</a:t>
+              <a:t>&lt;date/time&gt;</a:t>
             </a:r>
             <a:endParaRPr lang="en-US" sz="1400" b="0" u="none" strike="noStrike">
               <a:solidFill>
@@ -303,13 +428,93 @@
             <a:spLocks noGrp="1"/>
           </p:cNvSpPr>
           <p:nvPr>
+            <p:ph type="ftr" idx="2"/>
+          </p:nvPr>
+        </p:nvSpPr>
+        <p:spPr>
+          <a:xfrm>
+            <a:off x="4165560" y="6245280"/>
+            <a:ext cx="3846960" cy="462600"/>
+          </a:xfrm>
+          <a:prstGeom prst="rect">
+            <a:avLst/>
+          </a:prstGeom>
+          <a:noFill/>
+          <a:ln w="0">
+            <a:noFill/>
+          </a:ln>
+        </p:spPr>
+        <p:txBody>
+          <a:bodyPr numCol="1" spcCol="0" lIns="91440" rIns="91440" tIns="45720" bIns="45720" anchor="t">
+            <a:noAutofit/>
+          </a:bodyPr>
+          <a:lstStyle>
+            <a:lvl1pPr indent="0" algn="ctr" defTabSz="914400">
+              <a:lnSpc>
+                <a:spcPct val="100000"/>
+              </a:lnSpc>
+              <a:buNone/>
+              <a:tabLst>
+                <a:tab algn="l" pos="0"/>
+              </a:tabLst>
+              <a:defRPr lang="en-US" sz="1400" b="0" u="none" strike="noStrike">
+                <a:solidFill>
+                  <a:srgbClr val="000000"/>
+                </a:solidFill>
+                <a:effectLst/>
+                <a:uFillTx/>
+                <a:latin typeface="Times New Roman"/>
+                <a:ea typeface="SimSun"/>
+              </a:defRPr>
+            </a:lvl1pPr>
+          </a:lstStyle>
+          <a:p>
+            <a:pPr indent="0" algn="ctr" defTabSz="914400">
+              <a:lnSpc>
+                <a:spcPct val="100000"/>
+              </a:lnSpc>
+              <a:buNone/>
+              <a:tabLst>
+                <a:tab algn="l" pos="0"/>
+              </a:tabLst>
+            </a:pPr>
+            <a:r>
+              <a:rPr lang="en-US" sz="1400" b="0" u="none" strike="noStrike">
+                <a:solidFill>
+                  <a:srgbClr val="000000"/>
+                </a:solidFill>
+                <a:effectLst/>
+                <a:uFillTx/>
+                <a:latin typeface="Times New Roman"/>
+                <a:ea typeface="SimSun"/>
+              </a:rPr>
+              <a:t>&lt;footer&gt;</a:t>
+            </a:r>
+            <a:endParaRPr lang="en-US" sz="1400" b="0" u="none" strike="noStrike">
+              <a:solidFill>
+                <a:srgbClr val="000000"/>
+              </a:solidFill>
+              <a:effectLst/>
+              <a:uFillTx/>
+              <a:latin typeface="Times New Roman"/>
+            </a:endParaRPr>
+          </a:p>
+        </p:txBody>
+      </p:sp>
+      <p:sp>
+        <p:nvSpPr>
+          <p:cNvPr id="7" name="PlaceHolder 5"/>
+          <p:cNvSpPr>
+            <a:spLocks noGrp="1"/>
+          </p:cNvSpPr>
+          <p:nvPr>
             <p:ph type="sldNum" idx="3"/>
           </p:nvPr>
         </p:nvSpPr>
         <p:spPr>
           <a:xfrm>
             <a:off x="8737560" y="6245280"/>
-            <a:ext cx="2831400" cy="462960"/>
+            <a:ext cx="2831040" cy="462600"/>
           </a:xfrm>
           <a:prstGeom prst="rect">
             <a:avLst/>
@@ -344,6 +549,997 @@
 </file>
 
 <file path=ppt/slideLayouts/slideLayout10.xml><?xml version="1.0" encoding="utf-8"?>
+<p:sldLayout xmlns:a="http://schemas.openxmlformats.org/drawingml/2006/main" xmlns:p="http://schemas.openxmlformats.org/presentationml/2006/main" xmlns:r="http://schemas.openxmlformats.org/officeDocument/2006/relationships" xmlns:p14="http://schemas.microsoft.com/office/powerpoint/2010/main" xmlns:p15="http://schemas.microsoft.com/office/powerpoint/2012/main" xmlns:mc="http://schemas.openxmlformats.org/markup-compatibility/2006" type="blank" preserve="1">
+  <p:cSld name="Picture with Caption">
+    <p:bg>
+      <p:bgPr>
+        <a:solidFill>
+          <a:srgbClr val="ffffff"/>
+        </a:solidFill>
+      </p:bgPr>
+    </p:bg>
+    <p:spTree>
+      <p:nvGrpSpPr>
+        <p:cNvPr id="1" name=""/>
+        <p:cNvGrpSpPr/>
+        <p:nvPr/>
+      </p:nvGrpSpPr>
+      <p:grpSpPr>
+        <a:xfrm>
+          <a:off x="0" y="0"/>
+          <a:ext cx="0" cy="0"/>
+          <a:chOff x="0" y="0"/>
+          <a:chExt cx="0" cy="0"/>
+        </a:xfrm>
+      </p:grpSpPr>
+      <p:pic>
+        <p:nvPicPr>
+          <p:cNvPr id="58" name="Picture 10"/>
+          <p:cNvPicPr/>
+          <p:nvPr/>
+        </p:nvPicPr>
+        <p:blipFill>
+          <a:blip r:embed="rId2"/>
+          <a:stretch/>
+        </p:blipFill>
+        <p:spPr>
+          <a:xfrm>
+            <a:off x="0" y="0"/>
+            <a:ext cx="12178440" cy="6844320"/>
+          </a:xfrm>
+          <a:prstGeom prst="rect">
+            <a:avLst/>
+          </a:prstGeom>
+          <a:noFill/>
+          <a:ln w="9525">
+            <a:noFill/>
+          </a:ln>
+        </p:spPr>
+      </p:pic>
+      <p:sp>
+        <p:nvSpPr>
+          <p:cNvPr id="59" name="PlaceHolder 1"/>
+          <p:cNvSpPr>
+            <a:spLocks noGrp="1"/>
+          </p:cNvSpPr>
+          <p:nvPr>
+            <p:ph type="title"/>
+          </p:nvPr>
+        </p:nvSpPr>
+        <p:spPr>
+          <a:xfrm>
+            <a:off x="840240" y="457200"/>
+            <a:ext cx="3918960" cy="1586520"/>
+          </a:xfrm>
+          <a:prstGeom prst="rect">
+            <a:avLst/>
+          </a:prstGeom>
+          <a:noFill/>
+          <a:ln w="9360">
+            <a:noFill/>
+          </a:ln>
+        </p:spPr>
+        <p:txBody>
+          <a:bodyPr lIns="90000" rIns="90000" tIns="45000" bIns="45000" anchor="b">
+            <a:noAutofit/>
+          </a:bodyPr>
+          <a:p>
+            <a:pPr indent="0">
+              <a:lnSpc>
+                <a:spcPct val="100000"/>
+              </a:lnSpc>
+              <a:buNone/>
+              <a:tabLst>
+                <a:tab algn="l" pos="0"/>
+              </a:tabLst>
+            </a:pPr>
+            <a:r>
+              <a:rPr lang="en-US" sz="3200" b="0" u="none" strike="noStrike">
+                <a:solidFill>
+                  <a:schemeClr val="dk1"/>
+                </a:solidFill>
+                <a:effectLst/>
+                <a:uFillTx/>
+                <a:latin typeface="Arial"/>
+                <a:ea typeface="SimSun"/>
+              </a:rPr>
+              <a:t>Click to edit Master title style</a:t>
+            </a:r>
+            <a:endParaRPr lang="en-US" sz="3200" b="0" u="none" strike="noStrike">
+              <a:solidFill>
+                <a:srgbClr val="000000"/>
+              </a:solidFill>
+              <a:effectLst/>
+              <a:uFillTx/>
+              <a:latin typeface="Arial"/>
+            </a:endParaRPr>
+          </a:p>
+        </p:txBody>
+      </p:sp>
+      <p:sp>
+        <p:nvSpPr>
+          <p:cNvPr id="60" name="PlaceHolder 2"/>
+          <p:cNvSpPr>
+            <a:spLocks noGrp="1"/>
+          </p:cNvSpPr>
+          <p:nvPr>
+            <p:ph type="body"/>
+          </p:nvPr>
+        </p:nvSpPr>
+        <p:spPr>
+          <a:xfrm>
+            <a:off x="5183640" y="987480"/>
+            <a:ext cx="6158520" cy="4860000"/>
+          </a:xfrm>
+          <a:prstGeom prst="rect">
+            <a:avLst/>
+          </a:prstGeom>
+          <a:noFill/>
+          <a:ln w="0">
+            <a:noFill/>
+          </a:ln>
+        </p:spPr>
+        <p:txBody>
+          <a:bodyPr numCol="1" spcCol="0" lIns="91440" rIns="91440" tIns="45720" bIns="45720" anchor="t">
+            <a:noAutofit/>
+          </a:bodyPr>
+          <a:p>
+            <a:pPr marL="431640" indent="-324000">
+              <a:lnSpc>
+                <a:spcPct val="100000"/>
+              </a:lnSpc>
+              <a:spcBef>
+                <a:spcPts val="1414"/>
+              </a:spcBef>
+              <a:buClr>
+                <a:srgbClr val="000000"/>
+              </a:buClr>
+              <a:buSzPct val="45000"/>
+              <a:buFont typeface="Wingdings" charset="2"/>
+              <a:buChar char=""/>
+            </a:pPr>
+            <a:r>
+              <a:rPr lang="en-US" sz="3200" b="0" u="none" strike="noStrike">
+                <a:solidFill>
+                  <a:schemeClr val="dk1"/>
+                </a:solidFill>
+                <a:effectLst/>
+                <a:uFillTx/>
+                <a:latin typeface="Arial"/>
+              </a:rPr>
+              <a:t>Click to edit the outline text format</a:t>
+            </a:r>
+            <a:endParaRPr lang="en-US" sz="3200" b="0" u="none" strike="noStrike">
+              <a:solidFill>
+                <a:srgbClr val="000000"/>
+              </a:solidFill>
+              <a:effectLst/>
+              <a:uFillTx/>
+              <a:latin typeface="Arial"/>
+            </a:endParaRPr>
+          </a:p>
+          <a:p>
+            <a:pPr marL="864360" lvl="1" indent="-324000">
+              <a:lnSpc>
+                <a:spcPct val="100000"/>
+              </a:lnSpc>
+              <a:spcBef>
+                <a:spcPts val="1134"/>
+              </a:spcBef>
+              <a:buClr>
+                <a:srgbClr val="000000"/>
+              </a:buClr>
+              <a:buSzPct val="75000"/>
+              <a:buFont typeface="Symbol" charset="2"/>
+              <a:buChar char=""/>
+            </a:pPr>
+            <a:r>
+              <a:rPr lang="en-US" sz="3200" b="0" u="none" strike="noStrike">
+                <a:solidFill>
+                  <a:schemeClr val="dk1"/>
+                </a:solidFill>
+                <a:effectLst/>
+                <a:uFillTx/>
+                <a:latin typeface="Arial"/>
+              </a:rPr>
+              <a:t>Second Outline Level</a:t>
+            </a:r>
+            <a:endParaRPr lang="en-US" sz="3200" b="0" u="none" strike="noStrike">
+              <a:solidFill>
+                <a:srgbClr val="000000"/>
+              </a:solidFill>
+              <a:effectLst/>
+              <a:uFillTx/>
+              <a:latin typeface="Arial"/>
+            </a:endParaRPr>
+          </a:p>
+          <a:p>
+            <a:pPr marL="1296000" lvl="2" indent="-288360">
+              <a:lnSpc>
+                <a:spcPct val="100000"/>
+              </a:lnSpc>
+              <a:spcBef>
+                <a:spcPts val="850"/>
+              </a:spcBef>
+              <a:buClr>
+                <a:srgbClr val="000000"/>
+              </a:buClr>
+              <a:buSzPct val="45000"/>
+              <a:buFont typeface="Wingdings" charset="2"/>
+              <a:buChar char=""/>
+            </a:pPr>
+            <a:r>
+              <a:rPr lang="en-US" sz="3200" b="0" u="none" strike="noStrike">
+                <a:solidFill>
+                  <a:schemeClr val="dk1"/>
+                </a:solidFill>
+                <a:effectLst/>
+                <a:uFillTx/>
+                <a:latin typeface="Arial"/>
+              </a:rPr>
+              <a:t>Third Outline Level</a:t>
+            </a:r>
+            <a:endParaRPr lang="en-US" sz="3200" b="0" u="none" strike="noStrike">
+              <a:solidFill>
+                <a:srgbClr val="000000"/>
+              </a:solidFill>
+              <a:effectLst/>
+              <a:uFillTx/>
+              <a:latin typeface="Arial"/>
+            </a:endParaRPr>
+          </a:p>
+          <a:p>
+            <a:pPr marL="1728000" lvl="3" indent="-216000">
+              <a:lnSpc>
+                <a:spcPct val="100000"/>
+              </a:lnSpc>
+              <a:spcBef>
+                <a:spcPts val="564"/>
+              </a:spcBef>
+              <a:buClr>
+                <a:srgbClr val="000000"/>
+              </a:buClr>
+              <a:buSzPct val="75000"/>
+              <a:buFont typeface="Symbol" charset="2"/>
+              <a:buChar char=""/>
+            </a:pPr>
+            <a:r>
+              <a:rPr lang="en-US" sz="3200" b="0" u="none" strike="noStrike">
+                <a:solidFill>
+                  <a:schemeClr val="dk1"/>
+                </a:solidFill>
+                <a:effectLst/>
+                <a:uFillTx/>
+                <a:latin typeface="Arial"/>
+              </a:rPr>
+              <a:t>Fourth Outline Level</a:t>
+            </a:r>
+            <a:endParaRPr lang="en-US" sz="3200" b="0" u="none" strike="noStrike">
+              <a:solidFill>
+                <a:srgbClr val="000000"/>
+              </a:solidFill>
+              <a:effectLst/>
+              <a:uFillTx/>
+              <a:latin typeface="Arial"/>
+            </a:endParaRPr>
+          </a:p>
+          <a:p>
+            <a:pPr marL="2160360" lvl="4" indent="-216000">
+              <a:lnSpc>
+                <a:spcPct val="100000"/>
+              </a:lnSpc>
+              <a:spcBef>
+                <a:spcPts val="286"/>
+              </a:spcBef>
+              <a:buClr>
+                <a:srgbClr val="000000"/>
+              </a:buClr>
+              <a:buSzPct val="45000"/>
+              <a:buFont typeface="Wingdings" charset="2"/>
+              <a:buChar char=""/>
+            </a:pPr>
+            <a:r>
+              <a:rPr lang="en-US" sz="3200" b="0" u="none" strike="noStrike">
+                <a:solidFill>
+                  <a:schemeClr val="dk1"/>
+                </a:solidFill>
+                <a:effectLst/>
+                <a:uFillTx/>
+                <a:latin typeface="Arial"/>
+              </a:rPr>
+              <a:t>Fifth Outline Level</a:t>
+            </a:r>
+            <a:endParaRPr lang="en-US" sz="3200" b="0" u="none" strike="noStrike">
+              <a:solidFill>
+                <a:srgbClr val="000000"/>
+              </a:solidFill>
+              <a:effectLst/>
+              <a:uFillTx/>
+              <a:latin typeface="Arial"/>
+            </a:endParaRPr>
+          </a:p>
+          <a:p>
+            <a:pPr marL="2592000" lvl="5" indent="-216000">
+              <a:lnSpc>
+                <a:spcPct val="100000"/>
+              </a:lnSpc>
+              <a:spcBef>
+                <a:spcPts val="286"/>
+              </a:spcBef>
+              <a:buClr>
+                <a:srgbClr val="000000"/>
+              </a:buClr>
+              <a:buSzPct val="45000"/>
+              <a:buFont typeface="Wingdings" charset="2"/>
+              <a:buChar char=""/>
+            </a:pPr>
+            <a:r>
+              <a:rPr lang="en-US" sz="3200" b="0" u="none" strike="noStrike">
+                <a:solidFill>
+                  <a:schemeClr val="dk1"/>
+                </a:solidFill>
+                <a:effectLst/>
+                <a:uFillTx/>
+                <a:latin typeface="Arial"/>
+              </a:rPr>
+              <a:t>Sixth Outline Level</a:t>
+            </a:r>
+            <a:endParaRPr lang="en-US" sz="3200" b="0" u="none" strike="noStrike">
+              <a:solidFill>
+                <a:srgbClr val="000000"/>
+              </a:solidFill>
+              <a:effectLst/>
+              <a:uFillTx/>
+              <a:latin typeface="Arial"/>
+            </a:endParaRPr>
+          </a:p>
+          <a:p>
+            <a:pPr marL="3024000" lvl="6" indent="-216000">
+              <a:lnSpc>
+                <a:spcPct val="100000"/>
+              </a:lnSpc>
+              <a:spcBef>
+                <a:spcPts val="286"/>
+              </a:spcBef>
+              <a:buClr>
+                <a:srgbClr val="000000"/>
+              </a:buClr>
+              <a:buSzPct val="45000"/>
+              <a:buFont typeface="Wingdings" charset="2"/>
+              <a:buChar char=""/>
+            </a:pPr>
+            <a:r>
+              <a:rPr lang="en-US" sz="3200" b="0" u="none" strike="noStrike">
+                <a:solidFill>
+                  <a:schemeClr val="dk1"/>
+                </a:solidFill>
+                <a:effectLst/>
+                <a:uFillTx/>
+                <a:latin typeface="Arial"/>
+              </a:rPr>
+              <a:t>Seventh Outline Level</a:t>
+            </a:r>
+            <a:endParaRPr lang="en-US" sz="3200" b="0" u="none" strike="noStrike">
+              <a:solidFill>
+                <a:srgbClr val="000000"/>
+              </a:solidFill>
+              <a:effectLst/>
+              <a:uFillTx/>
+              <a:latin typeface="Arial"/>
+            </a:endParaRPr>
+          </a:p>
+        </p:txBody>
+      </p:sp>
+      <p:sp>
+        <p:nvSpPr>
+          <p:cNvPr id="61" name="PlaceHolder 3"/>
+          <p:cNvSpPr>
+            <a:spLocks noGrp="1"/>
+          </p:cNvSpPr>
+          <p:nvPr>
+            <p:ph type="body"/>
+          </p:nvPr>
+        </p:nvSpPr>
+        <p:spPr>
+          <a:xfrm>
+            <a:off x="840240" y="2057400"/>
+            <a:ext cx="3918960" cy="3798000"/>
+          </a:xfrm>
+          <a:prstGeom prst="rect">
+            <a:avLst/>
+          </a:prstGeom>
+          <a:noFill/>
+          <a:ln w="9360">
+            <a:noFill/>
+          </a:ln>
+        </p:spPr>
+        <p:txBody>
+          <a:bodyPr lIns="90000" rIns="90000" tIns="45000" bIns="45000" anchor="t">
+            <a:noAutofit/>
+          </a:bodyPr>
+          <a:p>
+            <a:pPr indent="0">
+              <a:lnSpc>
+                <a:spcPct val="100000"/>
+              </a:lnSpc>
+              <a:spcBef>
+                <a:spcPts val="320"/>
+              </a:spcBef>
+              <a:buNone/>
+              <a:tabLst>
+                <a:tab algn="l" pos="0"/>
+              </a:tabLst>
+            </a:pPr>
+            <a:r>
+              <a:rPr lang="en-US" sz="1600" b="0" u="none" strike="noStrike">
+                <a:solidFill>
+                  <a:schemeClr val="dk1"/>
+                </a:solidFill>
+                <a:effectLst/>
+                <a:uFillTx/>
+                <a:latin typeface="Arial"/>
+                <a:ea typeface="SimSun"/>
+              </a:rPr>
+              <a:t>Click to edit Master text styles</a:t>
+            </a:r>
+            <a:endParaRPr lang="en-US" sz="1600" b="0" u="none" strike="noStrike">
+              <a:solidFill>
+                <a:srgbClr val="000000"/>
+              </a:solidFill>
+              <a:effectLst/>
+              <a:uFillTx/>
+              <a:latin typeface="Arial"/>
+            </a:endParaRPr>
+          </a:p>
+        </p:txBody>
+      </p:sp>
+      <p:sp>
+        <p:nvSpPr>
+          <p:cNvPr id="62" name="PlaceHolder 4"/>
+          <p:cNvSpPr>
+            <a:spLocks noGrp="1"/>
+          </p:cNvSpPr>
+          <p:nvPr>
+            <p:ph type="dt" idx="28"/>
+          </p:nvPr>
+        </p:nvSpPr>
+        <p:spPr>
+          <a:xfrm>
+            <a:off x="609480" y="6245280"/>
+            <a:ext cx="2831040" cy="462600"/>
+          </a:xfrm>
+          <a:prstGeom prst="rect">
+            <a:avLst/>
+          </a:prstGeom>
+          <a:noFill/>
+          <a:ln w="0">
+            <a:noFill/>
+          </a:ln>
+        </p:spPr>
+        <p:txBody>
+          <a:bodyPr numCol="1" spcCol="0" lIns="91440" rIns="91440" tIns="45720" bIns="45720" anchor="t">
+            <a:noAutofit/>
+          </a:bodyPr>
+          <a:lstStyle>
+            <a:lvl1pPr indent="0" defTabSz="914400">
+              <a:lnSpc>
+                <a:spcPct val="100000"/>
+              </a:lnSpc>
+              <a:buNone/>
+              <a:tabLst>
+                <a:tab algn="l" pos="0"/>
+              </a:tabLst>
+              <a:defRPr lang="en-US" sz="1400" b="0" u="none" strike="noStrike">
+                <a:solidFill>
+                  <a:srgbClr val="000000"/>
+                </a:solidFill>
+                <a:effectLst/>
+                <a:uFillTx/>
+                <a:latin typeface="Times New Roman"/>
+                <a:ea typeface="SimSun"/>
+              </a:defRPr>
+            </a:lvl1pPr>
+          </a:lstStyle>
+          <a:p>
+            <a:pPr indent="0" defTabSz="914400">
+              <a:lnSpc>
+                <a:spcPct val="100000"/>
+              </a:lnSpc>
+              <a:buNone/>
+              <a:tabLst>
+                <a:tab algn="l" pos="0"/>
+              </a:tabLst>
+            </a:pPr>
+            <a:r>
+              <a:rPr lang="en-US" sz="1400" b="0" u="none" strike="noStrike">
+                <a:solidFill>
+                  <a:srgbClr val="000000"/>
+                </a:solidFill>
+                <a:effectLst/>
+                <a:uFillTx/>
+                <a:latin typeface="Times New Roman"/>
+                <a:ea typeface="SimSun"/>
+              </a:rPr>
+              <a:t>&lt;date/time&gt;</a:t>
+            </a:r>
+            <a:endParaRPr lang="en-US" sz="1400" b="0" u="none" strike="noStrike">
+              <a:solidFill>
+                <a:srgbClr val="000000"/>
+              </a:solidFill>
+              <a:effectLst/>
+              <a:uFillTx/>
+              <a:latin typeface="Times New Roman"/>
+            </a:endParaRPr>
+          </a:p>
+        </p:txBody>
+      </p:sp>
+      <p:sp>
+        <p:nvSpPr>
+          <p:cNvPr id="63" name="PlaceHolder 5"/>
+          <p:cNvSpPr>
+            <a:spLocks noGrp="1"/>
+          </p:cNvSpPr>
+          <p:nvPr>
+            <p:ph type="ftr" idx="29"/>
+          </p:nvPr>
+        </p:nvSpPr>
+        <p:spPr>
+          <a:xfrm>
+            <a:off x="4165560" y="6245280"/>
+            <a:ext cx="3846960" cy="462600"/>
+          </a:xfrm>
+          <a:prstGeom prst="rect">
+            <a:avLst/>
+          </a:prstGeom>
+          <a:noFill/>
+          <a:ln w="0">
+            <a:noFill/>
+          </a:ln>
+        </p:spPr>
+        <p:txBody>
+          <a:bodyPr numCol="1" spcCol="0" lIns="91440" rIns="91440" tIns="45720" bIns="45720" anchor="t">
+            <a:noAutofit/>
+          </a:bodyPr>
+          <a:lstStyle>
+            <a:lvl1pPr indent="0" algn="ctr" defTabSz="914400">
+              <a:lnSpc>
+                <a:spcPct val="100000"/>
+              </a:lnSpc>
+              <a:buNone/>
+              <a:tabLst>
+                <a:tab algn="l" pos="0"/>
+              </a:tabLst>
+              <a:defRPr lang="en-US" sz="1400" b="0" u="none" strike="noStrike">
+                <a:solidFill>
+                  <a:srgbClr val="000000"/>
+                </a:solidFill>
+                <a:effectLst/>
+                <a:uFillTx/>
+                <a:latin typeface="Times New Roman"/>
+                <a:ea typeface="SimSun"/>
+              </a:defRPr>
+            </a:lvl1pPr>
+          </a:lstStyle>
+          <a:p>
+            <a:pPr indent="0" algn="ctr" defTabSz="914400">
+              <a:lnSpc>
+                <a:spcPct val="100000"/>
+              </a:lnSpc>
+              <a:buNone/>
+              <a:tabLst>
+                <a:tab algn="l" pos="0"/>
+              </a:tabLst>
+            </a:pPr>
+            <a:r>
+              <a:rPr lang="en-US" sz="1400" b="0" u="none" strike="noStrike">
+                <a:solidFill>
+                  <a:srgbClr val="000000"/>
+                </a:solidFill>
+                <a:effectLst/>
+                <a:uFillTx/>
+                <a:latin typeface="Times New Roman"/>
+                <a:ea typeface="SimSun"/>
+              </a:rPr>
+              <a:t>&lt;footer&gt;</a:t>
+            </a:r>
+            <a:endParaRPr lang="en-US" sz="1400" b="0" u="none" strike="noStrike">
+              <a:solidFill>
+                <a:srgbClr val="000000"/>
+              </a:solidFill>
+              <a:effectLst/>
+              <a:uFillTx/>
+              <a:latin typeface="Times New Roman"/>
+            </a:endParaRPr>
+          </a:p>
+        </p:txBody>
+      </p:sp>
+      <p:sp>
+        <p:nvSpPr>
+          <p:cNvPr id="64" name="PlaceHolder 6"/>
+          <p:cNvSpPr>
+            <a:spLocks noGrp="1"/>
+          </p:cNvSpPr>
+          <p:nvPr>
+            <p:ph type="sldNum" idx="30"/>
+          </p:nvPr>
+        </p:nvSpPr>
+        <p:spPr>
+          <a:xfrm>
+            <a:off x="8737560" y="6245280"/>
+            <a:ext cx="2831040" cy="462600"/>
+          </a:xfrm>
+          <a:prstGeom prst="rect">
+            <a:avLst/>
+          </a:prstGeom>
+          <a:noFill/>
+          <a:ln w="0">
+            <a:noFill/>
+          </a:ln>
+        </p:spPr>
+        <p:txBody>
+          <a:bodyPr numCol="1" spcCol="0" lIns="91440" rIns="91440" tIns="45720" bIns="45720" anchor="t">
+            <a:noAutofit/>
+          </a:bodyPr>
+          <a:p>
+            <a:pPr indent="0">
+              <a:buNone/>
+            </a:pPr>
+            <a:endParaRPr lang="en-US" sz="1800" b="0" u="none" strike="noStrike">
+              <a:solidFill>
+                <a:srgbClr val="000000"/>
+              </a:solidFill>
+              <a:effectLst/>
+              <a:uFillTx/>
+              <a:latin typeface="Times New Roman"/>
+            </a:endParaRPr>
+          </a:p>
+        </p:txBody>
+      </p:sp>
+    </p:spTree>
+  </p:cSld>
+</p:sldLayout>
+</file>
+
+<file path=ppt/slideLayouts/slideLayout11.xml><?xml version="1.0" encoding="utf-8"?>
+<p:sldLayout xmlns:a="http://schemas.openxmlformats.org/drawingml/2006/main" xmlns:p="http://schemas.openxmlformats.org/presentationml/2006/main" xmlns:r="http://schemas.openxmlformats.org/officeDocument/2006/relationships" xmlns:p14="http://schemas.microsoft.com/office/powerpoint/2010/main" xmlns:p15="http://schemas.microsoft.com/office/powerpoint/2012/main" xmlns:mc="http://schemas.openxmlformats.org/markup-compatibility/2006" type="title" preserve="1">
+  <p:cSld name="Title Slide">
+    <p:bg>
+      <p:bgPr>
+        <a:solidFill>
+          <a:srgbClr val="ffffff"/>
+        </a:solidFill>
+      </p:bgPr>
+    </p:bg>
+    <p:spTree>
+      <p:nvGrpSpPr>
+        <p:cNvPr id="1" name=""/>
+        <p:cNvGrpSpPr/>
+        <p:nvPr/>
+      </p:nvGrpSpPr>
+      <p:grpSpPr>
+        <a:xfrm>
+          <a:off x="0" y="0"/>
+          <a:ext cx="0" cy="0"/>
+          <a:chOff x="0" y="0"/>
+          <a:chExt cx="0" cy="0"/>
+        </a:xfrm>
+      </p:grpSpPr>
+      <p:pic>
+        <p:nvPicPr>
+          <p:cNvPr id="65" name="Picture 10" hidden="1"/>
+          <p:cNvPicPr/>
+          <p:nvPr/>
+        </p:nvPicPr>
+        <p:blipFill>
+          <a:blip r:embed="rId2"/>
+          <a:stretch/>
+        </p:blipFill>
+        <p:spPr>
+          <a:xfrm>
+            <a:off x="0" y="0"/>
+            <a:ext cx="12178440" cy="6844320"/>
+          </a:xfrm>
+          <a:prstGeom prst="rect">
+            <a:avLst/>
+          </a:prstGeom>
+          <a:noFill/>
+          <a:ln w="9525">
+            <a:noFill/>
+          </a:ln>
+        </p:spPr>
+      </p:pic>
+      <p:pic>
+        <p:nvPicPr>
+          <p:cNvPr id="66" name="Picture 3"/>
+          <p:cNvPicPr/>
+          <p:nvPr/>
+        </p:nvPicPr>
+        <p:blipFill>
+          <a:blip r:embed="rId3"/>
+          <a:stretch/>
+        </p:blipFill>
+        <p:spPr>
+          <a:xfrm>
+            <a:off x="0" y="0"/>
+            <a:ext cx="12178440" cy="6844320"/>
+          </a:xfrm>
+          <a:prstGeom prst="rect">
+            <a:avLst/>
+          </a:prstGeom>
+          <a:noFill/>
+          <a:ln w="9525">
+            <a:noFill/>
+          </a:ln>
+        </p:spPr>
+      </p:pic>
+      <p:sp>
+        <p:nvSpPr>
+          <p:cNvPr id="67" name="PlaceHolder 1"/>
+          <p:cNvSpPr>
+            <a:spLocks noGrp="1"/>
+          </p:cNvSpPr>
+          <p:nvPr>
+            <p:ph type="title"/>
+          </p:nvPr>
+        </p:nvSpPr>
+        <p:spPr>
+          <a:xfrm>
+            <a:off x="624240" y="3718080"/>
+            <a:ext cx="10929600" cy="1068840"/>
+          </a:xfrm>
+          <a:prstGeom prst="rect">
+            <a:avLst/>
+          </a:prstGeom>
+          <a:noFill/>
+          <a:ln w="9360">
+            <a:noFill/>
+          </a:ln>
+        </p:spPr>
+        <p:txBody>
+          <a:bodyPr lIns="90000" rIns="90000" tIns="45000" bIns="45000" anchor="ctr">
+            <a:noAutofit/>
+          </a:bodyPr>
+          <a:p>
+            <a:pPr indent="0" algn="r">
+              <a:lnSpc>
+                <a:spcPct val="100000"/>
+              </a:lnSpc>
+              <a:buNone/>
+              <a:tabLst>
+                <a:tab algn="l" pos="0"/>
+              </a:tabLst>
+            </a:pPr>
+            <a:r>
+              <a:rPr lang="en-US" sz="3600" b="0" u="none" strike="noStrike">
+                <a:solidFill>
+                  <a:schemeClr val="dk1"/>
+                </a:solidFill>
+                <a:effectLst/>
+                <a:uFillTx/>
+                <a:latin typeface="Arial"/>
+                <a:ea typeface="SimSun"/>
+              </a:rPr>
+              <a:t>Click to edit Master title style</a:t>
+            </a:r>
+            <a:endParaRPr lang="en-US" sz="3600" b="0" u="none" strike="noStrike">
+              <a:solidFill>
+                <a:srgbClr val="000000"/>
+              </a:solidFill>
+              <a:effectLst/>
+              <a:uFillTx/>
+              <a:latin typeface="Arial"/>
+            </a:endParaRPr>
+          </a:p>
+        </p:txBody>
+      </p:sp>
+      <p:sp>
+        <p:nvSpPr>
+          <p:cNvPr id="68" name="PlaceHolder 2"/>
+          <p:cNvSpPr>
+            <a:spLocks noGrp="1"/>
+          </p:cNvSpPr>
+          <p:nvPr>
+            <p:ph type="dt" idx="31"/>
+          </p:nvPr>
+        </p:nvSpPr>
+        <p:spPr>
+          <a:xfrm>
+            <a:off x="609480" y="6245280"/>
+            <a:ext cx="2831040" cy="462600"/>
+          </a:xfrm>
+          <a:prstGeom prst="rect">
+            <a:avLst/>
+          </a:prstGeom>
+          <a:noFill/>
+          <a:ln w="0">
+            <a:noFill/>
+          </a:ln>
+        </p:spPr>
+        <p:txBody>
+          <a:bodyPr numCol="1" spcCol="0" lIns="91440" rIns="91440" tIns="45720" bIns="45720" anchor="t">
+            <a:noAutofit/>
+          </a:bodyPr>
+          <a:lstStyle>
+            <a:lvl1pPr indent="0" defTabSz="914400">
+              <a:lnSpc>
+                <a:spcPct val="100000"/>
+              </a:lnSpc>
+              <a:buNone/>
+              <a:tabLst>
+                <a:tab algn="l" pos="0"/>
+              </a:tabLst>
+              <a:defRPr lang="en-US" sz="1400" b="0" u="none" strike="noStrike">
+                <a:solidFill>
+                  <a:srgbClr val="000000"/>
+                </a:solidFill>
+                <a:effectLst/>
+                <a:uFillTx/>
+                <a:latin typeface="Times New Roman"/>
+                <a:ea typeface="SimSun"/>
+              </a:defRPr>
+            </a:lvl1pPr>
+          </a:lstStyle>
+          <a:p>
+            <a:pPr indent="0" defTabSz="914400">
+              <a:lnSpc>
+                <a:spcPct val="100000"/>
+              </a:lnSpc>
+              <a:buNone/>
+              <a:tabLst>
+                <a:tab algn="l" pos="0"/>
+              </a:tabLst>
+            </a:pPr>
+            <a:r>
+              <a:rPr lang="en-US" sz="1400" b="0" u="none" strike="noStrike">
+                <a:solidFill>
+                  <a:srgbClr val="000000"/>
+                </a:solidFill>
+                <a:effectLst/>
+                <a:uFillTx/>
+                <a:latin typeface="Times New Roman"/>
+                <a:ea typeface="SimSun"/>
+              </a:rPr>
+              <a:t>&lt;date/time&gt;</a:t>
+            </a:r>
+            <a:endParaRPr lang="en-US" sz="1400" b="0" u="none" strike="noStrike">
+              <a:solidFill>
+                <a:srgbClr val="000000"/>
+              </a:solidFill>
+              <a:effectLst/>
+              <a:uFillTx/>
+              <a:latin typeface="Times New Roman"/>
+            </a:endParaRPr>
+          </a:p>
+        </p:txBody>
+      </p:sp>
+      <p:sp>
+        <p:nvSpPr>
+          <p:cNvPr id="69" name="PlaceHolder 3"/>
+          <p:cNvSpPr>
+            <a:spLocks noGrp="1"/>
+          </p:cNvSpPr>
+          <p:nvPr>
+            <p:ph type="ftr" idx="32"/>
+          </p:nvPr>
+        </p:nvSpPr>
+        <p:spPr>
+          <a:xfrm>
+            <a:off x="4165560" y="6245280"/>
+            <a:ext cx="3846960" cy="462600"/>
+          </a:xfrm>
+          <a:prstGeom prst="rect">
+            <a:avLst/>
+          </a:prstGeom>
+          <a:noFill/>
+          <a:ln w="0">
+            <a:noFill/>
+          </a:ln>
+        </p:spPr>
+        <p:txBody>
+          <a:bodyPr numCol="1" spcCol="0" lIns="91440" rIns="91440" tIns="45720" bIns="45720" anchor="t">
+            <a:noAutofit/>
+          </a:bodyPr>
+          <a:lstStyle>
+            <a:lvl1pPr indent="0" algn="ctr" defTabSz="914400">
+              <a:lnSpc>
+                <a:spcPct val="100000"/>
+              </a:lnSpc>
+              <a:buNone/>
+              <a:tabLst>
+                <a:tab algn="l" pos="0"/>
+              </a:tabLst>
+              <a:defRPr lang="en-US" sz="1400" b="0" u="none" strike="noStrike">
+                <a:solidFill>
+                  <a:srgbClr val="000000"/>
+                </a:solidFill>
+                <a:effectLst/>
+                <a:uFillTx/>
+                <a:latin typeface="Times New Roman"/>
+                <a:ea typeface="SimSun"/>
+              </a:defRPr>
+            </a:lvl1pPr>
+          </a:lstStyle>
+          <a:p>
+            <a:pPr indent="0" algn="ctr" defTabSz="914400">
+              <a:lnSpc>
+                <a:spcPct val="100000"/>
+              </a:lnSpc>
+              <a:buNone/>
+              <a:tabLst>
+                <a:tab algn="l" pos="0"/>
+              </a:tabLst>
+            </a:pPr>
+            <a:r>
+              <a:rPr lang="en-US" sz="1400" b="0" u="none" strike="noStrike">
+                <a:solidFill>
+                  <a:srgbClr val="000000"/>
+                </a:solidFill>
+                <a:effectLst/>
+                <a:uFillTx/>
+                <a:latin typeface="Times New Roman"/>
+                <a:ea typeface="SimSun"/>
+              </a:rPr>
+              <a:t>&lt;footer&gt;</a:t>
+            </a:r>
+            <a:endParaRPr lang="en-US" sz="1400" b="0" u="none" strike="noStrike">
+              <a:solidFill>
+                <a:srgbClr val="000000"/>
+              </a:solidFill>
+              <a:effectLst/>
+              <a:uFillTx/>
+              <a:latin typeface="Times New Roman"/>
+            </a:endParaRPr>
+          </a:p>
+        </p:txBody>
+      </p:sp>
+      <p:sp>
+        <p:nvSpPr>
+          <p:cNvPr id="70" name="PlaceHolder 4"/>
+          <p:cNvSpPr>
+            <a:spLocks noGrp="1"/>
+          </p:cNvSpPr>
+          <p:nvPr>
+            <p:ph type="sldNum" idx="33"/>
+          </p:nvPr>
+        </p:nvSpPr>
+        <p:spPr>
+          <a:xfrm>
+            <a:off x="8737560" y="6245280"/>
+            <a:ext cx="2831040" cy="462600"/>
+          </a:xfrm>
+          <a:prstGeom prst="rect">
+            <a:avLst/>
+          </a:prstGeom>
+          <a:noFill/>
+          <a:ln w="0">
+            <a:noFill/>
+          </a:ln>
+        </p:spPr>
+        <p:txBody>
+          <a:bodyPr numCol="1" spcCol="0" lIns="91440" rIns="91440" tIns="45720" bIns="45720" anchor="t">
+            <a:noAutofit/>
+          </a:bodyPr>
+          <a:p>
+            <a:pPr indent="0">
+              <a:buNone/>
+            </a:pPr>
+            <a:endParaRPr lang="en-US" sz="1800" b="0" u="none" strike="noStrike">
+              <a:solidFill>
+                <a:srgbClr val="000000"/>
+              </a:solidFill>
+              <a:effectLst/>
+              <a:uFillTx/>
+              <a:latin typeface="Times New Roman"/>
+            </a:endParaRPr>
+          </a:p>
+        </p:txBody>
+      </p:sp>
+    </p:spTree>
+  </p:cSld>
+</p:sldLayout>
+</file>
+
+<file path=ppt/slideLayouts/slideLayout2.xml><?xml version="1.0" encoding="utf-8"?>
 <p:sldLayout xmlns:a="http://schemas.openxmlformats.org/drawingml/2006/main" xmlns:p="http://schemas.openxmlformats.org/presentationml/2006/main" xmlns:r="http://schemas.openxmlformats.org/officeDocument/2006/relationships" xmlns:p14="http://schemas.microsoft.com/office/powerpoint/2010/main" xmlns:p15="http://schemas.microsoft.com/office/powerpoint/2012/main" xmlns:mc="http://schemas.openxmlformats.org/markup-compatibility/2006" type="obj" preserve="1">
   <p:cSld name="Title and Content">
     <p:bg>
@@ -369,7 +1565,7 @@
       </p:grpSpPr>
       <p:pic>
         <p:nvPicPr>
-          <p:cNvPr id="59" name="Picture 10"/>
+          <p:cNvPr id="8" name="Picture 10"/>
           <p:cNvPicPr/>
           <p:nvPr/>
         </p:nvPicPr>
@@ -380,7 +1576,7 @@
         <p:spPr>
           <a:xfrm>
             <a:off x="0" y="0"/>
-            <a:ext cx="12178800" cy="6844680"/>
+            <a:ext cx="12178440" cy="6844320"/>
           </a:xfrm>
           <a:prstGeom prst="rect">
             <a:avLst/>
@@ -393,7 +1589,7 @@
       </p:pic>
       <p:sp>
         <p:nvSpPr>
-          <p:cNvPr id="60" name="PlaceHolder 1"/>
+          <p:cNvPr id="9" name="PlaceHolder 1"/>
           <p:cNvSpPr>
             <a:spLocks noGrp="1"/>
           </p:cNvSpPr>
@@ -404,7 +1600,7 @@
         <p:spPr>
           <a:xfrm>
             <a:off x="609480" y="190440"/>
-            <a:ext cx="10959480" cy="569160"/>
+            <a:ext cx="10959120" cy="568800"/>
           </a:xfrm>
           <a:prstGeom prst="rect">
             <a:avLst/>
@@ -453,7 +1649,7 @@
       </p:sp>
       <p:sp>
         <p:nvSpPr>
-          <p:cNvPr id="61" name="PlaceHolder 2"/>
+          <p:cNvPr id="10" name="PlaceHolder 2"/>
           <p:cNvSpPr>
             <a:spLocks noGrp="1"/>
           </p:cNvSpPr>
@@ -464,7 +1660,7 @@
         <p:spPr>
           <a:xfrm>
             <a:off x="609480" y="1174680"/>
-            <a:ext cx="10959480" cy="4939560"/>
+            <a:ext cx="10959120" cy="4939200"/>
           </a:xfrm>
           <a:prstGeom prst="rect">
             <a:avLst/>
@@ -657,1108 +1853,7 @@
       </p:sp>
       <p:sp>
         <p:nvSpPr>
-          <p:cNvPr id="62" name="PlaceHolder 3"/>
-          <p:cNvSpPr>
-            <a:spLocks noGrp="1"/>
-          </p:cNvSpPr>
-          <p:nvPr>
-            <p:ph type="dt" idx="28"/>
-          </p:nvPr>
-        </p:nvSpPr>
-        <p:spPr>
-          <a:xfrm>
-            <a:off x="609480" y="6245280"/>
-            <a:ext cx="2831400" cy="462960"/>
-          </a:xfrm>
-          <a:prstGeom prst="rect">
-            <a:avLst/>
-          </a:prstGeom>
-          <a:noFill/>
-          <a:ln w="0">
-            <a:noFill/>
-          </a:ln>
-        </p:spPr>
-        <p:txBody>
-          <a:bodyPr numCol="1" spcCol="0" lIns="91440" rIns="91440" tIns="45720" bIns="45720" anchor="t">
-            <a:noAutofit/>
-          </a:bodyPr>
-          <a:lstStyle>
-            <a:lvl1pPr indent="0" defTabSz="914400">
-              <a:lnSpc>
-                <a:spcPct val="100000"/>
-              </a:lnSpc>
-              <a:buNone/>
-              <a:tabLst>
-                <a:tab algn="l" pos="0"/>
-              </a:tabLst>
-              <a:defRPr lang="en-US" sz="1400" b="0" u="none" strike="noStrike">
-                <a:solidFill>
-                  <a:srgbClr val="000000"/>
-                </a:solidFill>
-                <a:effectLst/>
-                <a:uFillTx/>
-                <a:latin typeface="Times New Roman"/>
-                <a:ea typeface="SimSun"/>
-              </a:defRPr>
-            </a:lvl1pPr>
-          </a:lstStyle>
-          <a:p>
-            <a:pPr indent="0" defTabSz="914400">
-              <a:lnSpc>
-                <a:spcPct val="100000"/>
-              </a:lnSpc>
-              <a:buNone/>
-              <a:tabLst>
-                <a:tab algn="l" pos="0"/>
-              </a:tabLst>
-            </a:pPr>
-            <a:r>
-              <a:rPr lang="en-US" sz="1400" b="0" u="none" strike="noStrike">
-                <a:solidFill>
-                  <a:srgbClr val="000000"/>
-                </a:solidFill>
-                <a:effectLst/>
-                <a:uFillTx/>
-                <a:latin typeface="Times New Roman"/>
-                <a:ea typeface="SimSun"/>
-              </a:rPr>
-              <a:t>&lt;date/time&gt;</a:t>
-            </a:r>
-            <a:endParaRPr lang="en-US" sz="1400" b="0" u="none" strike="noStrike">
-              <a:solidFill>
-                <a:srgbClr val="000000"/>
-              </a:solidFill>
-              <a:effectLst/>
-              <a:uFillTx/>
-              <a:latin typeface="Times New Roman"/>
-            </a:endParaRPr>
-          </a:p>
-        </p:txBody>
-      </p:sp>
-      <p:sp>
-        <p:nvSpPr>
-          <p:cNvPr id="63" name="PlaceHolder 4"/>
-          <p:cNvSpPr>
-            <a:spLocks noGrp="1"/>
-          </p:cNvSpPr>
-          <p:nvPr>
-            <p:ph type="ftr" idx="29"/>
-          </p:nvPr>
-        </p:nvSpPr>
-        <p:spPr>
-          <a:xfrm>
-            <a:off x="4165560" y="6245280"/>
-            <a:ext cx="3847320" cy="462960"/>
-          </a:xfrm>
-          <a:prstGeom prst="rect">
-            <a:avLst/>
-          </a:prstGeom>
-          <a:noFill/>
-          <a:ln w="0">
-            <a:noFill/>
-          </a:ln>
-        </p:spPr>
-        <p:txBody>
-          <a:bodyPr numCol="1" spcCol="0" lIns="91440" rIns="91440" tIns="45720" bIns="45720" anchor="t">
-            <a:noAutofit/>
-          </a:bodyPr>
-          <a:lstStyle>
-            <a:lvl1pPr indent="0" algn="ctr" defTabSz="914400">
-              <a:lnSpc>
-                <a:spcPct val="100000"/>
-              </a:lnSpc>
-              <a:buNone/>
-              <a:tabLst>
-                <a:tab algn="l" pos="0"/>
-              </a:tabLst>
-              <a:defRPr lang="en-US" sz="1400" b="0" u="none" strike="noStrike">
-                <a:solidFill>
-                  <a:srgbClr val="000000"/>
-                </a:solidFill>
-                <a:effectLst/>
-                <a:uFillTx/>
-                <a:latin typeface="Times New Roman"/>
-                <a:ea typeface="SimSun"/>
-              </a:defRPr>
-            </a:lvl1pPr>
-          </a:lstStyle>
-          <a:p>
-            <a:pPr indent="0" algn="ctr" defTabSz="914400">
-              <a:lnSpc>
-                <a:spcPct val="100000"/>
-              </a:lnSpc>
-              <a:buNone/>
-              <a:tabLst>
-                <a:tab algn="l" pos="0"/>
-              </a:tabLst>
-            </a:pPr>
-            <a:r>
-              <a:rPr lang="en-US" sz="1400" b="0" u="none" strike="noStrike">
-                <a:solidFill>
-                  <a:srgbClr val="000000"/>
-                </a:solidFill>
-                <a:effectLst/>
-                <a:uFillTx/>
-                <a:latin typeface="Times New Roman"/>
-                <a:ea typeface="SimSun"/>
-              </a:rPr>
-              <a:t>&lt;footer&gt;</a:t>
-            </a:r>
-            <a:endParaRPr lang="en-US" sz="1400" b="0" u="none" strike="noStrike">
-              <a:solidFill>
-                <a:srgbClr val="000000"/>
-              </a:solidFill>
-              <a:effectLst/>
-              <a:uFillTx/>
-              <a:latin typeface="Times New Roman"/>
-            </a:endParaRPr>
-          </a:p>
-        </p:txBody>
-      </p:sp>
-      <p:sp>
-        <p:nvSpPr>
-          <p:cNvPr id="64" name="PlaceHolder 5"/>
-          <p:cNvSpPr>
-            <a:spLocks noGrp="1"/>
-          </p:cNvSpPr>
-          <p:nvPr>
-            <p:ph type="sldNum" idx="30"/>
-          </p:nvPr>
-        </p:nvSpPr>
-        <p:spPr>
-          <a:xfrm>
-            <a:off x="8737560" y="6245280"/>
-            <a:ext cx="2831400" cy="462960"/>
-          </a:xfrm>
-          <a:prstGeom prst="rect">
-            <a:avLst/>
-          </a:prstGeom>
-          <a:noFill/>
-          <a:ln w="0">
-            <a:noFill/>
-          </a:ln>
-        </p:spPr>
-        <p:txBody>
-          <a:bodyPr numCol="1" spcCol="0" lIns="91440" rIns="91440" tIns="45720" bIns="45720" anchor="t">
-            <a:noAutofit/>
-          </a:bodyPr>
-          <a:p>
-            <a:pPr indent="0">
-              <a:buNone/>
-            </a:pPr>
-            <a:endParaRPr lang="en-US" sz="1800" b="0" u="none" strike="noStrike">
-              <a:solidFill>
-                <a:srgbClr val="000000"/>
-              </a:solidFill>
-              <a:effectLst/>
-              <a:uFillTx/>
-              <a:latin typeface="Times New Roman"/>
-            </a:endParaRPr>
-          </a:p>
-        </p:txBody>
-      </p:sp>
-    </p:spTree>
-  </p:cSld>
-</p:sldLayout>
-</file>
-
-<file path=ppt/slideLayouts/slideLayout11.xml><?xml version="1.0" encoding="utf-8"?>
-<p:sldLayout xmlns:a="http://schemas.openxmlformats.org/drawingml/2006/main" xmlns:p="http://schemas.openxmlformats.org/presentationml/2006/main" xmlns:r="http://schemas.openxmlformats.org/officeDocument/2006/relationships" xmlns:p14="http://schemas.microsoft.com/office/powerpoint/2010/main" xmlns:p15="http://schemas.microsoft.com/office/powerpoint/2012/main" xmlns:mc="http://schemas.openxmlformats.org/markup-compatibility/2006" type="blank" preserve="1">
-  <p:cSld name="Section Header">
-    <p:bg>
-      <p:bgPr>
-        <a:solidFill>
-          <a:srgbClr val="ffffff"/>
-        </a:solidFill>
-      </p:bgPr>
-    </p:bg>
-    <p:spTree>
-      <p:nvGrpSpPr>
-        <p:cNvPr id="1" name=""/>
-        <p:cNvGrpSpPr/>
-        <p:nvPr/>
-      </p:nvGrpSpPr>
-      <p:grpSpPr>
-        <a:xfrm>
-          <a:off x="0" y="0"/>
-          <a:ext cx="0" cy="0"/>
-          <a:chOff x="0" y="0"/>
-          <a:chExt cx="0" cy="0"/>
-        </a:xfrm>
-      </p:grpSpPr>
-      <p:pic>
-        <p:nvPicPr>
-          <p:cNvPr id="65" name="Picture 10"/>
-          <p:cNvPicPr/>
-          <p:nvPr/>
-        </p:nvPicPr>
-        <p:blipFill>
-          <a:blip r:embed="rId2"/>
-          <a:stretch/>
-        </p:blipFill>
-        <p:spPr>
-          <a:xfrm>
-            <a:off x="0" y="0"/>
-            <a:ext cx="12178800" cy="6844680"/>
-          </a:xfrm>
-          <a:prstGeom prst="rect">
-            <a:avLst/>
-          </a:prstGeom>
-          <a:noFill/>
-          <a:ln w="9525">
-            <a:noFill/>
-          </a:ln>
-        </p:spPr>
-      </p:pic>
-      <p:sp>
-        <p:nvSpPr>
-          <p:cNvPr id="66" name="PlaceHolder 1"/>
-          <p:cNvSpPr>
-            <a:spLocks noGrp="1"/>
-          </p:cNvSpPr>
-          <p:nvPr>
-            <p:ph type="title"/>
-          </p:nvPr>
-        </p:nvSpPr>
-        <p:spPr>
-          <a:xfrm>
-            <a:off x="831960" y="1709640"/>
-            <a:ext cx="10502280" cy="2839320"/>
-          </a:xfrm>
-          <a:prstGeom prst="rect">
-            <a:avLst/>
-          </a:prstGeom>
-          <a:noFill/>
-          <a:ln w="9360">
-            <a:noFill/>
-          </a:ln>
-        </p:spPr>
-        <p:txBody>
-          <a:bodyPr lIns="90000" rIns="90000" tIns="45000" bIns="45000" anchor="b">
-            <a:noAutofit/>
-          </a:bodyPr>
-          <a:p>
-            <a:pPr indent="0">
-              <a:lnSpc>
-                <a:spcPct val="100000"/>
-              </a:lnSpc>
-              <a:buNone/>
-              <a:tabLst>
-                <a:tab algn="l" pos="0"/>
-              </a:tabLst>
-            </a:pPr>
-            <a:r>
-              <a:rPr lang="en-US" sz="6000" b="0" u="none" strike="noStrike">
-                <a:solidFill>
-                  <a:schemeClr val="dk1"/>
-                </a:solidFill>
-                <a:effectLst/>
-                <a:uFillTx/>
-                <a:latin typeface="Arial"/>
-                <a:ea typeface="SimSun"/>
-              </a:rPr>
-              <a:t>Click to edit Master title style</a:t>
-            </a:r>
-            <a:endParaRPr lang="en-US" sz="6000" b="0" u="none" strike="noStrike">
-              <a:solidFill>
-                <a:srgbClr val="000000"/>
-              </a:solidFill>
-              <a:effectLst/>
-              <a:uFillTx/>
-              <a:latin typeface="Arial"/>
-            </a:endParaRPr>
-          </a:p>
-        </p:txBody>
-      </p:sp>
-      <p:sp>
-        <p:nvSpPr>
-          <p:cNvPr id="67" name="PlaceHolder 2"/>
-          <p:cNvSpPr>
-            <a:spLocks noGrp="1"/>
-          </p:cNvSpPr>
-          <p:nvPr>
-            <p:ph type="body"/>
-          </p:nvPr>
-        </p:nvSpPr>
-        <p:spPr>
-          <a:xfrm>
-            <a:off x="831960" y="4589640"/>
-            <a:ext cx="10502280" cy="1486800"/>
-          </a:xfrm>
-          <a:prstGeom prst="rect">
-            <a:avLst/>
-          </a:prstGeom>
-          <a:noFill/>
-          <a:ln w="9360">
-            <a:noFill/>
-          </a:ln>
-        </p:spPr>
-        <p:txBody>
-          <a:bodyPr lIns="90000" rIns="90000" tIns="45000" bIns="45000" anchor="t">
-            <a:noAutofit/>
-          </a:bodyPr>
-          <a:p>
-            <a:pPr indent="0">
-              <a:lnSpc>
-                <a:spcPct val="100000"/>
-              </a:lnSpc>
-              <a:spcBef>
-                <a:spcPts val="479"/>
-              </a:spcBef>
-              <a:buNone/>
-              <a:tabLst>
-                <a:tab algn="l" pos="0"/>
-              </a:tabLst>
-            </a:pPr>
-            <a:r>
-              <a:rPr lang="en-US" sz="2400" b="0" u="none" strike="noStrike">
-                <a:solidFill>
-                  <a:schemeClr val="dk1"/>
-                </a:solidFill>
-                <a:effectLst/>
-                <a:uFillTx/>
-                <a:latin typeface="Arial"/>
-                <a:ea typeface="SimSun"/>
-              </a:rPr>
-              <a:t>Click to edit Master text styles</a:t>
-            </a:r>
-            <a:endParaRPr lang="en-US" sz="2400" b="0" u="none" strike="noStrike">
-              <a:solidFill>
-                <a:srgbClr val="000000"/>
-              </a:solidFill>
-              <a:effectLst/>
-              <a:uFillTx/>
-              <a:latin typeface="Arial"/>
-            </a:endParaRPr>
-          </a:p>
-        </p:txBody>
-      </p:sp>
-      <p:sp>
-        <p:nvSpPr>
-          <p:cNvPr id="68" name="PlaceHolder 3"/>
-          <p:cNvSpPr>
-            <a:spLocks noGrp="1"/>
-          </p:cNvSpPr>
-          <p:nvPr>
-            <p:ph type="dt" idx="31"/>
-          </p:nvPr>
-        </p:nvSpPr>
-        <p:spPr>
-          <a:xfrm>
-            <a:off x="609480" y="6245280"/>
-            <a:ext cx="2831400" cy="462960"/>
-          </a:xfrm>
-          <a:prstGeom prst="rect">
-            <a:avLst/>
-          </a:prstGeom>
-          <a:noFill/>
-          <a:ln w="0">
-            <a:noFill/>
-          </a:ln>
-        </p:spPr>
-        <p:txBody>
-          <a:bodyPr numCol="1" spcCol="0" lIns="91440" rIns="91440" tIns="45720" bIns="45720" anchor="t">
-            <a:noAutofit/>
-          </a:bodyPr>
-          <a:lstStyle>
-            <a:lvl1pPr indent="0" defTabSz="914400">
-              <a:lnSpc>
-                <a:spcPct val="100000"/>
-              </a:lnSpc>
-              <a:buNone/>
-              <a:tabLst>
-                <a:tab algn="l" pos="0"/>
-              </a:tabLst>
-              <a:defRPr lang="en-US" sz="1400" b="0" u="none" strike="noStrike">
-                <a:solidFill>
-                  <a:srgbClr val="000000"/>
-                </a:solidFill>
-                <a:effectLst/>
-                <a:uFillTx/>
-                <a:latin typeface="Times New Roman"/>
-                <a:ea typeface="SimSun"/>
-              </a:defRPr>
-            </a:lvl1pPr>
-          </a:lstStyle>
-          <a:p>
-            <a:pPr indent="0" defTabSz="914400">
-              <a:lnSpc>
-                <a:spcPct val="100000"/>
-              </a:lnSpc>
-              <a:buNone/>
-              <a:tabLst>
-                <a:tab algn="l" pos="0"/>
-              </a:tabLst>
-            </a:pPr>
-            <a:r>
-              <a:rPr lang="en-US" sz="1400" b="0" u="none" strike="noStrike">
-                <a:solidFill>
-                  <a:srgbClr val="000000"/>
-                </a:solidFill>
-                <a:effectLst/>
-                <a:uFillTx/>
-                <a:latin typeface="Times New Roman"/>
-                <a:ea typeface="SimSun"/>
-              </a:rPr>
-              <a:t>&lt;date/time&gt;</a:t>
-            </a:r>
-            <a:endParaRPr lang="en-US" sz="1400" b="0" u="none" strike="noStrike">
-              <a:solidFill>
-                <a:srgbClr val="000000"/>
-              </a:solidFill>
-              <a:effectLst/>
-              <a:uFillTx/>
-              <a:latin typeface="Times New Roman"/>
-            </a:endParaRPr>
-          </a:p>
-        </p:txBody>
-      </p:sp>
-      <p:sp>
-        <p:nvSpPr>
-          <p:cNvPr id="69" name="PlaceHolder 4"/>
-          <p:cNvSpPr>
-            <a:spLocks noGrp="1"/>
-          </p:cNvSpPr>
-          <p:nvPr>
-            <p:ph type="ftr" idx="32"/>
-          </p:nvPr>
-        </p:nvSpPr>
-        <p:spPr>
-          <a:xfrm>
-            <a:off x="4165560" y="6245280"/>
-            <a:ext cx="3847320" cy="462960"/>
-          </a:xfrm>
-          <a:prstGeom prst="rect">
-            <a:avLst/>
-          </a:prstGeom>
-          <a:noFill/>
-          <a:ln w="0">
-            <a:noFill/>
-          </a:ln>
-        </p:spPr>
-        <p:txBody>
-          <a:bodyPr numCol="1" spcCol="0" lIns="91440" rIns="91440" tIns="45720" bIns="45720" anchor="t">
-            <a:noAutofit/>
-          </a:bodyPr>
-          <a:lstStyle>
-            <a:lvl1pPr indent="0" algn="ctr" defTabSz="914400">
-              <a:lnSpc>
-                <a:spcPct val="100000"/>
-              </a:lnSpc>
-              <a:buNone/>
-              <a:tabLst>
-                <a:tab algn="l" pos="0"/>
-              </a:tabLst>
-              <a:defRPr lang="en-US" sz="1400" b="0" u="none" strike="noStrike">
-                <a:solidFill>
-                  <a:srgbClr val="000000"/>
-                </a:solidFill>
-                <a:effectLst/>
-                <a:uFillTx/>
-                <a:latin typeface="Times New Roman"/>
-                <a:ea typeface="SimSun"/>
-              </a:defRPr>
-            </a:lvl1pPr>
-          </a:lstStyle>
-          <a:p>
-            <a:pPr indent="0" algn="ctr" defTabSz="914400">
-              <a:lnSpc>
-                <a:spcPct val="100000"/>
-              </a:lnSpc>
-              <a:buNone/>
-              <a:tabLst>
-                <a:tab algn="l" pos="0"/>
-              </a:tabLst>
-            </a:pPr>
-            <a:r>
-              <a:rPr lang="en-US" sz="1400" b="0" u="none" strike="noStrike">
-                <a:solidFill>
-                  <a:srgbClr val="000000"/>
-                </a:solidFill>
-                <a:effectLst/>
-                <a:uFillTx/>
-                <a:latin typeface="Times New Roman"/>
-                <a:ea typeface="SimSun"/>
-              </a:rPr>
-              <a:t>&lt;footer&gt;</a:t>
-            </a:r>
-            <a:endParaRPr lang="en-US" sz="1400" b="0" u="none" strike="noStrike">
-              <a:solidFill>
-                <a:srgbClr val="000000"/>
-              </a:solidFill>
-              <a:effectLst/>
-              <a:uFillTx/>
-              <a:latin typeface="Times New Roman"/>
-            </a:endParaRPr>
-          </a:p>
-        </p:txBody>
-      </p:sp>
-      <p:sp>
-        <p:nvSpPr>
-          <p:cNvPr id="70" name="PlaceHolder 5"/>
-          <p:cNvSpPr>
-            <a:spLocks noGrp="1"/>
-          </p:cNvSpPr>
-          <p:nvPr>
-            <p:ph type="sldNum" idx="33"/>
-          </p:nvPr>
-        </p:nvSpPr>
-        <p:spPr>
-          <a:xfrm>
-            <a:off x="8737560" y="6245280"/>
-            <a:ext cx="2831400" cy="462960"/>
-          </a:xfrm>
-          <a:prstGeom prst="rect">
-            <a:avLst/>
-          </a:prstGeom>
-          <a:noFill/>
-          <a:ln w="0">
-            <a:noFill/>
-          </a:ln>
-        </p:spPr>
-        <p:txBody>
-          <a:bodyPr numCol="1" spcCol="0" lIns="91440" rIns="91440" tIns="45720" bIns="45720" anchor="t">
-            <a:noAutofit/>
-          </a:bodyPr>
-          <a:p>
-            <a:pPr indent="0">
-              <a:buNone/>
-            </a:pPr>
-            <a:endParaRPr lang="en-US" sz="1800" b="0" u="none" strike="noStrike">
-              <a:solidFill>
-                <a:srgbClr val="000000"/>
-              </a:solidFill>
-              <a:effectLst/>
-              <a:uFillTx/>
-              <a:latin typeface="Times New Roman"/>
-            </a:endParaRPr>
-          </a:p>
-        </p:txBody>
-      </p:sp>
-    </p:spTree>
-  </p:cSld>
-</p:sldLayout>
-</file>
-
-<file path=ppt/slideLayouts/slideLayout2.xml><?xml version="1.0" encoding="utf-8"?>
-<p:sldLayout xmlns:a="http://schemas.openxmlformats.org/drawingml/2006/main" xmlns:p="http://schemas.openxmlformats.org/presentationml/2006/main" xmlns:r="http://schemas.openxmlformats.org/officeDocument/2006/relationships" xmlns:p14="http://schemas.microsoft.com/office/powerpoint/2010/main" xmlns:p15="http://schemas.microsoft.com/office/powerpoint/2012/main" xmlns:mc="http://schemas.openxmlformats.org/markup-compatibility/2006" type="twoObj" preserve="1">
-  <p:cSld name="Two Content">
-    <p:bg>
-      <p:bgPr>
-        <a:solidFill>
-          <a:srgbClr val="ffffff"/>
-        </a:solidFill>
-      </p:bgPr>
-    </p:bg>
-    <p:spTree>
-      <p:nvGrpSpPr>
-        <p:cNvPr id="1" name=""/>
-        <p:cNvGrpSpPr/>
-        <p:nvPr/>
-      </p:nvGrpSpPr>
-      <p:grpSpPr>
-        <a:xfrm>
-          <a:off x="0" y="0"/>
-          <a:ext cx="0" cy="0"/>
-          <a:chOff x="0" y="0"/>
-          <a:chExt cx="0" cy="0"/>
-        </a:xfrm>
-      </p:grpSpPr>
-      <p:pic>
-        <p:nvPicPr>
-          <p:cNvPr id="7" name="Picture 10"/>
-          <p:cNvPicPr/>
-          <p:nvPr/>
-        </p:nvPicPr>
-        <p:blipFill>
-          <a:blip r:embed="rId2"/>
-          <a:stretch/>
-        </p:blipFill>
-        <p:spPr>
-          <a:xfrm>
-            <a:off x="0" y="0"/>
-            <a:ext cx="12178800" cy="6844680"/>
-          </a:xfrm>
-          <a:prstGeom prst="rect">
-            <a:avLst/>
-          </a:prstGeom>
-          <a:noFill/>
-          <a:ln w="9525">
-            <a:noFill/>
-          </a:ln>
-        </p:spPr>
-      </p:pic>
-      <p:sp>
-        <p:nvSpPr>
-          <p:cNvPr id="8" name="PlaceHolder 1"/>
-          <p:cNvSpPr>
-            <a:spLocks noGrp="1"/>
-          </p:cNvSpPr>
-          <p:nvPr>
-            <p:ph type="title"/>
-          </p:nvPr>
-        </p:nvSpPr>
-        <p:spPr>
-          <a:xfrm>
-            <a:off x="609480" y="190440"/>
-            <a:ext cx="10959480" cy="569160"/>
-          </a:xfrm>
-          <a:prstGeom prst="rect">
-            <a:avLst/>
-          </a:prstGeom>
-          <a:noFill/>
-          <a:ln w="9360">
-            <a:noFill/>
-          </a:ln>
-        </p:spPr>
-        <p:txBody>
-          <a:bodyPr lIns="90000" rIns="90000" tIns="45000" bIns="45000" anchor="ctr">
-            <a:noAutofit/>
-          </a:bodyPr>
-          <a:p>
-            <a:pPr indent="0">
-              <a:lnSpc>
-                <a:spcPct val="100000"/>
-              </a:lnSpc>
-              <a:buNone/>
-              <a:tabLst>
-                <a:tab algn="l" pos="0"/>
-              </a:tabLst>
-            </a:pPr>
-            <a:r>
-              <a:rPr lang="en-US" sz="3600" b="0" u="none" strike="noStrike">
-                <a:solidFill>
-                  <a:schemeClr val="dk1"/>
-                </a:solidFill>
-                <a:effectLst/>
-                <a:uFillTx/>
-                <a:latin typeface="Arial"/>
-                <a:ea typeface="SimSun"/>
-              </a:rPr>
-              <a:t>Click to edit Master title style</a:t>
-            </a:r>
-            <a:endParaRPr lang="en-US" sz="3600" b="0" u="none" strike="noStrike">
-              <a:solidFill>
-                <a:srgbClr val="000000"/>
-              </a:solidFill>
-              <a:effectLst/>
-              <a:uFillTx/>
-              <a:latin typeface="Arial"/>
-            </a:endParaRPr>
-          </a:p>
-        </p:txBody>
-      </p:sp>
-      <p:sp>
-        <p:nvSpPr>
-          <p:cNvPr id="9" name="PlaceHolder 2"/>
-          <p:cNvSpPr>
-            <a:spLocks noGrp="1"/>
-          </p:cNvSpPr>
-          <p:nvPr>
-            <p:ph type="body"/>
-          </p:nvPr>
-        </p:nvSpPr>
-        <p:spPr>
-          <a:xfrm>
-            <a:off x="609480" y="1174680"/>
-            <a:ext cx="5371560" cy="4939560"/>
-          </a:xfrm>
-          <a:prstGeom prst="rect">
-            <a:avLst/>
-          </a:prstGeom>
-          <a:noFill/>
-          <a:ln w="9360">
-            <a:noFill/>
-          </a:ln>
-        </p:spPr>
-        <p:txBody>
-          <a:bodyPr lIns="90000" rIns="90000" tIns="45000" bIns="45000" anchor="t">
-            <a:noAutofit/>
-          </a:bodyPr>
-          <a:p>
-            <a:pPr marL="343080" indent="-343080">
-              <a:lnSpc>
-                <a:spcPct val="100000"/>
-              </a:lnSpc>
-              <a:spcBef>
-                <a:spcPts val="641"/>
-              </a:spcBef>
-              <a:buClr>
-                <a:srgbClr val="000000"/>
-              </a:buClr>
-              <a:buFont typeface="Symbol" charset="2"/>
-              <a:buChar char=""/>
-            </a:pPr>
-            <a:r>
-              <a:rPr lang="en-US" sz="3200" b="0" u="none" strike="noStrike">
-                <a:solidFill>
-                  <a:schemeClr val="dk1"/>
-                </a:solidFill>
-                <a:effectLst/>
-                <a:uFillTx/>
-                <a:latin typeface="Arial"/>
-                <a:ea typeface="SimSun"/>
-              </a:rPr>
-              <a:t>Click to edit Master text styles</a:t>
-            </a:r>
-            <a:endParaRPr lang="en-US" sz="3200" b="0" u="none" strike="noStrike">
-              <a:solidFill>
-                <a:srgbClr val="000000"/>
-              </a:solidFill>
-              <a:effectLst/>
-              <a:uFillTx/>
-              <a:latin typeface="Arial"/>
-            </a:endParaRPr>
-          </a:p>
-          <a:p>
-            <a:pPr marL="743040" lvl="1" indent="-285840">
-              <a:lnSpc>
-                <a:spcPct val="100000"/>
-              </a:lnSpc>
-              <a:spcBef>
-                <a:spcPts val="561"/>
-              </a:spcBef>
-              <a:buClr>
-                <a:srgbClr val="000000"/>
-              </a:buClr>
-              <a:buFont typeface="Symbol" charset="2"/>
-              <a:buChar char=""/>
-            </a:pPr>
-            <a:r>
-              <a:rPr lang="en-US" sz="2800" b="0" u="none" strike="noStrike">
-                <a:solidFill>
-                  <a:schemeClr val="dk1"/>
-                </a:solidFill>
-                <a:effectLst/>
-                <a:uFillTx/>
-                <a:latin typeface="Arial"/>
-                <a:ea typeface="SimSun"/>
-              </a:rPr>
-              <a:t>Second level</a:t>
-            </a:r>
-            <a:endParaRPr lang="en-US" sz="2800" b="0" u="none" strike="noStrike">
-              <a:solidFill>
-                <a:srgbClr val="000000"/>
-              </a:solidFill>
-              <a:effectLst/>
-              <a:uFillTx/>
-              <a:latin typeface="Arial"/>
-            </a:endParaRPr>
-          </a:p>
-          <a:p>
-            <a:pPr marL="1143000" lvl="2" indent="-228600">
-              <a:lnSpc>
-                <a:spcPct val="100000"/>
-              </a:lnSpc>
-              <a:spcBef>
-                <a:spcPts val="479"/>
-              </a:spcBef>
-              <a:buClr>
-                <a:srgbClr val="000000"/>
-              </a:buClr>
-              <a:buFont typeface="Symbol" charset="2"/>
-              <a:buChar char=""/>
-            </a:pPr>
-            <a:r>
-              <a:rPr lang="en-US" sz="2400" b="0" u="none" strike="noStrike">
-                <a:solidFill>
-                  <a:schemeClr val="dk1"/>
-                </a:solidFill>
-                <a:effectLst/>
-                <a:uFillTx/>
-                <a:latin typeface="Arial"/>
-                <a:ea typeface="SimSun"/>
-              </a:rPr>
-              <a:t>Third level</a:t>
-            </a:r>
-            <a:endParaRPr lang="en-US" sz="2400" b="0" u="none" strike="noStrike">
-              <a:solidFill>
-                <a:srgbClr val="000000"/>
-              </a:solidFill>
-              <a:effectLst/>
-              <a:uFillTx/>
-              <a:latin typeface="Arial"/>
-            </a:endParaRPr>
-          </a:p>
-          <a:p>
-            <a:pPr marL="1600200" lvl="3" indent="-228600">
-              <a:lnSpc>
-                <a:spcPct val="100000"/>
-              </a:lnSpc>
-              <a:spcBef>
-                <a:spcPts val="400"/>
-              </a:spcBef>
-              <a:buClr>
-                <a:srgbClr val="000000"/>
-              </a:buClr>
-              <a:buFont typeface="Symbol" charset="2"/>
-              <a:buChar char=""/>
-            </a:pPr>
-            <a:r>
-              <a:rPr lang="en-US" sz="2000" b="0" u="none" strike="noStrike">
-                <a:solidFill>
-                  <a:schemeClr val="dk1"/>
-                </a:solidFill>
-                <a:effectLst/>
-                <a:uFillTx/>
-                <a:latin typeface="Arial"/>
-                <a:ea typeface="SimSun"/>
-              </a:rPr>
-              <a:t>Fourth level</a:t>
-            </a:r>
-            <a:endParaRPr lang="en-US" sz="2000" b="0" u="none" strike="noStrike">
-              <a:solidFill>
-                <a:srgbClr val="000000"/>
-              </a:solidFill>
-              <a:effectLst/>
-              <a:uFillTx/>
-              <a:latin typeface="Arial"/>
-            </a:endParaRPr>
-          </a:p>
-          <a:p>
-            <a:pPr marL="2057400" lvl="4" indent="-228600">
-              <a:lnSpc>
-                <a:spcPct val="100000"/>
-              </a:lnSpc>
-              <a:spcBef>
-                <a:spcPts val="400"/>
-              </a:spcBef>
-              <a:buClr>
-                <a:srgbClr val="000000"/>
-              </a:buClr>
-              <a:buFont typeface="OpenSymbol"/>
-              <a:buChar char="»"/>
-            </a:pPr>
-            <a:r>
-              <a:rPr lang="en-US" sz="2000" b="0" u="none" strike="noStrike">
-                <a:solidFill>
-                  <a:schemeClr val="dk1"/>
-                </a:solidFill>
-                <a:effectLst/>
-                <a:uFillTx/>
-                <a:latin typeface="Arial"/>
-                <a:ea typeface="SimSun"/>
-              </a:rPr>
-              <a:t>Fifth level</a:t>
-            </a:r>
-            <a:endParaRPr lang="en-US" sz="2000" b="0" u="none" strike="noStrike">
-              <a:solidFill>
-                <a:srgbClr val="000000"/>
-              </a:solidFill>
-              <a:effectLst/>
-              <a:uFillTx/>
-              <a:latin typeface="Arial"/>
-            </a:endParaRPr>
-          </a:p>
-        </p:txBody>
-      </p:sp>
-      <p:sp>
-        <p:nvSpPr>
-          <p:cNvPr id="10" name="PlaceHolder 3"/>
-          <p:cNvSpPr>
-            <a:spLocks noGrp="1"/>
-          </p:cNvSpPr>
-          <p:nvPr>
-            <p:ph type="body"/>
-          </p:nvPr>
-        </p:nvSpPr>
-        <p:spPr>
-          <a:xfrm>
-            <a:off x="6197760" y="1174680"/>
-            <a:ext cx="5371560" cy="4939560"/>
-          </a:xfrm>
-          <a:prstGeom prst="rect">
-            <a:avLst/>
-          </a:prstGeom>
-          <a:noFill/>
-          <a:ln w="9360">
-            <a:noFill/>
-          </a:ln>
-        </p:spPr>
-        <p:txBody>
-          <a:bodyPr lIns="90000" rIns="90000" tIns="45000" bIns="45000" anchor="t">
-            <a:noAutofit/>
-          </a:bodyPr>
-          <a:p>
-            <a:pPr marL="343080" indent="-343080">
-              <a:lnSpc>
-                <a:spcPct val="100000"/>
-              </a:lnSpc>
-              <a:spcBef>
-                <a:spcPts val="641"/>
-              </a:spcBef>
-              <a:buClr>
-                <a:srgbClr val="000000"/>
-              </a:buClr>
-              <a:buFont typeface="Symbol" charset="2"/>
-              <a:buChar char=""/>
-            </a:pPr>
-            <a:r>
-              <a:rPr lang="en-US" sz="3200" b="0" u="none" strike="noStrike">
-                <a:solidFill>
-                  <a:schemeClr val="dk1"/>
-                </a:solidFill>
-                <a:effectLst/>
-                <a:uFillTx/>
-                <a:latin typeface="Arial"/>
-                <a:ea typeface="SimSun"/>
-              </a:rPr>
-              <a:t>Click to edit Master text styles</a:t>
-            </a:r>
-            <a:endParaRPr lang="en-US" sz="3200" b="0" u="none" strike="noStrike">
-              <a:solidFill>
-                <a:srgbClr val="000000"/>
-              </a:solidFill>
-              <a:effectLst/>
-              <a:uFillTx/>
-              <a:latin typeface="Arial"/>
-            </a:endParaRPr>
-          </a:p>
-          <a:p>
-            <a:pPr marL="743040" lvl="1" indent="-285840">
-              <a:lnSpc>
-                <a:spcPct val="100000"/>
-              </a:lnSpc>
-              <a:spcBef>
-                <a:spcPts val="561"/>
-              </a:spcBef>
-              <a:buClr>
-                <a:srgbClr val="000000"/>
-              </a:buClr>
-              <a:buFont typeface="Symbol" charset="2"/>
-              <a:buChar char=""/>
-            </a:pPr>
-            <a:r>
-              <a:rPr lang="en-US" sz="2800" b="0" u="none" strike="noStrike">
-                <a:solidFill>
-                  <a:schemeClr val="dk1"/>
-                </a:solidFill>
-                <a:effectLst/>
-                <a:uFillTx/>
-                <a:latin typeface="Arial"/>
-                <a:ea typeface="SimSun"/>
-              </a:rPr>
-              <a:t>Second level</a:t>
-            </a:r>
-            <a:endParaRPr lang="en-US" sz="2800" b="0" u="none" strike="noStrike">
-              <a:solidFill>
-                <a:srgbClr val="000000"/>
-              </a:solidFill>
-              <a:effectLst/>
-              <a:uFillTx/>
-              <a:latin typeface="Arial"/>
-            </a:endParaRPr>
-          </a:p>
-          <a:p>
-            <a:pPr marL="1143000" lvl="2" indent="-228600">
-              <a:lnSpc>
-                <a:spcPct val="100000"/>
-              </a:lnSpc>
-              <a:spcBef>
-                <a:spcPts val="479"/>
-              </a:spcBef>
-              <a:buClr>
-                <a:srgbClr val="000000"/>
-              </a:buClr>
-              <a:buFont typeface="Symbol" charset="2"/>
-              <a:buChar char=""/>
-            </a:pPr>
-            <a:r>
-              <a:rPr lang="en-US" sz="2400" b="0" u="none" strike="noStrike">
-                <a:solidFill>
-                  <a:schemeClr val="dk1"/>
-                </a:solidFill>
-                <a:effectLst/>
-                <a:uFillTx/>
-                <a:latin typeface="Arial"/>
-                <a:ea typeface="SimSun"/>
-              </a:rPr>
-              <a:t>Third level</a:t>
-            </a:r>
-            <a:endParaRPr lang="en-US" sz="2400" b="0" u="none" strike="noStrike">
-              <a:solidFill>
-                <a:srgbClr val="000000"/>
-              </a:solidFill>
-              <a:effectLst/>
-              <a:uFillTx/>
-              <a:latin typeface="Arial"/>
-            </a:endParaRPr>
-          </a:p>
-          <a:p>
-            <a:pPr marL="1600200" lvl="3" indent="-228600">
-              <a:lnSpc>
-                <a:spcPct val="100000"/>
-              </a:lnSpc>
-              <a:spcBef>
-                <a:spcPts val="400"/>
-              </a:spcBef>
-              <a:buClr>
-                <a:srgbClr val="000000"/>
-              </a:buClr>
-              <a:buFont typeface="Symbol" charset="2"/>
-              <a:buChar char=""/>
-            </a:pPr>
-            <a:r>
-              <a:rPr lang="en-US" sz="2000" b="0" u="none" strike="noStrike">
-                <a:solidFill>
-                  <a:schemeClr val="dk1"/>
-                </a:solidFill>
-                <a:effectLst/>
-                <a:uFillTx/>
-                <a:latin typeface="Arial"/>
-                <a:ea typeface="SimSun"/>
-              </a:rPr>
-              <a:t>Fourth level</a:t>
-            </a:r>
-            <a:endParaRPr lang="en-US" sz="2000" b="0" u="none" strike="noStrike">
-              <a:solidFill>
-                <a:srgbClr val="000000"/>
-              </a:solidFill>
-              <a:effectLst/>
-              <a:uFillTx/>
-              <a:latin typeface="Arial"/>
-            </a:endParaRPr>
-          </a:p>
-          <a:p>
-            <a:pPr marL="2057400" lvl="4" indent="-228600">
-              <a:lnSpc>
-                <a:spcPct val="100000"/>
-              </a:lnSpc>
-              <a:spcBef>
-                <a:spcPts val="400"/>
-              </a:spcBef>
-              <a:buClr>
-                <a:srgbClr val="000000"/>
-              </a:buClr>
-              <a:buFont typeface="OpenSymbol"/>
-              <a:buChar char="»"/>
-            </a:pPr>
-            <a:r>
-              <a:rPr lang="en-US" sz="2000" b="0" u="none" strike="noStrike">
-                <a:solidFill>
-                  <a:schemeClr val="dk1"/>
-                </a:solidFill>
-                <a:effectLst/>
-                <a:uFillTx/>
-                <a:latin typeface="Arial"/>
-                <a:ea typeface="SimSun"/>
-              </a:rPr>
-              <a:t>Fifth level</a:t>
-            </a:r>
-            <a:endParaRPr lang="en-US" sz="2000" b="0" u="none" strike="noStrike">
-              <a:solidFill>
-                <a:srgbClr val="000000"/>
-              </a:solidFill>
-              <a:effectLst/>
-              <a:uFillTx/>
-              <a:latin typeface="Arial"/>
-            </a:endParaRPr>
-          </a:p>
-        </p:txBody>
-      </p:sp>
-      <p:sp>
-        <p:nvSpPr>
-          <p:cNvPr id="11" name="PlaceHolder 4"/>
+          <p:cNvPr id="11" name="PlaceHolder 3"/>
           <p:cNvSpPr>
             <a:spLocks noGrp="1"/>
           </p:cNvSpPr>
@@ -1769,7 +1864,7 @@
         <p:spPr>
           <a:xfrm>
             <a:off x="609480" y="6245280"/>
-            <a:ext cx="2831400" cy="462960"/>
+            <a:ext cx="2831040" cy="462600"/>
           </a:xfrm>
           <a:prstGeom prst="rect">
             <a:avLst/>
@@ -1838,7 +1933,7 @@
       </p:sp>
       <p:sp>
         <p:nvSpPr>
-          <p:cNvPr id="12" name="PlaceHolder 5"/>
+          <p:cNvPr id="12" name="PlaceHolder 4"/>
           <p:cNvSpPr>
             <a:spLocks noGrp="1"/>
           </p:cNvSpPr>
@@ -1849,7 +1944,7 @@
         <p:spPr>
           <a:xfrm>
             <a:off x="4165560" y="6245280"/>
-            <a:ext cx="3847320" cy="462960"/>
+            <a:ext cx="3846960" cy="462600"/>
           </a:xfrm>
           <a:prstGeom prst="rect">
             <a:avLst/>
@@ -1918,7 +2013,7 @@
       </p:sp>
       <p:sp>
         <p:nvSpPr>
-          <p:cNvPr id="13" name="PlaceHolder 6"/>
+          <p:cNvPr id="13" name="PlaceHolder 5"/>
           <p:cNvSpPr>
             <a:spLocks noGrp="1"/>
           </p:cNvSpPr>
@@ -1929,7 +2024,7 @@
         <p:spPr>
           <a:xfrm>
             <a:off x="8737560" y="6245280"/>
-            <a:ext cx="2831400" cy="462960"/>
+            <a:ext cx="2831040" cy="462600"/>
           </a:xfrm>
           <a:prstGeom prst="rect">
             <a:avLst/>
@@ -1965,7 +2060,7 @@
 
 <file path=ppt/slideLayouts/slideLayout3.xml><?xml version="1.0" encoding="utf-8"?>
 <p:sldLayout xmlns:a="http://schemas.openxmlformats.org/drawingml/2006/main" xmlns:p="http://schemas.openxmlformats.org/presentationml/2006/main" xmlns:r="http://schemas.openxmlformats.org/officeDocument/2006/relationships" xmlns:p14="http://schemas.microsoft.com/office/powerpoint/2010/main" xmlns:p15="http://schemas.microsoft.com/office/powerpoint/2012/main" xmlns:mc="http://schemas.openxmlformats.org/markup-compatibility/2006" type="blank" preserve="1">
-  <p:cSld name="Comparison">
+  <p:cSld name="Section Header">
     <p:bg>
       <p:bgPr>
         <a:solidFill>
@@ -2000,7 +2095,7 @@
         <p:spPr>
           <a:xfrm>
             <a:off x="0" y="0"/>
-            <a:ext cx="12178800" cy="6844680"/>
+            <a:ext cx="12178440" cy="6844320"/>
           </a:xfrm>
           <a:prstGeom prst="rect">
             <a:avLst/>
@@ -2023,8 +2118,8 @@
         </p:nvSpPr>
         <p:spPr>
           <a:xfrm>
-            <a:off x="840240" y="365040"/>
-            <a:ext cx="10502280" cy="1312200"/>
+            <a:off x="831960" y="1709640"/>
+            <a:ext cx="10501920" cy="2838960"/>
           </a:xfrm>
           <a:prstGeom prst="rect">
             <a:avLst/>
@@ -2035,7 +2130,7 @@
           </a:ln>
         </p:spPr>
         <p:txBody>
-          <a:bodyPr lIns="90000" rIns="90000" tIns="45000" bIns="45000" anchor="ctr">
+          <a:bodyPr lIns="90000" rIns="90000" tIns="45000" bIns="45000" anchor="b">
             <a:noAutofit/>
           </a:bodyPr>
           <a:p>
@@ -2049,7 +2144,7 @@
               </a:tabLst>
             </a:pPr>
             <a:r>
-              <a:rPr lang="en-US" sz="3600" b="0" u="none" strike="noStrike">
+              <a:rPr lang="en-US" sz="6000" b="0" u="none" strike="noStrike">
                 <a:solidFill>
                   <a:schemeClr val="dk1"/>
                 </a:solidFill>
@@ -2060,7 +2155,7 @@
               </a:rPr>
               <a:t>Click to edit Master title style</a:t>
             </a:r>
-            <a:endParaRPr lang="en-US" sz="3600" b="0" u="none" strike="noStrike">
+            <a:endParaRPr lang="en-US" sz="6000" b="0" u="none" strike="noStrike">
               <a:solidFill>
                 <a:srgbClr val="000000"/>
               </a:solidFill>
@@ -2083,8 +2178,8 @@
         </p:nvSpPr>
         <p:spPr>
           <a:xfrm>
-            <a:off x="840240" y="1681200"/>
-            <a:ext cx="5145120" cy="810720"/>
+            <a:off x="831960" y="4589640"/>
+            <a:ext cx="10501920" cy="1486440"/>
           </a:xfrm>
           <a:prstGeom prst="rect">
             <a:avLst/>
@@ -2095,7 +2190,7 @@
           </a:ln>
         </p:spPr>
         <p:txBody>
-          <a:bodyPr lIns="90000" rIns="90000" tIns="45000" bIns="45000" anchor="b">
+          <a:bodyPr lIns="90000" rIns="90000" tIns="45000" bIns="45000" anchor="t">
             <a:noAutofit/>
           </a:bodyPr>
           <a:p>
@@ -2112,7 +2207,7 @@
               </a:tabLst>
             </a:pPr>
             <a:r>
-              <a:rPr lang="en-US" sz="2400" b="1" u="none" strike="noStrike">
+              <a:rPr lang="en-US" sz="2400" b="0" u="none" strike="noStrike">
                 <a:solidFill>
                   <a:schemeClr val="dk1"/>
                 </a:solidFill>
@@ -2141,199 +2236,75 @@
             <a:spLocks noGrp="1"/>
           </p:cNvSpPr>
           <p:nvPr>
-            <p:ph type="body"/>
+            <p:ph type="dt" idx="7"/>
           </p:nvPr>
         </p:nvSpPr>
         <p:spPr>
           <a:xfrm>
-            <a:off x="840240" y="2505240"/>
-            <a:ext cx="5145120" cy="3671280"/>
-          </a:xfrm>
-          <a:prstGeom prst="rect">
-            <a:avLst/>
-          </a:prstGeom>
-          <a:noFill/>
-          <a:ln w="9360">
+            <a:off x="609480" y="6245280"/>
+            <a:ext cx="2831040" cy="462600"/>
+          </a:xfrm>
+          <a:prstGeom prst="rect">
+            <a:avLst/>
+          </a:prstGeom>
+          <a:noFill/>
+          <a:ln w="0">
             <a:noFill/>
           </a:ln>
         </p:spPr>
         <p:txBody>
-          <a:bodyPr lIns="90000" rIns="90000" tIns="45000" bIns="45000" anchor="t">
+          <a:bodyPr numCol="1" spcCol="0" lIns="91440" rIns="91440" tIns="45720" bIns="45720" anchor="t">
             <a:noAutofit/>
           </a:bodyPr>
-          <a:p>
-            <a:pPr marL="343080" indent="-343080">
-              <a:lnSpc>
-                <a:spcPct val="100000"/>
-              </a:lnSpc>
-              <a:spcBef>
-                <a:spcPts val="641"/>
-              </a:spcBef>
-              <a:buClr>
-                <a:srgbClr val="000000"/>
-              </a:buClr>
-              <a:buFont typeface="Symbol" charset="2"/>
-              <a:buChar char=""/>
-            </a:pPr>
-            <a:r>
-              <a:rPr lang="en-US" sz="3200" b="0" u="none" strike="noStrike">
-                <a:solidFill>
-                  <a:schemeClr val="dk1"/>
-                </a:solidFill>
-                <a:effectLst/>
-                <a:uFillTx/>
-                <a:latin typeface="Arial"/>
-                <a:ea typeface="SimSun"/>
-              </a:rPr>
-              <a:t>Click to edit Master text styles</a:t>
-            </a:r>
-            <a:endParaRPr lang="en-US" sz="3200" b="0" u="none" strike="noStrike">
-              <a:solidFill>
-                <a:srgbClr val="000000"/>
-              </a:solidFill>
-              <a:effectLst/>
-              <a:uFillTx/>
-              <a:latin typeface="Arial"/>
-            </a:endParaRPr>
-          </a:p>
-          <a:p>
-            <a:pPr marL="743040" lvl="1" indent="-285840">
-              <a:lnSpc>
-                <a:spcPct val="100000"/>
-              </a:lnSpc>
-              <a:spcBef>
-                <a:spcPts val="561"/>
-              </a:spcBef>
-              <a:buClr>
-                <a:srgbClr val="000000"/>
-              </a:buClr>
-              <a:buFont typeface="Symbol" charset="2"/>
-              <a:buChar char=""/>
-            </a:pPr>
-            <a:r>
-              <a:rPr lang="en-US" sz="2800" b="0" u="none" strike="noStrike">
-                <a:solidFill>
-                  <a:schemeClr val="dk1"/>
-                </a:solidFill>
-                <a:effectLst/>
-                <a:uFillTx/>
-                <a:latin typeface="Arial"/>
-                <a:ea typeface="SimSun"/>
-              </a:rPr>
-              <a:t>Second level</a:t>
-            </a:r>
-            <a:endParaRPr lang="en-US" sz="2800" b="0" u="none" strike="noStrike">
-              <a:solidFill>
-                <a:srgbClr val="000000"/>
-              </a:solidFill>
-              <a:effectLst/>
-              <a:uFillTx/>
-              <a:latin typeface="Arial"/>
-            </a:endParaRPr>
-          </a:p>
-          <a:p>
-            <a:pPr marL="1143000" lvl="2" indent="-228600">
-              <a:lnSpc>
-                <a:spcPct val="100000"/>
-              </a:lnSpc>
-              <a:spcBef>
-                <a:spcPts val="479"/>
-              </a:spcBef>
-              <a:buClr>
-                <a:srgbClr val="000000"/>
-              </a:buClr>
-              <a:buFont typeface="Symbol" charset="2"/>
-              <a:buChar char=""/>
-            </a:pPr>
-            <a:r>
-              <a:rPr lang="en-US" sz="2400" b="0" u="none" strike="noStrike">
-                <a:solidFill>
-                  <a:schemeClr val="dk1"/>
-                </a:solidFill>
-                <a:effectLst/>
-                <a:uFillTx/>
-                <a:latin typeface="Arial"/>
-                <a:ea typeface="SimSun"/>
-              </a:rPr>
-              <a:t>Third level</a:t>
-            </a:r>
-            <a:endParaRPr lang="en-US" sz="2400" b="0" u="none" strike="noStrike">
-              <a:solidFill>
-                <a:srgbClr val="000000"/>
-              </a:solidFill>
-              <a:effectLst/>
-              <a:uFillTx/>
-              <a:latin typeface="Arial"/>
-            </a:endParaRPr>
-          </a:p>
-          <a:p>
-            <a:pPr marL="1600200" lvl="3" indent="-228600">
-              <a:lnSpc>
-                <a:spcPct val="100000"/>
-              </a:lnSpc>
-              <a:spcBef>
-                <a:spcPts val="400"/>
-              </a:spcBef>
-              <a:buClr>
-                <a:srgbClr val="000000"/>
-              </a:buClr>
-              <a:buFont typeface="Symbol" charset="2"/>
-              <a:buChar char=""/>
-            </a:pPr>
-            <a:r>
-              <a:rPr lang="en-US" sz="2000" b="0" u="none" strike="noStrike">
-                <a:solidFill>
-                  <a:schemeClr val="dk1"/>
-                </a:solidFill>
-                <a:effectLst/>
-                <a:uFillTx/>
-                <a:latin typeface="Arial"/>
-                <a:ea typeface="SimSun"/>
-              </a:rPr>
-              <a:t>Fourth level</a:t>
-            </a:r>
-            <a:endParaRPr lang="en-US" sz="2000" b="0" u="none" strike="noStrike">
-              <a:solidFill>
-                <a:srgbClr val="000000"/>
-              </a:solidFill>
-              <a:effectLst/>
-              <a:uFillTx/>
-              <a:latin typeface="Arial"/>
-            </a:endParaRPr>
-          </a:p>
-          <a:p>
-            <a:pPr marL="2057400" lvl="4" indent="-228600">
-              <a:lnSpc>
-                <a:spcPct val="100000"/>
-              </a:lnSpc>
-              <a:spcBef>
-                <a:spcPts val="400"/>
-              </a:spcBef>
-              <a:buClr>
-                <a:srgbClr val="000000"/>
-              </a:buClr>
-              <a:buFont typeface="OpenSymbol"/>
-              <a:buChar char="»"/>
-            </a:pPr>
-            <a:r>
-              <a:rPr lang="en-US" sz="2000" b="0" u="none" strike="noStrike">
-                <a:solidFill>
-                  <a:schemeClr val="dk1"/>
-                </a:solidFill>
-                <a:effectLst/>
-                <a:uFillTx/>
-                <a:latin typeface="Arial"/>
-                <a:ea typeface="SimSun"/>
-              </a:rPr>
-              <a:t>Fifth level</a:t>
-            </a:r>
-            <a:endParaRPr lang="en-US" sz="2000" b="0" u="none" strike="noStrike">
-              <a:solidFill>
-                <a:srgbClr val="000000"/>
-              </a:solidFill>
-              <a:effectLst/>
-              <a:uFillTx/>
-              <a:latin typeface="Arial"/>
+          <a:lstStyle>
+            <a:lvl1pPr indent="0" defTabSz="914400">
+              <a:lnSpc>
+                <a:spcPct val="100000"/>
+              </a:lnSpc>
+              <a:buNone/>
+              <a:tabLst>
+                <a:tab algn="l" pos="0"/>
+              </a:tabLst>
+              <a:defRPr lang="en-US" sz="1400" b="0" u="none" strike="noStrike">
+                <a:solidFill>
+                  <a:srgbClr val="000000"/>
+                </a:solidFill>
+                <a:effectLst/>
+                <a:uFillTx/>
+                <a:latin typeface="Times New Roman"/>
+                <a:ea typeface="SimSun"/>
+              </a:defRPr>
+            </a:lvl1pPr>
+          </a:lstStyle>
+          <a:p>
+            <a:pPr indent="0" defTabSz="914400">
+              <a:lnSpc>
+                <a:spcPct val="100000"/>
+              </a:lnSpc>
+              <a:buNone/>
+              <a:tabLst>
+                <a:tab algn="l" pos="0"/>
+              </a:tabLst>
+            </a:pPr>
+            <a:r>
+              <a:rPr lang="en-US" sz="1400" b="0" u="none" strike="noStrike">
+                <a:solidFill>
+                  <a:srgbClr val="000000"/>
+                </a:solidFill>
+                <a:effectLst/>
+                <a:uFillTx/>
+                <a:latin typeface="Times New Roman"/>
+                <a:ea typeface="SimSun"/>
+              </a:rPr>
+              <a:t>&lt;date/time&gt;</a:t>
+            </a:r>
+            <a:endParaRPr lang="en-US" sz="1400" b="0" u="none" strike="noStrike">
+              <a:solidFill>
+                <a:srgbClr val="000000"/>
+              </a:solidFill>
+              <a:effectLst/>
+              <a:uFillTx/>
+              <a:latin typeface="Times New Roman"/>
             </a:endParaRPr>
           </a:p>
         </p:txBody>
@@ -2345,58 +2316,75 @@
             <a:spLocks noGrp="1"/>
           </p:cNvSpPr>
           <p:nvPr>
-            <p:ph type="body"/>
+            <p:ph type="ftr" idx="8"/>
           </p:nvPr>
         </p:nvSpPr>
         <p:spPr>
           <a:xfrm>
-            <a:off x="6172200" y="1681200"/>
-            <a:ext cx="5170320" cy="810720"/>
-          </a:xfrm>
-          <a:prstGeom prst="rect">
-            <a:avLst/>
-          </a:prstGeom>
-          <a:noFill/>
-          <a:ln w="9360">
+            <a:off x="4165560" y="6245280"/>
+            <a:ext cx="3846960" cy="462600"/>
+          </a:xfrm>
+          <a:prstGeom prst="rect">
+            <a:avLst/>
+          </a:prstGeom>
+          <a:noFill/>
+          <a:ln w="0">
             <a:noFill/>
           </a:ln>
         </p:spPr>
         <p:txBody>
-          <a:bodyPr lIns="90000" rIns="90000" tIns="45000" bIns="45000" anchor="b">
+          <a:bodyPr numCol="1" spcCol="0" lIns="91440" rIns="91440" tIns="45720" bIns="45720" anchor="t">
             <a:noAutofit/>
           </a:bodyPr>
-          <a:p>
-            <a:pPr indent="0">
-              <a:lnSpc>
-                <a:spcPct val="100000"/>
-              </a:lnSpc>
-              <a:spcBef>
-                <a:spcPts val="479"/>
-              </a:spcBef>
+          <a:lstStyle>
+            <a:lvl1pPr indent="0" algn="ctr" defTabSz="914400">
+              <a:lnSpc>
+                <a:spcPct val="100000"/>
+              </a:lnSpc>
               <a:buNone/>
               <a:tabLst>
                 <a:tab algn="l" pos="0"/>
               </a:tabLst>
-            </a:pPr>
-            <a:r>
-              <a:rPr lang="en-US" sz="2400" b="1" u="none" strike="noStrike">
-                <a:solidFill>
-                  <a:schemeClr val="dk1"/>
-                </a:solidFill>
-                <a:effectLst/>
-                <a:uFillTx/>
-                <a:latin typeface="Arial"/>
-                <a:ea typeface="SimSun"/>
-              </a:rPr>
-              <a:t>Click to edit Master text styles</a:t>
-            </a:r>
-            <a:endParaRPr lang="en-US" sz="2400" b="0" u="none" strike="noStrike">
-              <a:solidFill>
-                <a:srgbClr val="000000"/>
-              </a:solidFill>
-              <a:effectLst/>
-              <a:uFillTx/>
-              <a:latin typeface="Arial"/>
+              <a:defRPr lang="en-US" sz="1400" b="0" u="none" strike="noStrike">
+                <a:solidFill>
+                  <a:srgbClr val="000000"/>
+                </a:solidFill>
+                <a:effectLst/>
+                <a:uFillTx/>
+                <a:latin typeface="Times New Roman"/>
+                <a:ea typeface="SimSun"/>
+              </a:defRPr>
+            </a:lvl1pPr>
+          </a:lstStyle>
+          <a:p>
+            <a:pPr indent="0" algn="ctr" defTabSz="914400">
+              <a:lnSpc>
+                <a:spcPct val="100000"/>
+              </a:lnSpc>
+              <a:buNone/>
+              <a:tabLst>
+                <a:tab algn="l" pos="0"/>
+              </a:tabLst>
+            </a:pPr>
+            <a:r>
+              <a:rPr lang="en-US" sz="1400" b="0" u="none" strike="noStrike">
+                <a:solidFill>
+                  <a:srgbClr val="000000"/>
+                </a:solidFill>
+                <a:effectLst/>
+                <a:uFillTx/>
+                <a:latin typeface="Times New Roman"/>
+                <a:ea typeface="SimSun"/>
+              </a:rPr>
+              <a:t>&lt;footer&gt;</a:t>
+            </a:r>
+            <a:endParaRPr lang="en-US" sz="1400" b="0" u="none" strike="noStrike">
+              <a:solidFill>
+                <a:srgbClr val="000000"/>
+              </a:solidFill>
+              <a:effectLst/>
+              <a:uFillTx/>
+              <a:latin typeface="Times New Roman"/>
             </a:endParaRPr>
           </a:p>
         </p:txBody>
@@ -2408,377 +2396,13 @@
             <a:spLocks noGrp="1"/>
           </p:cNvSpPr>
           <p:nvPr>
-            <p:ph type="body"/>
-          </p:nvPr>
-        </p:nvSpPr>
-        <p:spPr>
-          <a:xfrm>
-            <a:off x="6172200" y="2505240"/>
-            <a:ext cx="5170320" cy="3671280"/>
-          </a:xfrm>
-          <a:prstGeom prst="rect">
-            <a:avLst/>
-          </a:prstGeom>
-          <a:noFill/>
-          <a:ln w="9360">
-            <a:noFill/>
-          </a:ln>
-        </p:spPr>
-        <p:txBody>
-          <a:bodyPr lIns="90000" rIns="90000" tIns="45000" bIns="45000" anchor="t">
-            <a:noAutofit/>
-          </a:bodyPr>
-          <a:p>
-            <a:pPr marL="343080" indent="-343080">
-              <a:lnSpc>
-                <a:spcPct val="100000"/>
-              </a:lnSpc>
-              <a:spcBef>
-                <a:spcPts val="641"/>
-              </a:spcBef>
-              <a:buClr>
-                <a:srgbClr val="000000"/>
-              </a:buClr>
-              <a:buFont typeface="Symbol" charset="2"/>
-              <a:buChar char=""/>
-            </a:pPr>
-            <a:r>
-              <a:rPr lang="en-US" sz="3200" b="0" u="none" strike="noStrike">
-                <a:solidFill>
-                  <a:schemeClr val="dk1"/>
-                </a:solidFill>
-                <a:effectLst/>
-                <a:uFillTx/>
-                <a:latin typeface="Arial"/>
-                <a:ea typeface="SimSun"/>
-              </a:rPr>
-              <a:t>Click to edit Master text styles</a:t>
-            </a:r>
-            <a:endParaRPr lang="en-US" sz="3200" b="0" u="none" strike="noStrike">
-              <a:solidFill>
-                <a:srgbClr val="000000"/>
-              </a:solidFill>
-              <a:effectLst/>
-              <a:uFillTx/>
-              <a:latin typeface="Arial"/>
-            </a:endParaRPr>
-          </a:p>
-          <a:p>
-            <a:pPr marL="743040" lvl="1" indent="-285840">
-              <a:lnSpc>
-                <a:spcPct val="100000"/>
-              </a:lnSpc>
-              <a:spcBef>
-                <a:spcPts val="561"/>
-              </a:spcBef>
-              <a:buClr>
-                <a:srgbClr val="000000"/>
-              </a:buClr>
-              <a:buFont typeface="Symbol" charset="2"/>
-              <a:buChar char=""/>
-            </a:pPr>
-            <a:r>
-              <a:rPr lang="en-US" sz="2800" b="0" u="none" strike="noStrike">
-                <a:solidFill>
-                  <a:schemeClr val="dk1"/>
-                </a:solidFill>
-                <a:effectLst/>
-                <a:uFillTx/>
-                <a:latin typeface="Arial"/>
-                <a:ea typeface="SimSun"/>
-              </a:rPr>
-              <a:t>Second level</a:t>
-            </a:r>
-            <a:endParaRPr lang="en-US" sz="2800" b="0" u="none" strike="noStrike">
-              <a:solidFill>
-                <a:srgbClr val="000000"/>
-              </a:solidFill>
-              <a:effectLst/>
-              <a:uFillTx/>
-              <a:latin typeface="Arial"/>
-            </a:endParaRPr>
-          </a:p>
-          <a:p>
-            <a:pPr marL="1143000" lvl="2" indent="-228600">
-              <a:lnSpc>
-                <a:spcPct val="100000"/>
-              </a:lnSpc>
-              <a:spcBef>
-                <a:spcPts val="479"/>
-              </a:spcBef>
-              <a:buClr>
-                <a:srgbClr val="000000"/>
-              </a:buClr>
-              <a:buFont typeface="Symbol" charset="2"/>
-              <a:buChar char=""/>
-            </a:pPr>
-            <a:r>
-              <a:rPr lang="en-US" sz="2400" b="0" u="none" strike="noStrike">
-                <a:solidFill>
-                  <a:schemeClr val="dk1"/>
-                </a:solidFill>
-                <a:effectLst/>
-                <a:uFillTx/>
-                <a:latin typeface="Arial"/>
-                <a:ea typeface="SimSun"/>
-              </a:rPr>
-              <a:t>Third level</a:t>
-            </a:r>
-            <a:endParaRPr lang="en-US" sz="2400" b="0" u="none" strike="noStrike">
-              <a:solidFill>
-                <a:srgbClr val="000000"/>
-              </a:solidFill>
-              <a:effectLst/>
-              <a:uFillTx/>
-              <a:latin typeface="Arial"/>
-            </a:endParaRPr>
-          </a:p>
-          <a:p>
-            <a:pPr marL="1600200" lvl="3" indent="-228600">
-              <a:lnSpc>
-                <a:spcPct val="100000"/>
-              </a:lnSpc>
-              <a:spcBef>
-                <a:spcPts val="400"/>
-              </a:spcBef>
-              <a:buClr>
-                <a:srgbClr val="000000"/>
-              </a:buClr>
-              <a:buFont typeface="Symbol" charset="2"/>
-              <a:buChar char=""/>
-            </a:pPr>
-            <a:r>
-              <a:rPr lang="en-US" sz="2000" b="0" u="none" strike="noStrike">
-                <a:solidFill>
-                  <a:schemeClr val="dk1"/>
-                </a:solidFill>
-                <a:effectLst/>
-                <a:uFillTx/>
-                <a:latin typeface="Arial"/>
-                <a:ea typeface="SimSun"/>
-              </a:rPr>
-              <a:t>Fourth level</a:t>
-            </a:r>
-            <a:endParaRPr lang="en-US" sz="2000" b="0" u="none" strike="noStrike">
-              <a:solidFill>
-                <a:srgbClr val="000000"/>
-              </a:solidFill>
-              <a:effectLst/>
-              <a:uFillTx/>
-              <a:latin typeface="Arial"/>
-            </a:endParaRPr>
-          </a:p>
-          <a:p>
-            <a:pPr marL="2057400" lvl="4" indent="-228600">
-              <a:lnSpc>
-                <a:spcPct val="100000"/>
-              </a:lnSpc>
-              <a:spcBef>
-                <a:spcPts val="400"/>
-              </a:spcBef>
-              <a:buClr>
-                <a:srgbClr val="000000"/>
-              </a:buClr>
-              <a:buFont typeface="OpenSymbol"/>
-              <a:buChar char="»"/>
-            </a:pPr>
-            <a:r>
-              <a:rPr lang="en-US" sz="2000" b="0" u="none" strike="noStrike">
-                <a:solidFill>
-                  <a:schemeClr val="dk1"/>
-                </a:solidFill>
-                <a:effectLst/>
-                <a:uFillTx/>
-                <a:latin typeface="Arial"/>
-                <a:ea typeface="SimSun"/>
-              </a:rPr>
-              <a:t>Fifth level</a:t>
-            </a:r>
-            <a:endParaRPr lang="en-US" sz="2000" b="0" u="none" strike="noStrike">
-              <a:solidFill>
-                <a:srgbClr val="000000"/>
-              </a:solidFill>
-              <a:effectLst/>
-              <a:uFillTx/>
-              <a:latin typeface="Arial"/>
-            </a:endParaRPr>
-          </a:p>
-        </p:txBody>
-      </p:sp>
-      <p:sp>
-        <p:nvSpPr>
-          <p:cNvPr id="20" name="PlaceHolder 6"/>
-          <p:cNvSpPr>
-            <a:spLocks noGrp="1"/>
-          </p:cNvSpPr>
-          <p:nvPr>
-            <p:ph type="dt" idx="7"/>
-          </p:nvPr>
-        </p:nvSpPr>
-        <p:spPr>
-          <a:xfrm>
-            <a:off x="609480" y="6245280"/>
-            <a:ext cx="2831400" cy="462960"/>
-          </a:xfrm>
-          <a:prstGeom prst="rect">
-            <a:avLst/>
-          </a:prstGeom>
-          <a:noFill/>
-          <a:ln w="0">
-            <a:noFill/>
-          </a:ln>
-        </p:spPr>
-        <p:txBody>
-          <a:bodyPr numCol="1" spcCol="0" lIns="91440" rIns="91440" tIns="45720" bIns="45720" anchor="t">
-            <a:noAutofit/>
-          </a:bodyPr>
-          <a:lstStyle>
-            <a:lvl1pPr indent="0" defTabSz="914400">
-              <a:lnSpc>
-                <a:spcPct val="100000"/>
-              </a:lnSpc>
-              <a:buNone/>
-              <a:tabLst>
-                <a:tab algn="l" pos="0"/>
-              </a:tabLst>
-              <a:defRPr lang="en-US" sz="1400" b="0" u="none" strike="noStrike">
-                <a:solidFill>
-                  <a:srgbClr val="000000"/>
-                </a:solidFill>
-                <a:effectLst/>
-                <a:uFillTx/>
-                <a:latin typeface="Times New Roman"/>
-                <a:ea typeface="SimSun"/>
-              </a:defRPr>
-            </a:lvl1pPr>
-          </a:lstStyle>
-          <a:p>
-            <a:pPr indent="0" defTabSz="914400">
-              <a:lnSpc>
-                <a:spcPct val="100000"/>
-              </a:lnSpc>
-              <a:buNone/>
-              <a:tabLst>
-                <a:tab algn="l" pos="0"/>
-              </a:tabLst>
-            </a:pPr>
-            <a:r>
-              <a:rPr lang="en-US" sz="1400" b="0" u="none" strike="noStrike">
-                <a:solidFill>
-                  <a:srgbClr val="000000"/>
-                </a:solidFill>
-                <a:effectLst/>
-                <a:uFillTx/>
-                <a:latin typeface="Times New Roman"/>
-                <a:ea typeface="SimSun"/>
-              </a:rPr>
-              <a:t>&lt;date/time&gt;</a:t>
-            </a:r>
-            <a:endParaRPr lang="en-US" sz="1400" b="0" u="none" strike="noStrike">
-              <a:solidFill>
-                <a:srgbClr val="000000"/>
-              </a:solidFill>
-              <a:effectLst/>
-              <a:uFillTx/>
-              <a:latin typeface="Times New Roman"/>
-            </a:endParaRPr>
-          </a:p>
-        </p:txBody>
-      </p:sp>
-      <p:sp>
-        <p:nvSpPr>
-          <p:cNvPr id="21" name="PlaceHolder 7"/>
-          <p:cNvSpPr>
-            <a:spLocks noGrp="1"/>
-          </p:cNvSpPr>
-          <p:nvPr>
-            <p:ph type="ftr" idx="8"/>
-          </p:nvPr>
-        </p:nvSpPr>
-        <p:spPr>
-          <a:xfrm>
-            <a:off x="4165560" y="6245280"/>
-            <a:ext cx="3847320" cy="462960"/>
-          </a:xfrm>
-          <a:prstGeom prst="rect">
-            <a:avLst/>
-          </a:prstGeom>
-          <a:noFill/>
-          <a:ln w="0">
-            <a:noFill/>
-          </a:ln>
-        </p:spPr>
-        <p:txBody>
-          <a:bodyPr numCol="1" spcCol="0" lIns="91440" rIns="91440" tIns="45720" bIns="45720" anchor="t">
-            <a:noAutofit/>
-          </a:bodyPr>
-          <a:lstStyle>
-            <a:lvl1pPr indent="0" algn="ctr" defTabSz="914400">
-              <a:lnSpc>
-                <a:spcPct val="100000"/>
-              </a:lnSpc>
-              <a:buNone/>
-              <a:tabLst>
-                <a:tab algn="l" pos="0"/>
-              </a:tabLst>
-              <a:defRPr lang="en-US" sz="1400" b="0" u="none" strike="noStrike">
-                <a:solidFill>
-                  <a:srgbClr val="000000"/>
-                </a:solidFill>
-                <a:effectLst/>
-                <a:uFillTx/>
-                <a:latin typeface="Times New Roman"/>
-                <a:ea typeface="SimSun"/>
-              </a:defRPr>
-            </a:lvl1pPr>
-          </a:lstStyle>
-          <a:p>
-            <a:pPr indent="0" algn="ctr" defTabSz="914400">
-              <a:lnSpc>
-                <a:spcPct val="100000"/>
-              </a:lnSpc>
-              <a:buNone/>
-              <a:tabLst>
-                <a:tab algn="l" pos="0"/>
-              </a:tabLst>
-            </a:pPr>
-            <a:r>
-              <a:rPr lang="en-US" sz="1400" b="0" u="none" strike="noStrike">
-                <a:solidFill>
-                  <a:srgbClr val="000000"/>
-                </a:solidFill>
-                <a:effectLst/>
-                <a:uFillTx/>
-                <a:latin typeface="Times New Roman"/>
-                <a:ea typeface="SimSun"/>
-              </a:rPr>
-              <a:t>&lt;footer&gt;</a:t>
-            </a:r>
-            <a:endParaRPr lang="en-US" sz="1400" b="0" u="none" strike="noStrike">
-              <a:solidFill>
-                <a:srgbClr val="000000"/>
-              </a:solidFill>
-              <a:effectLst/>
-              <a:uFillTx/>
-              <a:latin typeface="Times New Roman"/>
-            </a:endParaRPr>
-          </a:p>
-        </p:txBody>
-      </p:sp>
-      <p:sp>
-        <p:nvSpPr>
-          <p:cNvPr id="22" name="PlaceHolder 8"/>
-          <p:cNvSpPr>
-            <a:spLocks noGrp="1"/>
-          </p:cNvSpPr>
-          <p:nvPr>
             <p:ph type="sldNum" idx="9"/>
           </p:nvPr>
         </p:nvSpPr>
         <p:spPr>
           <a:xfrm>
             <a:off x="8737560" y="6245280"/>
-            <a:ext cx="2831400" cy="462960"/>
+            <a:ext cx="2831040" cy="462600"/>
           </a:xfrm>
           <a:prstGeom prst="rect">
             <a:avLst/>
@@ -2813,6 +2437,1893 @@
 </file>
 
 <file path=ppt/slideLayouts/slideLayout4.xml><?xml version="1.0" encoding="utf-8"?>
+<p:sldLayout xmlns:a="http://schemas.openxmlformats.org/drawingml/2006/main" xmlns:p="http://schemas.openxmlformats.org/presentationml/2006/main" xmlns:r="http://schemas.openxmlformats.org/officeDocument/2006/relationships" xmlns:p14="http://schemas.microsoft.com/office/powerpoint/2010/main" xmlns:p15="http://schemas.microsoft.com/office/powerpoint/2012/main" xmlns:mc="http://schemas.openxmlformats.org/markup-compatibility/2006" type="titleOnly" preserve="1">
+  <p:cSld name="Title Only">
+    <p:bg>
+      <p:bgPr>
+        <a:solidFill>
+          <a:srgbClr val="ffffff"/>
+        </a:solidFill>
+      </p:bgPr>
+    </p:bg>
+    <p:spTree>
+      <p:nvGrpSpPr>
+        <p:cNvPr id="1" name=""/>
+        <p:cNvGrpSpPr/>
+        <p:nvPr/>
+      </p:nvGrpSpPr>
+      <p:grpSpPr>
+        <a:xfrm>
+          <a:off x="0" y="0"/>
+          <a:ext cx="0" cy="0"/>
+          <a:chOff x="0" y="0"/>
+          <a:chExt cx="0" cy="0"/>
+        </a:xfrm>
+      </p:grpSpPr>
+      <p:pic>
+        <p:nvPicPr>
+          <p:cNvPr id="20" name="Picture 10"/>
+          <p:cNvPicPr/>
+          <p:nvPr/>
+        </p:nvPicPr>
+        <p:blipFill>
+          <a:blip r:embed="rId2"/>
+          <a:stretch/>
+        </p:blipFill>
+        <p:spPr>
+          <a:xfrm>
+            <a:off x="0" y="0"/>
+            <a:ext cx="12178440" cy="6844320"/>
+          </a:xfrm>
+          <a:prstGeom prst="rect">
+            <a:avLst/>
+          </a:prstGeom>
+          <a:noFill/>
+          <a:ln w="9525">
+            <a:noFill/>
+          </a:ln>
+        </p:spPr>
+      </p:pic>
+      <p:sp>
+        <p:nvSpPr>
+          <p:cNvPr id="21" name="PlaceHolder 1"/>
+          <p:cNvSpPr>
+            <a:spLocks noGrp="1"/>
+          </p:cNvSpPr>
+          <p:nvPr>
+            <p:ph type="title"/>
+          </p:nvPr>
+        </p:nvSpPr>
+        <p:spPr>
+          <a:xfrm>
+            <a:off x="609480" y="190440"/>
+            <a:ext cx="10959120" cy="568800"/>
+          </a:xfrm>
+          <a:prstGeom prst="rect">
+            <a:avLst/>
+          </a:prstGeom>
+          <a:noFill/>
+          <a:ln w="9360">
+            <a:noFill/>
+          </a:ln>
+        </p:spPr>
+        <p:txBody>
+          <a:bodyPr lIns="90000" rIns="90000" tIns="45000" bIns="45000" anchor="ctr">
+            <a:noAutofit/>
+          </a:bodyPr>
+          <a:p>
+            <a:pPr indent="0">
+              <a:lnSpc>
+                <a:spcPct val="100000"/>
+              </a:lnSpc>
+              <a:buNone/>
+              <a:tabLst>
+                <a:tab algn="l" pos="0"/>
+              </a:tabLst>
+            </a:pPr>
+            <a:r>
+              <a:rPr lang="en-US" sz="3600" b="0" u="none" strike="noStrike">
+                <a:solidFill>
+                  <a:schemeClr val="dk1"/>
+                </a:solidFill>
+                <a:effectLst/>
+                <a:uFillTx/>
+                <a:latin typeface="Arial"/>
+                <a:ea typeface="SimSun"/>
+              </a:rPr>
+              <a:t>Click to edit Master title style</a:t>
+            </a:r>
+            <a:endParaRPr lang="en-US" sz="3600" b="0" u="none" strike="noStrike">
+              <a:solidFill>
+                <a:srgbClr val="000000"/>
+              </a:solidFill>
+              <a:effectLst/>
+              <a:uFillTx/>
+              <a:latin typeface="Arial"/>
+            </a:endParaRPr>
+          </a:p>
+        </p:txBody>
+      </p:sp>
+      <p:sp>
+        <p:nvSpPr>
+          <p:cNvPr id="22" name="PlaceHolder 2"/>
+          <p:cNvSpPr>
+            <a:spLocks noGrp="1"/>
+          </p:cNvSpPr>
+          <p:nvPr>
+            <p:ph type="dt" idx="10"/>
+          </p:nvPr>
+        </p:nvSpPr>
+        <p:spPr>
+          <a:xfrm>
+            <a:off x="609480" y="6245280"/>
+            <a:ext cx="2831040" cy="462600"/>
+          </a:xfrm>
+          <a:prstGeom prst="rect">
+            <a:avLst/>
+          </a:prstGeom>
+          <a:noFill/>
+          <a:ln w="0">
+            <a:noFill/>
+          </a:ln>
+        </p:spPr>
+        <p:txBody>
+          <a:bodyPr numCol="1" spcCol="0" lIns="91440" rIns="91440" tIns="45720" bIns="45720" anchor="t">
+            <a:noAutofit/>
+          </a:bodyPr>
+          <a:lstStyle>
+            <a:lvl1pPr indent="0" defTabSz="914400">
+              <a:lnSpc>
+                <a:spcPct val="100000"/>
+              </a:lnSpc>
+              <a:buNone/>
+              <a:tabLst>
+                <a:tab algn="l" pos="0"/>
+              </a:tabLst>
+              <a:defRPr lang="en-US" sz="1400" b="0" u="none" strike="noStrike">
+                <a:solidFill>
+                  <a:srgbClr val="000000"/>
+                </a:solidFill>
+                <a:effectLst/>
+                <a:uFillTx/>
+                <a:latin typeface="Times New Roman"/>
+                <a:ea typeface="SimSun"/>
+              </a:defRPr>
+            </a:lvl1pPr>
+          </a:lstStyle>
+          <a:p>
+            <a:pPr indent="0" defTabSz="914400">
+              <a:lnSpc>
+                <a:spcPct val="100000"/>
+              </a:lnSpc>
+              <a:buNone/>
+              <a:tabLst>
+                <a:tab algn="l" pos="0"/>
+              </a:tabLst>
+            </a:pPr>
+            <a:r>
+              <a:rPr lang="en-US" sz="1400" b="0" u="none" strike="noStrike">
+                <a:solidFill>
+                  <a:srgbClr val="000000"/>
+                </a:solidFill>
+                <a:effectLst/>
+                <a:uFillTx/>
+                <a:latin typeface="Times New Roman"/>
+                <a:ea typeface="SimSun"/>
+              </a:rPr>
+              <a:t>&lt;date/time&gt;</a:t>
+            </a:r>
+            <a:endParaRPr lang="en-US" sz="1400" b="0" u="none" strike="noStrike">
+              <a:solidFill>
+                <a:srgbClr val="000000"/>
+              </a:solidFill>
+              <a:effectLst/>
+              <a:uFillTx/>
+              <a:latin typeface="Times New Roman"/>
+            </a:endParaRPr>
+          </a:p>
+        </p:txBody>
+      </p:sp>
+      <p:sp>
+        <p:nvSpPr>
+          <p:cNvPr id="23" name="PlaceHolder 3"/>
+          <p:cNvSpPr>
+            <a:spLocks noGrp="1"/>
+          </p:cNvSpPr>
+          <p:nvPr>
+            <p:ph type="ftr" idx="11"/>
+          </p:nvPr>
+        </p:nvSpPr>
+        <p:spPr>
+          <a:xfrm>
+            <a:off x="4165560" y="6245280"/>
+            <a:ext cx="3846960" cy="462600"/>
+          </a:xfrm>
+          <a:prstGeom prst="rect">
+            <a:avLst/>
+          </a:prstGeom>
+          <a:noFill/>
+          <a:ln w="0">
+            <a:noFill/>
+          </a:ln>
+        </p:spPr>
+        <p:txBody>
+          <a:bodyPr numCol="1" spcCol="0" lIns="91440" rIns="91440" tIns="45720" bIns="45720" anchor="t">
+            <a:noAutofit/>
+          </a:bodyPr>
+          <a:lstStyle>
+            <a:lvl1pPr indent="0" algn="ctr" defTabSz="914400">
+              <a:lnSpc>
+                <a:spcPct val="100000"/>
+              </a:lnSpc>
+              <a:buNone/>
+              <a:tabLst>
+                <a:tab algn="l" pos="0"/>
+              </a:tabLst>
+              <a:defRPr lang="en-US" sz="1400" b="0" u="none" strike="noStrike">
+                <a:solidFill>
+                  <a:srgbClr val="000000"/>
+                </a:solidFill>
+                <a:effectLst/>
+                <a:uFillTx/>
+                <a:latin typeface="Times New Roman"/>
+                <a:ea typeface="SimSun"/>
+              </a:defRPr>
+            </a:lvl1pPr>
+          </a:lstStyle>
+          <a:p>
+            <a:pPr indent="0" algn="ctr" defTabSz="914400">
+              <a:lnSpc>
+                <a:spcPct val="100000"/>
+              </a:lnSpc>
+              <a:buNone/>
+              <a:tabLst>
+                <a:tab algn="l" pos="0"/>
+              </a:tabLst>
+            </a:pPr>
+            <a:r>
+              <a:rPr lang="en-US" sz="1400" b="0" u="none" strike="noStrike">
+                <a:solidFill>
+                  <a:srgbClr val="000000"/>
+                </a:solidFill>
+                <a:effectLst/>
+                <a:uFillTx/>
+                <a:latin typeface="Times New Roman"/>
+                <a:ea typeface="SimSun"/>
+              </a:rPr>
+              <a:t>&lt;footer&gt;</a:t>
+            </a:r>
+            <a:endParaRPr lang="en-US" sz="1400" b="0" u="none" strike="noStrike">
+              <a:solidFill>
+                <a:srgbClr val="000000"/>
+              </a:solidFill>
+              <a:effectLst/>
+              <a:uFillTx/>
+              <a:latin typeface="Times New Roman"/>
+            </a:endParaRPr>
+          </a:p>
+        </p:txBody>
+      </p:sp>
+      <p:sp>
+        <p:nvSpPr>
+          <p:cNvPr id="24" name="PlaceHolder 4"/>
+          <p:cNvSpPr>
+            <a:spLocks noGrp="1"/>
+          </p:cNvSpPr>
+          <p:nvPr>
+            <p:ph type="sldNum" idx="12"/>
+          </p:nvPr>
+        </p:nvSpPr>
+        <p:spPr>
+          <a:xfrm>
+            <a:off x="8737560" y="6245280"/>
+            <a:ext cx="2831040" cy="462600"/>
+          </a:xfrm>
+          <a:prstGeom prst="rect">
+            <a:avLst/>
+          </a:prstGeom>
+          <a:noFill/>
+          <a:ln w="0">
+            <a:noFill/>
+          </a:ln>
+        </p:spPr>
+        <p:txBody>
+          <a:bodyPr numCol="1" spcCol="0" lIns="91440" rIns="91440" tIns="45720" bIns="45720" anchor="t">
+            <a:noAutofit/>
+          </a:bodyPr>
+          <a:p>
+            <a:pPr indent="0">
+              <a:buNone/>
+            </a:pPr>
+            <a:endParaRPr lang="en-US" sz="1800" b="0" u="none" strike="noStrike">
+              <a:solidFill>
+                <a:srgbClr val="000000"/>
+              </a:solidFill>
+              <a:effectLst/>
+              <a:uFillTx/>
+              <a:latin typeface="Times New Roman"/>
+            </a:endParaRPr>
+          </a:p>
+        </p:txBody>
+      </p:sp>
+    </p:spTree>
+  </p:cSld>
+</p:sldLayout>
+</file>
+
+<file path=ppt/slideLayouts/slideLayout5.xml><?xml version="1.0" encoding="utf-8"?>
+<p:sldLayout xmlns:a="http://schemas.openxmlformats.org/drawingml/2006/main" xmlns:p="http://schemas.openxmlformats.org/presentationml/2006/main" xmlns:r="http://schemas.openxmlformats.org/officeDocument/2006/relationships" xmlns:p14="http://schemas.microsoft.com/office/powerpoint/2010/main" xmlns:p15="http://schemas.microsoft.com/office/powerpoint/2012/main" xmlns:mc="http://schemas.openxmlformats.org/markup-compatibility/2006" type="twoObj" preserve="1">
+  <p:cSld name="Two Content">
+    <p:bg>
+      <p:bgPr>
+        <a:solidFill>
+          <a:srgbClr val="ffffff"/>
+        </a:solidFill>
+      </p:bgPr>
+    </p:bg>
+    <p:spTree>
+      <p:nvGrpSpPr>
+        <p:cNvPr id="1" name=""/>
+        <p:cNvGrpSpPr/>
+        <p:nvPr/>
+      </p:nvGrpSpPr>
+      <p:grpSpPr>
+        <a:xfrm>
+          <a:off x="0" y="0"/>
+          <a:ext cx="0" cy="0"/>
+          <a:chOff x="0" y="0"/>
+          <a:chExt cx="0" cy="0"/>
+        </a:xfrm>
+      </p:grpSpPr>
+      <p:pic>
+        <p:nvPicPr>
+          <p:cNvPr id="25" name="Picture 10"/>
+          <p:cNvPicPr/>
+          <p:nvPr/>
+        </p:nvPicPr>
+        <p:blipFill>
+          <a:blip r:embed="rId2"/>
+          <a:stretch/>
+        </p:blipFill>
+        <p:spPr>
+          <a:xfrm>
+            <a:off x="0" y="0"/>
+            <a:ext cx="12178440" cy="6844320"/>
+          </a:xfrm>
+          <a:prstGeom prst="rect">
+            <a:avLst/>
+          </a:prstGeom>
+          <a:noFill/>
+          <a:ln w="9525">
+            <a:noFill/>
+          </a:ln>
+        </p:spPr>
+      </p:pic>
+      <p:sp>
+        <p:nvSpPr>
+          <p:cNvPr id="26" name="PlaceHolder 1"/>
+          <p:cNvSpPr>
+            <a:spLocks noGrp="1"/>
+          </p:cNvSpPr>
+          <p:nvPr>
+            <p:ph type="title"/>
+          </p:nvPr>
+        </p:nvSpPr>
+        <p:spPr>
+          <a:xfrm>
+            <a:off x="609480" y="190440"/>
+            <a:ext cx="10959120" cy="568800"/>
+          </a:xfrm>
+          <a:prstGeom prst="rect">
+            <a:avLst/>
+          </a:prstGeom>
+          <a:noFill/>
+          <a:ln w="9360">
+            <a:noFill/>
+          </a:ln>
+        </p:spPr>
+        <p:txBody>
+          <a:bodyPr lIns="90000" rIns="90000" tIns="45000" bIns="45000" anchor="ctr">
+            <a:noAutofit/>
+          </a:bodyPr>
+          <a:p>
+            <a:pPr indent="0">
+              <a:lnSpc>
+                <a:spcPct val="100000"/>
+              </a:lnSpc>
+              <a:buNone/>
+              <a:tabLst>
+                <a:tab algn="l" pos="0"/>
+              </a:tabLst>
+            </a:pPr>
+            <a:r>
+              <a:rPr lang="en-US" sz="3600" b="0" u="none" strike="noStrike">
+                <a:solidFill>
+                  <a:schemeClr val="dk1"/>
+                </a:solidFill>
+                <a:effectLst/>
+                <a:uFillTx/>
+                <a:latin typeface="Arial"/>
+                <a:ea typeface="SimSun"/>
+              </a:rPr>
+              <a:t>Click to edit Master title style</a:t>
+            </a:r>
+            <a:endParaRPr lang="en-US" sz="3600" b="0" u="none" strike="noStrike">
+              <a:solidFill>
+                <a:srgbClr val="000000"/>
+              </a:solidFill>
+              <a:effectLst/>
+              <a:uFillTx/>
+              <a:latin typeface="Arial"/>
+            </a:endParaRPr>
+          </a:p>
+        </p:txBody>
+      </p:sp>
+      <p:sp>
+        <p:nvSpPr>
+          <p:cNvPr id="27" name="PlaceHolder 2"/>
+          <p:cNvSpPr>
+            <a:spLocks noGrp="1"/>
+          </p:cNvSpPr>
+          <p:nvPr>
+            <p:ph type="body"/>
+          </p:nvPr>
+        </p:nvSpPr>
+        <p:spPr>
+          <a:xfrm>
+            <a:off x="609480" y="1174680"/>
+            <a:ext cx="5371200" cy="4939200"/>
+          </a:xfrm>
+          <a:prstGeom prst="rect">
+            <a:avLst/>
+          </a:prstGeom>
+          <a:noFill/>
+          <a:ln w="9360">
+            <a:noFill/>
+          </a:ln>
+        </p:spPr>
+        <p:txBody>
+          <a:bodyPr lIns="90000" rIns="90000" tIns="45000" bIns="45000" anchor="t">
+            <a:noAutofit/>
+          </a:bodyPr>
+          <a:p>
+            <a:pPr marL="343080" indent="-343080">
+              <a:lnSpc>
+                <a:spcPct val="100000"/>
+              </a:lnSpc>
+              <a:spcBef>
+                <a:spcPts val="641"/>
+              </a:spcBef>
+              <a:buClr>
+                <a:srgbClr val="000000"/>
+              </a:buClr>
+              <a:buFont typeface="Symbol" charset="2"/>
+              <a:buChar char=""/>
+            </a:pPr>
+            <a:r>
+              <a:rPr lang="en-US" sz="3200" b="0" u="none" strike="noStrike">
+                <a:solidFill>
+                  <a:schemeClr val="dk1"/>
+                </a:solidFill>
+                <a:effectLst/>
+                <a:uFillTx/>
+                <a:latin typeface="Arial"/>
+                <a:ea typeface="SimSun"/>
+              </a:rPr>
+              <a:t>Click to edit Master text styles</a:t>
+            </a:r>
+            <a:endParaRPr lang="en-US" sz="3200" b="0" u="none" strike="noStrike">
+              <a:solidFill>
+                <a:srgbClr val="000000"/>
+              </a:solidFill>
+              <a:effectLst/>
+              <a:uFillTx/>
+              <a:latin typeface="Arial"/>
+            </a:endParaRPr>
+          </a:p>
+          <a:p>
+            <a:pPr marL="743040" lvl="1" indent="-285840">
+              <a:lnSpc>
+                <a:spcPct val="100000"/>
+              </a:lnSpc>
+              <a:spcBef>
+                <a:spcPts val="561"/>
+              </a:spcBef>
+              <a:buClr>
+                <a:srgbClr val="000000"/>
+              </a:buClr>
+              <a:buFont typeface="Symbol" charset="2"/>
+              <a:buChar char=""/>
+            </a:pPr>
+            <a:r>
+              <a:rPr lang="en-US" sz="2800" b="0" u="none" strike="noStrike">
+                <a:solidFill>
+                  <a:schemeClr val="dk1"/>
+                </a:solidFill>
+                <a:effectLst/>
+                <a:uFillTx/>
+                <a:latin typeface="Arial"/>
+                <a:ea typeface="SimSun"/>
+              </a:rPr>
+              <a:t>Second level</a:t>
+            </a:r>
+            <a:endParaRPr lang="en-US" sz="2800" b="0" u="none" strike="noStrike">
+              <a:solidFill>
+                <a:srgbClr val="000000"/>
+              </a:solidFill>
+              <a:effectLst/>
+              <a:uFillTx/>
+              <a:latin typeface="Arial"/>
+            </a:endParaRPr>
+          </a:p>
+          <a:p>
+            <a:pPr marL="1143000" lvl="2" indent="-228600">
+              <a:lnSpc>
+                <a:spcPct val="100000"/>
+              </a:lnSpc>
+              <a:spcBef>
+                <a:spcPts val="479"/>
+              </a:spcBef>
+              <a:buClr>
+                <a:srgbClr val="000000"/>
+              </a:buClr>
+              <a:buFont typeface="Symbol" charset="2"/>
+              <a:buChar char=""/>
+            </a:pPr>
+            <a:r>
+              <a:rPr lang="en-US" sz="2400" b="0" u="none" strike="noStrike">
+                <a:solidFill>
+                  <a:schemeClr val="dk1"/>
+                </a:solidFill>
+                <a:effectLst/>
+                <a:uFillTx/>
+                <a:latin typeface="Arial"/>
+                <a:ea typeface="SimSun"/>
+              </a:rPr>
+              <a:t>Third level</a:t>
+            </a:r>
+            <a:endParaRPr lang="en-US" sz="2400" b="0" u="none" strike="noStrike">
+              <a:solidFill>
+                <a:srgbClr val="000000"/>
+              </a:solidFill>
+              <a:effectLst/>
+              <a:uFillTx/>
+              <a:latin typeface="Arial"/>
+            </a:endParaRPr>
+          </a:p>
+          <a:p>
+            <a:pPr marL="1600200" lvl="3" indent="-228600">
+              <a:lnSpc>
+                <a:spcPct val="100000"/>
+              </a:lnSpc>
+              <a:spcBef>
+                <a:spcPts val="400"/>
+              </a:spcBef>
+              <a:buClr>
+                <a:srgbClr val="000000"/>
+              </a:buClr>
+              <a:buFont typeface="Symbol" charset="2"/>
+              <a:buChar char=""/>
+            </a:pPr>
+            <a:r>
+              <a:rPr lang="en-US" sz="2000" b="0" u="none" strike="noStrike">
+                <a:solidFill>
+                  <a:schemeClr val="dk1"/>
+                </a:solidFill>
+                <a:effectLst/>
+                <a:uFillTx/>
+                <a:latin typeface="Arial"/>
+                <a:ea typeface="SimSun"/>
+              </a:rPr>
+              <a:t>Fourth level</a:t>
+            </a:r>
+            <a:endParaRPr lang="en-US" sz="2000" b="0" u="none" strike="noStrike">
+              <a:solidFill>
+                <a:srgbClr val="000000"/>
+              </a:solidFill>
+              <a:effectLst/>
+              <a:uFillTx/>
+              <a:latin typeface="Arial"/>
+            </a:endParaRPr>
+          </a:p>
+          <a:p>
+            <a:pPr marL="2057400" lvl="4" indent="-228600">
+              <a:lnSpc>
+                <a:spcPct val="100000"/>
+              </a:lnSpc>
+              <a:spcBef>
+                <a:spcPts val="400"/>
+              </a:spcBef>
+              <a:buClr>
+                <a:srgbClr val="000000"/>
+              </a:buClr>
+              <a:buFont typeface="OpenSymbol"/>
+              <a:buChar char="»"/>
+            </a:pPr>
+            <a:r>
+              <a:rPr lang="en-US" sz="2000" b="0" u="none" strike="noStrike">
+                <a:solidFill>
+                  <a:schemeClr val="dk1"/>
+                </a:solidFill>
+                <a:effectLst/>
+                <a:uFillTx/>
+                <a:latin typeface="Arial"/>
+                <a:ea typeface="SimSun"/>
+              </a:rPr>
+              <a:t>Fifth level</a:t>
+            </a:r>
+            <a:endParaRPr lang="en-US" sz="2000" b="0" u="none" strike="noStrike">
+              <a:solidFill>
+                <a:srgbClr val="000000"/>
+              </a:solidFill>
+              <a:effectLst/>
+              <a:uFillTx/>
+              <a:latin typeface="Arial"/>
+            </a:endParaRPr>
+          </a:p>
+        </p:txBody>
+      </p:sp>
+      <p:sp>
+        <p:nvSpPr>
+          <p:cNvPr id="28" name="PlaceHolder 3"/>
+          <p:cNvSpPr>
+            <a:spLocks noGrp="1"/>
+          </p:cNvSpPr>
+          <p:nvPr>
+            <p:ph type="body"/>
+          </p:nvPr>
+        </p:nvSpPr>
+        <p:spPr>
+          <a:xfrm>
+            <a:off x="6197760" y="1174680"/>
+            <a:ext cx="5371200" cy="4939200"/>
+          </a:xfrm>
+          <a:prstGeom prst="rect">
+            <a:avLst/>
+          </a:prstGeom>
+          <a:noFill/>
+          <a:ln w="9360">
+            <a:noFill/>
+          </a:ln>
+        </p:spPr>
+        <p:txBody>
+          <a:bodyPr lIns="90000" rIns="90000" tIns="45000" bIns="45000" anchor="t">
+            <a:noAutofit/>
+          </a:bodyPr>
+          <a:p>
+            <a:pPr marL="343080" indent="-343080">
+              <a:lnSpc>
+                <a:spcPct val="100000"/>
+              </a:lnSpc>
+              <a:spcBef>
+                <a:spcPts val="641"/>
+              </a:spcBef>
+              <a:buClr>
+                <a:srgbClr val="000000"/>
+              </a:buClr>
+              <a:buFont typeface="Symbol" charset="2"/>
+              <a:buChar char=""/>
+            </a:pPr>
+            <a:r>
+              <a:rPr lang="en-US" sz="3200" b="0" u="none" strike="noStrike">
+                <a:solidFill>
+                  <a:schemeClr val="dk1"/>
+                </a:solidFill>
+                <a:effectLst/>
+                <a:uFillTx/>
+                <a:latin typeface="Arial"/>
+                <a:ea typeface="SimSun"/>
+              </a:rPr>
+              <a:t>Click to edit Master text styles</a:t>
+            </a:r>
+            <a:endParaRPr lang="en-US" sz="3200" b="0" u="none" strike="noStrike">
+              <a:solidFill>
+                <a:srgbClr val="000000"/>
+              </a:solidFill>
+              <a:effectLst/>
+              <a:uFillTx/>
+              <a:latin typeface="Arial"/>
+            </a:endParaRPr>
+          </a:p>
+          <a:p>
+            <a:pPr marL="743040" lvl="1" indent="-285840">
+              <a:lnSpc>
+                <a:spcPct val="100000"/>
+              </a:lnSpc>
+              <a:spcBef>
+                <a:spcPts val="561"/>
+              </a:spcBef>
+              <a:buClr>
+                <a:srgbClr val="000000"/>
+              </a:buClr>
+              <a:buFont typeface="Symbol" charset="2"/>
+              <a:buChar char=""/>
+            </a:pPr>
+            <a:r>
+              <a:rPr lang="en-US" sz="2800" b="0" u="none" strike="noStrike">
+                <a:solidFill>
+                  <a:schemeClr val="dk1"/>
+                </a:solidFill>
+                <a:effectLst/>
+                <a:uFillTx/>
+                <a:latin typeface="Arial"/>
+                <a:ea typeface="SimSun"/>
+              </a:rPr>
+              <a:t>Second level</a:t>
+            </a:r>
+            <a:endParaRPr lang="en-US" sz="2800" b="0" u="none" strike="noStrike">
+              <a:solidFill>
+                <a:srgbClr val="000000"/>
+              </a:solidFill>
+              <a:effectLst/>
+              <a:uFillTx/>
+              <a:latin typeface="Arial"/>
+            </a:endParaRPr>
+          </a:p>
+          <a:p>
+            <a:pPr marL="1143000" lvl="2" indent="-228600">
+              <a:lnSpc>
+                <a:spcPct val="100000"/>
+              </a:lnSpc>
+              <a:spcBef>
+                <a:spcPts val="479"/>
+              </a:spcBef>
+              <a:buClr>
+                <a:srgbClr val="000000"/>
+              </a:buClr>
+              <a:buFont typeface="Symbol" charset="2"/>
+              <a:buChar char=""/>
+            </a:pPr>
+            <a:r>
+              <a:rPr lang="en-US" sz="2400" b="0" u="none" strike="noStrike">
+                <a:solidFill>
+                  <a:schemeClr val="dk1"/>
+                </a:solidFill>
+                <a:effectLst/>
+                <a:uFillTx/>
+                <a:latin typeface="Arial"/>
+                <a:ea typeface="SimSun"/>
+              </a:rPr>
+              <a:t>Third level</a:t>
+            </a:r>
+            <a:endParaRPr lang="en-US" sz="2400" b="0" u="none" strike="noStrike">
+              <a:solidFill>
+                <a:srgbClr val="000000"/>
+              </a:solidFill>
+              <a:effectLst/>
+              <a:uFillTx/>
+              <a:latin typeface="Arial"/>
+            </a:endParaRPr>
+          </a:p>
+          <a:p>
+            <a:pPr marL="1600200" lvl="3" indent="-228600">
+              <a:lnSpc>
+                <a:spcPct val="100000"/>
+              </a:lnSpc>
+              <a:spcBef>
+                <a:spcPts val="400"/>
+              </a:spcBef>
+              <a:buClr>
+                <a:srgbClr val="000000"/>
+              </a:buClr>
+              <a:buFont typeface="Symbol" charset="2"/>
+              <a:buChar char=""/>
+            </a:pPr>
+            <a:r>
+              <a:rPr lang="en-US" sz="2000" b="0" u="none" strike="noStrike">
+                <a:solidFill>
+                  <a:schemeClr val="dk1"/>
+                </a:solidFill>
+                <a:effectLst/>
+                <a:uFillTx/>
+                <a:latin typeface="Arial"/>
+                <a:ea typeface="SimSun"/>
+              </a:rPr>
+              <a:t>Fourth level</a:t>
+            </a:r>
+            <a:endParaRPr lang="en-US" sz="2000" b="0" u="none" strike="noStrike">
+              <a:solidFill>
+                <a:srgbClr val="000000"/>
+              </a:solidFill>
+              <a:effectLst/>
+              <a:uFillTx/>
+              <a:latin typeface="Arial"/>
+            </a:endParaRPr>
+          </a:p>
+          <a:p>
+            <a:pPr marL="2057400" lvl="4" indent="-228600">
+              <a:lnSpc>
+                <a:spcPct val="100000"/>
+              </a:lnSpc>
+              <a:spcBef>
+                <a:spcPts val="400"/>
+              </a:spcBef>
+              <a:buClr>
+                <a:srgbClr val="000000"/>
+              </a:buClr>
+              <a:buFont typeface="OpenSymbol"/>
+              <a:buChar char="»"/>
+            </a:pPr>
+            <a:r>
+              <a:rPr lang="en-US" sz="2000" b="0" u="none" strike="noStrike">
+                <a:solidFill>
+                  <a:schemeClr val="dk1"/>
+                </a:solidFill>
+                <a:effectLst/>
+                <a:uFillTx/>
+                <a:latin typeface="Arial"/>
+                <a:ea typeface="SimSun"/>
+              </a:rPr>
+              <a:t>Fifth level</a:t>
+            </a:r>
+            <a:endParaRPr lang="en-US" sz="2000" b="0" u="none" strike="noStrike">
+              <a:solidFill>
+                <a:srgbClr val="000000"/>
+              </a:solidFill>
+              <a:effectLst/>
+              <a:uFillTx/>
+              <a:latin typeface="Arial"/>
+            </a:endParaRPr>
+          </a:p>
+        </p:txBody>
+      </p:sp>
+      <p:sp>
+        <p:nvSpPr>
+          <p:cNvPr id="29" name="PlaceHolder 4"/>
+          <p:cNvSpPr>
+            <a:spLocks noGrp="1"/>
+          </p:cNvSpPr>
+          <p:nvPr>
+            <p:ph type="dt" idx="13"/>
+          </p:nvPr>
+        </p:nvSpPr>
+        <p:spPr>
+          <a:xfrm>
+            <a:off x="609480" y="6245280"/>
+            <a:ext cx="2831040" cy="462600"/>
+          </a:xfrm>
+          <a:prstGeom prst="rect">
+            <a:avLst/>
+          </a:prstGeom>
+          <a:noFill/>
+          <a:ln w="0">
+            <a:noFill/>
+          </a:ln>
+        </p:spPr>
+        <p:txBody>
+          <a:bodyPr numCol="1" spcCol="0" lIns="91440" rIns="91440" tIns="45720" bIns="45720" anchor="t">
+            <a:noAutofit/>
+          </a:bodyPr>
+          <a:lstStyle>
+            <a:lvl1pPr indent="0" defTabSz="914400">
+              <a:lnSpc>
+                <a:spcPct val="100000"/>
+              </a:lnSpc>
+              <a:buNone/>
+              <a:tabLst>
+                <a:tab algn="l" pos="0"/>
+              </a:tabLst>
+              <a:defRPr lang="en-US" sz="1400" b="0" u="none" strike="noStrike">
+                <a:solidFill>
+                  <a:srgbClr val="000000"/>
+                </a:solidFill>
+                <a:effectLst/>
+                <a:uFillTx/>
+                <a:latin typeface="Times New Roman"/>
+                <a:ea typeface="SimSun"/>
+              </a:defRPr>
+            </a:lvl1pPr>
+          </a:lstStyle>
+          <a:p>
+            <a:pPr indent="0" defTabSz="914400">
+              <a:lnSpc>
+                <a:spcPct val="100000"/>
+              </a:lnSpc>
+              <a:buNone/>
+              <a:tabLst>
+                <a:tab algn="l" pos="0"/>
+              </a:tabLst>
+            </a:pPr>
+            <a:r>
+              <a:rPr lang="en-US" sz="1400" b="0" u="none" strike="noStrike">
+                <a:solidFill>
+                  <a:srgbClr val="000000"/>
+                </a:solidFill>
+                <a:effectLst/>
+                <a:uFillTx/>
+                <a:latin typeface="Times New Roman"/>
+                <a:ea typeface="SimSun"/>
+              </a:rPr>
+              <a:t>&lt;date/time&gt;</a:t>
+            </a:r>
+            <a:endParaRPr lang="en-US" sz="1400" b="0" u="none" strike="noStrike">
+              <a:solidFill>
+                <a:srgbClr val="000000"/>
+              </a:solidFill>
+              <a:effectLst/>
+              <a:uFillTx/>
+              <a:latin typeface="Times New Roman"/>
+            </a:endParaRPr>
+          </a:p>
+        </p:txBody>
+      </p:sp>
+      <p:sp>
+        <p:nvSpPr>
+          <p:cNvPr id="30" name="PlaceHolder 5"/>
+          <p:cNvSpPr>
+            <a:spLocks noGrp="1"/>
+          </p:cNvSpPr>
+          <p:nvPr>
+            <p:ph type="ftr" idx="14"/>
+          </p:nvPr>
+        </p:nvSpPr>
+        <p:spPr>
+          <a:xfrm>
+            <a:off x="4165560" y="6245280"/>
+            <a:ext cx="3846960" cy="462600"/>
+          </a:xfrm>
+          <a:prstGeom prst="rect">
+            <a:avLst/>
+          </a:prstGeom>
+          <a:noFill/>
+          <a:ln w="0">
+            <a:noFill/>
+          </a:ln>
+        </p:spPr>
+        <p:txBody>
+          <a:bodyPr numCol="1" spcCol="0" lIns="91440" rIns="91440" tIns="45720" bIns="45720" anchor="t">
+            <a:noAutofit/>
+          </a:bodyPr>
+          <a:lstStyle>
+            <a:lvl1pPr indent="0" algn="ctr" defTabSz="914400">
+              <a:lnSpc>
+                <a:spcPct val="100000"/>
+              </a:lnSpc>
+              <a:buNone/>
+              <a:tabLst>
+                <a:tab algn="l" pos="0"/>
+              </a:tabLst>
+              <a:defRPr lang="en-US" sz="1400" b="0" u="none" strike="noStrike">
+                <a:solidFill>
+                  <a:srgbClr val="000000"/>
+                </a:solidFill>
+                <a:effectLst/>
+                <a:uFillTx/>
+                <a:latin typeface="Times New Roman"/>
+                <a:ea typeface="SimSun"/>
+              </a:defRPr>
+            </a:lvl1pPr>
+          </a:lstStyle>
+          <a:p>
+            <a:pPr indent="0" algn="ctr" defTabSz="914400">
+              <a:lnSpc>
+                <a:spcPct val="100000"/>
+              </a:lnSpc>
+              <a:buNone/>
+              <a:tabLst>
+                <a:tab algn="l" pos="0"/>
+              </a:tabLst>
+            </a:pPr>
+            <a:r>
+              <a:rPr lang="en-US" sz="1400" b="0" u="none" strike="noStrike">
+                <a:solidFill>
+                  <a:srgbClr val="000000"/>
+                </a:solidFill>
+                <a:effectLst/>
+                <a:uFillTx/>
+                <a:latin typeface="Times New Roman"/>
+                <a:ea typeface="SimSun"/>
+              </a:rPr>
+              <a:t>&lt;footer&gt;</a:t>
+            </a:r>
+            <a:endParaRPr lang="en-US" sz="1400" b="0" u="none" strike="noStrike">
+              <a:solidFill>
+                <a:srgbClr val="000000"/>
+              </a:solidFill>
+              <a:effectLst/>
+              <a:uFillTx/>
+              <a:latin typeface="Times New Roman"/>
+            </a:endParaRPr>
+          </a:p>
+        </p:txBody>
+      </p:sp>
+      <p:sp>
+        <p:nvSpPr>
+          <p:cNvPr id="31" name="PlaceHolder 6"/>
+          <p:cNvSpPr>
+            <a:spLocks noGrp="1"/>
+          </p:cNvSpPr>
+          <p:nvPr>
+            <p:ph type="sldNum" idx="15"/>
+          </p:nvPr>
+        </p:nvSpPr>
+        <p:spPr>
+          <a:xfrm>
+            <a:off x="8737560" y="6245280"/>
+            <a:ext cx="2831040" cy="462600"/>
+          </a:xfrm>
+          <a:prstGeom prst="rect">
+            <a:avLst/>
+          </a:prstGeom>
+          <a:noFill/>
+          <a:ln w="0">
+            <a:noFill/>
+          </a:ln>
+        </p:spPr>
+        <p:txBody>
+          <a:bodyPr numCol="1" spcCol="0" lIns="91440" rIns="91440" tIns="45720" bIns="45720" anchor="t">
+            <a:noAutofit/>
+          </a:bodyPr>
+          <a:p>
+            <a:pPr indent="0">
+              <a:buNone/>
+            </a:pPr>
+            <a:endParaRPr lang="en-US" sz="1800" b="0" u="none" strike="noStrike">
+              <a:solidFill>
+                <a:srgbClr val="000000"/>
+              </a:solidFill>
+              <a:effectLst/>
+              <a:uFillTx/>
+              <a:latin typeface="Times New Roman"/>
+            </a:endParaRPr>
+          </a:p>
+        </p:txBody>
+      </p:sp>
+    </p:spTree>
+  </p:cSld>
+</p:sldLayout>
+</file>
+
+<file path=ppt/slideLayouts/slideLayout6.xml><?xml version="1.0" encoding="utf-8"?>
+<p:sldLayout xmlns:a="http://schemas.openxmlformats.org/drawingml/2006/main" xmlns:p="http://schemas.openxmlformats.org/presentationml/2006/main" xmlns:r="http://schemas.openxmlformats.org/officeDocument/2006/relationships" xmlns:p14="http://schemas.microsoft.com/office/powerpoint/2010/main" xmlns:p15="http://schemas.microsoft.com/office/powerpoint/2012/main" xmlns:mc="http://schemas.openxmlformats.org/markup-compatibility/2006" type="blank" preserve="1">
+  <p:cSld name="Comparison">
+    <p:bg>
+      <p:bgPr>
+        <a:solidFill>
+          <a:srgbClr val="ffffff"/>
+        </a:solidFill>
+      </p:bgPr>
+    </p:bg>
+    <p:spTree>
+      <p:nvGrpSpPr>
+        <p:cNvPr id="1" name=""/>
+        <p:cNvGrpSpPr/>
+        <p:nvPr/>
+      </p:nvGrpSpPr>
+      <p:grpSpPr>
+        <a:xfrm>
+          <a:off x="0" y="0"/>
+          <a:ext cx="0" cy="0"/>
+          <a:chOff x="0" y="0"/>
+          <a:chExt cx="0" cy="0"/>
+        </a:xfrm>
+      </p:grpSpPr>
+      <p:pic>
+        <p:nvPicPr>
+          <p:cNvPr id="32" name="Picture 10"/>
+          <p:cNvPicPr/>
+          <p:nvPr/>
+        </p:nvPicPr>
+        <p:blipFill>
+          <a:blip r:embed="rId2"/>
+          <a:stretch/>
+        </p:blipFill>
+        <p:spPr>
+          <a:xfrm>
+            <a:off x="0" y="0"/>
+            <a:ext cx="12178440" cy="6844320"/>
+          </a:xfrm>
+          <a:prstGeom prst="rect">
+            <a:avLst/>
+          </a:prstGeom>
+          <a:noFill/>
+          <a:ln w="9525">
+            <a:noFill/>
+          </a:ln>
+        </p:spPr>
+      </p:pic>
+      <p:sp>
+        <p:nvSpPr>
+          <p:cNvPr id="33" name="PlaceHolder 1"/>
+          <p:cNvSpPr>
+            <a:spLocks noGrp="1"/>
+          </p:cNvSpPr>
+          <p:nvPr>
+            <p:ph type="title"/>
+          </p:nvPr>
+        </p:nvSpPr>
+        <p:spPr>
+          <a:xfrm>
+            <a:off x="840240" y="365040"/>
+            <a:ext cx="10501920" cy="1311840"/>
+          </a:xfrm>
+          <a:prstGeom prst="rect">
+            <a:avLst/>
+          </a:prstGeom>
+          <a:noFill/>
+          <a:ln w="9360">
+            <a:noFill/>
+          </a:ln>
+        </p:spPr>
+        <p:txBody>
+          <a:bodyPr lIns="90000" rIns="90000" tIns="45000" bIns="45000" anchor="ctr">
+            <a:noAutofit/>
+          </a:bodyPr>
+          <a:p>
+            <a:pPr indent="0">
+              <a:lnSpc>
+                <a:spcPct val="100000"/>
+              </a:lnSpc>
+              <a:buNone/>
+              <a:tabLst>
+                <a:tab algn="l" pos="0"/>
+              </a:tabLst>
+            </a:pPr>
+            <a:r>
+              <a:rPr lang="en-US" sz="3600" b="0" u="none" strike="noStrike">
+                <a:solidFill>
+                  <a:schemeClr val="dk1"/>
+                </a:solidFill>
+                <a:effectLst/>
+                <a:uFillTx/>
+                <a:latin typeface="Arial"/>
+                <a:ea typeface="SimSun"/>
+              </a:rPr>
+              <a:t>Click to edit Master title style</a:t>
+            </a:r>
+            <a:endParaRPr lang="en-US" sz="3600" b="0" u="none" strike="noStrike">
+              <a:solidFill>
+                <a:srgbClr val="000000"/>
+              </a:solidFill>
+              <a:effectLst/>
+              <a:uFillTx/>
+              <a:latin typeface="Arial"/>
+            </a:endParaRPr>
+          </a:p>
+        </p:txBody>
+      </p:sp>
+      <p:sp>
+        <p:nvSpPr>
+          <p:cNvPr id="34" name="PlaceHolder 2"/>
+          <p:cNvSpPr>
+            <a:spLocks noGrp="1"/>
+          </p:cNvSpPr>
+          <p:nvPr>
+            <p:ph type="body"/>
+          </p:nvPr>
+        </p:nvSpPr>
+        <p:spPr>
+          <a:xfrm>
+            <a:off x="840240" y="1681200"/>
+            <a:ext cx="5144760" cy="810360"/>
+          </a:xfrm>
+          <a:prstGeom prst="rect">
+            <a:avLst/>
+          </a:prstGeom>
+          <a:noFill/>
+          <a:ln w="9360">
+            <a:noFill/>
+          </a:ln>
+        </p:spPr>
+        <p:txBody>
+          <a:bodyPr lIns="90000" rIns="90000" tIns="45000" bIns="45000" anchor="b">
+            <a:noAutofit/>
+          </a:bodyPr>
+          <a:p>
+            <a:pPr indent="0">
+              <a:lnSpc>
+                <a:spcPct val="100000"/>
+              </a:lnSpc>
+              <a:spcBef>
+                <a:spcPts val="479"/>
+              </a:spcBef>
+              <a:buNone/>
+              <a:tabLst>
+                <a:tab algn="l" pos="0"/>
+              </a:tabLst>
+            </a:pPr>
+            <a:r>
+              <a:rPr lang="en-US" sz="2400" b="1" u="none" strike="noStrike">
+                <a:solidFill>
+                  <a:schemeClr val="dk1"/>
+                </a:solidFill>
+                <a:effectLst/>
+                <a:uFillTx/>
+                <a:latin typeface="Arial"/>
+                <a:ea typeface="SimSun"/>
+              </a:rPr>
+              <a:t>Click to edit Master text styles</a:t>
+            </a:r>
+            <a:endParaRPr lang="en-US" sz="2400" b="0" u="none" strike="noStrike">
+              <a:solidFill>
+                <a:srgbClr val="000000"/>
+              </a:solidFill>
+              <a:effectLst/>
+              <a:uFillTx/>
+              <a:latin typeface="Arial"/>
+            </a:endParaRPr>
+          </a:p>
+        </p:txBody>
+      </p:sp>
+      <p:sp>
+        <p:nvSpPr>
+          <p:cNvPr id="35" name="PlaceHolder 3"/>
+          <p:cNvSpPr>
+            <a:spLocks noGrp="1"/>
+          </p:cNvSpPr>
+          <p:nvPr>
+            <p:ph type="body"/>
+          </p:nvPr>
+        </p:nvSpPr>
+        <p:spPr>
+          <a:xfrm>
+            <a:off x="840240" y="2505240"/>
+            <a:ext cx="5144760" cy="3670920"/>
+          </a:xfrm>
+          <a:prstGeom prst="rect">
+            <a:avLst/>
+          </a:prstGeom>
+          <a:noFill/>
+          <a:ln w="9360">
+            <a:noFill/>
+          </a:ln>
+        </p:spPr>
+        <p:txBody>
+          <a:bodyPr lIns="90000" rIns="90000" tIns="45000" bIns="45000" anchor="t">
+            <a:noAutofit/>
+          </a:bodyPr>
+          <a:p>
+            <a:pPr marL="343080" indent="-343080">
+              <a:lnSpc>
+                <a:spcPct val="100000"/>
+              </a:lnSpc>
+              <a:spcBef>
+                <a:spcPts val="641"/>
+              </a:spcBef>
+              <a:buClr>
+                <a:srgbClr val="000000"/>
+              </a:buClr>
+              <a:buFont typeface="Symbol" charset="2"/>
+              <a:buChar char=""/>
+            </a:pPr>
+            <a:r>
+              <a:rPr lang="en-US" sz="3200" b="0" u="none" strike="noStrike">
+                <a:solidFill>
+                  <a:schemeClr val="dk1"/>
+                </a:solidFill>
+                <a:effectLst/>
+                <a:uFillTx/>
+                <a:latin typeface="Arial"/>
+                <a:ea typeface="SimSun"/>
+              </a:rPr>
+              <a:t>Click to edit Master text styles</a:t>
+            </a:r>
+            <a:endParaRPr lang="en-US" sz="3200" b="0" u="none" strike="noStrike">
+              <a:solidFill>
+                <a:srgbClr val="000000"/>
+              </a:solidFill>
+              <a:effectLst/>
+              <a:uFillTx/>
+              <a:latin typeface="Arial"/>
+            </a:endParaRPr>
+          </a:p>
+          <a:p>
+            <a:pPr marL="743040" lvl="1" indent="-285840">
+              <a:lnSpc>
+                <a:spcPct val="100000"/>
+              </a:lnSpc>
+              <a:spcBef>
+                <a:spcPts val="561"/>
+              </a:spcBef>
+              <a:buClr>
+                <a:srgbClr val="000000"/>
+              </a:buClr>
+              <a:buFont typeface="Symbol" charset="2"/>
+              <a:buChar char=""/>
+            </a:pPr>
+            <a:r>
+              <a:rPr lang="en-US" sz="2800" b="0" u="none" strike="noStrike">
+                <a:solidFill>
+                  <a:schemeClr val="dk1"/>
+                </a:solidFill>
+                <a:effectLst/>
+                <a:uFillTx/>
+                <a:latin typeface="Arial"/>
+                <a:ea typeface="SimSun"/>
+              </a:rPr>
+              <a:t>Second level</a:t>
+            </a:r>
+            <a:endParaRPr lang="en-US" sz="2800" b="0" u="none" strike="noStrike">
+              <a:solidFill>
+                <a:srgbClr val="000000"/>
+              </a:solidFill>
+              <a:effectLst/>
+              <a:uFillTx/>
+              <a:latin typeface="Arial"/>
+            </a:endParaRPr>
+          </a:p>
+          <a:p>
+            <a:pPr marL="1143000" lvl="2" indent="-228600">
+              <a:lnSpc>
+                <a:spcPct val="100000"/>
+              </a:lnSpc>
+              <a:spcBef>
+                <a:spcPts val="479"/>
+              </a:spcBef>
+              <a:buClr>
+                <a:srgbClr val="000000"/>
+              </a:buClr>
+              <a:buFont typeface="Symbol" charset="2"/>
+              <a:buChar char=""/>
+            </a:pPr>
+            <a:r>
+              <a:rPr lang="en-US" sz="2400" b="0" u="none" strike="noStrike">
+                <a:solidFill>
+                  <a:schemeClr val="dk1"/>
+                </a:solidFill>
+                <a:effectLst/>
+                <a:uFillTx/>
+                <a:latin typeface="Arial"/>
+                <a:ea typeface="SimSun"/>
+              </a:rPr>
+              <a:t>Third level</a:t>
+            </a:r>
+            <a:endParaRPr lang="en-US" sz="2400" b="0" u="none" strike="noStrike">
+              <a:solidFill>
+                <a:srgbClr val="000000"/>
+              </a:solidFill>
+              <a:effectLst/>
+              <a:uFillTx/>
+              <a:latin typeface="Arial"/>
+            </a:endParaRPr>
+          </a:p>
+          <a:p>
+            <a:pPr marL="1600200" lvl="3" indent="-228600">
+              <a:lnSpc>
+                <a:spcPct val="100000"/>
+              </a:lnSpc>
+              <a:spcBef>
+                <a:spcPts val="400"/>
+              </a:spcBef>
+              <a:buClr>
+                <a:srgbClr val="000000"/>
+              </a:buClr>
+              <a:buFont typeface="Symbol" charset="2"/>
+              <a:buChar char=""/>
+            </a:pPr>
+            <a:r>
+              <a:rPr lang="en-US" sz="2000" b="0" u="none" strike="noStrike">
+                <a:solidFill>
+                  <a:schemeClr val="dk1"/>
+                </a:solidFill>
+                <a:effectLst/>
+                <a:uFillTx/>
+                <a:latin typeface="Arial"/>
+                <a:ea typeface="SimSun"/>
+              </a:rPr>
+              <a:t>Fourth level</a:t>
+            </a:r>
+            <a:endParaRPr lang="en-US" sz="2000" b="0" u="none" strike="noStrike">
+              <a:solidFill>
+                <a:srgbClr val="000000"/>
+              </a:solidFill>
+              <a:effectLst/>
+              <a:uFillTx/>
+              <a:latin typeface="Arial"/>
+            </a:endParaRPr>
+          </a:p>
+          <a:p>
+            <a:pPr marL="2057400" lvl="4" indent="-228600">
+              <a:lnSpc>
+                <a:spcPct val="100000"/>
+              </a:lnSpc>
+              <a:spcBef>
+                <a:spcPts val="400"/>
+              </a:spcBef>
+              <a:buClr>
+                <a:srgbClr val="000000"/>
+              </a:buClr>
+              <a:buFont typeface="OpenSymbol"/>
+              <a:buChar char="»"/>
+            </a:pPr>
+            <a:r>
+              <a:rPr lang="en-US" sz="2000" b="0" u="none" strike="noStrike">
+                <a:solidFill>
+                  <a:schemeClr val="dk1"/>
+                </a:solidFill>
+                <a:effectLst/>
+                <a:uFillTx/>
+                <a:latin typeface="Arial"/>
+                <a:ea typeface="SimSun"/>
+              </a:rPr>
+              <a:t>Fifth level</a:t>
+            </a:r>
+            <a:endParaRPr lang="en-US" sz="2000" b="0" u="none" strike="noStrike">
+              <a:solidFill>
+                <a:srgbClr val="000000"/>
+              </a:solidFill>
+              <a:effectLst/>
+              <a:uFillTx/>
+              <a:latin typeface="Arial"/>
+            </a:endParaRPr>
+          </a:p>
+        </p:txBody>
+      </p:sp>
+      <p:sp>
+        <p:nvSpPr>
+          <p:cNvPr id="36" name="PlaceHolder 4"/>
+          <p:cNvSpPr>
+            <a:spLocks noGrp="1"/>
+          </p:cNvSpPr>
+          <p:nvPr>
+            <p:ph type="body"/>
+          </p:nvPr>
+        </p:nvSpPr>
+        <p:spPr>
+          <a:xfrm>
+            <a:off x="6172200" y="1681200"/>
+            <a:ext cx="5169960" cy="810360"/>
+          </a:xfrm>
+          <a:prstGeom prst="rect">
+            <a:avLst/>
+          </a:prstGeom>
+          <a:noFill/>
+          <a:ln w="9360">
+            <a:noFill/>
+          </a:ln>
+        </p:spPr>
+        <p:txBody>
+          <a:bodyPr lIns="90000" rIns="90000" tIns="45000" bIns="45000" anchor="b">
+            <a:noAutofit/>
+          </a:bodyPr>
+          <a:p>
+            <a:pPr indent="0">
+              <a:lnSpc>
+                <a:spcPct val="100000"/>
+              </a:lnSpc>
+              <a:spcBef>
+                <a:spcPts val="479"/>
+              </a:spcBef>
+              <a:buNone/>
+              <a:tabLst>
+                <a:tab algn="l" pos="0"/>
+              </a:tabLst>
+            </a:pPr>
+            <a:r>
+              <a:rPr lang="en-US" sz="2400" b="1" u="none" strike="noStrike">
+                <a:solidFill>
+                  <a:schemeClr val="dk1"/>
+                </a:solidFill>
+                <a:effectLst/>
+                <a:uFillTx/>
+                <a:latin typeface="Arial"/>
+                <a:ea typeface="SimSun"/>
+              </a:rPr>
+              <a:t>Click to edit Master text styles</a:t>
+            </a:r>
+            <a:endParaRPr lang="en-US" sz="2400" b="0" u="none" strike="noStrike">
+              <a:solidFill>
+                <a:srgbClr val="000000"/>
+              </a:solidFill>
+              <a:effectLst/>
+              <a:uFillTx/>
+              <a:latin typeface="Arial"/>
+            </a:endParaRPr>
+          </a:p>
+        </p:txBody>
+      </p:sp>
+      <p:sp>
+        <p:nvSpPr>
+          <p:cNvPr id="37" name="PlaceHolder 5"/>
+          <p:cNvSpPr>
+            <a:spLocks noGrp="1"/>
+          </p:cNvSpPr>
+          <p:nvPr>
+            <p:ph type="body"/>
+          </p:nvPr>
+        </p:nvSpPr>
+        <p:spPr>
+          <a:xfrm>
+            <a:off x="6172200" y="2505240"/>
+            <a:ext cx="5169960" cy="3670920"/>
+          </a:xfrm>
+          <a:prstGeom prst="rect">
+            <a:avLst/>
+          </a:prstGeom>
+          <a:noFill/>
+          <a:ln w="9360">
+            <a:noFill/>
+          </a:ln>
+        </p:spPr>
+        <p:txBody>
+          <a:bodyPr lIns="90000" rIns="90000" tIns="45000" bIns="45000" anchor="t">
+            <a:noAutofit/>
+          </a:bodyPr>
+          <a:p>
+            <a:pPr marL="343080" indent="-343080">
+              <a:lnSpc>
+                <a:spcPct val="100000"/>
+              </a:lnSpc>
+              <a:spcBef>
+                <a:spcPts val="641"/>
+              </a:spcBef>
+              <a:buClr>
+                <a:srgbClr val="000000"/>
+              </a:buClr>
+              <a:buFont typeface="Symbol" charset="2"/>
+              <a:buChar char=""/>
+            </a:pPr>
+            <a:r>
+              <a:rPr lang="en-US" sz="3200" b="0" u="none" strike="noStrike">
+                <a:solidFill>
+                  <a:schemeClr val="dk1"/>
+                </a:solidFill>
+                <a:effectLst/>
+                <a:uFillTx/>
+                <a:latin typeface="Arial"/>
+                <a:ea typeface="SimSun"/>
+              </a:rPr>
+              <a:t>Click to edit Master text styles</a:t>
+            </a:r>
+            <a:endParaRPr lang="en-US" sz="3200" b="0" u="none" strike="noStrike">
+              <a:solidFill>
+                <a:srgbClr val="000000"/>
+              </a:solidFill>
+              <a:effectLst/>
+              <a:uFillTx/>
+              <a:latin typeface="Arial"/>
+            </a:endParaRPr>
+          </a:p>
+          <a:p>
+            <a:pPr marL="743040" lvl="1" indent="-285840">
+              <a:lnSpc>
+                <a:spcPct val="100000"/>
+              </a:lnSpc>
+              <a:spcBef>
+                <a:spcPts val="561"/>
+              </a:spcBef>
+              <a:buClr>
+                <a:srgbClr val="000000"/>
+              </a:buClr>
+              <a:buFont typeface="Symbol" charset="2"/>
+              <a:buChar char=""/>
+            </a:pPr>
+            <a:r>
+              <a:rPr lang="en-US" sz="2800" b="0" u="none" strike="noStrike">
+                <a:solidFill>
+                  <a:schemeClr val="dk1"/>
+                </a:solidFill>
+                <a:effectLst/>
+                <a:uFillTx/>
+                <a:latin typeface="Arial"/>
+                <a:ea typeface="SimSun"/>
+              </a:rPr>
+              <a:t>Second level</a:t>
+            </a:r>
+            <a:endParaRPr lang="en-US" sz="2800" b="0" u="none" strike="noStrike">
+              <a:solidFill>
+                <a:srgbClr val="000000"/>
+              </a:solidFill>
+              <a:effectLst/>
+              <a:uFillTx/>
+              <a:latin typeface="Arial"/>
+            </a:endParaRPr>
+          </a:p>
+          <a:p>
+            <a:pPr marL="1143000" lvl="2" indent="-228600">
+              <a:lnSpc>
+                <a:spcPct val="100000"/>
+              </a:lnSpc>
+              <a:spcBef>
+                <a:spcPts val="479"/>
+              </a:spcBef>
+              <a:buClr>
+                <a:srgbClr val="000000"/>
+              </a:buClr>
+              <a:buFont typeface="Symbol" charset="2"/>
+              <a:buChar char=""/>
+            </a:pPr>
+            <a:r>
+              <a:rPr lang="en-US" sz="2400" b="0" u="none" strike="noStrike">
+                <a:solidFill>
+                  <a:schemeClr val="dk1"/>
+                </a:solidFill>
+                <a:effectLst/>
+                <a:uFillTx/>
+                <a:latin typeface="Arial"/>
+                <a:ea typeface="SimSun"/>
+              </a:rPr>
+              <a:t>Third level</a:t>
+            </a:r>
+            <a:endParaRPr lang="en-US" sz="2400" b="0" u="none" strike="noStrike">
+              <a:solidFill>
+                <a:srgbClr val="000000"/>
+              </a:solidFill>
+              <a:effectLst/>
+              <a:uFillTx/>
+              <a:latin typeface="Arial"/>
+            </a:endParaRPr>
+          </a:p>
+          <a:p>
+            <a:pPr marL="1600200" lvl="3" indent="-228600">
+              <a:lnSpc>
+                <a:spcPct val="100000"/>
+              </a:lnSpc>
+              <a:spcBef>
+                <a:spcPts val="400"/>
+              </a:spcBef>
+              <a:buClr>
+                <a:srgbClr val="000000"/>
+              </a:buClr>
+              <a:buFont typeface="Symbol" charset="2"/>
+              <a:buChar char=""/>
+            </a:pPr>
+            <a:r>
+              <a:rPr lang="en-US" sz="2000" b="0" u="none" strike="noStrike">
+                <a:solidFill>
+                  <a:schemeClr val="dk1"/>
+                </a:solidFill>
+                <a:effectLst/>
+                <a:uFillTx/>
+                <a:latin typeface="Arial"/>
+                <a:ea typeface="SimSun"/>
+              </a:rPr>
+              <a:t>Fourth level</a:t>
+            </a:r>
+            <a:endParaRPr lang="en-US" sz="2000" b="0" u="none" strike="noStrike">
+              <a:solidFill>
+                <a:srgbClr val="000000"/>
+              </a:solidFill>
+              <a:effectLst/>
+              <a:uFillTx/>
+              <a:latin typeface="Arial"/>
+            </a:endParaRPr>
+          </a:p>
+          <a:p>
+            <a:pPr marL="2057400" lvl="4" indent="-228600">
+              <a:lnSpc>
+                <a:spcPct val="100000"/>
+              </a:lnSpc>
+              <a:spcBef>
+                <a:spcPts val="400"/>
+              </a:spcBef>
+              <a:buClr>
+                <a:srgbClr val="000000"/>
+              </a:buClr>
+              <a:buFont typeface="OpenSymbol"/>
+              <a:buChar char="»"/>
+            </a:pPr>
+            <a:r>
+              <a:rPr lang="en-US" sz="2000" b="0" u="none" strike="noStrike">
+                <a:solidFill>
+                  <a:schemeClr val="dk1"/>
+                </a:solidFill>
+                <a:effectLst/>
+                <a:uFillTx/>
+                <a:latin typeface="Arial"/>
+                <a:ea typeface="SimSun"/>
+              </a:rPr>
+              <a:t>Fifth level</a:t>
+            </a:r>
+            <a:endParaRPr lang="en-US" sz="2000" b="0" u="none" strike="noStrike">
+              <a:solidFill>
+                <a:srgbClr val="000000"/>
+              </a:solidFill>
+              <a:effectLst/>
+              <a:uFillTx/>
+              <a:latin typeface="Arial"/>
+            </a:endParaRPr>
+          </a:p>
+        </p:txBody>
+      </p:sp>
+      <p:sp>
+        <p:nvSpPr>
+          <p:cNvPr id="38" name="PlaceHolder 6"/>
+          <p:cNvSpPr>
+            <a:spLocks noGrp="1"/>
+          </p:cNvSpPr>
+          <p:nvPr>
+            <p:ph type="dt" idx="16"/>
+          </p:nvPr>
+        </p:nvSpPr>
+        <p:spPr>
+          <a:xfrm>
+            <a:off x="609480" y="6245280"/>
+            <a:ext cx="2831040" cy="462600"/>
+          </a:xfrm>
+          <a:prstGeom prst="rect">
+            <a:avLst/>
+          </a:prstGeom>
+          <a:noFill/>
+          <a:ln w="0">
+            <a:noFill/>
+          </a:ln>
+        </p:spPr>
+        <p:txBody>
+          <a:bodyPr numCol="1" spcCol="0" lIns="91440" rIns="91440" tIns="45720" bIns="45720" anchor="t">
+            <a:noAutofit/>
+          </a:bodyPr>
+          <a:lstStyle>
+            <a:lvl1pPr indent="0" defTabSz="914400">
+              <a:lnSpc>
+                <a:spcPct val="100000"/>
+              </a:lnSpc>
+              <a:buNone/>
+              <a:tabLst>
+                <a:tab algn="l" pos="0"/>
+              </a:tabLst>
+              <a:defRPr lang="en-US" sz="1400" b="0" u="none" strike="noStrike">
+                <a:solidFill>
+                  <a:srgbClr val="000000"/>
+                </a:solidFill>
+                <a:effectLst/>
+                <a:uFillTx/>
+                <a:latin typeface="Times New Roman"/>
+                <a:ea typeface="SimSun"/>
+              </a:defRPr>
+            </a:lvl1pPr>
+          </a:lstStyle>
+          <a:p>
+            <a:pPr indent="0" defTabSz="914400">
+              <a:lnSpc>
+                <a:spcPct val="100000"/>
+              </a:lnSpc>
+              <a:buNone/>
+              <a:tabLst>
+                <a:tab algn="l" pos="0"/>
+              </a:tabLst>
+            </a:pPr>
+            <a:r>
+              <a:rPr lang="en-US" sz="1400" b="0" u="none" strike="noStrike">
+                <a:solidFill>
+                  <a:srgbClr val="000000"/>
+                </a:solidFill>
+                <a:effectLst/>
+                <a:uFillTx/>
+                <a:latin typeface="Times New Roman"/>
+                <a:ea typeface="SimSun"/>
+              </a:rPr>
+              <a:t>&lt;date/time&gt;</a:t>
+            </a:r>
+            <a:endParaRPr lang="en-US" sz="1400" b="0" u="none" strike="noStrike">
+              <a:solidFill>
+                <a:srgbClr val="000000"/>
+              </a:solidFill>
+              <a:effectLst/>
+              <a:uFillTx/>
+              <a:latin typeface="Times New Roman"/>
+            </a:endParaRPr>
+          </a:p>
+        </p:txBody>
+      </p:sp>
+      <p:sp>
+        <p:nvSpPr>
+          <p:cNvPr id="39" name="PlaceHolder 7"/>
+          <p:cNvSpPr>
+            <a:spLocks noGrp="1"/>
+          </p:cNvSpPr>
+          <p:nvPr>
+            <p:ph type="ftr" idx="17"/>
+          </p:nvPr>
+        </p:nvSpPr>
+        <p:spPr>
+          <a:xfrm>
+            <a:off x="4165560" y="6245280"/>
+            <a:ext cx="3846960" cy="462600"/>
+          </a:xfrm>
+          <a:prstGeom prst="rect">
+            <a:avLst/>
+          </a:prstGeom>
+          <a:noFill/>
+          <a:ln w="0">
+            <a:noFill/>
+          </a:ln>
+        </p:spPr>
+        <p:txBody>
+          <a:bodyPr numCol="1" spcCol="0" lIns="91440" rIns="91440" tIns="45720" bIns="45720" anchor="t">
+            <a:noAutofit/>
+          </a:bodyPr>
+          <a:lstStyle>
+            <a:lvl1pPr indent="0" algn="ctr" defTabSz="914400">
+              <a:lnSpc>
+                <a:spcPct val="100000"/>
+              </a:lnSpc>
+              <a:buNone/>
+              <a:tabLst>
+                <a:tab algn="l" pos="0"/>
+              </a:tabLst>
+              <a:defRPr lang="en-US" sz="1400" b="0" u="none" strike="noStrike">
+                <a:solidFill>
+                  <a:srgbClr val="000000"/>
+                </a:solidFill>
+                <a:effectLst/>
+                <a:uFillTx/>
+                <a:latin typeface="Times New Roman"/>
+                <a:ea typeface="SimSun"/>
+              </a:defRPr>
+            </a:lvl1pPr>
+          </a:lstStyle>
+          <a:p>
+            <a:pPr indent="0" algn="ctr" defTabSz="914400">
+              <a:lnSpc>
+                <a:spcPct val="100000"/>
+              </a:lnSpc>
+              <a:buNone/>
+              <a:tabLst>
+                <a:tab algn="l" pos="0"/>
+              </a:tabLst>
+            </a:pPr>
+            <a:r>
+              <a:rPr lang="en-US" sz="1400" b="0" u="none" strike="noStrike">
+                <a:solidFill>
+                  <a:srgbClr val="000000"/>
+                </a:solidFill>
+                <a:effectLst/>
+                <a:uFillTx/>
+                <a:latin typeface="Times New Roman"/>
+                <a:ea typeface="SimSun"/>
+              </a:rPr>
+              <a:t>&lt;footer&gt;</a:t>
+            </a:r>
+            <a:endParaRPr lang="en-US" sz="1400" b="0" u="none" strike="noStrike">
+              <a:solidFill>
+                <a:srgbClr val="000000"/>
+              </a:solidFill>
+              <a:effectLst/>
+              <a:uFillTx/>
+              <a:latin typeface="Times New Roman"/>
+            </a:endParaRPr>
+          </a:p>
+        </p:txBody>
+      </p:sp>
+      <p:sp>
+        <p:nvSpPr>
+          <p:cNvPr id="40" name="PlaceHolder 8"/>
+          <p:cNvSpPr>
+            <a:spLocks noGrp="1"/>
+          </p:cNvSpPr>
+          <p:nvPr>
+            <p:ph type="sldNum" idx="18"/>
+          </p:nvPr>
+        </p:nvSpPr>
+        <p:spPr>
+          <a:xfrm>
+            <a:off x="8737560" y="6245280"/>
+            <a:ext cx="2831040" cy="462600"/>
+          </a:xfrm>
+          <a:prstGeom prst="rect">
+            <a:avLst/>
+          </a:prstGeom>
+          <a:noFill/>
+          <a:ln w="0">
+            <a:noFill/>
+          </a:ln>
+        </p:spPr>
+        <p:txBody>
+          <a:bodyPr numCol="1" spcCol="0" lIns="91440" rIns="91440" tIns="45720" bIns="45720" anchor="t">
+            <a:noAutofit/>
+          </a:bodyPr>
+          <a:p>
+            <a:pPr indent="0">
+              <a:buNone/>
+            </a:pPr>
+            <a:endParaRPr lang="en-US" sz="1800" b="0" u="none" strike="noStrike">
+              <a:solidFill>
+                <a:srgbClr val="000000"/>
+              </a:solidFill>
+              <a:effectLst/>
+              <a:uFillTx/>
+              <a:latin typeface="Times New Roman"/>
+            </a:endParaRPr>
+          </a:p>
+        </p:txBody>
+      </p:sp>
+    </p:spTree>
+  </p:cSld>
+</p:sldLayout>
+</file>
+
+<file path=ppt/slideLayouts/slideLayout7.xml><?xml version="1.0" encoding="utf-8"?>
 <p:sldLayout xmlns:a="http://schemas.openxmlformats.org/drawingml/2006/main" xmlns:p="http://schemas.openxmlformats.org/presentationml/2006/main" xmlns:r="http://schemas.openxmlformats.org/officeDocument/2006/relationships" xmlns:p14="http://schemas.microsoft.com/office/powerpoint/2010/main" xmlns:p15="http://schemas.microsoft.com/office/powerpoint/2012/main" xmlns:mc="http://schemas.openxmlformats.org/markup-compatibility/2006" type="blank" preserve="1">
   <p:cSld name="Blank">
     <p:bg>
@@ -2838,7 +4349,7 @@
       </p:grpSpPr>
       <p:pic>
         <p:nvPicPr>
-          <p:cNvPr id="23" name="Picture 10"/>
+          <p:cNvPr id="41" name="Picture 10"/>
           <p:cNvPicPr/>
           <p:nvPr/>
         </p:nvPicPr>
@@ -2849,7 +4360,7 @@
         <p:spPr>
           <a:xfrm>
             <a:off x="0" y="0"/>
-            <a:ext cx="12178800" cy="6844680"/>
+            <a:ext cx="12178440" cy="6844320"/>
           </a:xfrm>
           <a:prstGeom prst="rect">
             <a:avLst/>
@@ -2862,18 +4373,18 @@
       </p:pic>
       <p:sp>
         <p:nvSpPr>
-          <p:cNvPr id="24" name="PlaceHolder 1"/>
+          <p:cNvPr id="42" name="PlaceHolder 1"/>
           <p:cNvSpPr>
             <a:spLocks noGrp="1"/>
           </p:cNvSpPr>
           <p:nvPr>
-            <p:ph type="dt" idx="10"/>
+            <p:ph type="dt" idx="19"/>
           </p:nvPr>
         </p:nvSpPr>
         <p:spPr>
           <a:xfrm>
             <a:off x="609480" y="6245280"/>
-            <a:ext cx="2831400" cy="462960"/>
+            <a:ext cx="2831040" cy="462600"/>
           </a:xfrm>
           <a:prstGeom prst="rect">
             <a:avLst/>
@@ -2942,18 +4453,18 @@
       </p:sp>
       <p:sp>
         <p:nvSpPr>
-          <p:cNvPr id="25" name="PlaceHolder 2"/>
+          <p:cNvPr id="43" name="PlaceHolder 2"/>
           <p:cNvSpPr>
             <a:spLocks noGrp="1"/>
           </p:cNvSpPr>
           <p:nvPr>
-            <p:ph type="ftr" idx="11"/>
+            <p:ph type="ftr" idx="20"/>
           </p:nvPr>
         </p:nvSpPr>
         <p:spPr>
           <a:xfrm>
             <a:off x="4165560" y="6245280"/>
-            <a:ext cx="3847320" cy="462960"/>
+            <a:ext cx="3846960" cy="462600"/>
           </a:xfrm>
           <a:prstGeom prst="rect">
             <a:avLst/>
@@ -3022,18 +4533,18 @@
       </p:sp>
       <p:sp>
         <p:nvSpPr>
-          <p:cNvPr id="26" name="PlaceHolder 3"/>
+          <p:cNvPr id="44" name="PlaceHolder 3"/>
           <p:cNvSpPr>
             <a:spLocks noGrp="1"/>
           </p:cNvSpPr>
           <p:nvPr>
-            <p:ph type="sldNum" idx="12"/>
+            <p:ph type="sldNum" idx="21"/>
           </p:nvPr>
         </p:nvSpPr>
         <p:spPr>
           <a:xfrm>
             <a:off x="8737560" y="6245280"/>
-            <a:ext cx="2831400" cy="462960"/>
+            <a:ext cx="2831040" cy="462600"/>
           </a:xfrm>
           <a:prstGeom prst="rect">
             <a:avLst/>
@@ -3067,7 +4578,7 @@
 </p:sldLayout>
 </file>
 
-<file path=ppt/slideLayouts/slideLayout5.xml><?xml version="1.0" encoding="utf-8"?>
+<file path=ppt/slideLayouts/slideLayout8.xml><?xml version="1.0" encoding="utf-8"?>
 <p:sldLayout xmlns:a="http://schemas.openxmlformats.org/drawingml/2006/main" xmlns:p="http://schemas.openxmlformats.org/presentationml/2006/main" xmlns:r="http://schemas.openxmlformats.org/officeDocument/2006/relationships" xmlns:p14="http://schemas.microsoft.com/office/powerpoint/2010/main" xmlns:p15="http://schemas.microsoft.com/office/powerpoint/2012/main" xmlns:mc="http://schemas.openxmlformats.org/markup-compatibility/2006" type="vertTitleAndTx" preserve="1">
   <p:cSld name="Vertical Title and Text">
     <p:bg>
@@ -3093,7 +4604,7 @@
       </p:grpSpPr>
       <p:pic>
         <p:nvPicPr>
-          <p:cNvPr id="27" name="Picture 10"/>
+          <p:cNvPr id="45" name="Picture 10"/>
           <p:cNvPicPr/>
           <p:nvPr/>
         </p:nvPicPr>
@@ -3104,7 +4615,7 @@
         <p:spPr>
           <a:xfrm>
             <a:off x="0" y="0"/>
-            <a:ext cx="12178800" cy="6844680"/>
+            <a:ext cx="12178440" cy="6844320"/>
           </a:xfrm>
           <a:prstGeom prst="rect">
             <a:avLst/>
@@ -3117,7 +4628,7 @@
       </p:pic>
       <p:sp>
         <p:nvSpPr>
-          <p:cNvPr id="28" name="PlaceHolder 1"/>
+          <p:cNvPr id="46" name="PlaceHolder 1"/>
           <p:cNvSpPr>
             <a:spLocks noGrp="1"/>
           </p:cNvSpPr>
@@ -3128,7 +4639,7 @@
         <p:spPr>
           <a:xfrm>
             <a:off x="8839080" y="190440"/>
-            <a:ext cx="2729880" cy="5923800"/>
+            <a:ext cx="2729520" cy="5923440"/>
           </a:xfrm>
           <a:prstGeom prst="rect">
             <a:avLst/>
@@ -3177,7 +4688,7 @@
       </p:sp>
       <p:sp>
         <p:nvSpPr>
-          <p:cNvPr id="29" name="PlaceHolder 2"/>
+          <p:cNvPr id="47" name="PlaceHolder 2"/>
           <p:cNvSpPr>
             <a:spLocks noGrp="1"/>
           </p:cNvSpPr>
@@ -3188,7 +4699,7 @@
         <p:spPr>
           <a:xfrm>
             <a:off x="609480" y="190440"/>
-            <a:ext cx="8013240" cy="5923800"/>
+            <a:ext cx="8012880" cy="5923440"/>
           </a:xfrm>
           <a:prstGeom prst="rect">
             <a:avLst/>
@@ -3381,18 +4892,18 @@
       </p:sp>
       <p:sp>
         <p:nvSpPr>
-          <p:cNvPr id="30" name="PlaceHolder 3"/>
+          <p:cNvPr id="48" name="PlaceHolder 3"/>
           <p:cNvSpPr>
             <a:spLocks noGrp="1"/>
           </p:cNvSpPr>
           <p:nvPr>
-            <p:ph type="dt" idx="13"/>
+            <p:ph type="dt" idx="22"/>
           </p:nvPr>
         </p:nvSpPr>
         <p:spPr>
           <a:xfrm>
             <a:off x="609480" y="6245280"/>
-            <a:ext cx="2831400" cy="462960"/>
+            <a:ext cx="2831040" cy="462600"/>
           </a:xfrm>
           <a:prstGeom prst="rect">
             <a:avLst/>
@@ -3461,18 +4972,18 @@
       </p:sp>
       <p:sp>
         <p:nvSpPr>
-          <p:cNvPr id="31" name="PlaceHolder 4"/>
+          <p:cNvPr id="49" name="PlaceHolder 4"/>
           <p:cNvSpPr>
             <a:spLocks noGrp="1"/>
           </p:cNvSpPr>
           <p:nvPr>
-            <p:ph type="ftr" idx="14"/>
+            <p:ph type="ftr" idx="23"/>
           </p:nvPr>
         </p:nvSpPr>
         <p:spPr>
           <a:xfrm>
             <a:off x="4165560" y="6245280"/>
-            <a:ext cx="3847320" cy="462960"/>
+            <a:ext cx="3846960" cy="462600"/>
           </a:xfrm>
           <a:prstGeom prst="rect">
             <a:avLst/>
@@ -3541,18 +5052,18 @@
       </p:sp>
       <p:sp>
         <p:nvSpPr>
-          <p:cNvPr id="32" name="PlaceHolder 5"/>
+          <p:cNvPr id="50" name="PlaceHolder 5"/>
           <p:cNvSpPr>
             <a:spLocks noGrp="1"/>
           </p:cNvSpPr>
           <p:nvPr>
-            <p:ph type="sldNum" idx="15"/>
+            <p:ph type="sldNum" idx="24"/>
           </p:nvPr>
         </p:nvSpPr>
         <p:spPr>
           <a:xfrm>
             <a:off x="8737560" y="6245280"/>
-            <a:ext cx="2831400" cy="462960"/>
+            <a:ext cx="2831040" cy="462600"/>
           </a:xfrm>
           <a:prstGeom prst="rect">
             <a:avLst/>
@@ -3586,7 +5097,7 @@
 </p:sldLayout>
 </file>
 
-<file path=ppt/slideLayouts/slideLayout6.xml><?xml version="1.0" encoding="utf-8"?>
+<file path=ppt/slideLayouts/slideLayout9.xml><?xml version="1.0" encoding="utf-8"?>
 <p:sldLayout xmlns:a="http://schemas.openxmlformats.org/drawingml/2006/main" xmlns:p="http://schemas.openxmlformats.org/presentationml/2006/main" xmlns:r="http://schemas.openxmlformats.org/officeDocument/2006/relationships" xmlns:p14="http://schemas.microsoft.com/office/powerpoint/2010/main" xmlns:p15="http://schemas.microsoft.com/office/powerpoint/2012/main" xmlns:mc="http://schemas.openxmlformats.org/markup-compatibility/2006" type="blank" preserve="1">
   <p:cSld name="Content with Caption">
     <p:bg>
@@ -3612,7 +5123,7 @@
       </p:grpSpPr>
       <p:pic>
         <p:nvPicPr>
-          <p:cNvPr id="33" name="Picture 10"/>
+          <p:cNvPr id="51" name="Picture 10"/>
           <p:cNvPicPr/>
           <p:nvPr/>
         </p:nvPicPr>
@@ -3623,7 +5134,7 @@
         <p:spPr>
           <a:xfrm>
             <a:off x="0" y="0"/>
-            <a:ext cx="12178800" cy="6844680"/>
+            <a:ext cx="12178440" cy="6844320"/>
           </a:xfrm>
           <a:prstGeom prst="rect">
             <a:avLst/>
@@ -3636,7 +5147,7 @@
       </p:pic>
       <p:sp>
         <p:nvSpPr>
-          <p:cNvPr id="34" name="PlaceHolder 1"/>
+          <p:cNvPr id="52" name="PlaceHolder 1"/>
           <p:cNvSpPr>
             <a:spLocks noGrp="1"/>
           </p:cNvSpPr>
@@ -3647,7 +5158,7 @@
         <p:spPr>
           <a:xfrm>
             <a:off x="840240" y="457200"/>
-            <a:ext cx="3919320" cy="1586880"/>
+            <a:ext cx="3918960" cy="1586520"/>
           </a:xfrm>
           <a:prstGeom prst="rect">
             <a:avLst/>
@@ -3681,379 +5192,7 @@
                 <a:latin typeface="Arial"/>
                 <a:ea typeface="SimSun"/>
               </a:rPr>
-              <a:t>C</a:t>
-            </a:r>
-            <a:r>
-              <a:rPr lang="en-US" sz="3200" b="0" u="none" strike="noStrike">
-                <a:solidFill>
-                  <a:schemeClr val="dk1"/>
-                </a:solidFill>
-                <a:effectLst/>
-                <a:uFillTx/>
-                <a:latin typeface="Arial"/>
-                <a:ea typeface="SimSun"/>
-              </a:rPr>
-              <a:t>l</a:t>
-            </a:r>
-            <a:r>
-              <a:rPr lang="en-US" sz="3200" b="0" u="none" strike="noStrike">
-                <a:solidFill>
-                  <a:schemeClr val="dk1"/>
-                </a:solidFill>
-                <a:effectLst/>
-                <a:uFillTx/>
-                <a:latin typeface="Arial"/>
-                <a:ea typeface="SimSun"/>
-              </a:rPr>
-              <a:t>i</a:t>
-            </a:r>
-            <a:r>
-              <a:rPr lang="en-US" sz="3200" b="0" u="none" strike="noStrike">
-                <a:solidFill>
-                  <a:schemeClr val="dk1"/>
-                </a:solidFill>
-                <a:effectLst/>
-                <a:uFillTx/>
-                <a:latin typeface="Arial"/>
-                <a:ea typeface="SimSun"/>
-              </a:rPr>
-              <a:t>c</a:t>
-            </a:r>
-            <a:r>
-              <a:rPr lang="en-US" sz="3200" b="0" u="none" strike="noStrike">
-                <a:solidFill>
-                  <a:schemeClr val="dk1"/>
-                </a:solidFill>
-                <a:effectLst/>
-                <a:uFillTx/>
-                <a:latin typeface="Arial"/>
-                <a:ea typeface="SimSun"/>
-              </a:rPr>
-              <a:t>k</a:t>
-            </a:r>
-            <a:r>
-              <a:rPr lang="en-US" sz="3200" b="0" u="none" strike="noStrike">
-                <a:solidFill>
-                  <a:schemeClr val="dk1"/>
-                </a:solidFill>
-                <a:effectLst/>
-                <a:uFillTx/>
-                <a:latin typeface="Arial"/>
-                <a:ea typeface="SimSun"/>
-              </a:rPr>
-              <a:t> </a:t>
-            </a:r>
-            <a:r>
-              <a:rPr lang="en-US" sz="3200" b="0" u="none" strike="noStrike">
-                <a:solidFill>
-                  <a:schemeClr val="dk1"/>
-                </a:solidFill>
-                <a:effectLst/>
-                <a:uFillTx/>
-                <a:latin typeface="Arial"/>
-                <a:ea typeface="SimSun"/>
-              </a:rPr>
-              <a:t>t</a:t>
-            </a:r>
-            <a:r>
-              <a:rPr lang="en-US" sz="3200" b="0" u="none" strike="noStrike">
-                <a:solidFill>
-                  <a:schemeClr val="dk1"/>
-                </a:solidFill>
-                <a:effectLst/>
-                <a:uFillTx/>
-                <a:latin typeface="Arial"/>
-                <a:ea typeface="SimSun"/>
-              </a:rPr>
-              <a:t>o</a:t>
-            </a:r>
-            <a:r>
-              <a:rPr lang="en-US" sz="3200" b="0" u="none" strike="noStrike">
-                <a:solidFill>
-                  <a:schemeClr val="dk1"/>
-                </a:solidFill>
-                <a:effectLst/>
-                <a:uFillTx/>
-                <a:latin typeface="Arial"/>
-                <a:ea typeface="SimSun"/>
-              </a:rPr>
-              <a:t> </a:t>
-            </a:r>
-            <a:r>
-              <a:rPr lang="en-US" sz="3200" b="0" u="none" strike="noStrike">
-                <a:solidFill>
-                  <a:schemeClr val="dk1"/>
-                </a:solidFill>
-                <a:effectLst/>
-                <a:uFillTx/>
-                <a:latin typeface="Arial"/>
-                <a:ea typeface="SimSun"/>
-              </a:rPr>
-              <a:t>e</a:t>
-            </a:r>
-            <a:r>
-              <a:rPr lang="en-US" sz="3200" b="0" u="none" strike="noStrike">
-                <a:solidFill>
-                  <a:schemeClr val="dk1"/>
-                </a:solidFill>
-                <a:effectLst/>
-                <a:uFillTx/>
-                <a:latin typeface="Arial"/>
-                <a:ea typeface="SimSun"/>
-              </a:rPr>
-              <a:t>d</a:t>
-            </a:r>
-            <a:r>
-              <a:rPr lang="en-US" sz="3200" b="0" u="none" strike="noStrike">
-                <a:solidFill>
-                  <a:schemeClr val="dk1"/>
-                </a:solidFill>
-                <a:effectLst/>
-                <a:uFillTx/>
-                <a:latin typeface="Arial"/>
-                <a:ea typeface="SimSun"/>
-              </a:rPr>
-              <a:t>i</a:t>
-            </a:r>
-            <a:r>
-              <a:rPr lang="en-US" sz="3200" b="0" u="none" strike="noStrike">
-                <a:solidFill>
-                  <a:schemeClr val="dk1"/>
-                </a:solidFill>
-                <a:effectLst/>
-                <a:uFillTx/>
-                <a:latin typeface="Arial"/>
-                <a:ea typeface="SimSun"/>
-              </a:rPr>
-              <a:t>t</a:t>
-            </a:r>
-            <a:r>
-              <a:rPr lang="en-US" sz="3200" b="0" u="none" strike="noStrike">
-                <a:solidFill>
-                  <a:schemeClr val="dk1"/>
-                </a:solidFill>
-                <a:effectLst/>
-                <a:uFillTx/>
-                <a:latin typeface="Arial"/>
-                <a:ea typeface="SimSun"/>
-              </a:rPr>
-              <a:t> </a:t>
-            </a:r>
-            <a:r>
-              <a:rPr lang="en-US" sz="3200" b="0" u="none" strike="noStrike">
-                <a:solidFill>
-                  <a:schemeClr val="dk1"/>
-                </a:solidFill>
-                <a:effectLst/>
-                <a:uFillTx/>
-                <a:latin typeface="Arial"/>
-                <a:ea typeface="SimSun"/>
-              </a:rPr>
-              <a:t>M</a:t>
-            </a:r>
-            <a:r>
-              <a:rPr lang="en-US" sz="3200" b="0" u="none" strike="noStrike">
-                <a:solidFill>
-                  <a:schemeClr val="dk1"/>
-                </a:solidFill>
-                <a:effectLst/>
-                <a:uFillTx/>
-                <a:latin typeface="Arial"/>
-                <a:ea typeface="SimSun"/>
-              </a:rPr>
-              <a:t>a</a:t>
-            </a:r>
-            <a:r>
-              <a:rPr lang="en-US" sz="3200" b="0" u="none" strike="noStrike">
-                <a:solidFill>
-                  <a:schemeClr val="dk1"/>
-                </a:solidFill>
-                <a:effectLst/>
-                <a:uFillTx/>
-                <a:latin typeface="Arial"/>
-                <a:ea typeface="SimSun"/>
-              </a:rPr>
-              <a:t>s</a:t>
-            </a:r>
-            <a:r>
-              <a:rPr lang="en-US" sz="3200" b="0" u="none" strike="noStrike">
-                <a:solidFill>
-                  <a:schemeClr val="dk1"/>
-                </a:solidFill>
-                <a:effectLst/>
-                <a:uFillTx/>
-                <a:latin typeface="Arial"/>
-                <a:ea typeface="SimSun"/>
-              </a:rPr>
-              <a:t>t</a:t>
-            </a:r>
-            <a:r>
-              <a:rPr lang="en-US" sz="3200" b="0" u="none" strike="noStrike">
-                <a:solidFill>
-                  <a:schemeClr val="dk1"/>
-                </a:solidFill>
-                <a:effectLst/>
-                <a:uFillTx/>
-                <a:latin typeface="Arial"/>
-                <a:ea typeface="SimSun"/>
-              </a:rPr>
-              <a:t>e</a:t>
-            </a:r>
-            <a:r>
-              <a:rPr lang="en-US" sz="3200" b="0" u="none" strike="noStrike">
-                <a:solidFill>
-                  <a:schemeClr val="dk1"/>
-                </a:solidFill>
-                <a:effectLst/>
-                <a:uFillTx/>
-                <a:latin typeface="Arial"/>
-                <a:ea typeface="SimSun"/>
-              </a:rPr>
-              <a:t>r</a:t>
-            </a:r>
-            <a:r>
-              <a:rPr lang="en-US" sz="3200" b="0" u="none" strike="noStrike">
-                <a:solidFill>
-                  <a:schemeClr val="dk1"/>
-                </a:solidFill>
-                <a:effectLst/>
-                <a:uFillTx/>
-                <a:latin typeface="Arial"/>
-                <a:ea typeface="SimSun"/>
-              </a:rPr>
-              <a:t> </a:t>
-            </a:r>
-            <a:r>
-              <a:rPr lang="en-US" sz="3200" b="0" u="none" strike="noStrike">
-                <a:solidFill>
-                  <a:schemeClr val="dk1"/>
-                </a:solidFill>
-                <a:effectLst/>
-                <a:uFillTx/>
-                <a:latin typeface="Arial"/>
-                <a:ea typeface="SimSun"/>
-              </a:rPr>
-              <a:t>t</a:t>
-            </a:r>
-            <a:r>
-              <a:rPr lang="en-US" sz="3200" b="0" u="none" strike="noStrike">
-                <a:solidFill>
-                  <a:schemeClr val="dk1"/>
-                </a:solidFill>
-                <a:effectLst/>
-                <a:uFillTx/>
-                <a:latin typeface="Arial"/>
-                <a:ea typeface="SimSun"/>
-              </a:rPr>
-              <a:t>i</a:t>
-            </a:r>
-            <a:r>
-              <a:rPr lang="en-US" sz="3200" b="0" u="none" strike="noStrike">
-                <a:solidFill>
-                  <a:schemeClr val="dk1"/>
-                </a:solidFill>
-                <a:effectLst/>
-                <a:uFillTx/>
-                <a:latin typeface="Arial"/>
-                <a:ea typeface="SimSun"/>
-              </a:rPr>
-              <a:t>t</a:t>
-            </a:r>
-            <a:r>
-              <a:rPr lang="en-US" sz="3200" b="0" u="none" strike="noStrike">
-                <a:solidFill>
-                  <a:schemeClr val="dk1"/>
-                </a:solidFill>
-                <a:effectLst/>
-                <a:uFillTx/>
-                <a:latin typeface="Arial"/>
-                <a:ea typeface="SimSun"/>
-              </a:rPr>
-              <a:t>l</a:t>
-            </a:r>
-            <a:r>
-              <a:rPr lang="en-US" sz="3200" b="0" u="none" strike="noStrike">
-                <a:solidFill>
-                  <a:schemeClr val="dk1"/>
-                </a:solidFill>
-                <a:effectLst/>
-                <a:uFillTx/>
-                <a:latin typeface="Arial"/>
-                <a:ea typeface="SimSun"/>
-              </a:rPr>
-              <a:t>e</a:t>
-            </a:r>
-            <a:r>
-              <a:rPr lang="en-US" sz="3200" b="0" u="none" strike="noStrike">
-                <a:solidFill>
-                  <a:schemeClr val="dk1"/>
-                </a:solidFill>
-                <a:effectLst/>
-                <a:uFillTx/>
-                <a:latin typeface="Arial"/>
-                <a:ea typeface="SimSun"/>
-              </a:rPr>
-              <a:t> </a:t>
-            </a:r>
-            <a:r>
-              <a:rPr lang="en-US" sz="3200" b="0" u="none" strike="noStrike">
-                <a:solidFill>
-                  <a:schemeClr val="dk1"/>
-                </a:solidFill>
-                <a:effectLst/>
-                <a:uFillTx/>
-                <a:latin typeface="Arial"/>
-                <a:ea typeface="SimSun"/>
-              </a:rPr>
-              <a:t>s</a:t>
-            </a:r>
-            <a:r>
-              <a:rPr lang="en-US" sz="3200" b="0" u="none" strike="noStrike">
-                <a:solidFill>
-                  <a:schemeClr val="dk1"/>
-                </a:solidFill>
-                <a:effectLst/>
-                <a:uFillTx/>
-                <a:latin typeface="Arial"/>
-                <a:ea typeface="SimSun"/>
-              </a:rPr>
-              <a:t>t</a:t>
-            </a:r>
-            <a:r>
-              <a:rPr lang="en-US" sz="3200" b="0" u="none" strike="noStrike">
-                <a:solidFill>
-                  <a:schemeClr val="dk1"/>
-                </a:solidFill>
-                <a:effectLst/>
-                <a:uFillTx/>
-                <a:latin typeface="Arial"/>
-                <a:ea typeface="SimSun"/>
-              </a:rPr>
-              <a:t>y</a:t>
-            </a:r>
-            <a:r>
-              <a:rPr lang="en-US" sz="3200" b="0" u="none" strike="noStrike">
-                <a:solidFill>
-                  <a:schemeClr val="dk1"/>
-                </a:solidFill>
-                <a:effectLst/>
-                <a:uFillTx/>
-                <a:latin typeface="Arial"/>
-                <a:ea typeface="SimSun"/>
-              </a:rPr>
-              <a:t>l</a:t>
-            </a:r>
-            <a:r>
-              <a:rPr lang="en-US" sz="3200" b="0" u="none" strike="noStrike">
-                <a:solidFill>
-                  <a:schemeClr val="dk1"/>
-                </a:solidFill>
-                <a:effectLst/>
-                <a:uFillTx/>
-                <a:latin typeface="Arial"/>
-                <a:ea typeface="SimSun"/>
-              </a:rPr>
-              <a:t>e</a:t>
+              <a:t>Click to edit Master title style</a:t>
             </a:r>
             <a:endParaRPr lang="en-US" sz="3200" b="0" u="none" strike="noStrike">
               <a:solidFill>
@@ -4068,7 +5207,7 @@
       </p:sp>
       <p:sp>
         <p:nvSpPr>
-          <p:cNvPr id="35" name="PlaceHolder 2"/>
+          <p:cNvPr id="53" name="PlaceHolder 2"/>
           <p:cNvSpPr>
             <a:spLocks noGrp="1"/>
           </p:cNvSpPr>
@@ -4079,7 +5218,7 @@
         <p:spPr>
           <a:xfrm>
             <a:off x="5183640" y="987480"/>
-            <a:ext cx="6158880" cy="4860360"/>
+            <a:ext cx="6158520" cy="4860000"/>
           </a:xfrm>
           <a:prstGeom prst="rect">
             <a:avLst/>
@@ -4272,7 +5411,7 @@
       </p:sp>
       <p:sp>
         <p:nvSpPr>
-          <p:cNvPr id="36" name="PlaceHolder 3"/>
+          <p:cNvPr id="54" name="PlaceHolder 3"/>
           <p:cNvSpPr>
             <a:spLocks noGrp="1"/>
           </p:cNvSpPr>
@@ -4283,7 +5422,7 @@
         <p:spPr>
           <a:xfrm>
             <a:off x="840240" y="2057400"/>
-            <a:ext cx="3919320" cy="3798360"/>
+            <a:ext cx="3918960" cy="3798000"/>
           </a:xfrm>
           <a:prstGeom prst="rect">
             <a:avLst/>
@@ -4335,1889 +5474,7 @@
       </p:sp>
       <p:sp>
         <p:nvSpPr>
-          <p:cNvPr id="37" name="PlaceHolder 4"/>
-          <p:cNvSpPr>
-            <a:spLocks noGrp="1"/>
-          </p:cNvSpPr>
-          <p:nvPr>
-            <p:ph type="dt" idx="16"/>
-          </p:nvPr>
-        </p:nvSpPr>
-        <p:spPr>
-          <a:xfrm>
-            <a:off x="609480" y="6245280"/>
-            <a:ext cx="2831400" cy="462960"/>
-          </a:xfrm>
-          <a:prstGeom prst="rect">
-            <a:avLst/>
-          </a:prstGeom>
-          <a:noFill/>
-          <a:ln w="0">
-            <a:noFill/>
-          </a:ln>
-        </p:spPr>
-        <p:txBody>
-          <a:bodyPr numCol="1" spcCol="0" lIns="91440" rIns="91440" tIns="45720" bIns="45720" anchor="t">
-            <a:noAutofit/>
-          </a:bodyPr>
-          <a:lstStyle>
-            <a:lvl1pPr indent="0" defTabSz="914400">
-              <a:lnSpc>
-                <a:spcPct val="100000"/>
-              </a:lnSpc>
-              <a:buNone/>
-              <a:tabLst>
-                <a:tab algn="l" pos="0"/>
-              </a:tabLst>
-              <a:defRPr lang="en-US" sz="1400" b="0" u="none" strike="noStrike">
-                <a:solidFill>
-                  <a:srgbClr val="000000"/>
-                </a:solidFill>
-                <a:effectLst/>
-                <a:uFillTx/>
-                <a:latin typeface="Times New Roman"/>
-                <a:ea typeface="SimSun"/>
-              </a:defRPr>
-            </a:lvl1pPr>
-          </a:lstStyle>
-          <a:p>
-            <a:pPr indent="0" defTabSz="914400">
-              <a:lnSpc>
-                <a:spcPct val="100000"/>
-              </a:lnSpc>
-              <a:buNone/>
-              <a:tabLst>
-                <a:tab algn="l" pos="0"/>
-              </a:tabLst>
-            </a:pPr>
-            <a:r>
-              <a:rPr lang="en-US" sz="1400" b="0" u="none" strike="noStrike">
-                <a:solidFill>
-                  <a:srgbClr val="000000"/>
-                </a:solidFill>
-                <a:effectLst/>
-                <a:uFillTx/>
-                <a:latin typeface="Times New Roman"/>
-                <a:ea typeface="SimSun"/>
-              </a:rPr>
-              <a:t>&lt;date/time&gt;</a:t>
-            </a:r>
-            <a:endParaRPr lang="en-US" sz="1400" b="0" u="none" strike="noStrike">
-              <a:solidFill>
-                <a:srgbClr val="000000"/>
-              </a:solidFill>
-              <a:effectLst/>
-              <a:uFillTx/>
-              <a:latin typeface="Times New Roman"/>
-            </a:endParaRPr>
-          </a:p>
-        </p:txBody>
-      </p:sp>
-      <p:sp>
-        <p:nvSpPr>
-          <p:cNvPr id="38" name="PlaceHolder 5"/>
-          <p:cNvSpPr>
-            <a:spLocks noGrp="1"/>
-          </p:cNvSpPr>
-          <p:nvPr>
-            <p:ph type="ftr" idx="17"/>
-          </p:nvPr>
-        </p:nvSpPr>
-        <p:spPr>
-          <a:xfrm>
-            <a:off x="4165560" y="6245280"/>
-            <a:ext cx="3847320" cy="462960"/>
-          </a:xfrm>
-          <a:prstGeom prst="rect">
-            <a:avLst/>
-          </a:prstGeom>
-          <a:noFill/>
-          <a:ln w="0">
-            <a:noFill/>
-          </a:ln>
-        </p:spPr>
-        <p:txBody>
-          <a:bodyPr numCol="1" spcCol="0" lIns="91440" rIns="91440" tIns="45720" bIns="45720" anchor="t">
-            <a:noAutofit/>
-          </a:bodyPr>
-          <a:lstStyle>
-            <a:lvl1pPr indent="0" algn="ctr" defTabSz="914400">
-              <a:lnSpc>
-                <a:spcPct val="100000"/>
-              </a:lnSpc>
-              <a:buNone/>
-              <a:tabLst>
-                <a:tab algn="l" pos="0"/>
-              </a:tabLst>
-              <a:defRPr lang="en-US" sz="1400" b="0" u="none" strike="noStrike">
-                <a:solidFill>
-                  <a:srgbClr val="000000"/>
-                </a:solidFill>
-                <a:effectLst/>
-                <a:uFillTx/>
-                <a:latin typeface="Times New Roman"/>
-                <a:ea typeface="SimSun"/>
-              </a:defRPr>
-            </a:lvl1pPr>
-          </a:lstStyle>
-          <a:p>
-            <a:pPr indent="0" algn="ctr" defTabSz="914400">
-              <a:lnSpc>
-                <a:spcPct val="100000"/>
-              </a:lnSpc>
-              <a:buNone/>
-              <a:tabLst>
-                <a:tab algn="l" pos="0"/>
-              </a:tabLst>
-            </a:pPr>
-            <a:r>
-              <a:rPr lang="en-US" sz="1400" b="0" u="none" strike="noStrike">
-                <a:solidFill>
-                  <a:srgbClr val="000000"/>
-                </a:solidFill>
-                <a:effectLst/>
-                <a:uFillTx/>
-                <a:latin typeface="Times New Roman"/>
-                <a:ea typeface="SimSun"/>
-              </a:rPr>
-              <a:t>&lt;footer&gt;</a:t>
-            </a:r>
-            <a:endParaRPr lang="en-US" sz="1400" b="0" u="none" strike="noStrike">
-              <a:solidFill>
-                <a:srgbClr val="000000"/>
-              </a:solidFill>
-              <a:effectLst/>
-              <a:uFillTx/>
-              <a:latin typeface="Times New Roman"/>
-            </a:endParaRPr>
-          </a:p>
-        </p:txBody>
-      </p:sp>
-      <p:sp>
-        <p:nvSpPr>
-          <p:cNvPr id="39" name="PlaceHolder 6"/>
-          <p:cNvSpPr>
-            <a:spLocks noGrp="1"/>
-          </p:cNvSpPr>
-          <p:nvPr>
-            <p:ph type="sldNum" idx="18"/>
-          </p:nvPr>
-        </p:nvSpPr>
-        <p:spPr>
-          <a:xfrm>
-            <a:off x="8737560" y="6245280"/>
-            <a:ext cx="2831400" cy="462960"/>
-          </a:xfrm>
-          <a:prstGeom prst="rect">
-            <a:avLst/>
-          </a:prstGeom>
-          <a:noFill/>
-          <a:ln w="0">
-            <a:noFill/>
-          </a:ln>
-        </p:spPr>
-        <p:txBody>
-          <a:bodyPr numCol="1" spcCol="0" lIns="91440" rIns="91440" tIns="45720" bIns="45720" anchor="t">
-            <a:noAutofit/>
-          </a:bodyPr>
-          <a:p>
-            <a:pPr indent="0">
-              <a:buNone/>
-            </a:pPr>
-            <a:endParaRPr lang="en-US" sz="1800" b="0" u="none" strike="noStrike">
-              <a:solidFill>
-                <a:srgbClr val="000000"/>
-              </a:solidFill>
-              <a:effectLst/>
-              <a:uFillTx/>
-              <a:latin typeface="Times New Roman"/>
-            </a:endParaRPr>
-          </a:p>
-        </p:txBody>
-      </p:sp>
-    </p:spTree>
-  </p:cSld>
-</p:sldLayout>
-</file>
-
-<file path=ppt/slideLayouts/slideLayout7.xml><?xml version="1.0" encoding="utf-8"?>
-<p:sldLayout xmlns:a="http://schemas.openxmlformats.org/drawingml/2006/main" xmlns:p="http://schemas.openxmlformats.org/presentationml/2006/main" xmlns:r="http://schemas.openxmlformats.org/officeDocument/2006/relationships" xmlns:p14="http://schemas.microsoft.com/office/powerpoint/2010/main" xmlns:p15="http://schemas.microsoft.com/office/powerpoint/2012/main" xmlns:mc="http://schemas.openxmlformats.org/markup-compatibility/2006" type="blank" preserve="1">
-  <p:cSld name="Picture with Caption">
-    <p:bg>
-      <p:bgPr>
-        <a:solidFill>
-          <a:srgbClr val="ffffff"/>
-        </a:solidFill>
-      </p:bgPr>
-    </p:bg>
-    <p:spTree>
-      <p:nvGrpSpPr>
-        <p:cNvPr id="1" name=""/>
-        <p:cNvGrpSpPr/>
-        <p:nvPr/>
-      </p:nvGrpSpPr>
-      <p:grpSpPr>
-        <a:xfrm>
-          <a:off x="0" y="0"/>
-          <a:ext cx="0" cy="0"/>
-          <a:chOff x="0" y="0"/>
-          <a:chExt cx="0" cy="0"/>
-        </a:xfrm>
-      </p:grpSpPr>
-      <p:pic>
-        <p:nvPicPr>
-          <p:cNvPr id="40" name="Picture 10"/>
-          <p:cNvPicPr/>
-          <p:nvPr/>
-        </p:nvPicPr>
-        <p:blipFill>
-          <a:blip r:embed="rId2"/>
-          <a:stretch/>
-        </p:blipFill>
-        <p:spPr>
-          <a:xfrm>
-            <a:off x="0" y="0"/>
-            <a:ext cx="12178800" cy="6844680"/>
-          </a:xfrm>
-          <a:prstGeom prst="rect">
-            <a:avLst/>
-          </a:prstGeom>
-          <a:noFill/>
-          <a:ln w="9525">
-            <a:noFill/>
-          </a:ln>
-        </p:spPr>
-      </p:pic>
-      <p:sp>
-        <p:nvSpPr>
-          <p:cNvPr id="41" name="PlaceHolder 1"/>
-          <p:cNvSpPr>
-            <a:spLocks noGrp="1"/>
-          </p:cNvSpPr>
-          <p:nvPr>
-            <p:ph type="title"/>
-          </p:nvPr>
-        </p:nvSpPr>
-        <p:spPr>
-          <a:xfrm>
-            <a:off x="840240" y="457200"/>
-            <a:ext cx="3919320" cy="1586880"/>
-          </a:xfrm>
-          <a:prstGeom prst="rect">
-            <a:avLst/>
-          </a:prstGeom>
-          <a:noFill/>
-          <a:ln w="9360">
-            <a:noFill/>
-          </a:ln>
-        </p:spPr>
-        <p:txBody>
-          <a:bodyPr lIns="90000" rIns="90000" tIns="45000" bIns="45000" anchor="b">
-            <a:noAutofit/>
-          </a:bodyPr>
-          <a:p>
-            <a:pPr indent="0">
-              <a:lnSpc>
-                <a:spcPct val="100000"/>
-              </a:lnSpc>
-              <a:buNone/>
-              <a:tabLst>
-                <a:tab algn="l" pos="0"/>
-              </a:tabLst>
-            </a:pPr>
-            <a:r>
-              <a:rPr lang="en-US" sz="3200" b="0" u="none" strike="noStrike">
-                <a:solidFill>
-                  <a:schemeClr val="dk1"/>
-                </a:solidFill>
-                <a:effectLst/>
-                <a:uFillTx/>
-                <a:latin typeface="Arial"/>
-                <a:ea typeface="SimSun"/>
-              </a:rPr>
-              <a:t>Click to edit Master title style</a:t>
-            </a:r>
-            <a:endParaRPr lang="en-US" sz="3200" b="0" u="none" strike="noStrike">
-              <a:solidFill>
-                <a:srgbClr val="000000"/>
-              </a:solidFill>
-              <a:effectLst/>
-              <a:uFillTx/>
-              <a:latin typeface="Arial"/>
-            </a:endParaRPr>
-          </a:p>
-        </p:txBody>
-      </p:sp>
-      <p:sp>
-        <p:nvSpPr>
-          <p:cNvPr id="42" name="PlaceHolder 2"/>
-          <p:cNvSpPr>
-            <a:spLocks noGrp="1"/>
-          </p:cNvSpPr>
-          <p:nvPr>
-            <p:ph type="body"/>
-          </p:nvPr>
-        </p:nvSpPr>
-        <p:spPr>
-          <a:xfrm>
-            <a:off x="5183640" y="987480"/>
-            <a:ext cx="6158880" cy="4860360"/>
-          </a:xfrm>
-          <a:prstGeom prst="rect">
-            <a:avLst/>
-          </a:prstGeom>
-          <a:noFill/>
-          <a:ln w="0">
-            <a:noFill/>
-          </a:ln>
-        </p:spPr>
-        <p:txBody>
-          <a:bodyPr numCol="1" spcCol="0" lIns="91440" rIns="91440" tIns="45720" bIns="45720" anchor="t">
-            <a:noAutofit/>
-          </a:bodyPr>
-          <a:p>
-            <a:pPr marL="431640" indent="-324000">
-              <a:lnSpc>
-                <a:spcPct val="100000"/>
-              </a:lnSpc>
-              <a:spcBef>
-                <a:spcPts val="1414"/>
-              </a:spcBef>
-              <a:buClr>
-                <a:srgbClr val="000000"/>
-              </a:buClr>
-              <a:buSzPct val="45000"/>
-              <a:buFont typeface="Wingdings" charset="2"/>
-              <a:buChar char=""/>
-            </a:pPr>
-            <a:r>
-              <a:rPr lang="en-US" sz="3200" b="0" u="none" strike="noStrike">
-                <a:solidFill>
-                  <a:schemeClr val="dk1"/>
-                </a:solidFill>
-                <a:effectLst/>
-                <a:uFillTx/>
-                <a:latin typeface="Arial"/>
-              </a:rPr>
-              <a:t>Click to edit the outline text format</a:t>
-            </a:r>
-            <a:endParaRPr lang="en-US" sz="3200" b="0" u="none" strike="noStrike">
-              <a:solidFill>
-                <a:srgbClr val="000000"/>
-              </a:solidFill>
-              <a:effectLst/>
-              <a:uFillTx/>
-              <a:latin typeface="Arial"/>
-            </a:endParaRPr>
-          </a:p>
-          <a:p>
-            <a:pPr marL="864360" lvl="1" indent="-324000">
-              <a:lnSpc>
-                <a:spcPct val="100000"/>
-              </a:lnSpc>
-              <a:spcBef>
-                <a:spcPts val="1134"/>
-              </a:spcBef>
-              <a:buClr>
-                <a:srgbClr val="000000"/>
-              </a:buClr>
-              <a:buSzPct val="75000"/>
-              <a:buFont typeface="Symbol" charset="2"/>
-              <a:buChar char=""/>
-            </a:pPr>
-            <a:r>
-              <a:rPr lang="en-US" sz="3200" b="0" u="none" strike="noStrike">
-                <a:solidFill>
-                  <a:schemeClr val="dk1"/>
-                </a:solidFill>
-                <a:effectLst/>
-                <a:uFillTx/>
-                <a:latin typeface="Arial"/>
-              </a:rPr>
-              <a:t>Second Outline Level</a:t>
-            </a:r>
-            <a:endParaRPr lang="en-US" sz="3200" b="0" u="none" strike="noStrike">
-              <a:solidFill>
-                <a:srgbClr val="000000"/>
-              </a:solidFill>
-              <a:effectLst/>
-              <a:uFillTx/>
-              <a:latin typeface="Arial"/>
-            </a:endParaRPr>
-          </a:p>
-          <a:p>
-            <a:pPr marL="1296000" lvl="2" indent="-288360">
-              <a:lnSpc>
-                <a:spcPct val="100000"/>
-              </a:lnSpc>
-              <a:spcBef>
-                <a:spcPts val="850"/>
-              </a:spcBef>
-              <a:buClr>
-                <a:srgbClr val="000000"/>
-              </a:buClr>
-              <a:buSzPct val="45000"/>
-              <a:buFont typeface="Wingdings" charset="2"/>
-              <a:buChar char=""/>
-            </a:pPr>
-            <a:r>
-              <a:rPr lang="en-US" sz="3200" b="0" u="none" strike="noStrike">
-                <a:solidFill>
-                  <a:schemeClr val="dk1"/>
-                </a:solidFill>
-                <a:effectLst/>
-                <a:uFillTx/>
-                <a:latin typeface="Arial"/>
-              </a:rPr>
-              <a:t>Third Outline Level</a:t>
-            </a:r>
-            <a:endParaRPr lang="en-US" sz="3200" b="0" u="none" strike="noStrike">
-              <a:solidFill>
-                <a:srgbClr val="000000"/>
-              </a:solidFill>
-              <a:effectLst/>
-              <a:uFillTx/>
-              <a:latin typeface="Arial"/>
-            </a:endParaRPr>
-          </a:p>
-          <a:p>
-            <a:pPr marL="1728000" lvl="3" indent="-216000">
-              <a:lnSpc>
-                <a:spcPct val="100000"/>
-              </a:lnSpc>
-              <a:spcBef>
-                <a:spcPts val="564"/>
-              </a:spcBef>
-              <a:buClr>
-                <a:srgbClr val="000000"/>
-              </a:buClr>
-              <a:buSzPct val="75000"/>
-              <a:buFont typeface="Symbol" charset="2"/>
-              <a:buChar char=""/>
-            </a:pPr>
-            <a:r>
-              <a:rPr lang="en-US" sz="3200" b="0" u="none" strike="noStrike">
-                <a:solidFill>
-                  <a:schemeClr val="dk1"/>
-                </a:solidFill>
-                <a:effectLst/>
-                <a:uFillTx/>
-                <a:latin typeface="Arial"/>
-              </a:rPr>
-              <a:t>Fourth Outline Level</a:t>
-            </a:r>
-            <a:endParaRPr lang="en-US" sz="3200" b="0" u="none" strike="noStrike">
-              <a:solidFill>
-                <a:srgbClr val="000000"/>
-              </a:solidFill>
-              <a:effectLst/>
-              <a:uFillTx/>
-              <a:latin typeface="Arial"/>
-            </a:endParaRPr>
-          </a:p>
-          <a:p>
-            <a:pPr marL="2160360" lvl="4" indent="-216000">
-              <a:lnSpc>
-                <a:spcPct val="100000"/>
-              </a:lnSpc>
-              <a:spcBef>
-                <a:spcPts val="286"/>
-              </a:spcBef>
-              <a:buClr>
-                <a:srgbClr val="000000"/>
-              </a:buClr>
-              <a:buSzPct val="45000"/>
-              <a:buFont typeface="Wingdings" charset="2"/>
-              <a:buChar char=""/>
-            </a:pPr>
-            <a:r>
-              <a:rPr lang="en-US" sz="3200" b="0" u="none" strike="noStrike">
-                <a:solidFill>
-                  <a:schemeClr val="dk1"/>
-                </a:solidFill>
-                <a:effectLst/>
-                <a:uFillTx/>
-                <a:latin typeface="Arial"/>
-              </a:rPr>
-              <a:t>Fifth Outline Level</a:t>
-            </a:r>
-            <a:endParaRPr lang="en-US" sz="3200" b="0" u="none" strike="noStrike">
-              <a:solidFill>
-                <a:srgbClr val="000000"/>
-              </a:solidFill>
-              <a:effectLst/>
-              <a:uFillTx/>
-              <a:latin typeface="Arial"/>
-            </a:endParaRPr>
-          </a:p>
-          <a:p>
-            <a:pPr marL="2592000" lvl="5" indent="-216000">
-              <a:lnSpc>
-                <a:spcPct val="100000"/>
-              </a:lnSpc>
-              <a:spcBef>
-                <a:spcPts val="286"/>
-              </a:spcBef>
-              <a:buClr>
-                <a:srgbClr val="000000"/>
-              </a:buClr>
-              <a:buSzPct val="45000"/>
-              <a:buFont typeface="Wingdings" charset="2"/>
-              <a:buChar char=""/>
-            </a:pPr>
-            <a:r>
-              <a:rPr lang="en-US" sz="3200" b="0" u="none" strike="noStrike">
-                <a:solidFill>
-                  <a:schemeClr val="dk1"/>
-                </a:solidFill>
-                <a:effectLst/>
-                <a:uFillTx/>
-                <a:latin typeface="Arial"/>
-              </a:rPr>
-              <a:t>Sixth Outline Level</a:t>
-            </a:r>
-            <a:endParaRPr lang="en-US" sz="3200" b="0" u="none" strike="noStrike">
-              <a:solidFill>
-                <a:srgbClr val="000000"/>
-              </a:solidFill>
-              <a:effectLst/>
-              <a:uFillTx/>
-              <a:latin typeface="Arial"/>
-            </a:endParaRPr>
-          </a:p>
-          <a:p>
-            <a:pPr marL="3024000" lvl="6" indent="-216000">
-              <a:lnSpc>
-                <a:spcPct val="100000"/>
-              </a:lnSpc>
-              <a:spcBef>
-                <a:spcPts val="286"/>
-              </a:spcBef>
-              <a:buClr>
-                <a:srgbClr val="000000"/>
-              </a:buClr>
-              <a:buSzPct val="45000"/>
-              <a:buFont typeface="Wingdings" charset="2"/>
-              <a:buChar char=""/>
-            </a:pPr>
-            <a:r>
-              <a:rPr lang="en-US" sz="3200" b="0" u="none" strike="noStrike">
-                <a:solidFill>
-                  <a:schemeClr val="dk1"/>
-                </a:solidFill>
-                <a:effectLst/>
-                <a:uFillTx/>
-                <a:latin typeface="Arial"/>
-              </a:rPr>
-              <a:t>Seventh Outline Level</a:t>
-            </a:r>
-            <a:endParaRPr lang="en-US" sz="3200" b="0" u="none" strike="noStrike">
-              <a:solidFill>
-                <a:srgbClr val="000000"/>
-              </a:solidFill>
-              <a:effectLst/>
-              <a:uFillTx/>
-              <a:latin typeface="Arial"/>
-            </a:endParaRPr>
-          </a:p>
-        </p:txBody>
-      </p:sp>
-      <p:sp>
-        <p:nvSpPr>
-          <p:cNvPr id="43" name="PlaceHolder 3"/>
-          <p:cNvSpPr>
-            <a:spLocks noGrp="1"/>
-          </p:cNvSpPr>
-          <p:nvPr>
-            <p:ph type="body"/>
-          </p:nvPr>
-        </p:nvSpPr>
-        <p:spPr>
-          <a:xfrm>
-            <a:off x="840240" y="2057400"/>
-            <a:ext cx="3919320" cy="3798360"/>
-          </a:xfrm>
-          <a:prstGeom prst="rect">
-            <a:avLst/>
-          </a:prstGeom>
-          <a:noFill/>
-          <a:ln w="9360">
-            <a:noFill/>
-          </a:ln>
-        </p:spPr>
-        <p:txBody>
-          <a:bodyPr lIns="90000" rIns="90000" tIns="45000" bIns="45000" anchor="t">
-            <a:noAutofit/>
-          </a:bodyPr>
-          <a:p>
-            <a:pPr indent="0">
-              <a:lnSpc>
-                <a:spcPct val="100000"/>
-              </a:lnSpc>
-              <a:spcBef>
-                <a:spcPts val="320"/>
-              </a:spcBef>
-              <a:buNone/>
-              <a:tabLst>
-                <a:tab algn="l" pos="0"/>
-              </a:tabLst>
-            </a:pPr>
-            <a:r>
-              <a:rPr lang="en-US" sz="1600" b="0" u="none" strike="noStrike">
-                <a:solidFill>
-                  <a:schemeClr val="dk1"/>
-                </a:solidFill>
-                <a:effectLst/>
-                <a:uFillTx/>
-                <a:latin typeface="Arial"/>
-                <a:ea typeface="SimSun"/>
-              </a:rPr>
-              <a:t>Click to edit Master text styles</a:t>
-            </a:r>
-            <a:endParaRPr lang="en-US" sz="1600" b="0" u="none" strike="noStrike">
-              <a:solidFill>
-                <a:srgbClr val="000000"/>
-              </a:solidFill>
-              <a:effectLst/>
-              <a:uFillTx/>
-              <a:latin typeface="Arial"/>
-            </a:endParaRPr>
-          </a:p>
-        </p:txBody>
-      </p:sp>
-      <p:sp>
-        <p:nvSpPr>
-          <p:cNvPr id="44" name="PlaceHolder 4"/>
-          <p:cNvSpPr>
-            <a:spLocks noGrp="1"/>
-          </p:cNvSpPr>
-          <p:nvPr>
-            <p:ph type="dt" idx="19"/>
-          </p:nvPr>
-        </p:nvSpPr>
-        <p:spPr>
-          <a:xfrm>
-            <a:off x="609480" y="6245280"/>
-            <a:ext cx="2831400" cy="462960"/>
-          </a:xfrm>
-          <a:prstGeom prst="rect">
-            <a:avLst/>
-          </a:prstGeom>
-          <a:noFill/>
-          <a:ln w="0">
-            <a:noFill/>
-          </a:ln>
-        </p:spPr>
-        <p:txBody>
-          <a:bodyPr numCol="1" spcCol="0" lIns="91440" rIns="91440" tIns="45720" bIns="45720" anchor="t">
-            <a:noAutofit/>
-          </a:bodyPr>
-          <a:lstStyle>
-            <a:lvl1pPr indent="0" defTabSz="914400">
-              <a:lnSpc>
-                <a:spcPct val="100000"/>
-              </a:lnSpc>
-              <a:buNone/>
-              <a:tabLst>
-                <a:tab algn="l" pos="0"/>
-              </a:tabLst>
-              <a:defRPr lang="en-US" sz="1400" b="0" u="none" strike="noStrike">
-                <a:solidFill>
-                  <a:srgbClr val="000000"/>
-                </a:solidFill>
-                <a:effectLst/>
-                <a:uFillTx/>
-                <a:latin typeface="Times New Roman"/>
-                <a:ea typeface="SimSun"/>
-              </a:defRPr>
-            </a:lvl1pPr>
-          </a:lstStyle>
-          <a:p>
-            <a:pPr indent="0" defTabSz="914400">
-              <a:lnSpc>
-                <a:spcPct val="100000"/>
-              </a:lnSpc>
-              <a:buNone/>
-              <a:tabLst>
-                <a:tab algn="l" pos="0"/>
-              </a:tabLst>
-            </a:pPr>
-            <a:r>
-              <a:rPr lang="en-US" sz="1400" b="0" u="none" strike="noStrike">
-                <a:solidFill>
-                  <a:srgbClr val="000000"/>
-                </a:solidFill>
-                <a:effectLst/>
-                <a:uFillTx/>
-                <a:latin typeface="Times New Roman"/>
-                <a:ea typeface="SimSun"/>
-              </a:rPr>
-              <a:t>&lt;date/time&gt;</a:t>
-            </a:r>
-            <a:endParaRPr lang="en-US" sz="1400" b="0" u="none" strike="noStrike">
-              <a:solidFill>
-                <a:srgbClr val="000000"/>
-              </a:solidFill>
-              <a:effectLst/>
-              <a:uFillTx/>
-              <a:latin typeface="Times New Roman"/>
-            </a:endParaRPr>
-          </a:p>
-        </p:txBody>
-      </p:sp>
-      <p:sp>
-        <p:nvSpPr>
-          <p:cNvPr id="45" name="PlaceHolder 5"/>
-          <p:cNvSpPr>
-            <a:spLocks noGrp="1"/>
-          </p:cNvSpPr>
-          <p:nvPr>
-            <p:ph type="ftr" idx="20"/>
-          </p:nvPr>
-        </p:nvSpPr>
-        <p:spPr>
-          <a:xfrm>
-            <a:off x="4165560" y="6245280"/>
-            <a:ext cx="3847320" cy="462960"/>
-          </a:xfrm>
-          <a:prstGeom prst="rect">
-            <a:avLst/>
-          </a:prstGeom>
-          <a:noFill/>
-          <a:ln w="0">
-            <a:noFill/>
-          </a:ln>
-        </p:spPr>
-        <p:txBody>
-          <a:bodyPr numCol="1" spcCol="0" lIns="91440" rIns="91440" tIns="45720" bIns="45720" anchor="t">
-            <a:noAutofit/>
-          </a:bodyPr>
-          <a:lstStyle>
-            <a:lvl1pPr indent="0" algn="ctr" defTabSz="914400">
-              <a:lnSpc>
-                <a:spcPct val="100000"/>
-              </a:lnSpc>
-              <a:buNone/>
-              <a:tabLst>
-                <a:tab algn="l" pos="0"/>
-              </a:tabLst>
-              <a:defRPr lang="en-US" sz="1400" b="0" u="none" strike="noStrike">
-                <a:solidFill>
-                  <a:srgbClr val="000000"/>
-                </a:solidFill>
-                <a:effectLst/>
-                <a:uFillTx/>
-                <a:latin typeface="Times New Roman"/>
-                <a:ea typeface="SimSun"/>
-              </a:defRPr>
-            </a:lvl1pPr>
-          </a:lstStyle>
-          <a:p>
-            <a:pPr indent="0" algn="ctr" defTabSz="914400">
-              <a:lnSpc>
-                <a:spcPct val="100000"/>
-              </a:lnSpc>
-              <a:buNone/>
-              <a:tabLst>
-                <a:tab algn="l" pos="0"/>
-              </a:tabLst>
-            </a:pPr>
-            <a:r>
-              <a:rPr lang="en-US" sz="1400" b="0" u="none" strike="noStrike">
-                <a:solidFill>
-                  <a:srgbClr val="000000"/>
-                </a:solidFill>
-                <a:effectLst/>
-                <a:uFillTx/>
-                <a:latin typeface="Times New Roman"/>
-                <a:ea typeface="SimSun"/>
-              </a:rPr>
-              <a:t>&lt;footer&gt;</a:t>
-            </a:r>
-            <a:endParaRPr lang="en-US" sz="1400" b="0" u="none" strike="noStrike">
-              <a:solidFill>
-                <a:srgbClr val="000000"/>
-              </a:solidFill>
-              <a:effectLst/>
-              <a:uFillTx/>
-              <a:latin typeface="Times New Roman"/>
-            </a:endParaRPr>
-          </a:p>
-        </p:txBody>
-      </p:sp>
-      <p:sp>
-        <p:nvSpPr>
-          <p:cNvPr id="46" name="PlaceHolder 6"/>
-          <p:cNvSpPr>
-            <a:spLocks noGrp="1"/>
-          </p:cNvSpPr>
-          <p:nvPr>
-            <p:ph type="sldNum" idx="21"/>
-          </p:nvPr>
-        </p:nvSpPr>
-        <p:spPr>
-          <a:xfrm>
-            <a:off x="8737560" y="6245280"/>
-            <a:ext cx="2831400" cy="462960"/>
-          </a:xfrm>
-          <a:prstGeom prst="rect">
-            <a:avLst/>
-          </a:prstGeom>
-          <a:noFill/>
-          <a:ln w="0">
-            <a:noFill/>
-          </a:ln>
-        </p:spPr>
-        <p:txBody>
-          <a:bodyPr numCol="1" spcCol="0" lIns="91440" rIns="91440" tIns="45720" bIns="45720" anchor="t">
-            <a:noAutofit/>
-          </a:bodyPr>
-          <a:p>
-            <a:pPr indent="0">
-              <a:buNone/>
-            </a:pPr>
-            <a:endParaRPr lang="en-US" sz="1800" b="0" u="none" strike="noStrike">
-              <a:solidFill>
-                <a:srgbClr val="000000"/>
-              </a:solidFill>
-              <a:effectLst/>
-              <a:uFillTx/>
-              <a:latin typeface="Times New Roman"/>
-            </a:endParaRPr>
-          </a:p>
-        </p:txBody>
-      </p:sp>
-    </p:spTree>
-  </p:cSld>
-</p:sldLayout>
-</file>
-
-<file path=ppt/slideLayouts/slideLayout8.xml><?xml version="1.0" encoding="utf-8"?>
-<p:sldLayout xmlns:a="http://schemas.openxmlformats.org/drawingml/2006/main" xmlns:p="http://schemas.openxmlformats.org/presentationml/2006/main" xmlns:r="http://schemas.openxmlformats.org/officeDocument/2006/relationships" xmlns:p14="http://schemas.microsoft.com/office/powerpoint/2010/main" xmlns:p15="http://schemas.microsoft.com/office/powerpoint/2012/main" xmlns:mc="http://schemas.openxmlformats.org/markup-compatibility/2006" type="title" preserve="1">
-  <p:cSld name="Title Slide">
-    <p:bg>
-      <p:bgPr>
-        <a:solidFill>
-          <a:srgbClr val="ffffff"/>
-        </a:solidFill>
-      </p:bgPr>
-    </p:bg>
-    <p:spTree>
-      <p:nvGrpSpPr>
-        <p:cNvPr id="1" name=""/>
-        <p:cNvGrpSpPr/>
-        <p:nvPr/>
-      </p:nvGrpSpPr>
-      <p:grpSpPr>
-        <a:xfrm>
-          <a:off x="0" y="0"/>
-          <a:ext cx="0" cy="0"/>
-          <a:chOff x="0" y="0"/>
-          <a:chExt cx="0" cy="0"/>
-        </a:xfrm>
-      </p:grpSpPr>
-      <p:pic>
-        <p:nvPicPr>
-          <p:cNvPr id="47" name="Picture 10" hidden="1"/>
-          <p:cNvPicPr/>
-          <p:nvPr/>
-        </p:nvPicPr>
-        <p:blipFill>
-          <a:blip r:embed="rId2"/>
-          <a:stretch/>
-        </p:blipFill>
-        <p:spPr>
-          <a:xfrm>
-            <a:off x="0" y="0"/>
-            <a:ext cx="12178800" cy="6844680"/>
-          </a:xfrm>
-          <a:prstGeom prst="rect">
-            <a:avLst/>
-          </a:prstGeom>
-          <a:noFill/>
-          <a:ln w="9525">
-            <a:noFill/>
-          </a:ln>
-        </p:spPr>
-      </p:pic>
-      <p:pic>
-        <p:nvPicPr>
-          <p:cNvPr id="48" name="Picture 3"/>
-          <p:cNvPicPr/>
-          <p:nvPr/>
-        </p:nvPicPr>
-        <p:blipFill>
-          <a:blip r:embed="rId3"/>
-          <a:stretch/>
-        </p:blipFill>
-        <p:spPr>
-          <a:xfrm>
-            <a:off x="0" y="0"/>
-            <a:ext cx="12178800" cy="6844680"/>
-          </a:xfrm>
-          <a:prstGeom prst="rect">
-            <a:avLst/>
-          </a:prstGeom>
-          <a:noFill/>
-          <a:ln w="9525">
-            <a:noFill/>
-          </a:ln>
-        </p:spPr>
-      </p:pic>
-      <p:sp>
-        <p:nvSpPr>
-          <p:cNvPr id="49" name="PlaceHolder 1"/>
-          <p:cNvSpPr>
-            <a:spLocks noGrp="1"/>
-          </p:cNvSpPr>
-          <p:nvPr>
-            <p:ph type="title"/>
-          </p:nvPr>
-        </p:nvSpPr>
-        <p:spPr>
-          <a:xfrm>
-            <a:off x="624240" y="3718080"/>
-            <a:ext cx="10929960" cy="1069200"/>
-          </a:xfrm>
-          <a:prstGeom prst="rect">
-            <a:avLst/>
-          </a:prstGeom>
-          <a:noFill/>
-          <a:ln w="9360">
-            <a:noFill/>
-          </a:ln>
-        </p:spPr>
-        <p:txBody>
-          <a:bodyPr lIns="90000" rIns="90000" tIns="45000" bIns="45000" anchor="ctr">
-            <a:noAutofit/>
-          </a:bodyPr>
-          <a:p>
-            <a:pPr indent="0" algn="r">
-              <a:lnSpc>
-                <a:spcPct val="100000"/>
-              </a:lnSpc>
-              <a:buNone/>
-              <a:tabLst>
-                <a:tab algn="l" pos="0"/>
-              </a:tabLst>
-            </a:pPr>
-            <a:r>
-              <a:rPr lang="en-US" sz="3600" b="0" u="none" strike="noStrike">
-                <a:solidFill>
-                  <a:schemeClr val="dk1"/>
-                </a:solidFill>
-                <a:effectLst/>
-                <a:uFillTx/>
-                <a:latin typeface="Arial"/>
-                <a:ea typeface="SimSun"/>
-              </a:rPr>
-              <a:t>Click to edit Master title style</a:t>
-            </a:r>
-            <a:endParaRPr lang="en-US" sz="3600" b="0" u="none" strike="noStrike">
-              <a:solidFill>
-                <a:srgbClr val="000000"/>
-              </a:solidFill>
-              <a:effectLst/>
-              <a:uFillTx/>
-              <a:latin typeface="Arial"/>
-            </a:endParaRPr>
-          </a:p>
-        </p:txBody>
-      </p:sp>
-      <p:sp>
-        <p:nvSpPr>
-          <p:cNvPr id="50" name="PlaceHolder 2"/>
-          <p:cNvSpPr>
-            <a:spLocks noGrp="1"/>
-          </p:cNvSpPr>
-          <p:nvPr>
-            <p:ph type="dt" idx="22"/>
-          </p:nvPr>
-        </p:nvSpPr>
-        <p:spPr>
-          <a:xfrm>
-            <a:off x="609480" y="6245280"/>
-            <a:ext cx="2831400" cy="462960"/>
-          </a:xfrm>
-          <a:prstGeom prst="rect">
-            <a:avLst/>
-          </a:prstGeom>
-          <a:noFill/>
-          <a:ln w="0">
-            <a:noFill/>
-          </a:ln>
-        </p:spPr>
-        <p:txBody>
-          <a:bodyPr numCol="1" spcCol="0" lIns="91440" rIns="91440" tIns="45720" bIns="45720" anchor="t">
-            <a:noAutofit/>
-          </a:bodyPr>
-          <a:lstStyle>
-            <a:lvl1pPr indent="0" defTabSz="914400">
-              <a:lnSpc>
-                <a:spcPct val="100000"/>
-              </a:lnSpc>
-              <a:buNone/>
-              <a:tabLst>
-                <a:tab algn="l" pos="0"/>
-              </a:tabLst>
-              <a:defRPr lang="en-US" sz="1400" b="0" u="none" strike="noStrike">
-                <a:solidFill>
-                  <a:srgbClr val="000000"/>
-                </a:solidFill>
-                <a:effectLst/>
-                <a:uFillTx/>
-                <a:latin typeface="Times New Roman"/>
-                <a:ea typeface="SimSun"/>
-              </a:defRPr>
-            </a:lvl1pPr>
-          </a:lstStyle>
-          <a:p>
-            <a:pPr indent="0" defTabSz="914400">
-              <a:lnSpc>
-                <a:spcPct val="100000"/>
-              </a:lnSpc>
-              <a:buNone/>
-              <a:tabLst>
-                <a:tab algn="l" pos="0"/>
-              </a:tabLst>
-            </a:pPr>
-            <a:r>
-              <a:rPr lang="en-US" sz="1400" b="0" u="none" strike="noStrike">
-                <a:solidFill>
-                  <a:srgbClr val="000000"/>
-                </a:solidFill>
-                <a:effectLst/>
-                <a:uFillTx/>
-                <a:latin typeface="Times New Roman"/>
-                <a:ea typeface="SimSun"/>
-              </a:rPr>
-              <a:t>&lt;date/time&gt;</a:t>
-            </a:r>
-            <a:endParaRPr lang="en-US" sz="1400" b="0" u="none" strike="noStrike">
-              <a:solidFill>
-                <a:srgbClr val="000000"/>
-              </a:solidFill>
-              <a:effectLst/>
-              <a:uFillTx/>
-              <a:latin typeface="Times New Roman"/>
-            </a:endParaRPr>
-          </a:p>
-        </p:txBody>
-      </p:sp>
-      <p:sp>
-        <p:nvSpPr>
-          <p:cNvPr id="51" name="PlaceHolder 3"/>
-          <p:cNvSpPr>
-            <a:spLocks noGrp="1"/>
-          </p:cNvSpPr>
-          <p:nvPr>
-            <p:ph type="ftr" idx="23"/>
-          </p:nvPr>
-        </p:nvSpPr>
-        <p:spPr>
-          <a:xfrm>
-            <a:off x="4165560" y="6245280"/>
-            <a:ext cx="3847320" cy="462960"/>
-          </a:xfrm>
-          <a:prstGeom prst="rect">
-            <a:avLst/>
-          </a:prstGeom>
-          <a:noFill/>
-          <a:ln w="0">
-            <a:noFill/>
-          </a:ln>
-        </p:spPr>
-        <p:txBody>
-          <a:bodyPr numCol="1" spcCol="0" lIns="91440" rIns="91440" tIns="45720" bIns="45720" anchor="t">
-            <a:noAutofit/>
-          </a:bodyPr>
-          <a:lstStyle>
-            <a:lvl1pPr indent="0" algn="ctr" defTabSz="914400">
-              <a:lnSpc>
-                <a:spcPct val="100000"/>
-              </a:lnSpc>
-              <a:buNone/>
-              <a:tabLst>
-                <a:tab algn="l" pos="0"/>
-              </a:tabLst>
-              <a:defRPr lang="en-US" sz="1400" b="0" u="none" strike="noStrike">
-                <a:solidFill>
-                  <a:srgbClr val="000000"/>
-                </a:solidFill>
-                <a:effectLst/>
-                <a:uFillTx/>
-                <a:latin typeface="Times New Roman"/>
-                <a:ea typeface="SimSun"/>
-              </a:defRPr>
-            </a:lvl1pPr>
-          </a:lstStyle>
-          <a:p>
-            <a:pPr indent="0" algn="ctr" defTabSz="914400">
-              <a:lnSpc>
-                <a:spcPct val="100000"/>
-              </a:lnSpc>
-              <a:buNone/>
-              <a:tabLst>
-                <a:tab algn="l" pos="0"/>
-              </a:tabLst>
-            </a:pPr>
-            <a:r>
-              <a:rPr lang="en-US" sz="1400" b="0" u="none" strike="noStrike">
-                <a:solidFill>
-                  <a:srgbClr val="000000"/>
-                </a:solidFill>
-                <a:effectLst/>
-                <a:uFillTx/>
-                <a:latin typeface="Times New Roman"/>
-                <a:ea typeface="SimSun"/>
-              </a:rPr>
-              <a:t>&lt;footer&gt;</a:t>
-            </a:r>
-            <a:endParaRPr lang="en-US" sz="1400" b="0" u="none" strike="noStrike">
-              <a:solidFill>
-                <a:srgbClr val="000000"/>
-              </a:solidFill>
-              <a:effectLst/>
-              <a:uFillTx/>
-              <a:latin typeface="Times New Roman"/>
-            </a:endParaRPr>
-          </a:p>
-        </p:txBody>
-      </p:sp>
-      <p:sp>
-        <p:nvSpPr>
-          <p:cNvPr id="52" name="PlaceHolder 4"/>
-          <p:cNvSpPr>
-            <a:spLocks noGrp="1"/>
-          </p:cNvSpPr>
-          <p:nvPr>
-            <p:ph type="sldNum" idx="24"/>
-          </p:nvPr>
-        </p:nvSpPr>
-        <p:spPr>
-          <a:xfrm>
-            <a:off x="8737560" y="6245280"/>
-            <a:ext cx="2831400" cy="462960"/>
-          </a:xfrm>
-          <a:prstGeom prst="rect">
-            <a:avLst/>
-          </a:prstGeom>
-          <a:noFill/>
-          <a:ln w="0">
-            <a:noFill/>
-          </a:ln>
-        </p:spPr>
-        <p:txBody>
-          <a:bodyPr numCol="1" spcCol="0" lIns="91440" rIns="91440" tIns="45720" bIns="45720" anchor="t">
-            <a:noAutofit/>
-          </a:bodyPr>
-          <a:p>
-            <a:pPr indent="0">
-              <a:buNone/>
-            </a:pPr>
-            <a:endParaRPr lang="en-US" sz="1800" b="0" u="none" strike="noStrike">
-              <a:solidFill>
-                <a:srgbClr val="000000"/>
-              </a:solidFill>
-              <a:effectLst/>
-              <a:uFillTx/>
-              <a:latin typeface="Times New Roman"/>
-            </a:endParaRPr>
-          </a:p>
-        </p:txBody>
-      </p:sp>
-    </p:spTree>
-  </p:cSld>
-</p:sldLayout>
-</file>
-
-<file path=ppt/slideLayouts/slideLayout9.xml><?xml version="1.0" encoding="utf-8"?>
-<p:sldLayout xmlns:a="http://schemas.openxmlformats.org/drawingml/2006/main" xmlns:p="http://schemas.openxmlformats.org/presentationml/2006/main" xmlns:r="http://schemas.openxmlformats.org/officeDocument/2006/relationships" xmlns:p14="http://schemas.microsoft.com/office/powerpoint/2010/main" xmlns:p15="http://schemas.microsoft.com/office/powerpoint/2012/main" xmlns:mc="http://schemas.openxmlformats.org/markup-compatibility/2006" type="vertTx" preserve="1">
-  <p:cSld name="Title and Vertical Text">
-    <p:bg>
-      <p:bgPr>
-        <a:solidFill>
-          <a:srgbClr val="ffffff"/>
-        </a:solidFill>
-      </p:bgPr>
-    </p:bg>
-    <p:spTree>
-      <p:nvGrpSpPr>
-        <p:cNvPr id="1" name=""/>
-        <p:cNvGrpSpPr/>
-        <p:nvPr/>
-      </p:nvGrpSpPr>
-      <p:grpSpPr>
-        <a:xfrm>
-          <a:off x="0" y="0"/>
-          <a:ext cx="0" cy="0"/>
-          <a:chOff x="0" y="0"/>
-          <a:chExt cx="0" cy="0"/>
-        </a:xfrm>
-      </p:grpSpPr>
-      <p:pic>
-        <p:nvPicPr>
-          <p:cNvPr id="53" name="Picture 10"/>
-          <p:cNvPicPr/>
-          <p:nvPr/>
-        </p:nvPicPr>
-        <p:blipFill>
-          <a:blip r:embed="rId2"/>
-          <a:stretch/>
-        </p:blipFill>
-        <p:spPr>
-          <a:xfrm>
-            <a:off x="0" y="0"/>
-            <a:ext cx="12178800" cy="6844680"/>
-          </a:xfrm>
-          <a:prstGeom prst="rect">
-            <a:avLst/>
-          </a:prstGeom>
-          <a:noFill/>
-          <a:ln w="9525">
-            <a:noFill/>
-          </a:ln>
-        </p:spPr>
-      </p:pic>
-      <p:sp>
-        <p:nvSpPr>
-          <p:cNvPr id="54" name="PlaceHolder 1"/>
-          <p:cNvSpPr>
-            <a:spLocks noGrp="1"/>
-          </p:cNvSpPr>
-          <p:nvPr>
-            <p:ph type="title"/>
-          </p:nvPr>
-        </p:nvSpPr>
-        <p:spPr>
-          <a:xfrm>
-            <a:off x="609480" y="190440"/>
-            <a:ext cx="10959480" cy="569160"/>
-          </a:xfrm>
-          <a:prstGeom prst="rect">
-            <a:avLst/>
-          </a:prstGeom>
-          <a:noFill/>
-          <a:ln w="9360">
-            <a:noFill/>
-          </a:ln>
-        </p:spPr>
-        <p:txBody>
-          <a:bodyPr lIns="90000" rIns="90000" tIns="45000" bIns="45000" anchor="ctr">
-            <a:noAutofit/>
-          </a:bodyPr>
-          <a:p>
-            <a:pPr indent="0">
-              <a:lnSpc>
-                <a:spcPct val="100000"/>
-              </a:lnSpc>
-              <a:buNone/>
-              <a:tabLst>
-                <a:tab algn="l" pos="0"/>
-              </a:tabLst>
-            </a:pPr>
-            <a:r>
-              <a:rPr lang="en-US" sz="3600" b="0" u="none" strike="noStrike">
-                <a:solidFill>
-                  <a:schemeClr val="dk1"/>
-                </a:solidFill>
-                <a:effectLst/>
-                <a:uFillTx/>
-                <a:latin typeface="Arial"/>
-                <a:ea typeface="SimSun"/>
-              </a:rPr>
-              <a:t>C</a:t>
-            </a:r>
-            <a:r>
-              <a:rPr lang="en-US" sz="3600" b="0" u="none" strike="noStrike">
-                <a:solidFill>
-                  <a:schemeClr val="dk1"/>
-                </a:solidFill>
-                <a:effectLst/>
-                <a:uFillTx/>
-                <a:latin typeface="Arial"/>
-                <a:ea typeface="SimSun"/>
-              </a:rPr>
-              <a:t>l</a:t>
-            </a:r>
-            <a:r>
-              <a:rPr lang="en-US" sz="3600" b="0" u="none" strike="noStrike">
-                <a:solidFill>
-                  <a:schemeClr val="dk1"/>
-                </a:solidFill>
-                <a:effectLst/>
-                <a:uFillTx/>
-                <a:latin typeface="Arial"/>
-                <a:ea typeface="SimSun"/>
-              </a:rPr>
-              <a:t>i</a:t>
-            </a:r>
-            <a:r>
-              <a:rPr lang="en-US" sz="3600" b="0" u="none" strike="noStrike">
-                <a:solidFill>
-                  <a:schemeClr val="dk1"/>
-                </a:solidFill>
-                <a:effectLst/>
-                <a:uFillTx/>
-                <a:latin typeface="Arial"/>
-                <a:ea typeface="SimSun"/>
-              </a:rPr>
-              <a:t>c</a:t>
-            </a:r>
-            <a:r>
-              <a:rPr lang="en-US" sz="3600" b="0" u="none" strike="noStrike">
-                <a:solidFill>
-                  <a:schemeClr val="dk1"/>
-                </a:solidFill>
-                <a:effectLst/>
-                <a:uFillTx/>
-                <a:latin typeface="Arial"/>
-                <a:ea typeface="SimSun"/>
-              </a:rPr>
-              <a:t>k</a:t>
-            </a:r>
-            <a:r>
-              <a:rPr lang="en-US" sz="3600" b="0" u="none" strike="noStrike">
-                <a:solidFill>
-                  <a:schemeClr val="dk1"/>
-                </a:solidFill>
-                <a:effectLst/>
-                <a:uFillTx/>
-                <a:latin typeface="Arial"/>
-                <a:ea typeface="SimSun"/>
-              </a:rPr>
-              <a:t> </a:t>
-            </a:r>
-            <a:r>
-              <a:rPr lang="en-US" sz="3600" b="0" u="none" strike="noStrike">
-                <a:solidFill>
-                  <a:schemeClr val="dk1"/>
-                </a:solidFill>
-                <a:effectLst/>
-                <a:uFillTx/>
-                <a:latin typeface="Arial"/>
-                <a:ea typeface="SimSun"/>
-              </a:rPr>
-              <a:t>t</a:t>
-            </a:r>
-            <a:r>
-              <a:rPr lang="en-US" sz="3600" b="0" u="none" strike="noStrike">
-                <a:solidFill>
-                  <a:schemeClr val="dk1"/>
-                </a:solidFill>
-                <a:effectLst/>
-                <a:uFillTx/>
-                <a:latin typeface="Arial"/>
-                <a:ea typeface="SimSun"/>
-              </a:rPr>
-              <a:t>o</a:t>
-            </a:r>
-            <a:r>
-              <a:rPr lang="en-US" sz="3600" b="0" u="none" strike="noStrike">
-                <a:solidFill>
-                  <a:schemeClr val="dk1"/>
-                </a:solidFill>
-                <a:effectLst/>
-                <a:uFillTx/>
-                <a:latin typeface="Arial"/>
-                <a:ea typeface="SimSun"/>
-              </a:rPr>
-              <a:t> </a:t>
-            </a:r>
-            <a:r>
-              <a:rPr lang="en-US" sz="3600" b="0" u="none" strike="noStrike">
-                <a:solidFill>
-                  <a:schemeClr val="dk1"/>
-                </a:solidFill>
-                <a:effectLst/>
-                <a:uFillTx/>
-                <a:latin typeface="Arial"/>
-                <a:ea typeface="SimSun"/>
-              </a:rPr>
-              <a:t>e</a:t>
-            </a:r>
-            <a:r>
-              <a:rPr lang="en-US" sz="3600" b="0" u="none" strike="noStrike">
-                <a:solidFill>
-                  <a:schemeClr val="dk1"/>
-                </a:solidFill>
-                <a:effectLst/>
-                <a:uFillTx/>
-                <a:latin typeface="Arial"/>
-                <a:ea typeface="SimSun"/>
-              </a:rPr>
-              <a:t>d</a:t>
-            </a:r>
-            <a:r>
-              <a:rPr lang="en-US" sz="3600" b="0" u="none" strike="noStrike">
-                <a:solidFill>
-                  <a:schemeClr val="dk1"/>
-                </a:solidFill>
-                <a:effectLst/>
-                <a:uFillTx/>
-                <a:latin typeface="Arial"/>
-                <a:ea typeface="SimSun"/>
-              </a:rPr>
-              <a:t>i</a:t>
-            </a:r>
-            <a:r>
-              <a:rPr lang="en-US" sz="3600" b="0" u="none" strike="noStrike">
-                <a:solidFill>
-                  <a:schemeClr val="dk1"/>
-                </a:solidFill>
-                <a:effectLst/>
-                <a:uFillTx/>
-                <a:latin typeface="Arial"/>
-                <a:ea typeface="SimSun"/>
-              </a:rPr>
-              <a:t>t</a:t>
-            </a:r>
-            <a:r>
-              <a:rPr lang="en-US" sz="3600" b="0" u="none" strike="noStrike">
-                <a:solidFill>
-                  <a:schemeClr val="dk1"/>
-                </a:solidFill>
-                <a:effectLst/>
-                <a:uFillTx/>
-                <a:latin typeface="Arial"/>
-                <a:ea typeface="SimSun"/>
-              </a:rPr>
-              <a:t> </a:t>
-            </a:r>
-            <a:r>
-              <a:rPr lang="en-US" sz="3600" b="0" u="none" strike="noStrike">
-                <a:solidFill>
-                  <a:schemeClr val="dk1"/>
-                </a:solidFill>
-                <a:effectLst/>
-                <a:uFillTx/>
-                <a:latin typeface="Arial"/>
-                <a:ea typeface="SimSun"/>
-              </a:rPr>
-              <a:t>M</a:t>
-            </a:r>
-            <a:r>
-              <a:rPr lang="en-US" sz="3600" b="0" u="none" strike="noStrike">
-                <a:solidFill>
-                  <a:schemeClr val="dk1"/>
-                </a:solidFill>
-                <a:effectLst/>
-                <a:uFillTx/>
-                <a:latin typeface="Arial"/>
-                <a:ea typeface="SimSun"/>
-              </a:rPr>
-              <a:t>a</a:t>
-            </a:r>
-            <a:r>
-              <a:rPr lang="en-US" sz="3600" b="0" u="none" strike="noStrike">
-                <a:solidFill>
-                  <a:schemeClr val="dk1"/>
-                </a:solidFill>
-                <a:effectLst/>
-                <a:uFillTx/>
-                <a:latin typeface="Arial"/>
-                <a:ea typeface="SimSun"/>
-              </a:rPr>
-              <a:t>s</a:t>
-            </a:r>
-            <a:r>
-              <a:rPr lang="en-US" sz="3600" b="0" u="none" strike="noStrike">
-                <a:solidFill>
-                  <a:schemeClr val="dk1"/>
-                </a:solidFill>
-                <a:effectLst/>
-                <a:uFillTx/>
-                <a:latin typeface="Arial"/>
-                <a:ea typeface="SimSun"/>
-              </a:rPr>
-              <a:t>t</a:t>
-            </a:r>
-            <a:r>
-              <a:rPr lang="en-US" sz="3600" b="0" u="none" strike="noStrike">
-                <a:solidFill>
-                  <a:schemeClr val="dk1"/>
-                </a:solidFill>
-                <a:effectLst/>
-                <a:uFillTx/>
-                <a:latin typeface="Arial"/>
-                <a:ea typeface="SimSun"/>
-              </a:rPr>
-              <a:t>e</a:t>
-            </a:r>
-            <a:r>
-              <a:rPr lang="en-US" sz="3600" b="0" u="none" strike="noStrike">
-                <a:solidFill>
-                  <a:schemeClr val="dk1"/>
-                </a:solidFill>
-                <a:effectLst/>
-                <a:uFillTx/>
-                <a:latin typeface="Arial"/>
-                <a:ea typeface="SimSun"/>
-              </a:rPr>
-              <a:t>r</a:t>
-            </a:r>
-            <a:r>
-              <a:rPr lang="en-US" sz="3600" b="0" u="none" strike="noStrike">
-                <a:solidFill>
-                  <a:schemeClr val="dk1"/>
-                </a:solidFill>
-                <a:effectLst/>
-                <a:uFillTx/>
-                <a:latin typeface="Arial"/>
-                <a:ea typeface="SimSun"/>
-              </a:rPr>
-              <a:t> </a:t>
-            </a:r>
-            <a:r>
-              <a:rPr lang="en-US" sz="3600" b="0" u="none" strike="noStrike">
-                <a:solidFill>
-                  <a:schemeClr val="dk1"/>
-                </a:solidFill>
-                <a:effectLst/>
-                <a:uFillTx/>
-                <a:latin typeface="Arial"/>
-                <a:ea typeface="SimSun"/>
-              </a:rPr>
-              <a:t>t</a:t>
-            </a:r>
-            <a:r>
-              <a:rPr lang="en-US" sz="3600" b="0" u="none" strike="noStrike">
-                <a:solidFill>
-                  <a:schemeClr val="dk1"/>
-                </a:solidFill>
-                <a:effectLst/>
-                <a:uFillTx/>
-                <a:latin typeface="Arial"/>
-                <a:ea typeface="SimSun"/>
-              </a:rPr>
-              <a:t>i</a:t>
-            </a:r>
-            <a:r>
-              <a:rPr lang="en-US" sz="3600" b="0" u="none" strike="noStrike">
-                <a:solidFill>
-                  <a:schemeClr val="dk1"/>
-                </a:solidFill>
-                <a:effectLst/>
-                <a:uFillTx/>
-                <a:latin typeface="Arial"/>
-                <a:ea typeface="SimSun"/>
-              </a:rPr>
-              <a:t>t</a:t>
-            </a:r>
-            <a:r>
-              <a:rPr lang="en-US" sz="3600" b="0" u="none" strike="noStrike">
-                <a:solidFill>
-                  <a:schemeClr val="dk1"/>
-                </a:solidFill>
-                <a:effectLst/>
-                <a:uFillTx/>
-                <a:latin typeface="Arial"/>
-                <a:ea typeface="SimSun"/>
-              </a:rPr>
-              <a:t>l</a:t>
-            </a:r>
-            <a:r>
-              <a:rPr lang="en-US" sz="3600" b="0" u="none" strike="noStrike">
-                <a:solidFill>
-                  <a:schemeClr val="dk1"/>
-                </a:solidFill>
-                <a:effectLst/>
-                <a:uFillTx/>
-                <a:latin typeface="Arial"/>
-                <a:ea typeface="SimSun"/>
-              </a:rPr>
-              <a:t>e</a:t>
-            </a:r>
-            <a:r>
-              <a:rPr lang="en-US" sz="3600" b="0" u="none" strike="noStrike">
-                <a:solidFill>
-                  <a:schemeClr val="dk1"/>
-                </a:solidFill>
-                <a:effectLst/>
-                <a:uFillTx/>
-                <a:latin typeface="Arial"/>
-                <a:ea typeface="SimSun"/>
-              </a:rPr>
-              <a:t> </a:t>
-            </a:r>
-            <a:r>
-              <a:rPr lang="en-US" sz="3600" b="0" u="none" strike="noStrike">
-                <a:solidFill>
-                  <a:schemeClr val="dk1"/>
-                </a:solidFill>
-                <a:effectLst/>
-                <a:uFillTx/>
-                <a:latin typeface="Arial"/>
-                <a:ea typeface="SimSun"/>
-              </a:rPr>
-              <a:t>s</a:t>
-            </a:r>
-            <a:r>
-              <a:rPr lang="en-US" sz="3600" b="0" u="none" strike="noStrike">
-                <a:solidFill>
-                  <a:schemeClr val="dk1"/>
-                </a:solidFill>
-                <a:effectLst/>
-                <a:uFillTx/>
-                <a:latin typeface="Arial"/>
-                <a:ea typeface="SimSun"/>
-              </a:rPr>
-              <a:t>t</a:t>
-            </a:r>
-            <a:r>
-              <a:rPr lang="en-US" sz="3600" b="0" u="none" strike="noStrike">
-                <a:solidFill>
-                  <a:schemeClr val="dk1"/>
-                </a:solidFill>
-                <a:effectLst/>
-                <a:uFillTx/>
-                <a:latin typeface="Arial"/>
-                <a:ea typeface="SimSun"/>
-              </a:rPr>
-              <a:t>y</a:t>
-            </a:r>
-            <a:r>
-              <a:rPr lang="en-US" sz="3600" b="0" u="none" strike="noStrike">
-                <a:solidFill>
-                  <a:schemeClr val="dk1"/>
-                </a:solidFill>
-                <a:effectLst/>
-                <a:uFillTx/>
-                <a:latin typeface="Arial"/>
-                <a:ea typeface="SimSun"/>
-              </a:rPr>
-              <a:t>l</a:t>
-            </a:r>
-            <a:r>
-              <a:rPr lang="en-US" sz="3600" b="0" u="none" strike="noStrike">
-                <a:solidFill>
-                  <a:schemeClr val="dk1"/>
-                </a:solidFill>
-                <a:effectLst/>
-                <a:uFillTx/>
-                <a:latin typeface="Arial"/>
-                <a:ea typeface="SimSun"/>
-              </a:rPr>
-              <a:t>e</a:t>
-            </a:r>
-            <a:endParaRPr lang="en-US" sz="3600" b="0" u="none" strike="noStrike">
-              <a:solidFill>
-                <a:srgbClr val="000000"/>
-              </a:solidFill>
-              <a:effectLst/>
-              <a:uFillTx/>
-              <a:latin typeface="Arial"/>
-            </a:endParaRPr>
-          </a:p>
-        </p:txBody>
-      </p:sp>
-      <p:sp>
-        <p:nvSpPr>
-          <p:cNvPr id="55" name="PlaceHolder 2"/>
-          <p:cNvSpPr>
-            <a:spLocks noGrp="1"/>
-          </p:cNvSpPr>
-          <p:nvPr>
-            <p:ph type="body"/>
-          </p:nvPr>
-        </p:nvSpPr>
-        <p:spPr>
-          <a:xfrm>
-            <a:off x="609480" y="1174680"/>
-            <a:ext cx="10959480" cy="4939560"/>
-          </a:xfrm>
-          <a:prstGeom prst="rect">
-            <a:avLst/>
-          </a:prstGeom>
-          <a:noFill/>
-          <a:ln w="9360">
-            <a:noFill/>
-          </a:ln>
-        </p:spPr>
-        <p:txBody>
-          <a:bodyPr lIns="45000" rIns="45000" tIns="90000" bIns="90000" anchor="t" vert="eaVert">
-            <a:noAutofit/>
-          </a:bodyPr>
-          <a:p>
-            <a:pPr marL="343080" indent="-343080">
-              <a:lnSpc>
-                <a:spcPct val="100000"/>
-              </a:lnSpc>
-              <a:spcBef>
-                <a:spcPts val="641"/>
-              </a:spcBef>
-              <a:buClr>
-                <a:srgbClr val="000000"/>
-              </a:buClr>
-              <a:buFont typeface="Symbol" charset="2"/>
-              <a:buChar char=""/>
-            </a:pPr>
-            <a:r>
-              <a:rPr lang="en-US" sz="3200" b="0" u="none" strike="noStrike">
-                <a:solidFill>
-                  <a:schemeClr val="dk1"/>
-                </a:solidFill>
-                <a:effectLst/>
-                <a:uFillTx/>
-                <a:latin typeface="Arial"/>
-                <a:ea typeface="SimSun"/>
-              </a:rPr>
-              <a:t>Click to edit Master text styles</a:t>
-            </a:r>
-            <a:endParaRPr lang="en-US" sz="3200" b="0" u="none" strike="noStrike">
-              <a:solidFill>
-                <a:srgbClr val="000000"/>
-              </a:solidFill>
-              <a:effectLst/>
-              <a:uFillTx/>
-              <a:latin typeface="Arial"/>
-            </a:endParaRPr>
-          </a:p>
-          <a:p>
-            <a:pPr marL="743040" lvl="1" indent="-285840">
-              <a:lnSpc>
-                <a:spcPct val="100000"/>
-              </a:lnSpc>
-              <a:spcBef>
-                <a:spcPts val="561"/>
-              </a:spcBef>
-              <a:buClr>
-                <a:srgbClr val="000000"/>
-              </a:buClr>
-              <a:buFont typeface="Symbol" charset="2"/>
-              <a:buChar char=""/>
-            </a:pPr>
-            <a:r>
-              <a:rPr lang="en-US" sz="2800" b="0" u="none" strike="noStrike">
-                <a:solidFill>
-                  <a:schemeClr val="dk1"/>
-                </a:solidFill>
-                <a:effectLst/>
-                <a:uFillTx/>
-                <a:latin typeface="Arial"/>
-                <a:ea typeface="SimSun"/>
-              </a:rPr>
-              <a:t>Second level</a:t>
-            </a:r>
-            <a:endParaRPr lang="en-US" sz="2800" b="0" u="none" strike="noStrike">
-              <a:solidFill>
-                <a:srgbClr val="000000"/>
-              </a:solidFill>
-              <a:effectLst/>
-              <a:uFillTx/>
-              <a:latin typeface="Arial"/>
-            </a:endParaRPr>
-          </a:p>
-          <a:p>
-            <a:pPr marL="1143000" lvl="2" indent="-228600">
-              <a:lnSpc>
-                <a:spcPct val="100000"/>
-              </a:lnSpc>
-              <a:spcBef>
-                <a:spcPts val="479"/>
-              </a:spcBef>
-              <a:buClr>
-                <a:srgbClr val="000000"/>
-              </a:buClr>
-              <a:buFont typeface="Symbol" charset="2"/>
-              <a:buChar char=""/>
-            </a:pPr>
-            <a:r>
-              <a:rPr lang="en-US" sz="2400" b="0" u="none" strike="noStrike">
-                <a:solidFill>
-                  <a:schemeClr val="dk1"/>
-                </a:solidFill>
-                <a:effectLst/>
-                <a:uFillTx/>
-                <a:latin typeface="Arial"/>
-                <a:ea typeface="SimSun"/>
-              </a:rPr>
-              <a:t>Third level</a:t>
-            </a:r>
-            <a:endParaRPr lang="en-US" sz="2400" b="0" u="none" strike="noStrike">
-              <a:solidFill>
-                <a:srgbClr val="000000"/>
-              </a:solidFill>
-              <a:effectLst/>
-              <a:uFillTx/>
-              <a:latin typeface="Arial"/>
-            </a:endParaRPr>
-          </a:p>
-          <a:p>
-            <a:pPr marL="1600200" lvl="3" indent="-228600">
-              <a:lnSpc>
-                <a:spcPct val="100000"/>
-              </a:lnSpc>
-              <a:spcBef>
-                <a:spcPts val="400"/>
-              </a:spcBef>
-              <a:buClr>
-                <a:srgbClr val="000000"/>
-              </a:buClr>
-              <a:buFont typeface="Symbol" charset="2"/>
-              <a:buChar char=""/>
-            </a:pPr>
-            <a:r>
-              <a:rPr lang="en-US" sz="2000" b="0" u="none" strike="noStrike">
-                <a:solidFill>
-                  <a:schemeClr val="dk1"/>
-                </a:solidFill>
-                <a:effectLst/>
-                <a:uFillTx/>
-                <a:latin typeface="Arial"/>
-                <a:ea typeface="SimSun"/>
-              </a:rPr>
-              <a:t>Fourth level</a:t>
-            </a:r>
-            <a:endParaRPr lang="en-US" sz="2000" b="0" u="none" strike="noStrike">
-              <a:solidFill>
-                <a:srgbClr val="000000"/>
-              </a:solidFill>
-              <a:effectLst/>
-              <a:uFillTx/>
-              <a:latin typeface="Arial"/>
-            </a:endParaRPr>
-          </a:p>
-          <a:p>
-            <a:pPr marL="2057400" lvl="4" indent="-228600">
-              <a:lnSpc>
-                <a:spcPct val="100000"/>
-              </a:lnSpc>
-              <a:spcBef>
-                <a:spcPts val="400"/>
-              </a:spcBef>
-              <a:buClr>
-                <a:srgbClr val="000000"/>
-              </a:buClr>
-              <a:buFont typeface="OpenSymbol"/>
-              <a:buChar char="»"/>
-            </a:pPr>
-            <a:r>
-              <a:rPr lang="en-US" sz="2000" b="0" u="none" strike="noStrike">
-                <a:solidFill>
-                  <a:schemeClr val="dk1"/>
-                </a:solidFill>
-                <a:effectLst/>
-                <a:uFillTx/>
-                <a:latin typeface="Arial"/>
-                <a:ea typeface="SimSun"/>
-              </a:rPr>
-              <a:t>Fifth level</a:t>
-            </a:r>
-            <a:endParaRPr lang="en-US" sz="2000" b="0" u="none" strike="noStrike">
-              <a:solidFill>
-                <a:srgbClr val="000000"/>
-              </a:solidFill>
-              <a:effectLst/>
-              <a:uFillTx/>
-              <a:latin typeface="Arial"/>
-            </a:endParaRPr>
-          </a:p>
-        </p:txBody>
-      </p:sp>
-      <p:sp>
-        <p:nvSpPr>
-          <p:cNvPr id="56" name="PlaceHolder 3"/>
+          <p:cNvPr id="55" name="PlaceHolder 4"/>
           <p:cNvSpPr>
             <a:spLocks noGrp="1"/>
           </p:cNvSpPr>
@@ -6228,7 +5485,7 @@
         <p:spPr>
           <a:xfrm>
             <a:off x="609480" y="6245280"/>
-            <a:ext cx="2831400" cy="462960"/>
+            <a:ext cx="2831040" cy="462600"/>
           </a:xfrm>
           <a:prstGeom prst="rect">
             <a:avLst/>
@@ -6297,7 +5554,7 @@
       </p:sp>
       <p:sp>
         <p:nvSpPr>
-          <p:cNvPr id="57" name="PlaceHolder 4"/>
+          <p:cNvPr id="56" name="PlaceHolder 5"/>
           <p:cNvSpPr>
             <a:spLocks noGrp="1"/>
           </p:cNvSpPr>
@@ -6308,7 +5565,7 @@
         <p:spPr>
           <a:xfrm>
             <a:off x="4165560" y="6245280"/>
-            <a:ext cx="3847320" cy="462960"/>
+            <a:ext cx="3846960" cy="462600"/>
           </a:xfrm>
           <a:prstGeom prst="rect">
             <a:avLst/>
@@ -6377,7 +5634,7 @@
       </p:sp>
       <p:sp>
         <p:nvSpPr>
-          <p:cNvPr id="58" name="PlaceHolder 5"/>
+          <p:cNvPr id="57" name="PlaceHolder 6"/>
           <p:cNvSpPr>
             <a:spLocks noGrp="1"/>
           </p:cNvSpPr>
@@ -6388,7 +5645,7 @@
         <p:spPr>
           <a:xfrm>
             <a:off x="8737560" y="6245280"/>
-            <a:ext cx="2831400" cy="462960"/>
+            <a:ext cx="2831040" cy="462600"/>
           </a:xfrm>
           <a:prstGeom prst="rect">
             <a:avLst/>
@@ -6488,7 +5745,7 @@
         <p:spPr>
           <a:xfrm>
             <a:off x="734760" y="1720800"/>
-            <a:ext cx="10325160" cy="2887200"/>
+            <a:ext cx="10324800" cy="2886840"/>
           </a:xfrm>
           <a:prstGeom prst="rect">
             <a:avLst/>
@@ -6633,8 +5890,8 @@
         </p:nvSpPr>
         <p:spPr>
           <a:xfrm>
-            <a:off x="609480" y="135360"/>
-            <a:ext cx="2583720" cy="680040"/>
+            <a:off x="609480" y="135000"/>
+            <a:ext cx="2583360" cy="680400"/>
           </a:xfrm>
           <a:prstGeom prst="rect">
             <a:avLst/>
@@ -6689,7 +5946,7 @@
         <p:spPr>
           <a:xfrm>
             <a:off x="1440" y="914400"/>
-            <a:ext cx="2282040" cy="5247360"/>
+            <a:ext cx="2281680" cy="5247000"/>
           </a:xfrm>
           <a:prstGeom prst="rect">
             <a:avLst/>
@@ -6878,7 +6135,7 @@
         <p:spPr>
           <a:xfrm>
             <a:off x="2057400" y="1143000"/>
-            <a:ext cx="4571640" cy="4800240"/>
+            <a:ext cx="4571280" cy="4799880"/>
           </a:xfrm>
           <a:prstGeom prst="rect">
             <a:avLst/>
@@ -6902,7 +6159,7 @@
         <p:spPr>
           <a:xfrm>
             <a:off x="6813000" y="1143000"/>
-            <a:ext cx="5302440" cy="4800240"/>
+            <a:ext cx="5302080" cy="4799880"/>
           </a:xfrm>
           <a:prstGeom prst="rect">
             <a:avLst/>
@@ -6955,8 +6212,8 @@
         </p:nvSpPr>
         <p:spPr>
           <a:xfrm>
-            <a:off x="609480" y="135360"/>
-            <a:ext cx="2583720" cy="680040"/>
+            <a:off x="609480" y="135000"/>
+            <a:ext cx="2583360" cy="680400"/>
           </a:xfrm>
           <a:prstGeom prst="rect">
             <a:avLst/>
@@ -7015,7 +6272,7 @@
         <p:spPr>
           <a:xfrm>
             <a:off x="0" y="1595880"/>
-            <a:ext cx="4815720" cy="4116600"/>
+            <a:ext cx="4815360" cy="4116240"/>
           </a:xfrm>
           <a:prstGeom prst="rect">
             <a:avLst/>
@@ -7039,7 +6296,7 @@
         <p:spPr>
           <a:xfrm>
             <a:off x="5715000" y="1582920"/>
-            <a:ext cx="4828680" cy="4129560"/>
+            <a:ext cx="4828320" cy="4129200"/>
           </a:xfrm>
           <a:prstGeom prst="rect">
             <a:avLst/>
@@ -7089,7 +6346,7 @@
         <p:spPr>
           <a:xfrm>
             <a:off x="609480" y="140400"/>
-            <a:ext cx="3502800" cy="670320"/>
+            <a:ext cx="3502440" cy="669960"/>
           </a:xfrm>
           <a:prstGeom prst="rect">
             <a:avLst/>
@@ -7154,7 +6411,7 @@
         <p:spPr>
           <a:xfrm>
             <a:off x="217080" y="1600200"/>
-            <a:ext cx="5337000" cy="4114440"/>
+            <a:ext cx="5336640" cy="4114080"/>
           </a:xfrm>
           <a:prstGeom prst="rect">
             <a:avLst/>
@@ -7178,7 +6435,7 @@
         <p:spPr>
           <a:xfrm>
             <a:off x="5675040" y="1600200"/>
-            <a:ext cx="5297400" cy="4084200"/>
+            <a:ext cx="5297040" cy="4083840"/>
           </a:xfrm>
           <a:prstGeom prst="rect">
             <a:avLst/>
@@ -7228,7 +6485,7 @@
         <p:spPr>
           <a:xfrm>
             <a:off x="609480" y="140400"/>
-            <a:ext cx="3502800" cy="670320"/>
+            <a:ext cx="3502440" cy="669960"/>
           </a:xfrm>
           <a:prstGeom prst="rect">
             <a:avLst/>
@@ -7293,7 +6550,7 @@
         <p:spPr>
           <a:xfrm>
             <a:off x="6172200" y="1537560"/>
-            <a:ext cx="5714640" cy="4405680"/>
+            <a:ext cx="5714280" cy="4405320"/>
           </a:xfrm>
           <a:prstGeom prst="rect">
             <a:avLst/>
@@ -7317,7 +6574,7 @@
         <p:spPr>
           <a:xfrm>
             <a:off x="188640" y="1506600"/>
-            <a:ext cx="5754600" cy="4436640"/>
+            <a:ext cx="5754240" cy="4436280"/>
           </a:xfrm>
           <a:prstGeom prst="rect">
             <a:avLst/>
@@ -7367,7 +6624,7 @@
         <p:spPr>
           <a:xfrm>
             <a:off x="468000" y="239400"/>
-            <a:ext cx="10959480" cy="669600"/>
+            <a:ext cx="10959120" cy="669600"/>
           </a:xfrm>
           <a:prstGeom prst="rect">
             <a:avLst/>
@@ -7432,7 +6689,7 @@
         <p:spPr>
           <a:xfrm>
             <a:off x="7172640" y="0"/>
-            <a:ext cx="2885400" cy="6915960"/>
+            <a:ext cx="2885040" cy="6915600"/>
           </a:xfrm>
           <a:prstGeom prst="rect">
             <a:avLst/>
@@ -7456,7 +6713,7 @@
         <p:spPr>
           <a:xfrm>
             <a:off x="2286000" y="2286000"/>
-            <a:ext cx="2900520" cy="2285640"/>
+            <a:ext cx="2900160" cy="2285280"/>
           </a:xfrm>
           <a:prstGeom prst="rect">
             <a:avLst/>
@@ -7506,7 +6763,7 @@
         <p:spPr>
           <a:xfrm>
             <a:off x="609480" y="137520"/>
-            <a:ext cx="10959480" cy="676080"/>
+            <a:ext cx="10959120" cy="675720"/>
           </a:xfrm>
           <a:prstGeom prst="rect">
             <a:avLst/>
@@ -7571,7 +6828,7 @@
         <p:spPr>
           <a:xfrm>
             <a:off x="2057400" y="1143000"/>
-            <a:ext cx="7852320" cy="5483880"/>
+            <a:ext cx="7851960" cy="5483520"/>
           </a:xfrm>
           <a:prstGeom prst="rect">
             <a:avLst/>
@@ -7621,7 +6878,7 @@
         <p:spPr>
           <a:xfrm>
             <a:off x="470160" y="75600"/>
-            <a:ext cx="10959480" cy="549000"/>
+            <a:ext cx="10959120" cy="548640"/>
           </a:xfrm>
           <a:prstGeom prst="rect">
             <a:avLst/>
@@ -7682,7 +6939,7 @@
         <p:spPr>
           <a:xfrm>
             <a:off x="228600" y="685800"/>
-            <a:ext cx="4571640" cy="748800"/>
+            <a:ext cx="4571280" cy="748440"/>
           </a:xfrm>
           <a:prstGeom prst="rect">
             <a:avLst/>
@@ -7746,7 +7003,7 @@
         <p:spPr>
           <a:xfrm>
             <a:off x="6629400" y="685800"/>
-            <a:ext cx="5257440" cy="748800"/>
+            <a:ext cx="5257080" cy="748440"/>
           </a:xfrm>
           <a:prstGeom prst="rect">
             <a:avLst/>
@@ -7814,7 +7071,7 @@
         <p:spPr>
           <a:xfrm>
             <a:off x="0" y="1828800"/>
-            <a:ext cx="2965320" cy="2285640"/>
+            <a:ext cx="2964960" cy="2285280"/>
           </a:xfrm>
           <a:prstGeom prst="rect">
             <a:avLst/>
@@ -7838,7 +7095,7 @@
         <p:spPr>
           <a:xfrm>
             <a:off x="2971800" y="1828800"/>
-            <a:ext cx="2964240" cy="2285640"/>
+            <a:ext cx="2963880" cy="2285280"/>
           </a:xfrm>
           <a:prstGeom prst="rect">
             <a:avLst/>
@@ -7862,7 +7119,7 @@
         <p:spPr>
           <a:xfrm>
             <a:off x="0" y="4572000"/>
-            <a:ext cx="2964960" cy="2285640"/>
+            <a:ext cx="2964600" cy="2285280"/>
           </a:xfrm>
           <a:prstGeom prst="rect">
             <a:avLst/>
@@ -7886,7 +7143,7 @@
         <p:spPr>
           <a:xfrm>
             <a:off x="2971800" y="4572000"/>
-            <a:ext cx="2977920" cy="2295720"/>
+            <a:ext cx="2977560" cy="2295360"/>
           </a:xfrm>
           <a:prstGeom prst="rect">
             <a:avLst/>
@@ -7910,7 +7167,7 @@
         <p:spPr>
           <a:xfrm>
             <a:off x="6172200" y="1828800"/>
-            <a:ext cx="2798280" cy="2386440"/>
+            <a:ext cx="2797920" cy="2386080"/>
           </a:xfrm>
           <a:prstGeom prst="rect">
             <a:avLst/>
@@ -7978,7 +7235,7 @@
         <p:spPr>
           <a:xfrm>
             <a:off x="9372600" y="1775160"/>
-            <a:ext cx="2742840" cy="2339280"/>
+            <a:ext cx="2742480" cy="2338920"/>
           </a:xfrm>
           <a:prstGeom prst="rect">
             <a:avLst/>
@@ -8002,7 +7259,7 @@
         <p:spPr>
           <a:xfrm>
             <a:off x="6195240" y="4353480"/>
-            <a:ext cx="2948400" cy="2514240"/>
+            <a:ext cx="2948040" cy="2513880"/>
           </a:xfrm>
           <a:prstGeom prst="rect">
             <a:avLst/>
@@ -8026,7 +7283,7 @@
         <p:spPr>
           <a:xfrm>
             <a:off x="9243360" y="4343400"/>
-            <a:ext cx="2948400" cy="2514240"/>
+            <a:ext cx="2948040" cy="2513880"/>
           </a:xfrm>
           <a:prstGeom prst="rect">
             <a:avLst/>
@@ -8076,7 +7333,7 @@
         <p:spPr>
           <a:xfrm>
             <a:off x="457200" y="228600"/>
-            <a:ext cx="10959480" cy="1339920"/>
+            <a:ext cx="10959120" cy="1339920"/>
           </a:xfrm>
           <a:prstGeom prst="rect">
             <a:avLst/>
@@ -8141,7 +7398,7 @@
         <p:spPr>
           <a:xfrm>
             <a:off x="457200" y="1600200"/>
-            <a:ext cx="4444200" cy="1161360"/>
+            <a:ext cx="4443840" cy="1161000"/>
           </a:xfrm>
           <a:prstGeom prst="rect">
             <a:avLst/>
@@ -8165,7 +7422,7 @@
         <p:spPr>
           <a:xfrm>
             <a:off x="1143000" y="2743200"/>
-            <a:ext cx="2964240" cy="2285640"/>
+            <a:ext cx="2963880" cy="2285280"/>
           </a:xfrm>
           <a:prstGeom prst="rect">
             <a:avLst/>
@@ -8189,7 +7446,7 @@
         <p:spPr>
           <a:xfrm>
             <a:off x="5991480" y="1591200"/>
-            <a:ext cx="4468680" cy="1151640"/>
+            <a:ext cx="4468320" cy="1151280"/>
           </a:xfrm>
           <a:prstGeom prst="rect">
             <a:avLst/>
@@ -8213,7 +7470,7 @@
         <p:spPr>
           <a:xfrm>
             <a:off x="7020000" y="2743200"/>
-            <a:ext cx="2809440" cy="2396160"/>
+            <a:ext cx="2809080" cy="2395800"/>
           </a:xfrm>
           <a:prstGeom prst="rect">
             <a:avLst/>
@@ -8237,7 +7494,7 @@
         <p:spPr>
           <a:xfrm>
             <a:off x="3610080" y="5257800"/>
-            <a:ext cx="3698640" cy="1371240"/>
+            <a:ext cx="3698280" cy="1370880"/>
           </a:xfrm>
           <a:prstGeom prst="rect">
             <a:avLst/>
@@ -8248,6 +7505,1060 @@
           </a:ln>
         </p:spPr>
       </p:pic>
+    </p:spTree>
+  </p:cSld>
+  <mc:AlternateContent>
+    <mc:Choice Requires="p14">
+      <p:transition spd="slow" p14:dur="2000"/>
+    </mc:Choice>
+    <mc:Fallback>
+      <p:transition spd="slow"/>
+    </mc:Fallback>
+  </mc:AlternateContent>
+</p:sld>
+</file>
+
+<file path=ppt/slides/slide18.xml><?xml version="1.0" encoding="utf-8"?>
+<p:sld xmlns:a="http://schemas.openxmlformats.org/drawingml/2006/main" xmlns:p="http://schemas.openxmlformats.org/presentationml/2006/main" xmlns:r="http://schemas.openxmlformats.org/officeDocument/2006/relationships" xmlns:p14="http://schemas.microsoft.com/office/powerpoint/2010/main" xmlns:p15="http://schemas.microsoft.com/office/powerpoint/2012/main" xmlns:mc="http://schemas.openxmlformats.org/markup-compatibility/2006">
+  <p:cSld>
+    <p:spTree>
+      <p:nvGrpSpPr>
+        <p:cNvPr id="1" name=""/>
+        <p:cNvGrpSpPr/>
+        <p:nvPr/>
+      </p:nvGrpSpPr>
+      <p:grpSpPr>
+        <a:xfrm>
+          <a:off x="0" y="0"/>
+          <a:ext cx="0" cy="0"/>
+          <a:chOff x="0" y="0"/>
+          <a:chExt cx="0" cy="0"/>
+        </a:xfrm>
+      </p:grpSpPr>
+      <p:sp>
+        <p:nvSpPr>
+          <p:cNvPr id="133" name="PlaceHolder 1"/>
+          <p:cNvSpPr>
+            <a:spLocks noGrp="1"/>
+          </p:cNvSpPr>
+          <p:nvPr>
+            <p:ph type="title"/>
+          </p:nvPr>
+        </p:nvSpPr>
+        <p:spPr>
+          <a:xfrm>
+            <a:off x="242280" y="0"/>
+            <a:ext cx="10959120" cy="396720"/>
+          </a:xfrm>
+          <a:prstGeom prst="rect">
+            <a:avLst/>
+          </a:prstGeom>
+          <a:noFill/>
+          <a:ln w="0">
+            <a:noFill/>
+          </a:ln>
+        </p:spPr>
+        <p:txBody>
+          <a:bodyPr lIns="0" rIns="0" tIns="0" bIns="0" anchor="ctr">
+            <a:spAutoFit/>
+          </a:bodyPr>
+          <a:p>
+            <a:pPr indent="0" algn="ctr">
+              <a:buNone/>
+            </a:pPr>
+            <a:r>
+              <a:rPr lang="en-US" sz="2800" b="1" u="none" strike="noStrike">
+                <a:solidFill>
+                  <a:srgbClr val="ff0000"/>
+                </a:solidFill>
+                <a:effectLst/>
+                <a:uFillTx/>
+                <a:latin typeface="Arial"/>
+              </a:rPr>
+              <a:t>TRACING</a:t>
+            </a:r>
+            <a:endParaRPr lang="en-US" sz="2800" b="1" u="none" strike="noStrike">
+              <a:solidFill>
+                <a:srgbClr val="ff0000"/>
+              </a:solidFill>
+              <a:effectLst/>
+              <a:uFillTx/>
+              <a:latin typeface="Arial"/>
+            </a:endParaRPr>
+          </a:p>
+        </p:txBody>
+      </p:sp>
+      <p:sp>
+        <p:nvSpPr>
+          <p:cNvPr id="134" name=""/>
+          <p:cNvSpPr txBox="1"/>
+          <p:nvPr/>
+        </p:nvSpPr>
+        <p:spPr>
+          <a:xfrm>
+            <a:off x="228600" y="402840"/>
+            <a:ext cx="11430000" cy="8285760"/>
+          </a:xfrm>
+          <a:prstGeom prst="rect">
+            <a:avLst/>
+          </a:prstGeom>
+          <a:noFill/>
+          <a:ln w="0">
+            <a:noFill/>
+          </a:ln>
+        </p:spPr>
+        <p:txBody>
+          <a:bodyPr lIns="90000" rIns="90000" tIns="45000" bIns="45000" anchor="t">
+            <a:spAutoFit/>
+          </a:bodyPr>
+          <a:p>
+            <a:r>
+              <a:rPr lang="en-US" sz="1400" b="1" u="none" strike="noStrike">
+                <a:solidFill>
+                  <a:srgbClr val="000000"/>
+                </a:solidFill>
+                <a:effectLst/>
+                <a:uFillTx/>
+                <a:latin typeface="Arial"/>
+              </a:rPr>
+              <a:t>ImageJ/Fiji tools</a:t>
+            </a:r>
+            <a:endParaRPr lang="en-US" sz="1400" b="0" u="none" strike="noStrike">
+              <a:solidFill>
+                <a:srgbClr val="000000"/>
+              </a:solidFill>
+              <a:effectLst/>
+              <a:uFillTx/>
+              <a:latin typeface="Arial"/>
+            </a:endParaRPr>
+          </a:p>
+          <a:p>
+            <a:pPr marL="216000" indent="-216000">
+              <a:lnSpc>
+                <a:spcPct val="100000"/>
+              </a:lnSpc>
+              <a:spcBef>
+                <a:spcPts val="340"/>
+              </a:spcBef>
+              <a:spcAft>
+                <a:spcPts val="142"/>
+              </a:spcAft>
+              <a:buClr>
+                <a:srgbClr val="000000"/>
+              </a:buClr>
+              <a:buSzPct val="45000"/>
+              <a:buFont typeface="Wingdings" charset="2"/>
+              <a:buChar char=""/>
+            </a:pPr>
+            <a:r>
+              <a:rPr lang="en-US" sz="1400" b="0" u="none" strike="noStrike">
+                <a:solidFill>
+                  <a:srgbClr val="000000"/>
+                </a:solidFill>
+                <a:effectLst/>
+                <a:uFillTx/>
+                <a:latin typeface="Arial"/>
+              </a:rPr>
+              <a:t>Simple Neurite Tracer (SNT) – semi-automatic 2D/3D tracing </a:t>
+            </a:r>
+            <a:endParaRPr lang="en-US" sz="1400" b="0" u="none" strike="noStrike">
+              <a:solidFill>
+                <a:srgbClr val="000000"/>
+              </a:solidFill>
+              <a:effectLst/>
+              <a:uFillTx/>
+              <a:latin typeface="Arial"/>
+              <a:ea typeface="Microsoft YaHei"/>
+            </a:endParaRPr>
+          </a:p>
+          <a:p>
+            <a:pPr marL="216000" indent="-216000">
+              <a:lnSpc>
+                <a:spcPct val="100000"/>
+              </a:lnSpc>
+              <a:spcBef>
+                <a:spcPts val="340"/>
+              </a:spcBef>
+              <a:spcAft>
+                <a:spcPts val="142"/>
+              </a:spcAft>
+              <a:buClr>
+                <a:srgbClr val="000000"/>
+              </a:buClr>
+              <a:buSzPct val="45000"/>
+              <a:buFont typeface="Wingdings" charset="2"/>
+              <a:buChar char=""/>
+            </a:pPr>
+            <a:r>
+              <a:rPr lang="en-US" sz="1400" b="0" u="none" strike="noStrike">
+                <a:solidFill>
+                  <a:srgbClr val="000000"/>
+                </a:solidFill>
+                <a:effectLst/>
+                <a:uFillTx/>
+                <a:latin typeface="Arial"/>
+              </a:rPr>
+              <a:t>NeuronJ – manual/semi-manual 2D tracing</a:t>
+            </a:r>
+            <a:endParaRPr lang="en-US" sz="1400" b="0" u="none" strike="noStrike">
+              <a:solidFill>
+                <a:srgbClr val="000000"/>
+              </a:solidFill>
+              <a:effectLst/>
+              <a:uFillTx/>
+              <a:latin typeface="Arial"/>
+              <a:ea typeface="Microsoft YaHei"/>
+            </a:endParaRPr>
+          </a:p>
+          <a:p>
+            <a:pPr>
+              <a:lnSpc>
+                <a:spcPct val="100000"/>
+              </a:lnSpc>
+              <a:spcBef>
+                <a:spcPts val="907"/>
+              </a:spcBef>
+              <a:spcAft>
+                <a:spcPts val="709"/>
+              </a:spcAft>
+            </a:pPr>
+            <a:r>
+              <a:rPr lang="en-US" sz="1400" b="1" u="none" strike="noStrike">
+                <a:solidFill>
+                  <a:srgbClr val="000000"/>
+                </a:solidFill>
+                <a:effectLst/>
+                <a:uFillTx/>
+                <a:latin typeface="Arial"/>
+                <a:ea typeface="Microsoft YaHei"/>
+              </a:rPr>
+              <a:t>3D neuron reconstruction platforms</a:t>
+            </a:r>
+            <a:endParaRPr lang="en-US" sz="1400" b="1" u="none" strike="noStrike">
+              <a:solidFill>
+                <a:srgbClr val="000000"/>
+              </a:solidFill>
+              <a:effectLst/>
+              <a:uFillTx/>
+              <a:latin typeface="Arial"/>
+              <a:ea typeface="Microsoft YaHei"/>
+            </a:endParaRPr>
+          </a:p>
+          <a:p>
+            <a:pPr marL="216000" indent="-216000">
+              <a:lnSpc>
+                <a:spcPct val="100000"/>
+              </a:lnSpc>
+              <a:spcBef>
+                <a:spcPts val="624"/>
+              </a:spcBef>
+              <a:spcAft>
+                <a:spcPts val="425"/>
+              </a:spcAft>
+              <a:buClr>
+                <a:srgbClr val="000000"/>
+              </a:buClr>
+              <a:buSzPct val="45000"/>
+              <a:buFont typeface="Wingdings" charset="2"/>
+              <a:buChar char=""/>
+            </a:pPr>
+            <a:r>
+              <a:rPr lang="en-US" sz="1400" b="1" u="none" strike="noStrike">
+                <a:solidFill>
+                  <a:srgbClr val="000000"/>
+                </a:solidFill>
+                <a:effectLst/>
+                <a:uFillTx/>
+                <a:latin typeface="Arial"/>
+                <a:ea typeface="Microsoft YaHei"/>
+              </a:rPr>
+              <a:t>Vaa3D</a:t>
+            </a:r>
+            <a:r>
+              <a:rPr lang="en-US" sz="1400" b="0" u="none" strike="noStrike">
+                <a:solidFill>
+                  <a:srgbClr val="000000"/>
+                </a:solidFill>
+                <a:effectLst/>
+                <a:uFillTx/>
+                <a:latin typeface="Arial"/>
+                <a:ea typeface="Microsoft YaHei"/>
+              </a:rPr>
+              <a:t> </a:t>
+            </a:r>
+            <a:endParaRPr lang="en-US" sz="1400" b="0" u="none" strike="noStrike">
+              <a:solidFill>
+                <a:srgbClr val="000000"/>
+              </a:solidFill>
+              <a:effectLst/>
+              <a:uFillTx/>
+              <a:latin typeface="Arial"/>
+              <a:ea typeface="Microsoft YaHei"/>
+            </a:endParaRPr>
+          </a:p>
+          <a:p>
+            <a:pPr marL="432000" lvl="1" indent="-216000">
+              <a:lnSpc>
+                <a:spcPct val="100000"/>
+              </a:lnSpc>
+              <a:spcBef>
+                <a:spcPts val="57"/>
+              </a:spcBef>
+              <a:buClr>
+                <a:srgbClr val="000000"/>
+              </a:buClr>
+              <a:buSzPct val="45000"/>
+              <a:buFont typeface="Wingdings" charset="2"/>
+              <a:buChar char=""/>
+            </a:pPr>
+            <a:r>
+              <a:rPr lang="en-US" sz="1400" b="0" u="none" strike="noStrike">
+                <a:solidFill>
+                  <a:srgbClr val="000000"/>
+                </a:solidFill>
+                <a:effectLst/>
+                <a:uFillTx/>
+                <a:latin typeface="Arial"/>
+                <a:ea typeface="Microsoft YaHei"/>
+              </a:rPr>
+              <a:t>-APP2 (automatic tracing) </a:t>
+            </a:r>
+            <a:endParaRPr lang="en-US" sz="1400" b="0" u="none" strike="noStrike">
+              <a:solidFill>
+                <a:srgbClr val="000000"/>
+              </a:solidFill>
+              <a:effectLst/>
+              <a:uFillTx/>
+              <a:latin typeface="Arial"/>
+              <a:ea typeface="Microsoft YaHei"/>
+            </a:endParaRPr>
+          </a:p>
+          <a:p>
+            <a:pPr marL="432000" lvl="1" indent="-216000">
+              <a:lnSpc>
+                <a:spcPct val="100000"/>
+              </a:lnSpc>
+              <a:spcBef>
+                <a:spcPts val="340"/>
+              </a:spcBef>
+              <a:spcAft>
+                <a:spcPts val="142"/>
+              </a:spcAft>
+              <a:buClr>
+                <a:srgbClr val="000000"/>
+              </a:buClr>
+              <a:buSzPct val="45000"/>
+              <a:buFont typeface="Wingdings" charset="2"/>
+              <a:buChar char=""/>
+            </a:pPr>
+            <a:r>
+              <a:rPr lang="en-US" sz="1400" b="0" u="none" strike="noStrike">
+                <a:solidFill>
+                  <a:srgbClr val="000000"/>
+                </a:solidFill>
+                <a:effectLst/>
+                <a:uFillTx/>
+                <a:latin typeface="Arial"/>
+                <a:ea typeface="Microsoft YaHei"/>
+              </a:rPr>
+              <a:t>-SmartTracing / Neutube plugins</a:t>
+            </a:r>
+            <a:endParaRPr lang="en-US" sz="1400" b="0" u="none" strike="noStrike">
+              <a:solidFill>
+                <a:srgbClr val="000000"/>
+              </a:solidFill>
+              <a:effectLst/>
+              <a:uFillTx/>
+              <a:latin typeface="Arial"/>
+              <a:ea typeface="Microsoft YaHei"/>
+            </a:endParaRPr>
+          </a:p>
+          <a:p>
+            <a:pPr>
+              <a:lnSpc>
+                <a:spcPct val="100000"/>
+              </a:lnSpc>
+              <a:spcBef>
+                <a:spcPts val="907"/>
+              </a:spcBef>
+              <a:spcAft>
+                <a:spcPts val="709"/>
+              </a:spcAft>
+            </a:pPr>
+            <a:r>
+              <a:rPr lang="en-US" sz="1400" b="1" u="none" strike="noStrike">
+                <a:solidFill>
+                  <a:srgbClr val="000000"/>
+                </a:solidFill>
+                <a:effectLst/>
+                <a:uFillTx/>
+                <a:latin typeface="Arial"/>
+                <a:ea typeface="Microsoft YaHei"/>
+              </a:rPr>
+              <a:t>Machine learning approaches</a:t>
+            </a:r>
+            <a:endParaRPr lang="en-US" sz="1400" b="0" u="none" strike="noStrike">
+              <a:solidFill>
+                <a:srgbClr val="000000"/>
+              </a:solidFill>
+              <a:effectLst/>
+              <a:uFillTx/>
+              <a:latin typeface="Arial"/>
+              <a:ea typeface="Microsoft YaHei"/>
+            </a:endParaRPr>
+          </a:p>
+          <a:p>
+            <a:pPr marL="216000" indent="-216000">
+              <a:lnSpc>
+                <a:spcPct val="100000"/>
+              </a:lnSpc>
+              <a:buClr>
+                <a:srgbClr val="000000"/>
+              </a:buClr>
+              <a:buSzPct val="45000"/>
+              <a:buFont typeface="Wingdings" charset="2"/>
+              <a:buChar char=""/>
+            </a:pPr>
+            <a:r>
+              <a:rPr lang="en-US" sz="1400" b="0" u="none" strike="noStrike">
+                <a:solidFill>
+                  <a:srgbClr val="000000"/>
+                </a:solidFill>
+                <a:effectLst/>
+                <a:uFillTx/>
+                <a:latin typeface="Arial"/>
+                <a:ea typeface="Microsoft YaHei"/>
+              </a:rPr>
+              <a:t>ilastik – pixel classification (segmentation before tracing)</a:t>
+            </a:r>
+            <a:endParaRPr lang="en-US" sz="1400" b="0" u="none" strike="noStrike">
+              <a:solidFill>
+                <a:srgbClr val="000000"/>
+              </a:solidFill>
+              <a:effectLst/>
+              <a:uFillTx/>
+              <a:latin typeface="Arial"/>
+              <a:ea typeface="Microsoft YaHei"/>
+            </a:endParaRPr>
+          </a:p>
+          <a:p>
+            <a:pPr marL="216000" indent="-216000">
+              <a:lnSpc>
+                <a:spcPct val="100000"/>
+              </a:lnSpc>
+              <a:spcBef>
+                <a:spcPts val="57"/>
+              </a:spcBef>
+              <a:buClr>
+                <a:srgbClr val="000000"/>
+              </a:buClr>
+              <a:buSzPct val="45000"/>
+              <a:buFont typeface="Wingdings" charset="2"/>
+              <a:buChar char=""/>
+            </a:pPr>
+            <a:r>
+              <a:rPr lang="en-US" sz="1400" b="0" u="none" strike="noStrike">
+                <a:solidFill>
+                  <a:srgbClr val="000000"/>
+                </a:solidFill>
+                <a:effectLst/>
+                <a:uFillTx/>
+                <a:latin typeface="Arial"/>
+                <a:ea typeface="Microsoft YaHei"/>
+              </a:rPr>
+              <a:t>DeepNeuron (Vaa3D) – deep learning tracing</a:t>
+            </a:r>
+            <a:endParaRPr lang="en-US" sz="1400" b="0" u="none" strike="noStrike">
+              <a:solidFill>
+                <a:srgbClr val="000000"/>
+              </a:solidFill>
+              <a:effectLst/>
+              <a:uFillTx/>
+              <a:latin typeface="Arial"/>
+              <a:ea typeface="Microsoft YaHei"/>
+            </a:endParaRPr>
+          </a:p>
+          <a:p>
+            <a:pPr marL="216000" indent="-216000">
+              <a:lnSpc>
+                <a:spcPct val="100000"/>
+              </a:lnSpc>
+              <a:buClr>
+                <a:srgbClr val="000000"/>
+              </a:buClr>
+              <a:buSzPct val="45000"/>
+              <a:buFont typeface="Wingdings" charset="2"/>
+              <a:buChar char=""/>
+            </a:pPr>
+            <a:r>
+              <a:rPr lang="en-US" sz="1400" b="0" u="none" strike="noStrike">
+                <a:solidFill>
+                  <a:srgbClr val="000000"/>
+                </a:solidFill>
+                <a:effectLst/>
+                <a:uFillTx/>
+                <a:latin typeface="Arial"/>
+                <a:ea typeface="Microsoft YaHei"/>
+              </a:rPr>
+              <a:t>U-Net pipelines – custom deep learning segmentation</a:t>
+            </a:r>
+            <a:endParaRPr lang="en-US" sz="1400" b="0" u="none" strike="noStrike">
+              <a:solidFill>
+                <a:srgbClr val="000000"/>
+              </a:solidFill>
+              <a:effectLst/>
+              <a:uFillTx/>
+              <a:latin typeface="Arial"/>
+              <a:ea typeface="Microsoft YaHei"/>
+            </a:endParaRPr>
+          </a:p>
+          <a:p>
+            <a:pPr>
+              <a:lnSpc>
+                <a:spcPct val="100000"/>
+              </a:lnSpc>
+            </a:pPr>
+            <a:endParaRPr lang="en-US" sz="1400" b="0" u="none" strike="noStrike">
+              <a:solidFill>
+                <a:srgbClr val="000000"/>
+              </a:solidFill>
+              <a:effectLst/>
+              <a:uFillTx/>
+              <a:latin typeface="Arial"/>
+              <a:ea typeface="Microsoft YaHei"/>
+            </a:endParaRPr>
+          </a:p>
+          <a:p>
+            <a:pPr>
+              <a:lnSpc>
+                <a:spcPct val="100000"/>
+              </a:lnSpc>
+            </a:pPr>
+            <a:r>
+              <a:rPr lang="en-US" sz="1400" b="1" u="none" strike="noStrike">
+                <a:solidFill>
+                  <a:srgbClr val="000000"/>
+                </a:solidFill>
+                <a:effectLst/>
+                <a:uFillTx/>
+                <a:latin typeface="Arial"/>
+                <a:ea typeface="Microsoft YaHei"/>
+              </a:rPr>
+              <a:t>Python-based workflows </a:t>
+            </a:r>
+            <a:endParaRPr lang="en-US" sz="1400" b="0" u="none" strike="noStrike">
+              <a:solidFill>
+                <a:srgbClr val="000000"/>
+              </a:solidFill>
+              <a:effectLst/>
+              <a:uFillTx/>
+              <a:latin typeface="Arial"/>
+              <a:ea typeface="Microsoft YaHei"/>
+            </a:endParaRPr>
+          </a:p>
+          <a:p>
+            <a:pPr marL="216000" indent="-216000">
+              <a:lnSpc>
+                <a:spcPct val="100000"/>
+              </a:lnSpc>
+              <a:spcBef>
+                <a:spcPts val="57"/>
+              </a:spcBef>
+              <a:buClr>
+                <a:srgbClr val="000000"/>
+              </a:buClr>
+              <a:buSzPct val="45000"/>
+              <a:buFont typeface="Wingdings" charset="2"/>
+              <a:buChar char=""/>
+            </a:pPr>
+            <a:r>
+              <a:rPr lang="en-US" sz="1400" b="0" u="none" strike="noStrike">
+                <a:solidFill>
+                  <a:srgbClr val="000000"/>
+                </a:solidFill>
+                <a:effectLst/>
+                <a:uFillTx/>
+                <a:latin typeface="Arial"/>
+                <a:ea typeface="Microsoft YaHei"/>
+              </a:rPr>
+              <a:t>scikit-image – segmentation + skeletonization </a:t>
+            </a:r>
+            <a:endParaRPr lang="en-US" sz="1400" b="0" u="none" strike="noStrike">
+              <a:solidFill>
+                <a:srgbClr val="000000"/>
+              </a:solidFill>
+              <a:effectLst/>
+              <a:uFillTx/>
+              <a:latin typeface="Arial"/>
+              <a:ea typeface="Microsoft YaHei"/>
+            </a:endParaRPr>
+          </a:p>
+          <a:p>
+            <a:pPr marL="216000" indent="-216000">
+              <a:lnSpc>
+                <a:spcPct val="100000"/>
+              </a:lnSpc>
+              <a:spcBef>
+                <a:spcPts val="57"/>
+              </a:spcBef>
+              <a:buClr>
+                <a:srgbClr val="000000"/>
+              </a:buClr>
+              <a:buSzPct val="45000"/>
+              <a:buFont typeface="Wingdings" charset="2"/>
+              <a:buChar char=""/>
+            </a:pPr>
+            <a:r>
+              <a:rPr lang="en-US" sz="1400" b="0" u="none" strike="noStrike">
+                <a:solidFill>
+                  <a:srgbClr val="000000"/>
+                </a:solidFill>
+                <a:effectLst/>
+                <a:uFillTx/>
+                <a:latin typeface="Arial"/>
+                <a:ea typeface="Microsoft YaHei"/>
+              </a:rPr>
+              <a:t>networkx – graph reconstruction </a:t>
+            </a:r>
+            <a:endParaRPr lang="en-US" sz="1400" b="0" u="none" strike="noStrike">
+              <a:solidFill>
+                <a:srgbClr val="000000"/>
+              </a:solidFill>
+              <a:effectLst/>
+              <a:uFillTx/>
+              <a:latin typeface="Arial"/>
+              <a:ea typeface="Microsoft YaHei"/>
+            </a:endParaRPr>
+          </a:p>
+          <a:p>
+            <a:pPr marL="216000" indent="-216000">
+              <a:lnSpc>
+                <a:spcPct val="100000"/>
+              </a:lnSpc>
+              <a:spcBef>
+                <a:spcPts val="57"/>
+              </a:spcBef>
+              <a:buClr>
+                <a:srgbClr val="000000"/>
+              </a:buClr>
+              <a:buSzPct val="45000"/>
+              <a:buFont typeface="Wingdings" charset="2"/>
+              <a:buChar char=""/>
+            </a:pPr>
+            <a:r>
+              <a:rPr lang="en-US" sz="1400" b="0" u="none" strike="noStrike">
+                <a:solidFill>
+                  <a:srgbClr val="000000"/>
+                </a:solidFill>
+                <a:effectLst/>
+                <a:uFillTx/>
+                <a:latin typeface="Arial"/>
+                <a:ea typeface="Microsoft YaHei"/>
+              </a:rPr>
+              <a:t>Kimimaro – skeletonization (large volumes) </a:t>
+            </a:r>
+            <a:endParaRPr lang="en-US" sz="1400" b="0" u="none" strike="noStrike">
+              <a:solidFill>
+                <a:srgbClr val="000000"/>
+              </a:solidFill>
+              <a:effectLst/>
+              <a:uFillTx/>
+              <a:latin typeface="Arial"/>
+              <a:ea typeface="Microsoft YaHei"/>
+            </a:endParaRPr>
+          </a:p>
+          <a:p>
+            <a:pPr marL="216000" indent="-216000">
+              <a:lnSpc>
+                <a:spcPct val="100000"/>
+              </a:lnSpc>
+              <a:buClr>
+                <a:srgbClr val="000000"/>
+              </a:buClr>
+              <a:buSzPct val="45000"/>
+              <a:buFont typeface="Wingdings" charset="2"/>
+              <a:buChar char=""/>
+            </a:pPr>
+            <a:r>
+              <a:rPr lang="en-US" sz="1400" b="0" u="none" strike="noStrike">
+                <a:solidFill>
+                  <a:srgbClr val="000000"/>
+                </a:solidFill>
+                <a:effectLst/>
+                <a:uFillTx/>
+                <a:latin typeface="Arial"/>
+                <a:ea typeface="Microsoft YaHei"/>
+              </a:rPr>
+              <a:t>Navis – neuron analysis &amp; visualization</a:t>
+            </a:r>
+            <a:endParaRPr lang="en-US" sz="1400" b="0" u="none" strike="noStrike">
+              <a:solidFill>
+                <a:srgbClr val="000000"/>
+              </a:solidFill>
+              <a:effectLst/>
+              <a:uFillTx/>
+              <a:latin typeface="Arial"/>
+              <a:ea typeface="Microsoft YaHei"/>
+            </a:endParaRPr>
+          </a:p>
+          <a:p>
+            <a:pPr>
+              <a:lnSpc>
+                <a:spcPct val="100000"/>
+              </a:lnSpc>
+            </a:pPr>
+            <a:endParaRPr lang="en-US" sz="1400" b="0" u="none" strike="noStrike">
+              <a:solidFill>
+                <a:srgbClr val="000000"/>
+              </a:solidFill>
+              <a:effectLst/>
+              <a:uFillTx/>
+              <a:latin typeface="Arial"/>
+              <a:ea typeface="Microsoft YaHei"/>
+            </a:endParaRPr>
+          </a:p>
+          <a:p>
+            <a:pPr>
+              <a:lnSpc>
+                <a:spcPct val="100000"/>
+              </a:lnSpc>
+            </a:pPr>
+            <a:r>
+              <a:rPr lang="en-US" sz="1400" b="1" u="none" strike="noStrike">
+                <a:solidFill>
+                  <a:srgbClr val="000000"/>
+                </a:solidFill>
+                <a:effectLst/>
+                <a:uFillTx/>
+                <a:latin typeface="Arial"/>
+                <a:ea typeface="Microsoft YaHei"/>
+              </a:rPr>
+              <a:t>Commercial software</a:t>
+            </a:r>
+            <a:r>
+              <a:rPr lang="en-US" sz="1400" b="0" u="none" strike="noStrike">
+                <a:solidFill>
+                  <a:srgbClr val="000000"/>
+                </a:solidFill>
+                <a:effectLst/>
+                <a:uFillTx/>
+                <a:latin typeface="Arial"/>
+                <a:ea typeface="Microsoft YaHei"/>
+              </a:rPr>
+              <a:t> </a:t>
+            </a:r>
+            <a:endParaRPr lang="en-US" sz="1400" b="0" u="none" strike="noStrike">
+              <a:solidFill>
+                <a:srgbClr val="000000"/>
+              </a:solidFill>
+              <a:effectLst/>
+              <a:uFillTx/>
+              <a:latin typeface="Arial"/>
+              <a:ea typeface="Microsoft YaHei"/>
+            </a:endParaRPr>
+          </a:p>
+          <a:p>
+            <a:pPr marL="216000" indent="-216000">
+              <a:lnSpc>
+                <a:spcPct val="100000"/>
+              </a:lnSpc>
+              <a:spcBef>
+                <a:spcPts val="340"/>
+              </a:spcBef>
+              <a:spcAft>
+                <a:spcPts val="142"/>
+              </a:spcAft>
+              <a:buClr>
+                <a:srgbClr val="000000"/>
+              </a:buClr>
+              <a:buSzPct val="45000"/>
+              <a:buFont typeface="Wingdings" charset="2"/>
+              <a:buChar char=""/>
+            </a:pPr>
+            <a:r>
+              <a:rPr lang="en-US" sz="1400" b="0" u="none" strike="noStrike">
+                <a:solidFill>
+                  <a:srgbClr val="000000"/>
+                </a:solidFill>
+                <a:effectLst/>
+                <a:uFillTx/>
+                <a:latin typeface="Arial"/>
+                <a:ea typeface="Microsoft YaHei"/>
+              </a:rPr>
+              <a:t>Imaris (Filament Tracer) – user-friendly semi-automatic tracing </a:t>
+            </a:r>
+            <a:endParaRPr lang="en-US" sz="1400" b="0" u="none" strike="noStrike">
+              <a:solidFill>
+                <a:srgbClr val="000000"/>
+              </a:solidFill>
+              <a:effectLst/>
+              <a:uFillTx/>
+              <a:latin typeface="Arial"/>
+              <a:ea typeface="Microsoft YaHei"/>
+            </a:endParaRPr>
+          </a:p>
+          <a:p>
+            <a:pPr marL="216000" indent="-216000">
+              <a:lnSpc>
+                <a:spcPct val="100000"/>
+              </a:lnSpc>
+              <a:spcBef>
+                <a:spcPts val="340"/>
+              </a:spcBef>
+              <a:spcAft>
+                <a:spcPts val="142"/>
+              </a:spcAft>
+              <a:buClr>
+                <a:srgbClr val="000000"/>
+              </a:buClr>
+              <a:buSzPct val="45000"/>
+              <a:buFont typeface="Wingdings" charset="2"/>
+              <a:buChar char=""/>
+            </a:pPr>
+            <a:r>
+              <a:rPr lang="en-US" sz="1400" b="0" u="none" strike="noStrike">
+                <a:solidFill>
+                  <a:srgbClr val="000000"/>
+                </a:solidFill>
+                <a:effectLst/>
+                <a:uFillTx/>
+                <a:latin typeface="Arial"/>
+                <a:ea typeface="Microsoft YaHei"/>
+              </a:rPr>
+              <a:t>Neurolucida – high-end neuron reconstruction</a:t>
+            </a:r>
+            <a:endParaRPr lang="en-US" sz="1400" b="0" u="none" strike="noStrike">
+              <a:solidFill>
+                <a:srgbClr val="000000"/>
+              </a:solidFill>
+              <a:effectLst/>
+              <a:uFillTx/>
+              <a:latin typeface="Arial"/>
+              <a:ea typeface="Microsoft YaHei"/>
+            </a:endParaRPr>
+          </a:p>
+          <a:p>
+            <a:pPr>
+              <a:lnSpc>
+                <a:spcPct val="100000"/>
+              </a:lnSpc>
+              <a:spcBef>
+                <a:spcPts val="1191"/>
+              </a:spcBef>
+              <a:spcAft>
+                <a:spcPts val="992"/>
+              </a:spcAft>
+            </a:pPr>
+            <a:r>
+              <a:rPr lang="en-US" sz="1400" b="1" u="none" strike="noStrike">
+                <a:solidFill>
+                  <a:srgbClr val="000000"/>
+                </a:solidFill>
+                <a:effectLst/>
+                <a:uFillTx/>
+                <a:latin typeface="Arial"/>
+                <a:ea typeface="Microsoft YaHei"/>
+              </a:rPr>
+              <a:t>Common output / analysis</a:t>
+            </a:r>
+            <a:r>
+              <a:rPr lang="en-US" sz="1400" b="0" u="none" strike="noStrike">
+                <a:solidFill>
+                  <a:srgbClr val="000000"/>
+                </a:solidFill>
+                <a:effectLst/>
+                <a:uFillTx/>
+                <a:latin typeface="Arial"/>
+                <a:ea typeface="Microsoft YaHei"/>
+              </a:rPr>
+              <a:t> </a:t>
+            </a:r>
+            <a:endParaRPr lang="en-US" sz="1400" b="0" u="none" strike="noStrike">
+              <a:solidFill>
+                <a:srgbClr val="000000"/>
+              </a:solidFill>
+              <a:effectLst/>
+              <a:uFillTx/>
+              <a:latin typeface="Arial"/>
+            </a:endParaRPr>
+          </a:p>
+          <a:p>
+            <a:pPr marL="216000" indent="-216000">
+              <a:lnSpc>
+                <a:spcPct val="100000"/>
+              </a:lnSpc>
+              <a:spcBef>
+                <a:spcPts val="340"/>
+              </a:spcBef>
+              <a:spcAft>
+                <a:spcPts val="142"/>
+              </a:spcAft>
+              <a:buClr>
+                <a:srgbClr val="000000"/>
+              </a:buClr>
+              <a:buSzPct val="45000"/>
+              <a:buFont typeface="Wingdings" charset="2"/>
+              <a:buChar char=""/>
+            </a:pPr>
+            <a:r>
+              <a:rPr lang="en-US" sz="1400" b="0" u="none" strike="noStrike">
+                <a:solidFill>
+                  <a:srgbClr val="000000"/>
+                </a:solidFill>
+                <a:effectLst/>
+                <a:uFillTx/>
+                <a:latin typeface="Arial"/>
+                <a:ea typeface="Microsoft YaHei"/>
+              </a:rPr>
+              <a:t>SWC format (standard neuron morphology file) </a:t>
+            </a:r>
+            <a:endParaRPr lang="en-US" sz="1400" b="0" u="none" strike="noStrike">
+              <a:solidFill>
+                <a:srgbClr val="000000"/>
+              </a:solidFill>
+              <a:effectLst/>
+              <a:uFillTx/>
+              <a:latin typeface="Arial"/>
+              <a:ea typeface="Microsoft YaHei"/>
+            </a:endParaRPr>
+          </a:p>
+          <a:p>
+            <a:pPr marL="216000" indent="-216000">
+              <a:lnSpc>
+                <a:spcPct val="100000"/>
+              </a:lnSpc>
+              <a:spcBef>
+                <a:spcPts val="340"/>
+              </a:spcBef>
+              <a:spcAft>
+                <a:spcPts val="142"/>
+              </a:spcAft>
+              <a:buClr>
+                <a:srgbClr val="000000"/>
+              </a:buClr>
+              <a:buSzPct val="45000"/>
+              <a:buFont typeface="Wingdings" charset="2"/>
+              <a:buChar char=""/>
+            </a:pPr>
+            <a:r>
+              <a:rPr lang="en-US" sz="1400" b="0" u="none" strike="noStrike">
+                <a:solidFill>
+                  <a:srgbClr val="000000"/>
+                </a:solidFill>
+                <a:effectLst/>
+                <a:uFillTx/>
+                <a:latin typeface="Arial"/>
+                <a:ea typeface="Microsoft YaHei"/>
+              </a:rPr>
+              <a:t>Analysis tools: L-Measure, Navis</a:t>
+            </a:r>
+            <a:endParaRPr lang="en-US" sz="1400" b="0" u="none" strike="noStrike">
+              <a:solidFill>
+                <a:srgbClr val="000000"/>
+              </a:solidFill>
+              <a:effectLst/>
+              <a:uFillTx/>
+              <a:latin typeface="Arial"/>
+              <a:ea typeface="Microsoft YaHei"/>
+            </a:endParaRPr>
+          </a:p>
+          <a:p>
+            <a:pPr>
+              <a:lnSpc>
+                <a:spcPct val="100000"/>
+              </a:lnSpc>
+              <a:spcBef>
+                <a:spcPts val="1191"/>
+              </a:spcBef>
+              <a:spcAft>
+                <a:spcPts val="992"/>
+              </a:spcAft>
+            </a:pPr>
+            <a:endParaRPr lang="en-US" sz="1400" b="0" u="none" strike="noStrike">
+              <a:solidFill>
+                <a:srgbClr val="000000"/>
+              </a:solidFill>
+              <a:effectLst/>
+              <a:uFillTx/>
+              <a:latin typeface="Arial"/>
+            </a:endParaRPr>
+          </a:p>
+          <a:p>
+            <a:pPr>
+              <a:lnSpc>
+                <a:spcPct val="100000"/>
+              </a:lnSpc>
+              <a:spcBef>
+                <a:spcPts val="624"/>
+              </a:spcBef>
+              <a:spcAft>
+                <a:spcPts val="425"/>
+              </a:spcAft>
+            </a:pPr>
+            <a:endParaRPr lang="en-US" sz="1400" b="0" u="none" strike="noStrike">
+              <a:solidFill>
+                <a:srgbClr val="000000"/>
+              </a:solidFill>
+              <a:effectLst/>
+              <a:uFillTx/>
+              <a:latin typeface="Arial"/>
+              <a:ea typeface="Microsoft YaHei"/>
+            </a:endParaRPr>
+          </a:p>
+          <a:p>
+            <a:pPr>
+              <a:lnSpc>
+                <a:spcPct val="100000"/>
+              </a:lnSpc>
+              <a:spcBef>
+                <a:spcPts val="1191"/>
+              </a:spcBef>
+              <a:spcAft>
+                <a:spcPts val="992"/>
+              </a:spcAft>
+            </a:pPr>
+            <a:endParaRPr lang="en-US" sz="1400" b="0" u="none" strike="noStrike">
+              <a:solidFill>
+                <a:srgbClr val="000000"/>
+              </a:solidFill>
+              <a:effectLst/>
+              <a:uFillTx/>
+              <a:latin typeface="Arial"/>
+            </a:endParaRPr>
+          </a:p>
+          <a:p>
+            <a:pPr>
+              <a:lnSpc>
+                <a:spcPct val="100000"/>
+              </a:lnSpc>
+              <a:spcBef>
+                <a:spcPts val="1191"/>
+              </a:spcBef>
+              <a:spcAft>
+                <a:spcPts val="992"/>
+              </a:spcAft>
+            </a:pPr>
+            <a:endParaRPr lang="en-US" sz="1400" b="0" u="none" strike="noStrike">
+              <a:solidFill>
+                <a:srgbClr val="000000"/>
+              </a:solidFill>
+              <a:effectLst/>
+              <a:uFillTx/>
+              <a:latin typeface="Arial"/>
+            </a:endParaRPr>
+          </a:p>
+          <a:p>
+            <a:endParaRPr lang="en-US" sz="1400" b="0" u="none" strike="noStrike">
+              <a:solidFill>
+                <a:srgbClr val="000000"/>
+              </a:solidFill>
+              <a:effectLst/>
+              <a:uFillTx/>
+              <a:latin typeface="Arial"/>
+            </a:endParaRPr>
+          </a:p>
+        </p:txBody>
+      </p:sp>
     </p:spTree>
   </p:cSld>
   <mc:AlternateContent>
@@ -8287,7 +8598,7 @@
         <p:spPr>
           <a:xfrm>
             <a:off x="1143000" y="2743560"/>
-            <a:ext cx="10959480" cy="748800"/>
+            <a:ext cx="10959120" cy="748440"/>
           </a:xfrm>
           <a:prstGeom prst="rect">
             <a:avLst/>
@@ -8381,8 +8692,8 @@
         </p:nvSpPr>
         <p:spPr>
           <a:xfrm>
-            <a:off x="609480" y="135360"/>
-            <a:ext cx="2583720" cy="680040"/>
+            <a:off x="609480" y="135000"/>
+            <a:ext cx="2583360" cy="680400"/>
           </a:xfrm>
           <a:prstGeom prst="rect">
             <a:avLst/>
@@ -8437,7 +8748,7 @@
         <p:spPr>
           <a:xfrm>
             <a:off x="1440" y="914400"/>
-            <a:ext cx="2282040" cy="5247360"/>
+            <a:ext cx="2281680" cy="5247000"/>
           </a:xfrm>
           <a:prstGeom prst="rect">
             <a:avLst/>
@@ -8626,7 +8937,7 @@
         <p:spPr>
           <a:xfrm>
             <a:off x="2142360" y="1363680"/>
-            <a:ext cx="4833360" cy="4122000"/>
+            <a:ext cx="4833000" cy="4121640"/>
           </a:xfrm>
           <a:prstGeom prst="rect">
             <a:avLst/>
@@ -8650,7 +8961,7 @@
         <p:spPr>
           <a:xfrm>
             <a:off x="7011360" y="1321200"/>
-            <a:ext cx="4883040" cy="4164480"/>
+            <a:ext cx="4882680" cy="4164120"/>
           </a:xfrm>
           <a:prstGeom prst="rect">
             <a:avLst/>
@@ -8703,8 +9014,8 @@
         </p:nvSpPr>
         <p:spPr>
           <a:xfrm>
-            <a:off x="609480" y="135360"/>
-            <a:ext cx="2583720" cy="680040"/>
+            <a:off x="609480" y="135000"/>
+            <a:ext cx="2583360" cy="680400"/>
           </a:xfrm>
           <a:prstGeom prst="rect">
             <a:avLst/>
@@ -8763,7 +9074,7 @@
         <p:spPr>
           <a:xfrm>
             <a:off x="0" y="1595880"/>
-            <a:ext cx="4815720" cy="4116600"/>
+            <a:ext cx="4815360" cy="4116240"/>
           </a:xfrm>
           <a:prstGeom prst="rect">
             <a:avLst/>
@@ -8787,7 +9098,7 @@
         <p:spPr>
           <a:xfrm>
             <a:off x="5715000" y="1582920"/>
-            <a:ext cx="4828680" cy="4129560"/>
+            <a:ext cx="4828320" cy="4129200"/>
           </a:xfrm>
           <a:prstGeom prst="rect">
             <a:avLst/>
@@ -8837,7 +9148,7 @@
         <p:spPr>
           <a:xfrm>
             <a:off x="609480" y="-193680"/>
-            <a:ext cx="3502800" cy="1338480"/>
+            <a:ext cx="3502440" cy="1338120"/>
           </a:xfrm>
           <a:prstGeom prst="rect">
             <a:avLst/>
@@ -8902,7 +9213,7 @@
         <p:spPr>
           <a:xfrm>
             <a:off x="37440" y="906480"/>
-            <a:ext cx="5905440" cy="5036400"/>
+            <a:ext cx="5905080" cy="5036040"/>
           </a:xfrm>
           <a:prstGeom prst="rect">
             <a:avLst/>
@@ -8926,7 +9237,7 @@
         <p:spPr>
           <a:xfrm>
             <a:off x="6167880" y="914400"/>
-            <a:ext cx="5947200" cy="5072040"/>
+            <a:ext cx="5946840" cy="5071680"/>
           </a:xfrm>
           <a:prstGeom prst="rect">
             <a:avLst/>
@@ -8976,7 +9287,7 @@
         <p:spPr>
           <a:xfrm>
             <a:off x="609480" y="-193680"/>
-            <a:ext cx="3502800" cy="1338480"/>
+            <a:ext cx="3502440" cy="1338120"/>
           </a:xfrm>
           <a:prstGeom prst="rect">
             <a:avLst/>
@@ -9041,7 +9352,7 @@
         <p:spPr>
           <a:xfrm>
             <a:off x="46440" y="1143000"/>
-            <a:ext cx="5896440" cy="5028480"/>
+            <a:ext cx="5896080" cy="5028120"/>
           </a:xfrm>
           <a:prstGeom prst="rect">
             <a:avLst/>
@@ -9065,7 +9376,7 @@
         <p:spPr>
           <a:xfrm>
             <a:off x="6099120" y="1135080"/>
-            <a:ext cx="5905800" cy="5036400"/>
+            <a:ext cx="5905440" cy="5036040"/>
           </a:xfrm>
           <a:prstGeom prst="rect">
             <a:avLst/>
@@ -9115,7 +9426,7 @@
         <p:spPr>
           <a:xfrm>
             <a:off x="468000" y="239400"/>
-            <a:ext cx="10959480" cy="669600"/>
+            <a:ext cx="10959120" cy="669600"/>
           </a:xfrm>
           <a:prstGeom prst="rect">
             <a:avLst/>
@@ -9180,7 +9491,7 @@
         <p:spPr>
           <a:xfrm>
             <a:off x="5976000" y="228600"/>
-            <a:ext cx="4767840" cy="6400440"/>
+            <a:ext cx="4767480" cy="6400080"/>
           </a:xfrm>
           <a:prstGeom prst="rect">
             <a:avLst/>
@@ -9204,7 +9515,7 @@
         <p:spPr>
           <a:xfrm>
             <a:off x="1572120" y="2229120"/>
-            <a:ext cx="2824560" cy="2342520"/>
+            <a:ext cx="2824200" cy="2342160"/>
           </a:xfrm>
           <a:prstGeom prst="rect">
             <a:avLst/>
@@ -9254,7 +9565,7 @@
         <p:spPr>
           <a:xfrm>
             <a:off x="1143000" y="2743560"/>
-            <a:ext cx="10959480" cy="748800"/>
+            <a:ext cx="10959120" cy="748440"/>
           </a:xfrm>
           <a:prstGeom prst="rect">
             <a:avLst/>
@@ -9345,7 +9656,7 @@
         <p:spPr>
           <a:xfrm>
             <a:off x="228600" y="0"/>
-            <a:ext cx="10959480" cy="748800"/>
+            <a:ext cx="10959120" cy="748440"/>
           </a:xfrm>
           <a:prstGeom prst="rect">
             <a:avLst/>
@@ -9410,7 +9721,7 @@
         <p:spPr>
           <a:xfrm>
             <a:off x="465840" y="4591440"/>
-            <a:ext cx="7077960" cy="1123560"/>
+            <a:ext cx="7077600" cy="1123200"/>
           </a:xfrm>
           <a:prstGeom prst="rect">
             <a:avLst/>
@@ -9424,13 +9735,13 @@
       <p:sp>
         <p:nvSpPr>
           <p:cNvPr id="92" name=""/>
-          <p:cNvSpPr txBox="1"/>
+          <p:cNvSpPr/>
           <p:nvPr/>
         </p:nvSpPr>
         <p:spPr>
           <a:xfrm>
             <a:off x="228600" y="703080"/>
-            <a:ext cx="11201400" cy="2681280"/>
+            <a:ext cx="11201040" cy="2680920"/>
           </a:xfrm>
           <a:prstGeom prst="rect">
             <a:avLst/>
@@ -9440,11 +9751,22 @@
             <a:noFill/>
           </a:ln>
         </p:spPr>
+        <p:style>
+          <a:lnRef idx="0"/>
+          <a:fillRef idx="0"/>
+          <a:effectRef idx="0"/>
+          <a:fontRef idx="minor"/>
+        </p:style>
         <p:txBody>
           <a:bodyPr lIns="90000" rIns="90000" tIns="45000" bIns="45000" anchor="t">
             <a:spAutoFit/>
           </a:bodyPr>
           <a:p>
+            <a:pPr>
+              <a:lnSpc>
+                <a:spcPct val="100000"/>
+              </a:lnSpc>
+            </a:pPr>
             <a:r>
               <a:rPr lang="en-US" sz="1800" b="0" u="none" strike="noStrike">
                 <a:solidFill>
@@ -9466,6 +9788,11 @@
             </a:endParaRPr>
           </a:p>
           <a:p>
+            <a:pPr>
+              <a:lnSpc>
+                <a:spcPct val="100000"/>
+              </a:lnSpc>
+            </a:pPr>
             <a:endParaRPr lang="en-US" sz="1800" b="0" u="none" strike="noStrike">
               <a:solidFill>
                 <a:srgbClr val="000000"/>
@@ -9505,7 +9832,6 @@
               <a:effectLst/>
               <a:uFillTx/>
               <a:latin typeface="Arial"/>
-              <a:ea typeface="Microsoft YaHei"/>
             </a:endParaRPr>
           </a:p>
           <a:p>
@@ -9544,7 +9870,6 @@
               <a:effectLst/>
               <a:uFillTx/>
               <a:latin typeface="Arial"/>
-              <a:ea typeface="Microsoft YaHei"/>
             </a:endParaRPr>
           </a:p>
           <a:p>
@@ -9583,7 +9908,6 @@
               <a:effectLst/>
               <a:uFillTx/>
               <a:latin typeface="Arial"/>
-              <a:ea typeface="Microsoft YaHei"/>
             </a:endParaRPr>
           </a:p>
           <a:p>
@@ -9616,10 +9940,14 @@
               <a:effectLst/>
               <a:uFillTx/>
               <a:latin typeface="Arial"/>
-              <a:ea typeface="Microsoft YaHei"/>
-            </a:endParaRPr>
-          </a:p>
-          <a:p>
+            </a:endParaRPr>
+          </a:p>
+          <a:p>
+            <a:pPr>
+              <a:lnSpc>
+                <a:spcPct val="100000"/>
+              </a:lnSpc>
+            </a:pPr>
             <a:endParaRPr lang="en-US" sz="1800" b="0" u="none" strike="noStrike">
               <a:solidFill>
                 <a:srgbClr val="000000"/>
@@ -9644,7 +9972,7 @@
         <p:spPr>
           <a:xfrm>
             <a:off x="3657600" y="1095840"/>
-            <a:ext cx="3629160" cy="504360"/>
+            <a:ext cx="3628800" cy="504000"/>
           </a:xfrm>
           <a:prstGeom prst="rect">
             <a:avLst/>
@@ -9668,7 +9996,7 @@
         <p:spPr>
           <a:xfrm>
             <a:off x="1600200" y="2971800"/>
-            <a:ext cx="5906160" cy="457200"/>
+            <a:ext cx="5905800" cy="456840"/>
           </a:xfrm>
           <a:prstGeom prst="rect">
             <a:avLst/>
@@ -9692,7 +10020,7 @@
         <p:spPr>
           <a:xfrm>
             <a:off x="1600200" y="3657600"/>
-            <a:ext cx="5937840" cy="457200"/>
+            <a:ext cx="5937480" cy="456840"/>
           </a:xfrm>
           <a:prstGeom prst="rect">
             <a:avLst/>
@@ -9706,13 +10034,13 @@
       <p:sp>
         <p:nvSpPr>
           <p:cNvPr id="96" name=""/>
-          <p:cNvSpPr txBox="1"/>
+          <p:cNvSpPr/>
           <p:nvPr/>
         </p:nvSpPr>
         <p:spPr>
           <a:xfrm>
             <a:off x="7772400" y="1143000"/>
-            <a:ext cx="4343400" cy="5257800"/>
+            <a:ext cx="4343040" cy="5257440"/>
           </a:xfrm>
           <a:prstGeom prst="rect">
             <a:avLst/>
@@ -9724,11 +10052,22 @@
             </a:solidFill>
           </a:ln>
         </p:spPr>
+        <p:style>
+          <a:lnRef idx="0"/>
+          <a:fillRef idx="0"/>
+          <a:effectRef idx="0"/>
+          <a:fontRef idx="minor"/>
+        </p:style>
         <p:txBody>
           <a:bodyPr lIns="90000" rIns="90000" tIns="45000" bIns="45000" anchor="t">
             <a:spAutoFit/>
           </a:bodyPr>
           <a:p>
+            <a:pPr>
+              <a:lnSpc>
+                <a:spcPct val="100000"/>
+              </a:lnSpc>
+            </a:pPr>
             <a:r>
               <a:rPr lang="en-US" sz="1800" b="1" u="none" strike="noStrike">
                 <a:solidFill>
@@ -9740,7 +10079,7 @@
               </a:rPr>
               <a:t>What is Otsu’s method?</a:t>
             </a:r>
-            <a:endParaRPr lang="en-US" sz="1800" b="1" u="none" strike="noStrike">
+            <a:endParaRPr lang="en-US" sz="1800" b="0" u="none" strike="noStrike">
               <a:solidFill>
                 <a:srgbClr val="000000"/>
               </a:solidFill>
@@ -9779,7 +10118,6 @@
               <a:effectLst/>
               <a:uFillTx/>
               <a:latin typeface="Arial"/>
-              <a:ea typeface="Microsoft YaHei"/>
             </a:endParaRPr>
           </a:p>
           <a:p>
@@ -9812,7 +10150,6 @@
               <a:effectLst/>
               <a:uFillTx/>
               <a:latin typeface="Arial"/>
-              <a:ea typeface="Microsoft YaHei"/>
             </a:endParaRPr>
           </a:p>
           <a:p>
@@ -9851,7 +10188,6 @@
               <a:effectLst/>
               <a:uFillTx/>
               <a:latin typeface="Arial"/>
-              <a:ea typeface="Microsoft YaHei"/>
             </a:endParaRPr>
           </a:p>
           <a:p>
@@ -9890,7 +10226,6 @@
               <a:effectLst/>
               <a:uFillTx/>
               <a:latin typeface="Arial"/>
-              <a:ea typeface="Microsoft YaHei"/>
             </a:endParaRPr>
           </a:p>
           <a:p>
@@ -9923,7 +10258,6 @@
               <a:effectLst/>
               <a:uFillTx/>
               <a:latin typeface="Arial"/>
-              <a:ea typeface="Microsoft YaHei"/>
             </a:endParaRPr>
           </a:p>
           <a:p>
@@ -9945,7 +10279,6 @@
               <a:effectLst/>
               <a:uFillTx/>
               <a:latin typeface="Arial"/>
-              <a:ea typeface="Microsoft YaHei"/>
             </a:endParaRPr>
           </a:p>
           <a:p>
@@ -9972,14 +10305,13 @@
               </a:rPr>
               <a:t>Simply way</a:t>
             </a:r>
-            <a:endParaRPr lang="en-US" sz="1400" b="1" u="none" strike="noStrike">
-              <a:solidFill>
-                <a:srgbClr val="000000"/>
-              </a:solidFill>
-              <a:effectLst/>
-              <a:uFillTx/>
-              <a:latin typeface="Arial"/>
-              <a:ea typeface="Microsoft YaHei"/>
+            <a:endParaRPr lang="en-US" sz="1400" b="0" u="none" strike="noStrike">
+              <a:solidFill>
+                <a:srgbClr val="000000"/>
+              </a:solidFill>
+              <a:effectLst/>
+              <a:uFillTx/>
+              <a:latin typeface="Arial"/>
             </a:endParaRPr>
           </a:p>
           <a:p>
@@ -10013,7 +10345,6 @@
               <a:effectLst/>
               <a:uFillTx/>
               <a:latin typeface="Arial"/>
-              <a:ea typeface="Microsoft YaHei"/>
             </a:endParaRPr>
           </a:p>
           <a:p>
@@ -10053,7 +10384,6 @@
               <a:effectLst/>
               <a:uFillTx/>
               <a:latin typeface="Arial"/>
-              <a:ea typeface="Microsoft YaHei"/>
             </a:endParaRPr>
           </a:p>
           <a:p>
@@ -10093,7 +10423,6 @@
               <a:effectLst/>
               <a:uFillTx/>
               <a:latin typeface="Arial"/>
-              <a:ea typeface="Microsoft YaHei"/>
             </a:endParaRPr>
           </a:p>
           <a:p>
@@ -10127,7 +10456,6 @@
               <a:effectLst/>
               <a:uFillTx/>
               <a:latin typeface="Arial"/>
-              <a:ea typeface="Microsoft YaHei"/>
             </a:endParaRPr>
           </a:p>
           <a:p>
@@ -10161,7 +10489,6 @@
               <a:effectLst/>
               <a:uFillTx/>
               <a:latin typeface="Arial"/>
-              <a:ea typeface="Microsoft YaHei"/>
             </a:endParaRPr>
           </a:p>
           <a:p>
@@ -10186,6 +10513,11 @@
             </a:endParaRPr>
           </a:p>
           <a:p>
+            <a:pPr>
+              <a:lnSpc>
+                <a:spcPct val="100000"/>
+              </a:lnSpc>
+            </a:pPr>
             <a:endParaRPr lang="en-US" sz="1400" b="0" u="none" strike="noStrike">
               <a:solidFill>
                 <a:srgbClr val="000000"/>
